--- a/docs/HireFit_Ranker_Redrob_POLISHED.pptx
+++ b/docs/HireFit_Ranker_Redrob_POLISHED.pptx
@@ -1476,6 +1476,10 @@
           </a:solidFill>
           <a:ln/>
         </p:spPr>
+        <p:txBody>
+          <a:bodyPr/>
+          <a:p/>
+        </p:txBody>
       </p:sp>
       <p:sp>
         <p:nvSpPr>
@@ -1498,6 +1502,10 @@
           </a:solidFill>
           <a:ln/>
         </p:spPr>
+        <p:txBody>
+          <a:bodyPr/>
+          <a:p/>
+        </p:txBody>
       </p:sp>
       <p:sp>
         <p:nvSpPr>
@@ -1529,6 +1537,10 @@
             <a:prstDash val="solid"/>
           </a:ln>
         </p:spPr>
+        <p:txBody>
+          <a:bodyPr/>
+          <a:p/>
+        </p:txBody>
       </p:sp>
       <p:pic>
         <p:nvPicPr>
@@ -1810,6 +1822,10 @@
             </a:outerShdw>
           </a:effectLst>
         </p:spPr>
+        <p:txBody>
+          <a:bodyPr/>
+          <a:p/>
+        </p:txBody>
       </p:sp>
       <p:sp>
         <p:nvSpPr>
@@ -1922,6 +1938,10 @@
             </a:outerShdw>
           </a:effectLst>
         </p:spPr>
+        <p:txBody>
+          <a:bodyPr/>
+          <a:p/>
+        </p:txBody>
       </p:sp>
       <p:sp>
         <p:nvSpPr>
@@ -1956,7 +1976,7 @@
                 <a:ea typeface="Arial" pitchFamily="34" charset="-122"/>
                 <a:cs typeface="Arial" pitchFamily="34" charset="-120"/>
               </a:rPr>
-              <a:t>184s</a:t>
+              <a:t>193s</a:t>
             </a:r>
             <a:endParaRPr lang="en-US" sz="3300" dirty="0"/>
           </a:p>
@@ -2034,6 +2054,10 @@
             </a:outerShdw>
           </a:effectLst>
         </p:spPr>
+        <p:txBody>
+          <a:bodyPr/>
+          <a:p/>
+        </p:txBody>
       </p:sp>
       <p:sp>
         <p:nvSpPr>
@@ -2146,6 +2170,10 @@
             </a:outerShdw>
           </a:effectLst>
         </p:spPr>
+        <p:txBody>
+          <a:bodyPr/>
+          <a:p/>
+        </p:txBody>
       </p:sp>
       <p:sp>
         <p:nvSpPr>
@@ -2489,6 +2517,10 @@
             </a:outerShdw>
           </a:effectLst>
         </p:spPr>
+        <p:txBody>
+          <a:bodyPr/>
+          <a:p/>
+        </p:txBody>
       </p:sp>
       <p:pic>
         <p:nvPicPr>
@@ -2703,6 +2735,10 @@
             </a:outerShdw>
           </a:effectLst>
         </p:spPr>
+        <p:txBody>
+          <a:bodyPr/>
+          <a:p/>
+        </p:txBody>
       </p:sp>
       <p:sp>
         <p:nvSpPr>
@@ -2878,6 +2914,10 @@
             </a:outerShdw>
           </a:effectLst>
         </p:spPr>
+        <p:txBody>
+          <a:bodyPr/>
+          <a:p/>
+        </p:txBody>
       </p:sp>
       <p:sp>
         <p:nvSpPr>
@@ -2990,7 +3030,7 @@
                 <a:ea typeface="Arial" pitchFamily="34" charset="-122"/>
                 <a:cs typeface="Arial" pitchFamily="34" charset="-120"/>
               </a:rPr>
-              <a:t>4.33 GB peak</a:t>
+              <a:t>~6.1 GB peak</a:t>
             </a:r>
             <a:endParaRPr lang="en-US" sz="1250" dirty="0"/>
           </a:p>
@@ -3053,6 +3093,10 @@
             </a:outerShdw>
           </a:effectLst>
         </p:spPr>
+        <p:txBody>
+          <a:bodyPr/>
+          <a:p/>
+        </p:txBody>
       </p:sp>
       <p:sp>
         <p:nvSpPr>
@@ -3228,6 +3272,10 @@
             </a:outerShdw>
           </a:effectLst>
         </p:spPr>
+        <p:txBody>
+          <a:bodyPr/>
+          <a:p/>
+        </p:txBody>
       </p:sp>
       <p:sp>
         <p:nvSpPr>
@@ -3403,6 +3451,10 @@
             </a:outerShdw>
           </a:effectLst>
         </p:spPr>
+        <p:txBody>
+          <a:bodyPr/>
+          <a:p/>
+        </p:txBody>
       </p:sp>
       <p:sp>
         <p:nvSpPr>
@@ -3434,6 +3486,10 @@
             <a:prstDash val="solid"/>
           </a:ln>
         </p:spPr>
+        <p:txBody>
+          <a:bodyPr/>
+          <a:p/>
+        </p:txBody>
       </p:sp>
       <p:pic>
         <p:nvPicPr>
@@ -3945,6 +4001,10 @@
           </a:solidFill>
           <a:ln/>
         </p:spPr>
+        <p:txBody>
+          <a:bodyPr/>
+          <a:p/>
+        </p:txBody>
       </p:sp>
       <p:sp>
         <p:nvSpPr>
@@ -3967,6 +4027,10 @@
           </a:solidFill>
           <a:ln/>
         </p:spPr>
+        <p:txBody>
+          <a:bodyPr/>
+          <a:p/>
+        </p:txBody>
       </p:sp>
       <p:sp>
         <p:nvSpPr>
@@ -4105,6 +4169,10 @@
             </a:outerShdw>
           </a:effectLst>
         </p:spPr>
+        <p:txBody>
+          <a:bodyPr/>
+          <a:p/>
+        </p:txBody>
       </p:sp>
       <p:pic>
         <p:nvPicPr>
@@ -4202,6 +4270,10 @@
             </a:outerShdw>
           </a:effectLst>
         </p:spPr>
+        <p:txBody>
+          <a:bodyPr/>
+          <a:p/>
+        </p:txBody>
       </p:sp>
       <p:pic>
         <p:nvPicPr>
@@ -4299,6 +4371,10 @@
             </a:outerShdw>
           </a:effectLst>
         </p:spPr>
+        <p:txBody>
+          <a:bodyPr/>
+          <a:p/>
+        </p:txBody>
       </p:sp>
       <p:pic>
         <p:nvPicPr>
@@ -4396,6 +4472,10 @@
             </a:outerShdw>
           </a:effectLst>
         </p:spPr>
+        <p:txBody>
+          <a:bodyPr/>
+          <a:p/>
+        </p:txBody>
       </p:sp>
       <p:pic>
         <p:nvPicPr>
@@ -4454,7 +4534,7 @@
                 <a:ea typeface="Arial" pitchFamily="34" charset="-122"/>
                 <a:cs typeface="Arial" pitchFamily="34" charset="-120"/>
               </a:rPr>
-              <a:t>100K scored offline, on CPU, in 184s</a:t>
+              <a:t>100K scored offline, on CPU, in 193s</a:t>
             </a:r>
             <a:endParaRPr lang="en-US" sz="1250" dirty="0"/>
           </a:p>
@@ -4493,6 +4573,10 @@
             </a:outerShdw>
           </a:effectLst>
         </p:spPr>
+        <p:txBody>
+          <a:bodyPr/>
+          <a:p/>
+        </p:txBody>
       </p:sp>
       <p:pic>
         <p:nvPicPr>
@@ -4823,6 +4907,10 @@
             </a:outerShdw>
           </a:effectLst>
         </p:spPr>
+        <p:txBody>
+          <a:bodyPr/>
+          <a:p/>
+        </p:txBody>
       </p:sp>
       <p:sp>
         <p:nvSpPr>
@@ -4854,6 +4942,10 @@
             <a:prstDash val="solid"/>
           </a:ln>
         </p:spPr>
+        <p:txBody>
+          <a:bodyPr/>
+          <a:p/>
+        </p:txBody>
       </p:sp>
       <p:pic>
         <p:nvPicPr>
@@ -4993,6 +5085,10 @@
             </a:outerShdw>
           </a:effectLst>
         </p:spPr>
+        <p:txBody>
+          <a:bodyPr/>
+          <a:p/>
+        </p:txBody>
       </p:sp>
       <p:sp>
         <p:nvSpPr>
@@ -5024,6 +5120,10 @@
             <a:prstDash val="solid"/>
           </a:ln>
         </p:spPr>
+        <p:txBody>
+          <a:bodyPr/>
+          <a:p/>
+        </p:txBody>
       </p:sp>
       <p:pic>
         <p:nvPicPr>
@@ -5163,6 +5263,10 @@
             </a:outerShdw>
           </a:effectLst>
         </p:spPr>
+        <p:txBody>
+          <a:bodyPr/>
+          <a:p/>
+        </p:txBody>
       </p:sp>
       <p:sp>
         <p:nvSpPr>
@@ -5194,6 +5298,10 @@
             <a:prstDash val="solid"/>
           </a:ln>
         </p:spPr>
+        <p:txBody>
+          <a:bodyPr/>
+          <a:p/>
+        </p:txBody>
       </p:sp>
       <p:pic>
         <p:nvPicPr>
@@ -5333,6 +5441,10 @@
             </a:outerShdw>
           </a:effectLst>
         </p:spPr>
+        <p:txBody>
+          <a:bodyPr/>
+          <a:p/>
+        </p:txBody>
       </p:sp>
       <p:sp>
         <p:nvSpPr>
@@ -5364,6 +5476,10 @@
             <a:prstDash val="solid"/>
           </a:ln>
         </p:spPr>
+        <p:txBody>
+          <a:bodyPr/>
+          <a:p/>
+        </p:txBody>
       </p:sp>
       <p:pic>
         <p:nvPicPr>
@@ -5503,6 +5619,10 @@
             </a:outerShdw>
           </a:effectLst>
         </p:spPr>
+        <p:txBody>
+          <a:bodyPr/>
+          <a:p/>
+        </p:txBody>
       </p:sp>
       <p:sp>
         <p:nvSpPr>
@@ -5534,6 +5654,10 @@
             <a:prstDash val="solid"/>
           </a:ln>
         </p:spPr>
+        <p:txBody>
+          <a:bodyPr/>
+          <a:p/>
+        </p:txBody>
       </p:sp>
       <p:pic>
         <p:nvPicPr>
@@ -5920,6 +6044,10 @@
             </a:outerShdw>
           </a:effectLst>
         </p:spPr>
+        <p:txBody>
+          <a:bodyPr/>
+          <a:p/>
+        </p:txBody>
       </p:sp>
       <p:sp>
         <p:nvSpPr>
@@ -5951,6 +6079,10 @@
             <a:prstDash val="solid"/>
           </a:ln>
         </p:spPr>
+        <p:txBody>
+          <a:bodyPr/>
+          <a:p/>
+        </p:txBody>
       </p:sp>
       <p:pic>
         <p:nvPicPr>
@@ -6087,6 +6219,10 @@
             <a:prstDash val="solid"/>
           </a:ln>
         </p:spPr>
+        <p:txBody>
+          <a:bodyPr/>
+          <a:p/>
+        </p:txBody>
       </p:sp>
       <p:sp>
         <p:nvSpPr>
@@ -6157,6 +6293,10 @@
             <a:prstDash val="solid"/>
           </a:ln>
         </p:spPr>
+        <p:txBody>
+          <a:bodyPr/>
+          <a:p/>
+        </p:txBody>
       </p:sp>
       <p:sp>
         <p:nvSpPr>
@@ -6227,6 +6367,10 @@
             <a:prstDash val="solid"/>
           </a:ln>
         </p:spPr>
+        <p:txBody>
+          <a:bodyPr/>
+          <a:p/>
+        </p:txBody>
       </p:sp>
       <p:sp>
         <p:nvSpPr>
@@ -6297,6 +6441,10 @@
             <a:prstDash val="solid"/>
           </a:ln>
         </p:spPr>
+        <p:txBody>
+          <a:bodyPr/>
+          <a:p/>
+        </p:txBody>
       </p:sp>
       <p:sp>
         <p:nvSpPr>
@@ -6367,6 +6515,10 @@
             <a:prstDash val="solid"/>
           </a:ln>
         </p:spPr>
+        <p:txBody>
+          <a:bodyPr/>
+          <a:p/>
+        </p:txBody>
       </p:sp>
       <p:sp>
         <p:nvSpPr>
@@ -6440,6 +6592,10 @@
             </a:outerShdw>
           </a:effectLst>
         </p:spPr>
+        <p:txBody>
+          <a:bodyPr/>
+          <a:p/>
+        </p:txBody>
       </p:sp>
       <p:sp>
         <p:nvSpPr>
@@ -6527,6 +6683,10 @@
             </a:outerShdw>
           </a:effectLst>
         </p:spPr>
+        <p:txBody>
+          <a:bodyPr/>
+          <a:p/>
+        </p:txBody>
       </p:sp>
       <p:sp>
         <p:nvSpPr>
@@ -6558,6 +6718,10 @@
             <a:prstDash val="solid"/>
           </a:ln>
         </p:spPr>
+        <p:txBody>
+          <a:bodyPr/>
+          <a:p/>
+        </p:txBody>
       </p:sp>
       <p:pic>
         <p:nvPicPr>
@@ -7183,6 +7347,10 @@
             </a:outerShdw>
           </a:effectLst>
         </p:spPr>
+        <p:txBody>
+          <a:bodyPr/>
+          <a:p/>
+        </p:txBody>
       </p:sp>
       <p:sp>
         <p:nvSpPr>
@@ -7212,6 +7380,10 @@
             <a:prstDash val="solid"/>
           </a:ln>
         </p:spPr>
+        <p:txBody>
+          <a:bodyPr/>
+          <a:p/>
+        </p:txBody>
       </p:sp>
       <p:sp>
         <p:nvSpPr>
@@ -7410,6 +7582,10 @@
             </a:outerShdw>
           </a:effectLst>
         </p:spPr>
+        <p:txBody>
+          <a:bodyPr/>
+          <a:p/>
+        </p:txBody>
       </p:sp>
       <p:sp>
         <p:nvSpPr>
@@ -7439,6 +7615,10 @@
             <a:prstDash val="solid"/>
           </a:ln>
         </p:spPr>
+        <p:txBody>
+          <a:bodyPr/>
+          <a:p/>
+        </p:txBody>
       </p:sp>
       <p:sp>
         <p:nvSpPr>
@@ -7637,6 +7817,10 @@
             </a:outerShdw>
           </a:effectLst>
         </p:spPr>
+        <p:txBody>
+          <a:bodyPr/>
+          <a:p/>
+        </p:txBody>
       </p:sp>
       <p:sp>
         <p:nvSpPr>
@@ -7666,6 +7850,10 @@
             <a:prstDash val="solid"/>
           </a:ln>
         </p:spPr>
+        <p:txBody>
+          <a:bodyPr/>
+          <a:p/>
+        </p:txBody>
       </p:sp>
       <p:sp>
         <p:nvSpPr>
@@ -7864,6 +8052,10 @@
             </a:outerShdw>
           </a:effectLst>
         </p:spPr>
+        <p:txBody>
+          <a:bodyPr/>
+          <a:p/>
+        </p:txBody>
       </p:sp>
       <p:sp>
         <p:nvSpPr>
@@ -7893,6 +8085,10 @@
             <a:prstDash val="solid"/>
           </a:ln>
         </p:spPr>
+        <p:txBody>
+          <a:bodyPr/>
+          <a:p/>
+        </p:txBody>
       </p:sp>
       <p:sp>
         <p:nvSpPr>
@@ -8091,6 +8287,10 @@
             </a:outerShdw>
           </a:effectLst>
         </p:spPr>
+        <p:txBody>
+          <a:bodyPr/>
+          <a:p/>
+        </p:txBody>
       </p:sp>
       <p:sp>
         <p:nvSpPr>
@@ -8120,6 +8320,10 @@
             <a:prstDash val="solid"/>
           </a:ln>
         </p:spPr>
+        <p:txBody>
+          <a:bodyPr/>
+          <a:p/>
+        </p:txBody>
       </p:sp>
       <p:sp>
         <p:nvSpPr>
@@ -8318,6 +8522,10 @@
             </a:outerShdw>
           </a:effectLst>
         </p:spPr>
+        <p:txBody>
+          <a:bodyPr/>
+          <a:p/>
+        </p:txBody>
       </p:sp>
       <p:sp>
         <p:nvSpPr>
@@ -8347,6 +8555,10 @@
             <a:prstDash val="solid"/>
           </a:ln>
         </p:spPr>
+        <p:txBody>
+          <a:bodyPr/>
+          <a:p/>
+        </p:txBody>
       </p:sp>
       <p:sp>
         <p:nvSpPr>
@@ -8521,6 +8733,10 @@
             </a:outerShdw>
           </a:effectLst>
         </p:spPr>
+        <p:txBody>
+          <a:bodyPr/>
+          <a:p/>
+        </p:txBody>
       </p:sp>
       <p:sp>
         <p:nvSpPr>
@@ -8744,6 +8960,10 @@
             <a:prstDash val="solid"/>
           </a:ln>
         </p:spPr>
+        <p:txBody>
+          <a:bodyPr/>
+          <a:p/>
+        </p:txBody>
       </p:sp>
       <p:sp>
         <p:nvSpPr>
@@ -8823,6 +9043,10 @@
             <a:prstDash val="solid"/>
           </a:ln>
         </p:spPr>
+        <p:txBody>
+          <a:bodyPr/>
+          <a:p/>
+        </p:txBody>
       </p:sp>
       <p:sp>
         <p:nvSpPr>
@@ -8902,6 +9126,10 @@
             <a:prstDash val="solid"/>
           </a:ln>
         </p:spPr>
+        <p:txBody>
+          <a:bodyPr/>
+          <a:p/>
+        </p:txBody>
       </p:sp>
       <p:sp>
         <p:nvSpPr>
@@ -8981,6 +9209,10 @@
             <a:prstDash val="solid"/>
           </a:ln>
         </p:spPr>
+        <p:txBody>
+          <a:bodyPr/>
+          <a:p/>
+        </p:txBody>
       </p:sp>
       <p:sp>
         <p:nvSpPr>
@@ -9060,6 +9292,10 @@
             <a:prstDash val="solid"/>
           </a:ln>
         </p:spPr>
+        <p:txBody>
+          <a:bodyPr/>
+          <a:p/>
+        </p:txBody>
       </p:sp>
       <p:sp>
         <p:nvSpPr>
@@ -9375,6 +9611,10 @@
             </a:outerShdw>
           </a:effectLst>
         </p:spPr>
+        <p:txBody>
+          <a:bodyPr/>
+          <a:p/>
+        </p:txBody>
       </p:sp>
       <p:sp>
         <p:nvSpPr>
@@ -9406,6 +9646,10 @@
             <a:prstDash val="solid"/>
           </a:ln>
         </p:spPr>
+        <p:txBody>
+          <a:bodyPr/>
+          <a:p/>
+        </p:txBody>
       </p:sp>
       <p:pic>
         <p:nvPicPr>
@@ -9498,6 +9742,10 @@
             <a:prstDash val="solid"/>
           </a:ln>
         </p:spPr>
+        <p:txBody>
+          <a:bodyPr/>
+          <a:p/>
+        </p:txBody>
       </p:sp>
       <p:sp>
         <p:nvSpPr>
@@ -9613,6 +9861,10 @@
             </a:outerShdw>
           </a:effectLst>
         </p:spPr>
+        <p:txBody>
+          <a:bodyPr/>
+          <a:p/>
+        </p:txBody>
       </p:sp>
       <p:sp>
         <p:nvSpPr>
@@ -9644,6 +9896,10 @@
             <a:prstDash val="solid"/>
           </a:ln>
         </p:spPr>
+        <p:txBody>
+          <a:bodyPr/>
+          <a:p/>
+        </p:txBody>
       </p:sp>
       <p:pic>
         <p:nvPicPr>
@@ -9736,6 +9992,10 @@
             <a:prstDash val="solid"/>
           </a:ln>
         </p:spPr>
+        <p:txBody>
+          <a:bodyPr/>
+          <a:p/>
+        </p:txBody>
       </p:sp>
       <p:sp>
         <p:nvSpPr>
@@ -9851,6 +10111,10 @@
             </a:outerShdw>
           </a:effectLst>
         </p:spPr>
+        <p:txBody>
+          <a:bodyPr/>
+          <a:p/>
+        </p:txBody>
       </p:sp>
       <p:sp>
         <p:nvSpPr>
@@ -9882,6 +10146,10 @@
             <a:prstDash val="solid"/>
           </a:ln>
         </p:spPr>
+        <p:txBody>
+          <a:bodyPr/>
+          <a:p/>
+        </p:txBody>
       </p:sp>
       <p:pic>
         <p:nvPicPr>
@@ -9974,6 +10242,10 @@
             <a:prstDash val="solid"/>
           </a:ln>
         </p:spPr>
+        <p:txBody>
+          <a:bodyPr/>
+          <a:p/>
+        </p:txBody>
       </p:sp>
       <p:sp>
         <p:nvSpPr>
@@ -10089,6 +10361,10 @@
             </a:outerShdw>
           </a:effectLst>
         </p:spPr>
+        <p:txBody>
+          <a:bodyPr/>
+          <a:p/>
+        </p:txBody>
       </p:sp>
       <p:sp>
         <p:nvSpPr>
@@ -10120,6 +10396,10 @@
             <a:prstDash val="solid"/>
           </a:ln>
         </p:spPr>
+        <p:txBody>
+          <a:bodyPr/>
+          <a:p/>
+        </p:txBody>
       </p:sp>
       <p:pic>
         <p:nvPicPr>
@@ -10212,6 +10492,10 @@
             <a:prstDash val="solid"/>
           </a:ln>
         </p:spPr>
+        <p:txBody>
+          <a:bodyPr/>
+          <a:p/>
+        </p:txBody>
       </p:sp>
       <p:sp>
         <p:nvSpPr>
@@ -10327,6 +10611,10 @@
             </a:outerShdw>
           </a:effectLst>
         </p:spPr>
+        <p:txBody>
+          <a:bodyPr/>
+          <a:p/>
+        </p:txBody>
       </p:sp>
       <p:sp>
         <p:nvSpPr>
@@ -10358,6 +10646,10 @@
             <a:prstDash val="solid"/>
           </a:ln>
         </p:spPr>
+        <p:txBody>
+          <a:bodyPr/>
+          <a:p/>
+        </p:txBody>
       </p:sp>
       <p:pic>
         <p:nvPicPr>
@@ -10450,6 +10742,10 @@
             <a:prstDash val="solid"/>
           </a:ln>
         </p:spPr>
+        <p:txBody>
+          <a:bodyPr/>
+          <a:p/>
+        </p:txBody>
       </p:sp>
       <p:sp>
         <p:nvSpPr>
@@ -10565,6 +10861,10 @@
             </a:outerShdw>
           </a:effectLst>
         </p:spPr>
+        <p:txBody>
+          <a:bodyPr/>
+          <a:p/>
+        </p:txBody>
       </p:sp>
       <p:sp>
         <p:nvSpPr>
@@ -10596,6 +10896,10 @@
             <a:prstDash val="solid"/>
           </a:ln>
         </p:spPr>
+        <p:txBody>
+          <a:bodyPr/>
+          <a:p/>
+        </p:txBody>
       </p:sp>
       <p:pic>
         <p:nvPicPr>
@@ -15627,6 +15931,10 @@
             </a:outerShdw>
           </a:effectLst>
         </p:spPr>
+        <p:txBody>
+          <a:bodyPr/>
+          <a:p/>
+        </p:txBody>
       </p:sp>
       <p:sp>
         <p:nvSpPr>
@@ -15658,6 +15966,10 @@
             <a:prstDash val="solid"/>
           </a:ln>
         </p:spPr>
+        <p:txBody>
+          <a:bodyPr/>
+          <a:p/>
+        </p:txBody>
       </p:sp>
       <p:pic>
         <p:nvPicPr>
@@ -15836,6 +16148,10 @@
             </a:outerShdw>
           </a:effectLst>
         </p:spPr>
+        <p:txBody>
+          <a:bodyPr/>
+          <a:p/>
+        </p:txBody>
       </p:sp>
       <p:sp>
         <p:nvSpPr>
@@ -15867,6 +16183,10 @@
             <a:prstDash val="solid"/>
           </a:ln>
         </p:spPr>
+        <p:txBody>
+          <a:bodyPr/>
+          <a:p/>
+        </p:txBody>
       </p:sp>
       <p:pic>
         <p:nvPicPr>
@@ -16045,6 +16365,10 @@
             </a:outerShdw>
           </a:effectLst>
         </p:spPr>
+        <p:txBody>
+          <a:bodyPr/>
+          <a:p/>
+        </p:txBody>
       </p:sp>
       <p:sp>
         <p:nvSpPr>
@@ -16076,6 +16400,10 @@
             <a:prstDash val="solid"/>
           </a:ln>
         </p:spPr>
+        <p:txBody>
+          <a:bodyPr/>
+          <a:p/>
+        </p:txBody>
       </p:sp>
       <p:pic>
         <p:nvPicPr>
@@ -16254,6 +16582,10 @@
             </a:outerShdw>
           </a:effectLst>
         </p:spPr>
+        <p:txBody>
+          <a:bodyPr/>
+          <a:p/>
+        </p:txBody>
       </p:sp>
       <p:sp>
         <p:nvSpPr>
@@ -16285,6 +16617,10 @@
             <a:prstDash val="solid"/>
           </a:ln>
         </p:spPr>
+        <p:txBody>
+          <a:bodyPr/>
+          <a:p/>
+        </p:txBody>
       </p:sp>
       <p:pic>
         <p:nvPicPr>
@@ -16649,6 +16985,10 @@
             </a:outerShdw>
           </a:effectLst>
         </p:spPr>
+        <p:txBody>
+          <a:bodyPr/>
+          <a:p/>
+        </p:txBody>
       </p:sp>
       <p:sp>
         <p:nvSpPr>
@@ -16761,6 +17101,10 @@
             </a:outerShdw>
           </a:effectLst>
         </p:spPr>
+        <p:txBody>
+          <a:bodyPr/>
+          <a:p/>
+        </p:txBody>
       </p:sp>
       <p:sp>
         <p:nvSpPr>
@@ -16873,6 +17217,10 @@
             </a:outerShdw>
           </a:effectLst>
         </p:spPr>
+        <p:txBody>
+          <a:bodyPr/>
+          <a:p/>
+        </p:txBody>
       </p:sp>
       <p:sp>
         <p:nvSpPr>
@@ -16985,6 +17333,10 @@
             </a:outerShdw>
           </a:effectLst>
         </p:spPr>
+        <p:txBody>
+          <a:bodyPr/>
+          <a:p/>
+        </p:txBody>
       </p:sp>
       <p:sp>
         <p:nvSpPr>
@@ -17097,6 +17449,10 @@
             </a:outerShdw>
           </a:effectLst>
         </p:spPr>
+        <p:txBody>
+          <a:bodyPr/>
+          <a:p/>
+        </p:txBody>
       </p:sp>
       <p:sp>
         <p:nvSpPr>
@@ -17128,6 +17484,10 @@
             <a:prstDash val="solid"/>
           </a:ln>
         </p:spPr>
+        <p:txBody>
+          <a:bodyPr/>
+          <a:p/>
+        </p:txBody>
       </p:sp>
       <p:pic>
         <p:nvPicPr>
@@ -17384,6 +17744,10 @@
             </a:outerShdw>
           </a:effectLst>
         </p:spPr>
+        <p:txBody>
+          <a:bodyPr/>
+          <a:p/>
+        </p:txBody>
       </p:sp>
       <p:sp>
         <p:nvSpPr>
@@ -17415,6 +17779,10 @@
             <a:prstDash val="solid"/>
           </a:ln>
         </p:spPr>
+        <p:txBody>
+          <a:bodyPr/>
+          <a:p/>
+        </p:txBody>
       </p:sp>
       <p:pic>
         <p:nvPicPr>
@@ -17554,6 +17922,10 @@
             </a:outerShdw>
           </a:effectLst>
         </p:spPr>
+        <p:txBody>
+          <a:bodyPr/>
+          <a:p/>
+        </p:txBody>
       </p:sp>
       <p:pic>
         <p:nvPicPr>

--- a/docs/HireFit_Ranker_Redrob_POLISHED.pptx
+++ b/docs/HireFit_Ranker_Redrob_POLISHED.pptx
@@ -16,8 +16,10 @@
     <p:sldId id="266" r:id="rId7"/>
     <p:sldId id="261" r:id="rId8"/>
     <p:sldId id="262" r:id="rId9"/>
+    <p:sldId id="267" r:id="rId18"/>
     <p:sldId id="263" r:id="rId10"/>
     <p:sldId id="264" r:id="rId11"/>
+    <p:sldId id="268" r:id="rId19"/>
     <p:sldId id="265" r:id="rId12"/>
   </p:sldIdLst>
   <p:sldSz cx="12192000" cy="6858000"/>
@@ -1976,7 +1978,7 @@
                 <a:ea typeface="Arial" pitchFamily="34" charset="-122"/>
                 <a:cs typeface="Arial" pitchFamily="34" charset="-120"/>
               </a:rPr>
-              <a:t>193s</a:t>
+              <a:t>187s</a:t>
             </a:r>
             <a:endParaRPr lang="en-US" sz="3300" dirty="0"/>
           </a:p>
@@ -2340,6 +2342,1956 @@
 </file>
 
 <file path=ppt/slides/slide10.xml><?xml version="1.0" encoding="utf-8"?>
+<p:sld xmlns:a="http://schemas.openxmlformats.org/drawingml/2006/main" xmlns:r="http://schemas.openxmlformats.org/officeDocument/2006/relationships" xmlns:p="http://schemas.openxmlformats.org/presentationml/2006/main">
+  <p:cSld name="Slide 8">
+    <p:bg>
+      <p:bgPr>
+        <a:solidFill>
+          <a:srgbClr val="0E1116"/>
+        </a:solidFill>
+        <a:effectLst/>
+      </p:bgPr>
+    </p:bg>
+    <p:spTree>
+      <p:nvGrpSpPr>
+        <p:cNvPr id="1" name=""/>
+        <p:cNvGrpSpPr/>
+        <p:nvPr/>
+      </p:nvGrpSpPr>
+      <p:grpSpPr>
+        <a:xfrm>
+          <a:off x="0" y="0"/>
+          <a:ext cx="0" cy="0"/>
+          <a:chOff x="0" y="0"/>
+          <a:chExt cx="0" cy="0"/>
+        </a:xfrm>
+      </p:grpSpPr>
+      <p:sp>
+        <p:nvSpPr>
+          <p:cNvPr id="39" name="Rectangle 38">
+            <a:extLst>
+              <a:ext uri="{FF2B5EF4-FFF2-40B4-BE49-F238E27FC236}">
+                <a16:creationId xmlns:a16="http://schemas.microsoft.com/office/drawing/2014/main" id="{ED9998D3-4237-66E4-3FFA-742BA440BF2F}"/>
+              </a:ext>
+            </a:extLst>
+          </p:cNvPr>
+          <p:cNvSpPr/>
+          <p:nvPr/>
+        </p:nvSpPr>
+        <p:spPr>
+          <a:xfrm>
+            <a:off x="0" y="0"/>
+            <a:ext cx="12191695" cy="6858000"/>
+          </a:xfrm>
+          <a:prstGeom prst="rect">
+            <a:avLst/>
+          </a:prstGeom>
+          <a:solidFill>
+            <a:srgbClr val="0E1116"/>
+          </a:solidFill>
+          <a:ln w="12700" cap="flat" cmpd="sng" algn="ctr">
+            <a:noFill/>
+            <a:prstDash val="solid"/>
+            <a:miter lim="800000"/>
+          </a:ln>
+          <a:effectLst/>
+          <a:extLst>
+            <a:ext uri="{91240B29-F687-4F45-9708-019B960494DF}">
+              <a14:hiddenLine xmlns:a14="http://schemas.microsoft.com/office/drawing/2010/main" w="12700" cap="flat" cmpd="sng" algn="ctr">
+                <a:solidFill>
+                  <a:schemeClr val="accent1">
+                    <a:shade val="15000"/>
+                  </a:schemeClr>
+                </a:solidFill>
+                <a:prstDash val="solid"/>
+                <a:miter lim="800000"/>
+              </a14:hiddenLine>
+            </a:ext>
+          </a:extLst>
+        </p:spPr>
+        <p:style>
+          <a:lnRef idx="2">
+            <a:schemeClr val="accent1">
+              <a:shade val="15000"/>
+            </a:schemeClr>
+          </a:lnRef>
+          <a:fillRef idx="1">
+            <a:schemeClr val="accent1"/>
+          </a:fillRef>
+          <a:effectRef idx="0">
+            <a:schemeClr val="accent1"/>
+          </a:effectRef>
+          <a:fontRef idx="minor">
+            <a:schemeClr val="lt1"/>
+          </a:fontRef>
+        </p:style>
+        <p:txBody>
+          <a:bodyPr rtlCol="0" anchor="ctr"/>
+          <a:lstStyle/>
+          <a:p>
+            <a:pPr algn="ctr"/>
+            <a:endParaRPr lang="en-IN"/>
+          </a:p>
+        </p:txBody>
+      </p:sp>
+      <p:sp>
+        <p:nvSpPr>
+          <p:cNvPr id="40" name="TextBox 39">
+            <a:extLst>
+              <a:ext uri="{FF2B5EF4-FFF2-40B4-BE49-F238E27FC236}">
+                <a16:creationId xmlns:a16="http://schemas.microsoft.com/office/drawing/2014/main" id="{D54EB237-F78D-0269-84C8-933F09F66FAA}"/>
+              </a:ext>
+            </a:extLst>
+          </p:cNvPr>
+          <p:cNvSpPr txBox="1"/>
+          <p:nvPr/>
+        </p:nvSpPr>
+        <p:spPr>
+          <a:xfrm>
+            <a:off x="640080" y="384048"/>
+            <a:ext cx="10881360" cy="176972"/>
+          </a:xfrm>
+          <a:prstGeom prst="rect">
+            <a:avLst/>
+          </a:prstGeom>
+          <a:noFill/>
+        </p:spPr>
+        <p:txBody>
+          <a:bodyPr vert="horz" wrap="square" lIns="0" tIns="0" rIns="0" bIns="0" rtlCol="0">
+            <a:spAutoFit/>
+          </a:bodyPr>
+          <a:lstStyle/>
+          <a:p>
+            <a:r>
+              <a:rPr lang="en-IN" sz="1150" b="1">
+                <a:solidFill>
+                  <a:srgbClr val="8B7CF6"/>
+                </a:solidFill>
+                <a:latin typeface="Arial" panose="020B0604020202020204" pitchFamily="34" charset="0"/>
+              </a:rPr>
+              <a:t>TRADEOFFS &amp; LIMITS</a:t>
+            </a:r>
+          </a:p>
+        </p:txBody>
+      </p:sp>
+      <p:sp>
+        <p:nvSpPr>
+          <p:cNvPr id="41" name="TextBox 40">
+            <a:extLst>
+              <a:ext uri="{FF2B5EF4-FFF2-40B4-BE49-F238E27FC236}">
+                <a16:creationId xmlns:a16="http://schemas.microsoft.com/office/drawing/2014/main" id="{F2161346-604D-E5F8-1933-90B9D4C6FEAC}"/>
+              </a:ext>
+            </a:extLst>
+          </p:cNvPr>
+          <p:cNvSpPr txBox="1"/>
+          <p:nvPr/>
+        </p:nvSpPr>
+        <p:spPr>
+          <a:xfrm>
+            <a:off x="640080" y="658368"/>
+            <a:ext cx="10881360" cy="461665"/>
+          </a:xfrm>
+          <a:prstGeom prst="rect">
+            <a:avLst/>
+          </a:prstGeom>
+          <a:noFill/>
+        </p:spPr>
+        <p:txBody>
+          <a:bodyPr vert="horz" wrap="square" lIns="0" tIns="0" rIns="0" bIns="0" rtlCol="0">
+            <a:spAutoFit/>
+          </a:bodyPr>
+          <a:lstStyle/>
+          <a:p>
+            <a:r>
+              <a:rPr lang="en-US" sz="3000" b="1">
+                <a:solidFill>
+                  <a:srgbClr val="E6EDF3"/>
+                </a:solidFill>
+                <a:latin typeface="Arial" panose="020B0604020202020204" pitchFamily="34" charset="0"/>
+              </a:rPr>
+              <a:t>Reproducibility beats raw model power.</a:t>
+            </a:r>
+            <a:endParaRPr lang="en-IN" sz="3000" b="1">
+              <a:solidFill>
+                <a:srgbClr val="E6EDF3"/>
+              </a:solidFill>
+              <a:latin typeface="Arial" panose="020B0604020202020204" pitchFamily="34" charset="0"/>
+            </a:endParaRPr>
+          </a:p>
+        </p:txBody>
+      </p:sp>
+      <p:sp>
+        <p:nvSpPr>
+          <p:cNvPr id="42" name="TextBox 41">
+            <a:extLst>
+              <a:ext uri="{FF2B5EF4-FFF2-40B4-BE49-F238E27FC236}">
+                <a16:creationId xmlns:a16="http://schemas.microsoft.com/office/drawing/2014/main" id="{E6D84A61-C4E7-EB28-E06B-A18D38B3E52E}"/>
+              </a:ext>
+            </a:extLst>
+          </p:cNvPr>
+          <p:cNvSpPr txBox="1"/>
+          <p:nvPr/>
+        </p:nvSpPr>
+        <p:spPr>
+          <a:xfrm>
+            <a:off x="640080" y="1335024"/>
+            <a:ext cx="10881360" cy="200055"/>
+          </a:xfrm>
+          <a:prstGeom prst="rect">
+            <a:avLst/>
+          </a:prstGeom>
+          <a:noFill/>
+        </p:spPr>
+        <p:txBody>
+          <a:bodyPr vert="horz" wrap="square" lIns="0" tIns="0" rIns="0" bIns="0" rtlCol="0">
+            <a:spAutoFit/>
+          </a:bodyPr>
+          <a:lstStyle/>
+          <a:p>
+            <a:r>
+              <a:rPr lang="en-US" sz="1300">
+                <a:solidFill>
+                  <a:srgbClr val="9AA7B4"/>
+                </a:solidFill>
+                <a:latin typeface="Arial" panose="020B0604020202020204" pitchFamily="34" charset="0"/>
+              </a:rPr>
+              <a:t>The deck does not hide limitations; it turns them into Stage-5 defense points judges can verify.</a:t>
+            </a:r>
+            <a:endParaRPr lang="en-IN" sz="1300">
+              <a:solidFill>
+                <a:srgbClr val="9AA7B4"/>
+              </a:solidFill>
+              <a:latin typeface="Arial" panose="020B0604020202020204" pitchFamily="34" charset="0"/>
+            </a:endParaRPr>
+          </a:p>
+        </p:txBody>
+      </p:sp>
+      <p:sp>
+        <p:nvSpPr>
+          <p:cNvPr id="43" name="Rectangle: Rounded Corners 42">
+            <a:extLst>
+              <a:ext uri="{FF2B5EF4-FFF2-40B4-BE49-F238E27FC236}">
+                <a16:creationId xmlns:a16="http://schemas.microsoft.com/office/drawing/2014/main" id="{6B5A105F-DC77-6142-08D2-4212DB0225D8}"/>
+              </a:ext>
+            </a:extLst>
+          </p:cNvPr>
+          <p:cNvSpPr/>
+          <p:nvPr/>
+        </p:nvSpPr>
+        <p:spPr>
+          <a:xfrm>
+            <a:off x="640080" y="1874520"/>
+            <a:ext cx="5349240" cy="4069080"/>
+          </a:xfrm>
+          <a:prstGeom prst="roundRect">
+            <a:avLst>
+              <a:gd name="adj" fmla="val 3500"/>
+            </a:avLst>
+          </a:prstGeom>
+          <a:solidFill>
+            <a:srgbClr val="161C24"/>
+          </a:solidFill>
+          <a:ln w="12700">
+            <a:solidFill>
+              <a:srgbClr val="2A3340"/>
+            </a:solidFill>
+          </a:ln>
+        </p:spPr>
+        <p:style>
+          <a:lnRef idx="2">
+            <a:schemeClr val="accent1">
+              <a:shade val="15000"/>
+            </a:schemeClr>
+          </a:lnRef>
+          <a:fillRef idx="1">
+            <a:schemeClr val="accent1"/>
+          </a:fillRef>
+          <a:effectRef idx="0">
+            <a:schemeClr val="accent1"/>
+          </a:effectRef>
+          <a:fontRef idx="minor">
+            <a:schemeClr val="lt1"/>
+          </a:fontRef>
+        </p:style>
+        <p:txBody>
+          <a:bodyPr rtlCol="0" anchor="ctr"/>
+          <a:lstStyle/>
+          <a:p>
+            <a:pPr algn="ctr"/>
+            <a:endParaRPr lang="en-IN"/>
+          </a:p>
+        </p:txBody>
+      </p:sp>
+      <p:sp>
+        <p:nvSpPr>
+          <p:cNvPr id="44" name="TextBox 43">
+            <a:extLst>
+              <a:ext uri="{FF2B5EF4-FFF2-40B4-BE49-F238E27FC236}">
+                <a16:creationId xmlns:a16="http://schemas.microsoft.com/office/drawing/2014/main" id="{AA395892-7750-E775-B810-FD5AA94829AF}"/>
+              </a:ext>
+            </a:extLst>
+          </p:cNvPr>
+          <p:cNvSpPr txBox="1"/>
+          <p:nvPr/>
+        </p:nvSpPr>
+        <p:spPr>
+          <a:xfrm>
+            <a:off x="932688" y="2103120"/>
+            <a:ext cx="2743200" cy="230832"/>
+          </a:xfrm>
+          <a:prstGeom prst="rect">
+            <a:avLst/>
+          </a:prstGeom>
+          <a:noFill/>
+        </p:spPr>
+        <p:txBody>
+          <a:bodyPr vert="horz" wrap="square" lIns="0" tIns="0" rIns="0" bIns="0" rtlCol="0">
+            <a:spAutoFit/>
+          </a:bodyPr>
+          <a:lstStyle/>
+          <a:p>
+            <a:r>
+              <a:rPr lang="en-IN" sz="1500" b="1">
+                <a:solidFill>
+                  <a:srgbClr val="E6EDF3"/>
+                </a:solidFill>
+                <a:latin typeface="Arial" panose="020B0604020202020204" pitchFamily="34" charset="0"/>
+              </a:rPr>
+              <a:t>Defensible decisions</a:t>
+            </a:r>
+          </a:p>
+        </p:txBody>
+      </p:sp>
+      <p:sp>
+        <p:nvSpPr>
+          <p:cNvPr id="45" name="Rectangle: Rounded Corners 44">
+            <a:extLst>
+              <a:ext uri="{FF2B5EF4-FFF2-40B4-BE49-F238E27FC236}">
+                <a16:creationId xmlns:a16="http://schemas.microsoft.com/office/drawing/2014/main" id="{D2BE1CFD-69F6-40B2-27C7-E7B03EF33DFA}"/>
+              </a:ext>
+            </a:extLst>
+          </p:cNvPr>
+          <p:cNvSpPr/>
+          <p:nvPr/>
+        </p:nvSpPr>
+        <p:spPr>
+          <a:xfrm>
+            <a:off x="4645152" y="2121408"/>
+            <a:ext cx="914400" cy="256032"/>
+          </a:xfrm>
+          <a:prstGeom prst="roundRect">
+            <a:avLst>
+              <a:gd name="adj" fmla="val 50000"/>
+            </a:avLst>
+          </a:prstGeom>
+          <a:solidFill>
+            <a:srgbClr val="1B2330"/>
+          </a:solidFill>
+          <a:ln w="12700" cap="flat" cmpd="sng" algn="ctr">
+            <a:solidFill>
+              <a:srgbClr val="2DD4BF">
+                <a:alpha val="65000"/>
+              </a:srgbClr>
+            </a:solidFill>
+            <a:prstDash val="solid"/>
+            <a:miter lim="800000"/>
+            <a:headEnd type="none" w="med" len="med"/>
+            <a:tailEnd type="none" w="med" len="med"/>
+          </a:ln>
+        </p:spPr>
+        <p:style>
+          <a:lnRef idx="2">
+            <a:schemeClr val="accent1">
+              <a:shade val="15000"/>
+            </a:schemeClr>
+          </a:lnRef>
+          <a:fillRef idx="1">
+            <a:schemeClr val="accent1"/>
+          </a:fillRef>
+          <a:effectRef idx="0">
+            <a:schemeClr val="accent1"/>
+          </a:effectRef>
+          <a:fontRef idx="minor">
+            <a:schemeClr val="lt1"/>
+          </a:fontRef>
+        </p:style>
+        <p:txBody>
+          <a:bodyPr rtlCol="0" anchor="ctr"/>
+          <a:lstStyle/>
+          <a:p>
+            <a:pPr algn="ctr"/>
+            <a:endParaRPr lang="en-IN"/>
+          </a:p>
+        </p:txBody>
+      </p:sp>
+      <p:sp>
+        <p:nvSpPr>
+          <p:cNvPr id="46" name="TextBox 45">
+            <a:extLst>
+              <a:ext uri="{FF2B5EF4-FFF2-40B4-BE49-F238E27FC236}">
+                <a16:creationId xmlns:a16="http://schemas.microsoft.com/office/drawing/2014/main" id="{82764EEF-F1EF-8E57-349A-54673CF2B21F}"/>
+              </a:ext>
+            </a:extLst>
+          </p:cNvPr>
+          <p:cNvSpPr txBox="1"/>
+          <p:nvPr/>
+        </p:nvSpPr>
+        <p:spPr>
+          <a:xfrm>
+            <a:off x="4718304" y="2153412"/>
+            <a:ext cx="768096" cy="130805"/>
+          </a:xfrm>
+          <a:prstGeom prst="rect">
+            <a:avLst/>
+          </a:prstGeom>
+          <a:noFill/>
+        </p:spPr>
+        <p:txBody>
+          <a:bodyPr vert="horz" wrap="square" lIns="0" tIns="0" rIns="0" bIns="0" rtlCol="0">
+            <a:spAutoFit/>
+          </a:bodyPr>
+          <a:lstStyle/>
+          <a:p>
+            <a:pPr algn="ctr"/>
+            <a:r>
+              <a:rPr lang="en-IN" sz="850" b="1">
+                <a:solidFill>
+                  <a:srgbClr val="E6EDF3"/>
+                </a:solidFill>
+                <a:latin typeface="Arial" panose="020B0604020202020204" pitchFamily="34" charset="0"/>
+              </a:rPr>
+              <a:t>shipped path</a:t>
+            </a:r>
+          </a:p>
+        </p:txBody>
+      </p:sp>
+      <p:sp>
+        <p:nvSpPr>
+          <p:cNvPr id="47" name="Oval 46">
+            <a:extLst>
+              <a:ext uri="{FF2B5EF4-FFF2-40B4-BE49-F238E27FC236}">
+                <a16:creationId xmlns:a16="http://schemas.microsoft.com/office/drawing/2014/main" id="{C6E666A7-A9DA-282A-6235-719927B41A78}"/>
+              </a:ext>
+            </a:extLst>
+          </p:cNvPr>
+          <p:cNvSpPr/>
+          <p:nvPr/>
+        </p:nvSpPr>
+        <p:spPr>
+          <a:xfrm>
+            <a:off x="932688" y="2670048"/>
+            <a:ext cx="146304" cy="146304"/>
+          </a:xfrm>
+          <a:prstGeom prst="ellipse">
+            <a:avLst/>
+          </a:prstGeom>
+          <a:solidFill>
+            <a:srgbClr val="34D399"/>
+          </a:solidFill>
+          <a:ln w="12700" cap="flat" cmpd="sng" algn="ctr">
+            <a:noFill/>
+            <a:prstDash val="solid"/>
+            <a:miter lim="800000"/>
+          </a:ln>
+          <a:effectLst/>
+          <a:extLst>
+            <a:ext uri="{91240B29-F687-4F45-9708-019B960494DF}">
+              <a14:hiddenLine xmlns:a14="http://schemas.microsoft.com/office/drawing/2010/main" w="12700" cap="flat" cmpd="sng" algn="ctr">
+                <a:solidFill>
+                  <a:schemeClr val="accent1">
+                    <a:shade val="15000"/>
+                  </a:schemeClr>
+                </a:solidFill>
+                <a:prstDash val="solid"/>
+                <a:miter lim="800000"/>
+              </a14:hiddenLine>
+            </a:ext>
+          </a:extLst>
+        </p:spPr>
+        <p:style>
+          <a:lnRef idx="2">
+            <a:schemeClr val="accent1">
+              <a:shade val="15000"/>
+            </a:schemeClr>
+          </a:lnRef>
+          <a:fillRef idx="1">
+            <a:schemeClr val="accent1"/>
+          </a:fillRef>
+          <a:effectRef idx="0">
+            <a:schemeClr val="accent1"/>
+          </a:effectRef>
+          <a:fontRef idx="minor">
+            <a:schemeClr val="lt1"/>
+          </a:fontRef>
+        </p:style>
+        <p:txBody>
+          <a:bodyPr rtlCol="0" anchor="ctr"/>
+          <a:lstStyle/>
+          <a:p>
+            <a:pPr algn="ctr"/>
+            <a:endParaRPr lang="en-IN"/>
+          </a:p>
+        </p:txBody>
+      </p:sp>
+      <p:sp>
+        <p:nvSpPr>
+          <p:cNvPr id="48" name="TextBox 47">
+            <a:extLst>
+              <a:ext uri="{FF2B5EF4-FFF2-40B4-BE49-F238E27FC236}">
+                <a16:creationId xmlns:a16="http://schemas.microsoft.com/office/drawing/2014/main" id="{20A5A3A1-DF61-ACF6-B576-2C5E7168D4BA}"/>
+              </a:ext>
+            </a:extLst>
+          </p:cNvPr>
+          <p:cNvSpPr txBox="1"/>
+          <p:nvPr/>
+        </p:nvSpPr>
+        <p:spPr>
+          <a:xfrm>
+            <a:off x="1234440" y="2633472"/>
+            <a:ext cx="4160520" cy="181588"/>
+          </a:xfrm>
+          <a:prstGeom prst="rect">
+            <a:avLst/>
+          </a:prstGeom>
+          <a:noFill/>
+        </p:spPr>
+        <p:txBody>
+          <a:bodyPr vert="horz" wrap="square" lIns="0" tIns="0" rIns="0" bIns="0" rtlCol="0">
+            <a:spAutoFit/>
+          </a:bodyPr>
+          <a:lstStyle/>
+          <a:p>
+            <a:r>
+              <a:rPr lang="en-IN" sz="1180" b="1">
+                <a:solidFill>
+                  <a:srgbClr val="E6EDF3"/>
+                </a:solidFill>
+                <a:latin typeface="Arial" panose="020B0604020202020204" pitchFamily="34" charset="0"/>
+              </a:rPr>
+              <a:t>No LLM per candidate</a:t>
+            </a:r>
+          </a:p>
+        </p:txBody>
+      </p:sp>
+      <p:sp>
+        <p:nvSpPr>
+          <p:cNvPr id="49" name="TextBox 48">
+            <a:extLst>
+              <a:ext uri="{FF2B5EF4-FFF2-40B4-BE49-F238E27FC236}">
+                <a16:creationId xmlns:a16="http://schemas.microsoft.com/office/drawing/2014/main" id="{132CB621-651A-9B23-3182-9D88579452BA}"/>
+              </a:ext>
+            </a:extLst>
+          </p:cNvPr>
+          <p:cNvSpPr txBox="1"/>
+          <p:nvPr/>
+        </p:nvSpPr>
+        <p:spPr>
+          <a:xfrm>
+            <a:off x="1234440" y="2871216"/>
+            <a:ext cx="4224528" cy="298543"/>
+          </a:xfrm>
+          <a:prstGeom prst="rect">
+            <a:avLst/>
+          </a:prstGeom>
+          <a:noFill/>
+        </p:spPr>
+        <p:txBody>
+          <a:bodyPr vert="horz" wrap="square" lIns="0" tIns="0" rIns="0" bIns="0" rtlCol="0">
+            <a:spAutoFit/>
+          </a:bodyPr>
+          <a:lstStyle/>
+          <a:p>
+            <a:r>
+              <a:rPr lang="en-US" sz="970">
+                <a:solidFill>
+                  <a:srgbClr val="9AA7B4"/>
+                </a:solidFill>
+                <a:latin typeface="Arial" panose="020B0604020202020204" pitchFamily="34" charset="0"/>
+              </a:rPr>
+              <a:t>100K hosted calls break the CPU/no-network budget and make reproduction fragile.</a:t>
+            </a:r>
+            <a:endParaRPr lang="en-IN" sz="970">
+              <a:solidFill>
+                <a:srgbClr val="9AA7B4"/>
+              </a:solidFill>
+              <a:latin typeface="Arial" panose="020B0604020202020204" pitchFamily="34" charset="0"/>
+            </a:endParaRPr>
+          </a:p>
+        </p:txBody>
+      </p:sp>
+      <p:sp>
+        <p:nvSpPr>
+          <p:cNvPr id="50" name="Oval 49">
+            <a:extLst>
+              <a:ext uri="{FF2B5EF4-FFF2-40B4-BE49-F238E27FC236}">
+                <a16:creationId xmlns:a16="http://schemas.microsoft.com/office/drawing/2014/main" id="{6FDE318C-29BE-36A5-1F3B-FBC27953EE1B}"/>
+              </a:ext>
+            </a:extLst>
+          </p:cNvPr>
+          <p:cNvSpPr/>
+          <p:nvPr/>
+        </p:nvSpPr>
+        <p:spPr>
+          <a:xfrm>
+            <a:off x="932688" y="3438144"/>
+            <a:ext cx="146304" cy="146304"/>
+          </a:xfrm>
+          <a:prstGeom prst="ellipse">
+            <a:avLst/>
+          </a:prstGeom>
+          <a:solidFill>
+            <a:srgbClr val="34D399"/>
+          </a:solidFill>
+          <a:ln w="12700" cap="flat" cmpd="sng" algn="ctr">
+            <a:noFill/>
+            <a:prstDash val="solid"/>
+            <a:miter lim="800000"/>
+          </a:ln>
+          <a:effectLst/>
+          <a:extLst>
+            <a:ext uri="{91240B29-F687-4F45-9708-019B960494DF}">
+              <a14:hiddenLine xmlns:a14="http://schemas.microsoft.com/office/drawing/2010/main" w="12700" cap="flat" cmpd="sng" algn="ctr">
+                <a:solidFill>
+                  <a:schemeClr val="accent1">
+                    <a:shade val="15000"/>
+                  </a:schemeClr>
+                </a:solidFill>
+                <a:prstDash val="solid"/>
+                <a:miter lim="800000"/>
+              </a14:hiddenLine>
+            </a:ext>
+          </a:extLst>
+        </p:spPr>
+        <p:style>
+          <a:lnRef idx="2">
+            <a:schemeClr val="accent1">
+              <a:shade val="15000"/>
+            </a:schemeClr>
+          </a:lnRef>
+          <a:fillRef idx="1">
+            <a:schemeClr val="accent1"/>
+          </a:fillRef>
+          <a:effectRef idx="0">
+            <a:schemeClr val="accent1"/>
+          </a:effectRef>
+          <a:fontRef idx="minor">
+            <a:schemeClr val="lt1"/>
+          </a:fontRef>
+        </p:style>
+        <p:txBody>
+          <a:bodyPr rtlCol="0" anchor="ctr"/>
+          <a:lstStyle/>
+          <a:p>
+            <a:pPr algn="ctr"/>
+            <a:endParaRPr lang="en-IN"/>
+          </a:p>
+        </p:txBody>
+      </p:sp>
+      <p:sp>
+        <p:nvSpPr>
+          <p:cNvPr id="51" name="TextBox 50">
+            <a:extLst>
+              <a:ext uri="{FF2B5EF4-FFF2-40B4-BE49-F238E27FC236}">
+                <a16:creationId xmlns:a16="http://schemas.microsoft.com/office/drawing/2014/main" id="{A3CF24C1-F991-1B4B-FE0E-8E3AB42E7A78}"/>
+              </a:ext>
+            </a:extLst>
+          </p:cNvPr>
+          <p:cNvSpPr txBox="1"/>
+          <p:nvPr/>
+        </p:nvSpPr>
+        <p:spPr>
+          <a:xfrm>
+            <a:off x="1234440" y="3401568"/>
+            <a:ext cx="4160520" cy="181588"/>
+          </a:xfrm>
+          <a:prstGeom prst="rect">
+            <a:avLst/>
+          </a:prstGeom>
+          <a:noFill/>
+        </p:spPr>
+        <p:txBody>
+          <a:bodyPr vert="horz" wrap="square" lIns="0" tIns="0" rIns="0" bIns="0" rtlCol="0">
+            <a:spAutoFit/>
+          </a:bodyPr>
+          <a:lstStyle/>
+          <a:p>
+            <a:r>
+              <a:rPr lang="en-US" sz="1180" b="1">
+                <a:solidFill>
+                  <a:srgbClr val="E6EDF3"/>
+                </a:solidFill>
+                <a:latin typeface="Arial" panose="020B0604020202020204" pitchFamily="34" charset="0"/>
+              </a:rPr>
+              <a:t>Dense embeddings tested, then kept off</a:t>
+            </a:r>
+            <a:endParaRPr lang="en-IN" sz="1180" b="1">
+              <a:solidFill>
+                <a:srgbClr val="E6EDF3"/>
+              </a:solidFill>
+              <a:latin typeface="Arial" panose="020B0604020202020204" pitchFamily="34" charset="0"/>
+            </a:endParaRPr>
+          </a:p>
+        </p:txBody>
+      </p:sp>
+      <p:sp>
+        <p:nvSpPr>
+          <p:cNvPr id="52" name="TextBox 51">
+            <a:extLst>
+              <a:ext uri="{FF2B5EF4-FFF2-40B4-BE49-F238E27FC236}">
+                <a16:creationId xmlns:a16="http://schemas.microsoft.com/office/drawing/2014/main" id="{151AB0D3-8CA4-3230-8396-8D93CD6ECB37}"/>
+              </a:ext>
+            </a:extLst>
+          </p:cNvPr>
+          <p:cNvSpPr txBox="1"/>
+          <p:nvPr/>
+        </p:nvSpPr>
+        <p:spPr>
+          <a:xfrm>
+            <a:off x="1234440" y="3639312"/>
+            <a:ext cx="4224528" cy="298543"/>
+          </a:xfrm>
+          <a:prstGeom prst="rect">
+            <a:avLst/>
+          </a:prstGeom>
+          <a:noFill/>
+        </p:spPr>
+        <p:txBody>
+          <a:bodyPr vert="horz" wrap="square" lIns="0" tIns="0" rIns="0" bIns="0" rtlCol="0">
+            <a:spAutoFit/>
+          </a:bodyPr>
+          <a:lstStyle/>
+          <a:p>
+            <a:r>
+              <a:rPr lang="en-US" sz="970">
+                <a:solidFill>
+                  <a:srgbClr val="9AA7B4"/>
+                </a:solidFill>
+                <a:latin typeface="Arial" panose="020B0604020202020204" pitchFamily="34" charset="0"/>
+              </a:rPr>
+              <a:t>NDCG@10 was flat while runtime and complexity rose, so the simpler ranker won.</a:t>
+            </a:r>
+            <a:endParaRPr lang="en-IN" sz="970">
+              <a:solidFill>
+                <a:srgbClr val="9AA7B4"/>
+              </a:solidFill>
+              <a:latin typeface="Arial" panose="020B0604020202020204" pitchFamily="34" charset="0"/>
+            </a:endParaRPr>
+          </a:p>
+        </p:txBody>
+      </p:sp>
+      <p:sp>
+        <p:nvSpPr>
+          <p:cNvPr id="53" name="Oval 52">
+            <a:extLst>
+              <a:ext uri="{FF2B5EF4-FFF2-40B4-BE49-F238E27FC236}">
+                <a16:creationId xmlns:a16="http://schemas.microsoft.com/office/drawing/2014/main" id="{A6F9E95D-C63D-FC46-63E6-3C72E8A8BBCA}"/>
+              </a:ext>
+            </a:extLst>
+          </p:cNvPr>
+          <p:cNvSpPr/>
+          <p:nvPr/>
+        </p:nvSpPr>
+        <p:spPr>
+          <a:xfrm>
+            <a:off x="932688" y="4206240"/>
+            <a:ext cx="146304" cy="146304"/>
+          </a:xfrm>
+          <a:prstGeom prst="ellipse">
+            <a:avLst/>
+          </a:prstGeom>
+          <a:solidFill>
+            <a:srgbClr val="34D399"/>
+          </a:solidFill>
+          <a:ln w="12700" cap="flat" cmpd="sng" algn="ctr">
+            <a:noFill/>
+            <a:prstDash val="solid"/>
+            <a:miter lim="800000"/>
+          </a:ln>
+          <a:effectLst/>
+          <a:extLst>
+            <a:ext uri="{91240B29-F687-4F45-9708-019B960494DF}">
+              <a14:hiddenLine xmlns:a14="http://schemas.microsoft.com/office/drawing/2010/main" w="12700" cap="flat" cmpd="sng" algn="ctr">
+                <a:solidFill>
+                  <a:schemeClr val="accent1">
+                    <a:shade val="15000"/>
+                  </a:schemeClr>
+                </a:solidFill>
+                <a:prstDash val="solid"/>
+                <a:miter lim="800000"/>
+              </a14:hiddenLine>
+            </a:ext>
+          </a:extLst>
+        </p:spPr>
+        <p:style>
+          <a:lnRef idx="2">
+            <a:schemeClr val="accent1">
+              <a:shade val="15000"/>
+            </a:schemeClr>
+          </a:lnRef>
+          <a:fillRef idx="1">
+            <a:schemeClr val="accent1"/>
+          </a:fillRef>
+          <a:effectRef idx="0">
+            <a:schemeClr val="accent1"/>
+          </a:effectRef>
+          <a:fontRef idx="minor">
+            <a:schemeClr val="lt1"/>
+          </a:fontRef>
+        </p:style>
+        <p:txBody>
+          <a:bodyPr rtlCol="0" anchor="ctr"/>
+          <a:lstStyle/>
+          <a:p>
+            <a:pPr algn="ctr"/>
+            <a:endParaRPr lang="en-IN"/>
+          </a:p>
+        </p:txBody>
+      </p:sp>
+      <p:sp>
+        <p:nvSpPr>
+          <p:cNvPr id="54" name="TextBox 53">
+            <a:extLst>
+              <a:ext uri="{FF2B5EF4-FFF2-40B4-BE49-F238E27FC236}">
+                <a16:creationId xmlns:a16="http://schemas.microsoft.com/office/drawing/2014/main" id="{0980977D-A3C7-654D-95ED-64E182E42EC9}"/>
+              </a:ext>
+            </a:extLst>
+          </p:cNvPr>
+          <p:cNvSpPr txBox="1"/>
+          <p:nvPr/>
+        </p:nvSpPr>
+        <p:spPr>
+          <a:xfrm>
+            <a:off x="1234440" y="4169664"/>
+            <a:ext cx="4160520" cy="181588"/>
+          </a:xfrm>
+          <a:prstGeom prst="rect">
+            <a:avLst/>
+          </a:prstGeom>
+          <a:noFill/>
+        </p:spPr>
+        <p:txBody>
+          <a:bodyPr vert="horz" wrap="square" lIns="0" tIns="0" rIns="0" bIns="0" rtlCol="0">
+            <a:spAutoFit/>
+          </a:bodyPr>
+          <a:lstStyle/>
+          <a:p>
+            <a:r>
+              <a:rPr lang="en-IN" sz="1180" b="1">
+                <a:solidFill>
+                  <a:srgbClr val="E6EDF3"/>
+                </a:solidFill>
+                <a:latin typeface="Arial" panose="020B0604020202020204" pitchFamily="34" charset="0"/>
+              </a:rPr>
+              <a:t>Guardrails are multiplicative</a:t>
+            </a:r>
+          </a:p>
+        </p:txBody>
+      </p:sp>
+      <p:sp>
+        <p:nvSpPr>
+          <p:cNvPr id="55" name="TextBox 54">
+            <a:extLst>
+              <a:ext uri="{FF2B5EF4-FFF2-40B4-BE49-F238E27FC236}">
+                <a16:creationId xmlns:a16="http://schemas.microsoft.com/office/drawing/2014/main" id="{C465C445-A809-101B-386B-5A132CB5948C}"/>
+              </a:ext>
+            </a:extLst>
+          </p:cNvPr>
+          <p:cNvSpPr txBox="1"/>
+          <p:nvPr/>
+        </p:nvSpPr>
+        <p:spPr>
+          <a:xfrm>
+            <a:off x="1234440" y="4407408"/>
+            <a:ext cx="4224528" cy="298543"/>
+          </a:xfrm>
+          <a:prstGeom prst="rect">
+            <a:avLst/>
+          </a:prstGeom>
+          <a:noFill/>
+        </p:spPr>
+        <p:txBody>
+          <a:bodyPr vert="horz" wrap="square" lIns="0" tIns="0" rIns="0" bIns="0" rtlCol="0">
+            <a:spAutoFit/>
+          </a:bodyPr>
+          <a:lstStyle/>
+          <a:p>
+            <a:r>
+              <a:rPr lang="en-US" sz="970">
+                <a:solidFill>
+                  <a:srgbClr val="9AA7B4"/>
+                </a:solidFill>
+                <a:latin typeface="Arial" panose="020B0604020202020204" pitchFamily="34" charset="0"/>
+              </a:rPr>
+              <a:t>Impossible, off-target, or unreachable profiles cannot buy rank with keywords.</a:t>
+            </a:r>
+            <a:endParaRPr lang="en-IN" sz="970">
+              <a:solidFill>
+                <a:srgbClr val="9AA7B4"/>
+              </a:solidFill>
+              <a:latin typeface="Arial" panose="020B0604020202020204" pitchFamily="34" charset="0"/>
+            </a:endParaRPr>
+          </a:p>
+        </p:txBody>
+      </p:sp>
+      <p:sp>
+        <p:nvSpPr>
+          <p:cNvPr id="56" name="Oval 55">
+            <a:extLst>
+              <a:ext uri="{FF2B5EF4-FFF2-40B4-BE49-F238E27FC236}">
+                <a16:creationId xmlns:a16="http://schemas.microsoft.com/office/drawing/2014/main" id="{5566CFCC-B2AE-132E-6A32-85EE8E53E0FC}"/>
+              </a:ext>
+            </a:extLst>
+          </p:cNvPr>
+          <p:cNvSpPr/>
+          <p:nvPr/>
+        </p:nvSpPr>
+        <p:spPr>
+          <a:xfrm>
+            <a:off x="932688" y="4974336"/>
+            <a:ext cx="146304" cy="146304"/>
+          </a:xfrm>
+          <a:prstGeom prst="ellipse">
+            <a:avLst/>
+          </a:prstGeom>
+          <a:solidFill>
+            <a:srgbClr val="34D399"/>
+          </a:solidFill>
+          <a:ln w="12700" cap="flat" cmpd="sng" algn="ctr">
+            <a:noFill/>
+            <a:prstDash val="solid"/>
+            <a:miter lim="800000"/>
+          </a:ln>
+          <a:effectLst/>
+          <a:extLst>
+            <a:ext uri="{91240B29-F687-4F45-9708-019B960494DF}">
+              <a14:hiddenLine xmlns:a14="http://schemas.microsoft.com/office/drawing/2010/main" w="12700" cap="flat" cmpd="sng" algn="ctr">
+                <a:solidFill>
+                  <a:schemeClr val="accent1">
+                    <a:shade val="15000"/>
+                  </a:schemeClr>
+                </a:solidFill>
+                <a:prstDash val="solid"/>
+                <a:miter lim="800000"/>
+              </a14:hiddenLine>
+            </a:ext>
+          </a:extLst>
+        </p:spPr>
+        <p:style>
+          <a:lnRef idx="2">
+            <a:schemeClr val="accent1">
+              <a:shade val="15000"/>
+            </a:schemeClr>
+          </a:lnRef>
+          <a:fillRef idx="1">
+            <a:schemeClr val="accent1"/>
+          </a:fillRef>
+          <a:effectRef idx="0">
+            <a:schemeClr val="accent1"/>
+          </a:effectRef>
+          <a:fontRef idx="minor">
+            <a:schemeClr val="lt1"/>
+          </a:fontRef>
+        </p:style>
+        <p:txBody>
+          <a:bodyPr rtlCol="0" anchor="ctr"/>
+          <a:lstStyle/>
+          <a:p>
+            <a:pPr algn="ctr"/>
+            <a:endParaRPr lang="en-IN"/>
+          </a:p>
+        </p:txBody>
+      </p:sp>
+      <p:sp>
+        <p:nvSpPr>
+          <p:cNvPr id="57" name="TextBox 56">
+            <a:extLst>
+              <a:ext uri="{FF2B5EF4-FFF2-40B4-BE49-F238E27FC236}">
+                <a16:creationId xmlns:a16="http://schemas.microsoft.com/office/drawing/2014/main" id="{E9652D21-839F-758D-6273-08AE6899099B}"/>
+              </a:ext>
+            </a:extLst>
+          </p:cNvPr>
+          <p:cNvSpPr txBox="1"/>
+          <p:nvPr/>
+        </p:nvSpPr>
+        <p:spPr>
+          <a:xfrm>
+            <a:off x="1234440" y="4937760"/>
+            <a:ext cx="4160520" cy="181588"/>
+          </a:xfrm>
+          <a:prstGeom prst="rect">
+            <a:avLst/>
+          </a:prstGeom>
+          <a:noFill/>
+        </p:spPr>
+        <p:txBody>
+          <a:bodyPr vert="horz" wrap="square" lIns="0" tIns="0" rIns="0" bIns="0" rtlCol="0">
+            <a:spAutoFit/>
+          </a:bodyPr>
+          <a:lstStyle/>
+          <a:p>
+            <a:r>
+              <a:rPr lang="en-IN" sz="1180" b="1">
+                <a:solidFill>
+                  <a:srgbClr val="E6EDF3"/>
+                </a:solidFill>
+                <a:latin typeface="Arial" panose="020B0604020202020204" pitchFamily="34" charset="0"/>
+              </a:rPr>
+              <a:t>Deterministic reasoning</a:t>
+            </a:r>
+          </a:p>
+        </p:txBody>
+      </p:sp>
+      <p:sp>
+        <p:nvSpPr>
+          <p:cNvPr id="58" name="TextBox 57">
+            <a:extLst>
+              <a:ext uri="{FF2B5EF4-FFF2-40B4-BE49-F238E27FC236}">
+                <a16:creationId xmlns:a16="http://schemas.microsoft.com/office/drawing/2014/main" id="{092C095F-02DB-60A3-F6BF-11A1992E2BDC}"/>
+              </a:ext>
+            </a:extLst>
+          </p:cNvPr>
+          <p:cNvSpPr txBox="1"/>
+          <p:nvPr/>
+        </p:nvSpPr>
+        <p:spPr>
+          <a:xfrm>
+            <a:off x="1234440" y="5175504"/>
+            <a:ext cx="4224528" cy="149272"/>
+          </a:xfrm>
+          <a:prstGeom prst="rect">
+            <a:avLst/>
+          </a:prstGeom>
+          <a:noFill/>
+        </p:spPr>
+        <p:txBody>
+          <a:bodyPr vert="horz" wrap="square" lIns="0" tIns="0" rIns="0" bIns="0" rtlCol="0">
+            <a:spAutoFit/>
+          </a:bodyPr>
+          <a:lstStyle/>
+          <a:p>
+            <a:r>
+              <a:rPr lang="en-US" sz="970">
+                <a:solidFill>
+                  <a:srgbClr val="9AA7B4"/>
+                </a:solidFill>
+                <a:latin typeface="Arial" panose="020B0604020202020204" pitchFamily="34" charset="0"/>
+              </a:rPr>
+              <a:t>Same input gives the same CSV; every sentence points to real profile facts.</a:t>
+            </a:r>
+            <a:endParaRPr lang="en-IN" sz="970">
+              <a:solidFill>
+                <a:srgbClr val="9AA7B4"/>
+              </a:solidFill>
+              <a:latin typeface="Arial" panose="020B0604020202020204" pitchFamily="34" charset="0"/>
+            </a:endParaRPr>
+          </a:p>
+        </p:txBody>
+      </p:sp>
+      <p:sp>
+        <p:nvSpPr>
+          <p:cNvPr id="59" name="Rectangle: Rounded Corners 58">
+            <a:extLst>
+              <a:ext uri="{FF2B5EF4-FFF2-40B4-BE49-F238E27FC236}">
+                <a16:creationId xmlns:a16="http://schemas.microsoft.com/office/drawing/2014/main" id="{9425DBE5-6E1C-F454-DF69-C0DE1628AB39}"/>
+              </a:ext>
+            </a:extLst>
+          </p:cNvPr>
+          <p:cNvSpPr/>
+          <p:nvPr/>
+        </p:nvSpPr>
+        <p:spPr>
+          <a:xfrm>
+            <a:off x="6327648" y="1874520"/>
+            <a:ext cx="5221224" cy="4069080"/>
+          </a:xfrm>
+          <a:prstGeom prst="roundRect">
+            <a:avLst>
+              <a:gd name="adj" fmla="val 3500"/>
+            </a:avLst>
+          </a:prstGeom>
+          <a:solidFill>
+            <a:srgbClr val="1B2330"/>
+          </a:solidFill>
+          <a:ln w="12700">
+            <a:solidFill>
+              <a:srgbClr val="2A3340"/>
+            </a:solidFill>
+          </a:ln>
+        </p:spPr>
+        <p:style>
+          <a:lnRef idx="2">
+            <a:schemeClr val="accent1">
+              <a:shade val="15000"/>
+            </a:schemeClr>
+          </a:lnRef>
+          <a:fillRef idx="1">
+            <a:schemeClr val="accent1"/>
+          </a:fillRef>
+          <a:effectRef idx="0">
+            <a:schemeClr val="accent1"/>
+          </a:effectRef>
+          <a:fontRef idx="minor">
+            <a:schemeClr val="lt1"/>
+          </a:fontRef>
+        </p:style>
+        <p:txBody>
+          <a:bodyPr rtlCol="0" anchor="ctr"/>
+          <a:lstStyle/>
+          <a:p>
+            <a:pPr algn="ctr"/>
+            <a:endParaRPr lang="en-IN"/>
+          </a:p>
+        </p:txBody>
+      </p:sp>
+      <p:sp>
+        <p:nvSpPr>
+          <p:cNvPr id="60" name="TextBox 59">
+            <a:extLst>
+              <a:ext uri="{FF2B5EF4-FFF2-40B4-BE49-F238E27FC236}">
+                <a16:creationId xmlns:a16="http://schemas.microsoft.com/office/drawing/2014/main" id="{B402E204-3320-E613-E7A3-C3422B452F16}"/>
+              </a:ext>
+            </a:extLst>
+          </p:cNvPr>
+          <p:cNvSpPr txBox="1"/>
+          <p:nvPr/>
+        </p:nvSpPr>
+        <p:spPr>
+          <a:xfrm>
+            <a:off x="6620256" y="2103120"/>
+            <a:ext cx="2834640" cy="230832"/>
+          </a:xfrm>
+          <a:prstGeom prst="rect">
+            <a:avLst/>
+          </a:prstGeom>
+          <a:noFill/>
+        </p:spPr>
+        <p:txBody>
+          <a:bodyPr vert="horz" wrap="square" lIns="0" tIns="0" rIns="0" bIns="0" rtlCol="0">
+            <a:spAutoFit/>
+          </a:bodyPr>
+          <a:lstStyle/>
+          <a:p>
+            <a:r>
+              <a:rPr lang="en-IN" sz="1500" b="1">
+                <a:solidFill>
+                  <a:srgbClr val="F2B544"/>
+                </a:solidFill>
+                <a:latin typeface="Arial" panose="020B0604020202020204" pitchFamily="34" charset="0"/>
+              </a:rPr>
+              <a:t>Next hardening moves</a:t>
+            </a:r>
+          </a:p>
+        </p:txBody>
+      </p:sp>
+      <p:sp>
+        <p:nvSpPr>
+          <p:cNvPr id="61" name="Rectangle: Rounded Corners 60">
+            <a:extLst>
+              <a:ext uri="{FF2B5EF4-FFF2-40B4-BE49-F238E27FC236}">
+                <a16:creationId xmlns:a16="http://schemas.microsoft.com/office/drawing/2014/main" id="{EA2188D7-A674-11A2-BC24-7C5599F69278}"/>
+              </a:ext>
+            </a:extLst>
+          </p:cNvPr>
+          <p:cNvSpPr/>
+          <p:nvPr/>
+        </p:nvSpPr>
+        <p:spPr>
+          <a:xfrm>
+            <a:off x="10168128" y="2121408"/>
+            <a:ext cx="1005840" cy="256032"/>
+          </a:xfrm>
+          <a:prstGeom prst="roundRect">
+            <a:avLst>
+              <a:gd name="adj" fmla="val 50000"/>
+            </a:avLst>
+          </a:prstGeom>
+          <a:solidFill>
+            <a:srgbClr val="1B2330"/>
+          </a:solidFill>
+          <a:ln w="12700" cap="flat" cmpd="sng" algn="ctr">
+            <a:solidFill>
+              <a:srgbClr val="F2B544">
+                <a:alpha val="65000"/>
+              </a:srgbClr>
+            </a:solidFill>
+            <a:prstDash val="solid"/>
+            <a:miter lim="800000"/>
+            <a:headEnd type="none" w="med" len="med"/>
+            <a:tailEnd type="none" w="med" len="med"/>
+          </a:ln>
+        </p:spPr>
+        <p:style>
+          <a:lnRef idx="2">
+            <a:schemeClr val="accent1">
+              <a:shade val="15000"/>
+            </a:schemeClr>
+          </a:lnRef>
+          <a:fillRef idx="1">
+            <a:schemeClr val="accent1"/>
+          </a:fillRef>
+          <a:effectRef idx="0">
+            <a:schemeClr val="accent1"/>
+          </a:effectRef>
+          <a:fontRef idx="minor">
+            <a:schemeClr val="lt1"/>
+          </a:fontRef>
+        </p:style>
+        <p:txBody>
+          <a:bodyPr rtlCol="0" anchor="ctr"/>
+          <a:lstStyle/>
+          <a:p>
+            <a:pPr algn="ctr"/>
+            <a:endParaRPr lang="en-IN"/>
+          </a:p>
+        </p:txBody>
+      </p:sp>
+      <p:sp>
+        <p:nvSpPr>
+          <p:cNvPr id="62" name="TextBox 61">
+            <a:extLst>
+              <a:ext uri="{FF2B5EF4-FFF2-40B4-BE49-F238E27FC236}">
+                <a16:creationId xmlns:a16="http://schemas.microsoft.com/office/drawing/2014/main" id="{3FB3AF8D-AC8D-AF5C-CC28-827BAF66CDCF}"/>
+              </a:ext>
+            </a:extLst>
+          </p:cNvPr>
+          <p:cNvSpPr txBox="1"/>
+          <p:nvPr/>
+        </p:nvSpPr>
+        <p:spPr>
+          <a:xfrm>
+            <a:off x="10241280" y="2153412"/>
+            <a:ext cx="859536" cy="130805"/>
+          </a:xfrm>
+          <a:prstGeom prst="rect">
+            <a:avLst/>
+          </a:prstGeom>
+          <a:noFill/>
+        </p:spPr>
+        <p:txBody>
+          <a:bodyPr vert="horz" wrap="square" lIns="0" tIns="0" rIns="0" bIns="0" rtlCol="0">
+            <a:spAutoFit/>
+          </a:bodyPr>
+          <a:lstStyle/>
+          <a:p>
+            <a:pPr algn="ctr"/>
+            <a:r>
+              <a:rPr lang="en-IN" sz="850" b="1">
+                <a:solidFill>
+                  <a:srgbClr val="E6EDF3"/>
+                </a:solidFill>
+                <a:latin typeface="Arial" panose="020B0604020202020204" pitchFamily="34" charset="0"/>
+              </a:rPr>
+              <a:t>honest roadmap</a:t>
+            </a:r>
+          </a:p>
+        </p:txBody>
+      </p:sp>
+      <p:sp>
+        <p:nvSpPr>
+          <p:cNvPr id="63" name="Oval 62">
+            <a:extLst>
+              <a:ext uri="{FF2B5EF4-FFF2-40B4-BE49-F238E27FC236}">
+                <a16:creationId xmlns:a16="http://schemas.microsoft.com/office/drawing/2014/main" id="{8C9C10B7-5A12-EDD2-C55F-FBFBC7FC0A26}"/>
+              </a:ext>
+            </a:extLst>
+          </p:cNvPr>
+          <p:cNvSpPr/>
+          <p:nvPr/>
+        </p:nvSpPr>
+        <p:spPr>
+          <a:xfrm>
+            <a:off x="6620256" y="2670048"/>
+            <a:ext cx="146305" cy="146304"/>
+          </a:xfrm>
+          <a:prstGeom prst="ellipse">
+            <a:avLst/>
+          </a:prstGeom>
+          <a:solidFill>
+            <a:srgbClr val="F2B544"/>
+          </a:solidFill>
+          <a:ln w="12700" cap="flat" cmpd="sng" algn="ctr">
+            <a:noFill/>
+            <a:prstDash val="solid"/>
+            <a:miter lim="800000"/>
+          </a:ln>
+          <a:effectLst/>
+          <a:extLst>
+            <a:ext uri="{91240B29-F687-4F45-9708-019B960494DF}">
+              <a14:hiddenLine xmlns:a14="http://schemas.microsoft.com/office/drawing/2010/main" w="12700" cap="flat" cmpd="sng" algn="ctr">
+                <a:solidFill>
+                  <a:schemeClr val="accent1">
+                    <a:shade val="15000"/>
+                  </a:schemeClr>
+                </a:solidFill>
+                <a:prstDash val="solid"/>
+                <a:miter lim="800000"/>
+              </a14:hiddenLine>
+            </a:ext>
+          </a:extLst>
+        </p:spPr>
+        <p:style>
+          <a:lnRef idx="2">
+            <a:schemeClr val="accent1">
+              <a:shade val="15000"/>
+            </a:schemeClr>
+          </a:lnRef>
+          <a:fillRef idx="1">
+            <a:schemeClr val="accent1"/>
+          </a:fillRef>
+          <a:effectRef idx="0">
+            <a:schemeClr val="accent1"/>
+          </a:effectRef>
+          <a:fontRef idx="minor">
+            <a:schemeClr val="lt1"/>
+          </a:fontRef>
+        </p:style>
+        <p:txBody>
+          <a:bodyPr rtlCol="0" anchor="ctr"/>
+          <a:lstStyle/>
+          <a:p>
+            <a:pPr algn="ctr"/>
+            <a:endParaRPr lang="en-IN"/>
+          </a:p>
+        </p:txBody>
+      </p:sp>
+      <p:sp>
+        <p:nvSpPr>
+          <p:cNvPr id="64" name="TextBox 63">
+            <a:extLst>
+              <a:ext uri="{FF2B5EF4-FFF2-40B4-BE49-F238E27FC236}">
+                <a16:creationId xmlns:a16="http://schemas.microsoft.com/office/drawing/2014/main" id="{7BCCC323-0FD6-74B1-9D75-C5081038251E}"/>
+              </a:ext>
+            </a:extLst>
+          </p:cNvPr>
+          <p:cNvSpPr txBox="1"/>
+          <p:nvPr/>
+        </p:nvSpPr>
+        <p:spPr>
+          <a:xfrm>
+            <a:off x="6922008" y="2633472"/>
+            <a:ext cx="3977640" cy="181588"/>
+          </a:xfrm>
+          <a:prstGeom prst="rect">
+            <a:avLst/>
+          </a:prstGeom>
+          <a:noFill/>
+        </p:spPr>
+        <p:txBody>
+          <a:bodyPr vert="horz" wrap="square" lIns="0" tIns="0" rIns="0" bIns="0" rtlCol="0">
+            <a:spAutoFit/>
+          </a:bodyPr>
+          <a:lstStyle/>
+          <a:p>
+            <a:r>
+              <a:rPr lang="en-IN" sz="1180" b="1">
+                <a:solidFill>
+                  <a:srgbClr val="E6EDF3"/>
+                </a:solidFill>
+                <a:latin typeface="Arial" panose="020B0604020202020204" pitchFamily="34" charset="0"/>
+              </a:rPr>
+              <a:t>Hidden ground truth</a:t>
+            </a:r>
+          </a:p>
+        </p:txBody>
+      </p:sp>
+      <p:sp>
+        <p:nvSpPr>
+          <p:cNvPr id="65" name="TextBox 64">
+            <a:extLst>
+              <a:ext uri="{FF2B5EF4-FFF2-40B4-BE49-F238E27FC236}">
+                <a16:creationId xmlns:a16="http://schemas.microsoft.com/office/drawing/2014/main" id="{23450987-E5E3-55D7-DAD0-B890DBEDF3D5}"/>
+              </a:ext>
+            </a:extLst>
+          </p:cNvPr>
+          <p:cNvSpPr txBox="1"/>
+          <p:nvPr/>
+        </p:nvSpPr>
+        <p:spPr>
+          <a:xfrm>
+            <a:off x="6922008" y="2871216"/>
+            <a:ext cx="4069080" cy="298543"/>
+          </a:xfrm>
+          <a:prstGeom prst="rect">
+            <a:avLst/>
+          </a:prstGeom>
+          <a:noFill/>
+        </p:spPr>
+        <p:txBody>
+          <a:bodyPr vert="horz" wrap="square" lIns="0" tIns="0" rIns="0" bIns="0" rtlCol="0">
+            <a:spAutoFit/>
+          </a:bodyPr>
+          <a:lstStyle/>
+          <a:p>
+            <a:r>
+              <a:rPr lang="en-US" sz="970">
+                <a:solidFill>
+                  <a:srgbClr val="9AA7B4"/>
+                </a:solidFill>
+                <a:latin typeface="Arial" panose="020B0604020202020204" pitchFamily="34" charset="0"/>
+              </a:rPr>
+              <a:t>The official leaderboard is unseen, so proxy eval is evidence - not a score claim.</a:t>
+            </a:r>
+            <a:endParaRPr lang="en-IN" sz="970">
+              <a:solidFill>
+                <a:srgbClr val="9AA7B4"/>
+              </a:solidFill>
+              <a:latin typeface="Arial" panose="020B0604020202020204" pitchFamily="34" charset="0"/>
+            </a:endParaRPr>
+          </a:p>
+        </p:txBody>
+      </p:sp>
+      <p:sp>
+        <p:nvSpPr>
+          <p:cNvPr id="66" name="Oval 65">
+            <a:extLst>
+              <a:ext uri="{FF2B5EF4-FFF2-40B4-BE49-F238E27FC236}">
+                <a16:creationId xmlns:a16="http://schemas.microsoft.com/office/drawing/2014/main" id="{ACFA018F-70B3-3FC7-8CA0-2630C810BFD7}"/>
+              </a:ext>
+            </a:extLst>
+          </p:cNvPr>
+          <p:cNvSpPr/>
+          <p:nvPr/>
+        </p:nvSpPr>
+        <p:spPr>
+          <a:xfrm>
+            <a:off x="6620256" y="3438144"/>
+            <a:ext cx="146305" cy="146304"/>
+          </a:xfrm>
+          <a:prstGeom prst="ellipse">
+            <a:avLst/>
+          </a:prstGeom>
+          <a:solidFill>
+            <a:srgbClr val="F2B544"/>
+          </a:solidFill>
+          <a:ln w="12700" cap="flat" cmpd="sng" algn="ctr">
+            <a:noFill/>
+            <a:prstDash val="solid"/>
+            <a:miter lim="800000"/>
+          </a:ln>
+          <a:effectLst/>
+          <a:extLst>
+            <a:ext uri="{91240B29-F687-4F45-9708-019B960494DF}">
+              <a14:hiddenLine xmlns:a14="http://schemas.microsoft.com/office/drawing/2010/main" w="12700" cap="flat" cmpd="sng" algn="ctr">
+                <a:solidFill>
+                  <a:schemeClr val="accent1">
+                    <a:shade val="15000"/>
+                  </a:schemeClr>
+                </a:solidFill>
+                <a:prstDash val="solid"/>
+                <a:miter lim="800000"/>
+              </a14:hiddenLine>
+            </a:ext>
+          </a:extLst>
+        </p:spPr>
+        <p:style>
+          <a:lnRef idx="2">
+            <a:schemeClr val="accent1">
+              <a:shade val="15000"/>
+            </a:schemeClr>
+          </a:lnRef>
+          <a:fillRef idx="1">
+            <a:schemeClr val="accent1"/>
+          </a:fillRef>
+          <a:effectRef idx="0">
+            <a:schemeClr val="accent1"/>
+          </a:effectRef>
+          <a:fontRef idx="minor">
+            <a:schemeClr val="lt1"/>
+          </a:fontRef>
+        </p:style>
+        <p:txBody>
+          <a:bodyPr rtlCol="0" anchor="ctr"/>
+          <a:lstStyle/>
+          <a:p>
+            <a:pPr algn="ctr"/>
+            <a:endParaRPr lang="en-IN"/>
+          </a:p>
+        </p:txBody>
+      </p:sp>
+      <p:sp>
+        <p:nvSpPr>
+          <p:cNvPr id="67" name="TextBox 66">
+            <a:extLst>
+              <a:ext uri="{FF2B5EF4-FFF2-40B4-BE49-F238E27FC236}">
+                <a16:creationId xmlns:a16="http://schemas.microsoft.com/office/drawing/2014/main" id="{DB67AD5C-6325-897F-5918-03809559024E}"/>
+              </a:ext>
+            </a:extLst>
+          </p:cNvPr>
+          <p:cNvSpPr txBox="1"/>
+          <p:nvPr/>
+        </p:nvSpPr>
+        <p:spPr>
+          <a:xfrm>
+            <a:off x="6922008" y="3401568"/>
+            <a:ext cx="3977640" cy="181588"/>
+          </a:xfrm>
+          <a:prstGeom prst="rect">
+            <a:avLst/>
+          </a:prstGeom>
+          <a:noFill/>
+        </p:spPr>
+        <p:txBody>
+          <a:bodyPr vert="horz" wrap="square" lIns="0" tIns="0" rIns="0" bIns="0" rtlCol="0">
+            <a:spAutoFit/>
+          </a:bodyPr>
+          <a:lstStyle/>
+          <a:p>
+            <a:r>
+              <a:rPr lang="en-IN" sz="1180" b="1">
+                <a:solidFill>
+                  <a:srgbClr val="E6EDF3"/>
+                </a:solidFill>
+                <a:latin typeface="Arial" panose="020B0604020202020204" pitchFamily="34" charset="0"/>
+              </a:rPr>
+              <a:t>Conservative hard-trap recall</a:t>
+            </a:r>
+          </a:p>
+        </p:txBody>
+      </p:sp>
+      <p:sp>
+        <p:nvSpPr>
+          <p:cNvPr id="68" name="TextBox 67">
+            <a:extLst>
+              <a:ext uri="{FF2B5EF4-FFF2-40B4-BE49-F238E27FC236}">
+                <a16:creationId xmlns:a16="http://schemas.microsoft.com/office/drawing/2014/main" id="{65CA9012-83C7-78FB-450B-5197DF33BFA9}"/>
+              </a:ext>
+            </a:extLst>
+          </p:cNvPr>
+          <p:cNvSpPr txBox="1"/>
+          <p:nvPr/>
+        </p:nvSpPr>
+        <p:spPr>
+          <a:xfrm>
+            <a:off x="6922008" y="3639312"/>
+            <a:ext cx="4069080" cy="298543"/>
+          </a:xfrm>
+          <a:prstGeom prst="rect">
+            <a:avLst/>
+          </a:prstGeom>
+          <a:noFill/>
+        </p:spPr>
+        <p:txBody>
+          <a:bodyPr vert="horz" wrap="square" lIns="0" tIns="0" rIns="0" bIns="0" rtlCol="0">
+            <a:spAutoFit/>
+          </a:bodyPr>
+          <a:lstStyle/>
+          <a:p>
+            <a:r>
+              <a:rPr lang="en-US" sz="970">
+                <a:solidFill>
+                  <a:srgbClr val="9AA7B4"/>
+                </a:solidFill>
+                <a:latin typeface="Arial" panose="020B0604020202020204" pitchFamily="34" charset="0"/>
+              </a:rPr>
+              <a:t>53 hard traps are blocked; softer suspicious profiles are down-weighted, not over-zeroed.</a:t>
+            </a:r>
+            <a:endParaRPr lang="en-IN" sz="970">
+              <a:solidFill>
+                <a:srgbClr val="9AA7B4"/>
+              </a:solidFill>
+              <a:latin typeface="Arial" panose="020B0604020202020204" pitchFamily="34" charset="0"/>
+            </a:endParaRPr>
+          </a:p>
+        </p:txBody>
+      </p:sp>
+      <p:sp>
+        <p:nvSpPr>
+          <p:cNvPr id="69" name="Oval 68">
+            <a:extLst>
+              <a:ext uri="{FF2B5EF4-FFF2-40B4-BE49-F238E27FC236}">
+                <a16:creationId xmlns:a16="http://schemas.microsoft.com/office/drawing/2014/main" id="{4D2DCEE6-4F93-0777-F568-EE8CC4494EB7}"/>
+              </a:ext>
+            </a:extLst>
+          </p:cNvPr>
+          <p:cNvSpPr/>
+          <p:nvPr/>
+        </p:nvSpPr>
+        <p:spPr>
+          <a:xfrm>
+            <a:off x="6620256" y="4206240"/>
+            <a:ext cx="146305" cy="146304"/>
+          </a:xfrm>
+          <a:prstGeom prst="ellipse">
+            <a:avLst/>
+          </a:prstGeom>
+          <a:solidFill>
+            <a:srgbClr val="F2B544"/>
+          </a:solidFill>
+          <a:ln w="12700" cap="flat" cmpd="sng" algn="ctr">
+            <a:noFill/>
+            <a:prstDash val="solid"/>
+            <a:miter lim="800000"/>
+          </a:ln>
+          <a:effectLst/>
+          <a:extLst>
+            <a:ext uri="{91240B29-F687-4F45-9708-019B960494DF}">
+              <a14:hiddenLine xmlns:a14="http://schemas.microsoft.com/office/drawing/2010/main" w="12700" cap="flat" cmpd="sng" algn="ctr">
+                <a:solidFill>
+                  <a:schemeClr val="accent1">
+                    <a:shade val="15000"/>
+                  </a:schemeClr>
+                </a:solidFill>
+                <a:prstDash val="solid"/>
+                <a:miter lim="800000"/>
+              </a14:hiddenLine>
+            </a:ext>
+          </a:extLst>
+        </p:spPr>
+        <p:style>
+          <a:lnRef idx="2">
+            <a:schemeClr val="accent1">
+              <a:shade val="15000"/>
+            </a:schemeClr>
+          </a:lnRef>
+          <a:fillRef idx="1">
+            <a:schemeClr val="accent1"/>
+          </a:fillRef>
+          <a:effectRef idx="0">
+            <a:schemeClr val="accent1"/>
+          </a:effectRef>
+          <a:fontRef idx="minor">
+            <a:schemeClr val="lt1"/>
+          </a:fontRef>
+        </p:style>
+        <p:txBody>
+          <a:bodyPr rtlCol="0" anchor="ctr"/>
+          <a:lstStyle/>
+          <a:p>
+            <a:pPr algn="ctr"/>
+            <a:endParaRPr lang="en-IN"/>
+          </a:p>
+        </p:txBody>
+      </p:sp>
+      <p:sp>
+        <p:nvSpPr>
+          <p:cNvPr id="70" name="TextBox 69">
+            <a:extLst>
+              <a:ext uri="{FF2B5EF4-FFF2-40B4-BE49-F238E27FC236}">
+                <a16:creationId xmlns:a16="http://schemas.microsoft.com/office/drawing/2014/main" id="{172A7CE0-AD36-A8A0-95BC-81D017C6E757}"/>
+              </a:ext>
+            </a:extLst>
+          </p:cNvPr>
+          <p:cNvSpPr txBox="1"/>
+          <p:nvPr/>
+        </p:nvSpPr>
+        <p:spPr>
+          <a:xfrm>
+            <a:off x="6922008" y="4169664"/>
+            <a:ext cx="3977640" cy="181588"/>
+          </a:xfrm>
+          <a:prstGeom prst="rect">
+            <a:avLst/>
+          </a:prstGeom>
+          <a:noFill/>
+        </p:spPr>
+        <p:txBody>
+          <a:bodyPr vert="horz" wrap="square" lIns="0" tIns="0" rIns="0" bIns="0" rtlCol="0">
+            <a:spAutoFit/>
+          </a:bodyPr>
+          <a:lstStyle/>
+          <a:p>
+            <a:r>
+              <a:rPr lang="en-IN" sz="1180" b="1">
+                <a:solidFill>
+                  <a:srgbClr val="E6EDF3"/>
+                </a:solidFill>
+                <a:latin typeface="Arial" panose="020B0604020202020204" pitchFamily="34" charset="0"/>
+              </a:rPr>
+              <a:t>Learned ranking layer</a:t>
+            </a:r>
+          </a:p>
+        </p:txBody>
+      </p:sp>
+      <p:sp>
+        <p:nvSpPr>
+          <p:cNvPr id="71" name="TextBox 70">
+            <a:extLst>
+              <a:ext uri="{FF2B5EF4-FFF2-40B4-BE49-F238E27FC236}">
+                <a16:creationId xmlns:a16="http://schemas.microsoft.com/office/drawing/2014/main" id="{C3BDCBC8-26CB-3637-B4F1-B93E0DA85C62}"/>
+              </a:ext>
+            </a:extLst>
+          </p:cNvPr>
+          <p:cNvSpPr txBox="1"/>
+          <p:nvPr/>
+        </p:nvSpPr>
+        <p:spPr>
+          <a:xfrm>
+            <a:off x="6922008" y="4407408"/>
+            <a:ext cx="4069080" cy="298543"/>
+          </a:xfrm>
+          <a:prstGeom prst="rect">
+            <a:avLst/>
+          </a:prstGeom>
+          <a:noFill/>
+        </p:spPr>
+        <p:txBody>
+          <a:bodyPr vert="horz" wrap="square" lIns="0" tIns="0" rIns="0" bIns="0" rtlCol="0">
+            <a:spAutoFit/>
+          </a:bodyPr>
+          <a:lstStyle/>
+          <a:p>
+            <a:r>
+              <a:rPr lang="en-US" sz="970">
+                <a:solidFill>
+                  <a:srgbClr val="9AA7B4"/>
+                </a:solidFill>
+                <a:latin typeface="Arial" panose="020B0604020202020204" pitchFamily="34" charset="0"/>
+              </a:rPr>
+              <a:t>Future labels could train LambdaMART/XGBoost over these same features.</a:t>
+            </a:r>
+            <a:endParaRPr lang="en-IN" sz="970">
+              <a:solidFill>
+                <a:srgbClr val="9AA7B4"/>
+              </a:solidFill>
+              <a:latin typeface="Arial" panose="020B0604020202020204" pitchFamily="34" charset="0"/>
+            </a:endParaRPr>
+          </a:p>
+        </p:txBody>
+      </p:sp>
+      <p:sp>
+        <p:nvSpPr>
+          <p:cNvPr id="72" name="Oval 71">
+            <a:extLst>
+              <a:ext uri="{FF2B5EF4-FFF2-40B4-BE49-F238E27FC236}">
+                <a16:creationId xmlns:a16="http://schemas.microsoft.com/office/drawing/2014/main" id="{DE643930-814C-A471-7958-9543710F14CF}"/>
+              </a:ext>
+            </a:extLst>
+          </p:cNvPr>
+          <p:cNvSpPr/>
+          <p:nvPr/>
+        </p:nvSpPr>
+        <p:spPr>
+          <a:xfrm>
+            <a:off x="6620256" y="4974336"/>
+            <a:ext cx="146305" cy="146304"/>
+          </a:xfrm>
+          <a:prstGeom prst="ellipse">
+            <a:avLst/>
+          </a:prstGeom>
+          <a:solidFill>
+            <a:srgbClr val="F2B544"/>
+          </a:solidFill>
+          <a:ln w="12700" cap="flat" cmpd="sng" algn="ctr">
+            <a:noFill/>
+            <a:prstDash val="solid"/>
+            <a:miter lim="800000"/>
+          </a:ln>
+          <a:effectLst/>
+          <a:extLst>
+            <a:ext uri="{91240B29-F687-4F45-9708-019B960494DF}">
+              <a14:hiddenLine xmlns:a14="http://schemas.microsoft.com/office/drawing/2010/main" w="12700" cap="flat" cmpd="sng" algn="ctr">
+                <a:solidFill>
+                  <a:schemeClr val="accent1">
+                    <a:shade val="15000"/>
+                  </a:schemeClr>
+                </a:solidFill>
+                <a:prstDash val="solid"/>
+                <a:miter lim="800000"/>
+              </a14:hiddenLine>
+            </a:ext>
+          </a:extLst>
+        </p:spPr>
+        <p:style>
+          <a:lnRef idx="2">
+            <a:schemeClr val="accent1">
+              <a:shade val="15000"/>
+            </a:schemeClr>
+          </a:lnRef>
+          <a:fillRef idx="1">
+            <a:schemeClr val="accent1"/>
+          </a:fillRef>
+          <a:effectRef idx="0">
+            <a:schemeClr val="accent1"/>
+          </a:effectRef>
+          <a:fontRef idx="minor">
+            <a:schemeClr val="lt1"/>
+          </a:fontRef>
+        </p:style>
+        <p:txBody>
+          <a:bodyPr rtlCol="0" anchor="ctr"/>
+          <a:lstStyle/>
+          <a:p>
+            <a:pPr algn="ctr"/>
+            <a:endParaRPr lang="en-IN"/>
+          </a:p>
+        </p:txBody>
+      </p:sp>
+      <p:sp>
+        <p:nvSpPr>
+          <p:cNvPr id="73" name="TextBox 72">
+            <a:extLst>
+              <a:ext uri="{FF2B5EF4-FFF2-40B4-BE49-F238E27FC236}">
+                <a16:creationId xmlns:a16="http://schemas.microsoft.com/office/drawing/2014/main" id="{C25B9317-2BAC-3C5A-192F-941B13C5A173}"/>
+              </a:ext>
+            </a:extLst>
+          </p:cNvPr>
+          <p:cNvSpPr txBox="1"/>
+          <p:nvPr/>
+        </p:nvSpPr>
+        <p:spPr>
+          <a:xfrm>
+            <a:off x="6922008" y="4937760"/>
+            <a:ext cx="3977640" cy="181588"/>
+          </a:xfrm>
+          <a:prstGeom prst="rect">
+            <a:avLst/>
+          </a:prstGeom>
+          <a:noFill/>
+        </p:spPr>
+        <p:txBody>
+          <a:bodyPr vert="horz" wrap="square" lIns="0" tIns="0" rIns="0" bIns="0" rtlCol="0">
+            <a:spAutoFit/>
+          </a:bodyPr>
+          <a:lstStyle/>
+          <a:p>
+            <a:r>
+              <a:rPr lang="en-IN" sz="1180" b="1">
+                <a:solidFill>
+                  <a:srgbClr val="E6EDF3"/>
+                </a:solidFill>
+                <a:latin typeface="Arial" panose="020B0604020202020204" pitchFamily="34" charset="0"/>
+              </a:rPr>
+              <a:t>Stage-3 fallback</a:t>
+            </a:r>
+          </a:p>
+        </p:txBody>
+      </p:sp>
+      <p:sp>
+        <p:nvSpPr>
+          <p:cNvPr id="74" name="TextBox 73">
+            <a:extLst>
+              <a:ext uri="{FF2B5EF4-FFF2-40B4-BE49-F238E27FC236}">
+                <a16:creationId xmlns:a16="http://schemas.microsoft.com/office/drawing/2014/main" id="{78828866-18CD-81AE-4355-588C89B9E6E5}"/>
+              </a:ext>
+            </a:extLst>
+          </p:cNvPr>
+          <p:cNvSpPr txBox="1"/>
+          <p:nvPr/>
+        </p:nvSpPr>
+        <p:spPr>
+          <a:xfrm>
+            <a:off x="6922008" y="5175504"/>
+            <a:ext cx="4069080" cy="298543"/>
+          </a:xfrm>
+          <a:prstGeom prst="rect">
+            <a:avLst/>
+          </a:prstGeom>
+          <a:noFill/>
+        </p:spPr>
+        <p:txBody>
+          <a:bodyPr vert="horz" wrap="square" lIns="0" tIns="0" rIns="0" bIns="0" rtlCol="0">
+            <a:spAutoFit/>
+          </a:bodyPr>
+          <a:lstStyle/>
+          <a:p>
+            <a:r>
+              <a:rPr lang="en-US" sz="970">
+                <a:solidFill>
+                  <a:srgbClr val="9AA7B4"/>
+                </a:solidFill>
+                <a:latin typeface="Arial" panose="020B0604020202020204" pitchFamily="34" charset="0"/>
+              </a:rPr>
+              <a:t>If multiprocessing is constrained, --workers 1 preserves the exact same ranking output.</a:t>
+            </a:r>
+            <a:endParaRPr lang="en-IN" sz="970">
+              <a:solidFill>
+                <a:srgbClr val="9AA7B4"/>
+              </a:solidFill>
+              <a:latin typeface="Arial" panose="020B0604020202020204" pitchFamily="34" charset="0"/>
+            </a:endParaRPr>
+          </a:p>
+        </p:txBody>
+      </p:sp>
+      <p:sp>
+        <p:nvSpPr>
+          <p:cNvPr id="75" name="TextBox 74">
+            <a:extLst>
+              <a:ext uri="{FF2B5EF4-FFF2-40B4-BE49-F238E27FC236}">
+                <a16:creationId xmlns:a16="http://schemas.microsoft.com/office/drawing/2014/main" id="{3D4244A4-91F0-1D7E-70B3-924D9921A5B3}"/>
+              </a:ext>
+            </a:extLst>
+          </p:cNvPr>
+          <p:cNvSpPr txBox="1"/>
+          <p:nvPr/>
+        </p:nvSpPr>
+        <p:spPr>
+          <a:xfrm>
+            <a:off x="10881360" y="6473952"/>
+            <a:ext cx="914400" cy="138499"/>
+          </a:xfrm>
+          <a:prstGeom prst="rect">
+            <a:avLst/>
+          </a:prstGeom>
+          <a:noFill/>
+        </p:spPr>
+        <p:txBody>
+          <a:bodyPr vert="horz" wrap="square" lIns="0" tIns="0" rIns="0" bIns="0" rtlCol="0">
+            <a:spAutoFit/>
+          </a:bodyPr>
+          <a:lstStyle/>
+          <a:p>
+            <a:pPr algn="r"/>
+            <a:r>
+              <a:rPr lang="en-IN" sz="900">
+                <a:solidFill>
+                  <a:srgbClr val="6E7C8C"/>
+                </a:solidFill>
+                <a:latin typeface="Arial" panose="020B0604020202020204" pitchFamily="34" charset="0"/>
+              </a:rPr>
+              <a:t>10 / 13</a:t>
+            </a:r>
+          </a:p>
+        </p:txBody>
+      </p:sp>
+      <p:sp>
+        <p:nvSpPr>
+          <p:cNvPr id="76" name="TextBox 75">
+            <a:extLst>
+              <a:ext uri="{FF2B5EF4-FFF2-40B4-BE49-F238E27FC236}">
+                <a16:creationId xmlns:a16="http://schemas.microsoft.com/office/drawing/2014/main" id="{F6E0AFF0-E97A-F8A4-E153-3C6C28B07756}"/>
+              </a:ext>
+            </a:extLst>
+          </p:cNvPr>
+          <p:cNvSpPr txBox="1"/>
+          <p:nvPr/>
+        </p:nvSpPr>
+        <p:spPr>
+          <a:xfrm>
+            <a:off x="640080" y="6473952"/>
+            <a:ext cx="2743200" cy="138499"/>
+          </a:xfrm>
+          <a:prstGeom prst="rect">
+            <a:avLst/>
+          </a:prstGeom>
+          <a:noFill/>
+        </p:spPr>
+        <p:txBody>
+          <a:bodyPr vert="horz" wrap="square" lIns="0" tIns="0" rIns="0" bIns="0" rtlCol="0">
+            <a:spAutoFit/>
+          </a:bodyPr>
+          <a:lstStyle/>
+          <a:p>
+            <a:r>
+              <a:rPr lang="en-IN" sz="900" b="1">
+                <a:solidFill>
+                  <a:srgbClr val="6E7C8C"/>
+                </a:solidFill>
+                <a:latin typeface="Arial" panose="020B0604020202020204" pitchFamily="34" charset="0"/>
+              </a:rPr>
+              <a:t>HIREFIT RANKER</a:t>
+            </a:r>
+          </a:p>
+        </p:txBody>
+      </p:sp>
+    </p:spTree>
+  </p:cSld>
+  <p:clrMapOvr>
+    <a:masterClrMapping/>
+  </p:clrMapOvr>
+</p:sld>
+</file>
+
+<file path=ppt/slides/slide11.xml><?xml version="1.0" encoding="utf-8"?>
 <p:sld xmlns:a="http://schemas.openxmlformats.org/drawingml/2006/main" xmlns:r="http://schemas.openxmlformats.org/officeDocument/2006/relationships" xmlns:p="http://schemas.openxmlformats.org/presentationml/2006/main">
   <p:cSld name="Slide 9">
     <p:bg>
@@ -2851,7 +4803,7 @@
                 <a:ea typeface="Arial" pitchFamily="34" charset="-122"/>
                 <a:cs typeface="Arial" pitchFamily="34" charset="-120"/>
               </a:rPr>
-              <a:t>184 s</a:t>
+              <a:t>187 s</a:t>
             </a:r>
             <a:endParaRPr lang="en-US" sz="1250" dirty="0"/>
           </a:p>
@@ -3902,7 +5854,7 @@
                 <a:ea typeface="Arial" pitchFamily="34" charset="-122"/>
                 <a:cs typeface="Arial" pitchFamily="34" charset="-120"/>
               </a:rPr>
-              <a:t>10 / 11</a:t>
+              <a:t>11 / 13</a:t>
             </a:r>
             <a:endParaRPr lang="en-US" sz="900" dirty="0"/>
           </a:p>
@@ -3955,7 +5907,1231 @@
 </p:sld>
 </file>
 
-<file path=ppt/slides/slide11.xml><?xml version="1.0" encoding="utf-8"?>
+<file path=ppt/slides/slide12.xml><?xml version="1.0" encoding="utf-8"?>
+<p:sld xmlns:a="http://schemas.openxmlformats.org/drawingml/2006/main" xmlns:p="http://schemas.openxmlformats.org/presentationml/2006/main" xmlns:r="http://schemas.openxmlformats.org/officeDocument/2006/relationships">
+  <p:cSld>
+    <p:spTree>
+      <p:nvGrpSpPr>
+        <p:cNvPr id="1" name=""/>
+        <p:cNvGrpSpPr/>
+        <p:nvPr/>
+      </p:nvGrpSpPr>
+      <p:grpSpPr/>
+      <p:sp>
+        <p:nvSpPr>
+          <p:cNvPr id="2" name="Text 0"/>
+          <p:cNvSpPr/>
+          <p:nvPr/>
+        </p:nvSpPr>
+        <p:spPr>
+          <a:xfrm>
+            <a:off x="640080" y="384048"/>
+            <a:ext cx="10911535" cy="274320"/>
+          </a:xfrm>
+          <a:prstGeom prst="rect">
+            <a:avLst/>
+          </a:prstGeom>
+          <a:noFill/>
+          <a:ln/>
+        </p:spPr>
+        <p:txBody>
+          <a:bodyPr wrap="square" rtlCol="0" anchor="ctr"/>
+          <a:lstStyle/>
+          <a:p>
+            <a:pPr marL="0" indent="0">
+              <a:buNone/>
+            </a:pPr>
+            <a:r>
+              <a:rPr lang="en-US" sz="1150" b="1" kern="0" spc="300" dirty="0">
+                <a:solidFill>
+                  <a:srgbClr val="8B7CF6"/>
+                </a:solidFill>
+                <a:latin typeface="Arial" pitchFamily="34" charset="0"/>
+                <a:ea typeface="Arial" pitchFamily="34" charset="-122"/>
+                <a:cs typeface="Arial" pitchFamily="34" charset="-120"/>
+              </a:rPr>
+              <a:t>INSIDE REDROB</a:t>
+            </a:r>
+            <a:endParaRPr lang="en-US" sz="1150" dirty="0"/>
+          </a:p>
+        </p:txBody>
+      </p:sp>
+      <p:sp>
+        <p:nvSpPr>
+          <p:cNvPr id="3" name="Text 1"/>
+          <p:cNvSpPr/>
+          <p:nvPr/>
+        </p:nvSpPr>
+        <p:spPr>
+          <a:xfrm>
+            <a:off x="640080" y="658368"/>
+            <a:ext cx="10911535" cy="658368"/>
+          </a:xfrm>
+          <a:prstGeom prst="rect">
+            <a:avLst/>
+          </a:prstGeom>
+          <a:noFill/>
+          <a:ln/>
+        </p:spPr>
+        <p:txBody>
+          <a:bodyPr wrap="square" rtlCol="0" anchor="ctr"/>
+          <a:lstStyle/>
+          <a:p>
+            <a:pPr marL="0" indent="0">
+              <a:lnSpc>
+                <a:spcPct val="98000"/>
+              </a:lnSpc>
+              <a:buNone/>
+            </a:pPr>
+            <a:r>
+              <a:rPr lang="en-US" sz="2600" b="1" dirty="0">
+                <a:solidFill>
+                  <a:srgbClr val="E6EDF3"/>
+                </a:solidFill>
+                <a:latin typeface="Arial" pitchFamily="34" charset="0"/>
+                <a:ea typeface="Arial" pitchFamily="34" charset="-122"/>
+                <a:cs typeface="Arial" pitchFamily="34" charset="-120"/>
+              </a:rPr>
+              <a:t>A drop-in scoring layer for Redrob's hiring stack — auditable by design.</a:t>
+            </a:r>
+            <a:endParaRPr lang="en-US" sz="2600" dirty="0"/>
+          </a:p>
+        </p:txBody>
+      </p:sp>
+      <p:sp>
+        <p:nvSpPr>
+          <p:cNvPr id="4" name="Text 2"/>
+          <p:cNvSpPr/>
+          <p:nvPr/>
+        </p:nvSpPr>
+        <p:spPr>
+          <a:xfrm>
+            <a:off x="640080" y="1335024"/>
+            <a:ext cx="10911535" cy="292608"/>
+          </a:xfrm>
+          <a:prstGeom prst="rect">
+            <a:avLst/>
+          </a:prstGeom>
+          <a:noFill/>
+          <a:ln/>
+        </p:spPr>
+        <p:txBody>
+          <a:bodyPr wrap="square" rtlCol="0" anchor="ctr"/>
+          <a:lstStyle/>
+          <a:p>
+            <a:pPr marL="0" indent="0">
+              <a:buNone/>
+            </a:pPr>
+            <a:r>
+              <a:rPr lang="en-US" sz="1300" dirty="0">
+                <a:solidFill>
+                  <a:srgbClr val="9AA7B4"/>
+                </a:solidFill>
+                <a:latin typeface="Arial" pitchFamily="34" charset="0"/>
+                <a:ea typeface="Arial" pitchFamily="34" charset="-122"/>
+                <a:cs typeface="Arial" pitchFamily="34" charset="-120"/>
+              </a:rPr>
+              <a:t>Ranks talent on behavior and evidence, not resumes — the same thesis as the platform it would join.</a:t>
+            </a:r>
+            <a:endParaRPr lang="en-US" sz="1300" dirty="0"/>
+          </a:p>
+        </p:txBody>
+      </p:sp>
+      <p:sp>
+        <p:nvSpPr>
+          <p:cNvPr id="5" name="Shape 3"/>
+          <p:cNvSpPr/>
+          <p:nvPr/>
+        </p:nvSpPr>
+        <p:spPr>
+          <a:xfrm>
+            <a:off x="640080" y="1874520"/>
+            <a:ext cx="2522144" cy="1097280"/>
+          </a:xfrm>
+          <a:prstGeom prst="roundRect">
+            <a:avLst>
+              <a:gd name="adj" fmla="val 10000"/>
+            </a:avLst>
+          </a:prstGeom>
+          <a:solidFill>
+            <a:srgbClr val="161C24"/>
+          </a:solidFill>
+          <a:ln w="12700">
+            <a:solidFill>
+              <a:srgbClr val="2A3340"/>
+            </a:solidFill>
+            <a:prstDash val="solid"/>
+          </a:ln>
+          <a:effectLst>
+            <a:outerShdw blurRad="114300" dist="38100" dir="5400000" algn="bl" rotWithShape="0">
+              <a:srgbClr val="000000">
+                <a:alpha val="28000"/>
+              </a:srgbClr>
+            </a:outerShdw>
+          </a:effectLst>
+        </p:spPr>
+        <p:txBody>
+          <a:bodyPr/>
+          <a:p/>
+        </p:txBody>
+      </p:sp>
+      <p:sp>
+        <p:nvSpPr>
+          <p:cNvPr id="6" name="Text 4"/>
+          <p:cNvSpPr/>
+          <p:nvPr/>
+        </p:nvSpPr>
+        <p:spPr>
+          <a:xfrm>
+            <a:off x="640080" y="1993392"/>
+            <a:ext cx="2522144" cy="566928"/>
+          </a:xfrm>
+          <a:prstGeom prst="rect">
+            <a:avLst/>
+          </a:prstGeom>
+          <a:noFill/>
+          <a:ln/>
+        </p:spPr>
+        <p:txBody>
+          <a:bodyPr wrap="square" rtlCol="0" anchor="ctr"/>
+          <a:lstStyle/>
+          <a:p>
+            <a:pPr marL="0" indent="0" algn="ctr">
+              <a:buNone/>
+            </a:pPr>
+            <a:r>
+              <a:rPr lang="en-US" sz="3400" b="1" dirty="0">
+                <a:solidFill>
+                  <a:srgbClr val="2DD4BF"/>
+                </a:solidFill>
+                <a:latin typeface="Arial" pitchFamily="34" charset="0"/>
+                <a:ea typeface="Arial" pitchFamily="34" charset="-122"/>
+                <a:cs typeface="Arial" pitchFamily="34" charset="-120"/>
+              </a:rPr>
+              <a:t>&lt;50 ms</a:t>
+            </a:r>
+            <a:endParaRPr lang="en-US" sz="3400" dirty="0"/>
+          </a:p>
+        </p:txBody>
+      </p:sp>
+      <p:sp>
+        <p:nvSpPr>
+          <p:cNvPr id="7" name="Text 5"/>
+          <p:cNvSpPr/>
+          <p:nvPr/>
+        </p:nvSpPr>
+        <p:spPr>
+          <a:xfrm>
+            <a:off x="640080" y="2578608"/>
+            <a:ext cx="2522144" cy="274320"/>
+          </a:xfrm>
+          <a:prstGeom prst="rect">
+            <a:avLst/>
+          </a:prstGeom>
+          <a:noFill/>
+          <a:ln/>
+        </p:spPr>
+        <p:txBody>
+          <a:bodyPr wrap="square" rtlCol="0" anchor="ctr"/>
+          <a:lstStyle/>
+          <a:p>
+            <a:pPr marL="0" indent="0" algn="ctr">
+              <a:buNone/>
+            </a:pPr>
+            <a:r>
+              <a:rPr lang="en-US" sz="1200" dirty="0">
+                <a:solidFill>
+                  <a:srgbClr val="9AA7B4"/>
+                </a:solidFill>
+                <a:latin typeface="Arial" pitchFamily="34" charset="0"/>
+                <a:ea typeface="Arial" pitchFamily="34" charset="-122"/>
+                <a:cs typeface="Arial" pitchFamily="34" charset="-120"/>
+              </a:rPr>
+              <a:t>PER-CANDIDATE AUDIT API</a:t>
+            </a:r>
+            <a:endParaRPr lang="en-US" sz="1200" dirty="0"/>
+          </a:p>
+        </p:txBody>
+      </p:sp>
+      <p:sp>
+        <p:nvSpPr>
+          <p:cNvPr id="8" name="Shape 6"/>
+          <p:cNvSpPr/>
+          <p:nvPr/>
+        </p:nvSpPr>
+        <p:spPr>
+          <a:xfrm>
+            <a:off x="3436544" y="1874520"/>
+            <a:ext cx="2522144" cy="1097280"/>
+          </a:xfrm>
+          <a:prstGeom prst="roundRect">
+            <a:avLst>
+              <a:gd name="adj" fmla="val 10000"/>
+            </a:avLst>
+          </a:prstGeom>
+          <a:solidFill>
+            <a:srgbClr val="161C24"/>
+          </a:solidFill>
+          <a:ln w="12700">
+            <a:solidFill>
+              <a:srgbClr val="2A3340"/>
+            </a:solidFill>
+            <a:prstDash val="solid"/>
+          </a:ln>
+          <a:effectLst>
+            <a:outerShdw blurRad="114300" dist="38100" dir="5400000" algn="bl" rotWithShape="0">
+              <a:srgbClr val="000000">
+                <a:alpha val="28000"/>
+              </a:srgbClr>
+            </a:outerShdw>
+          </a:effectLst>
+        </p:spPr>
+        <p:txBody>
+          <a:bodyPr/>
+          <a:p/>
+        </p:txBody>
+      </p:sp>
+      <p:sp>
+        <p:nvSpPr>
+          <p:cNvPr id="9" name="Text 7"/>
+          <p:cNvSpPr/>
+          <p:nvPr/>
+        </p:nvSpPr>
+        <p:spPr>
+          <a:xfrm>
+            <a:off x="3436544" y="1993392"/>
+            <a:ext cx="2522144" cy="566928"/>
+          </a:xfrm>
+          <a:prstGeom prst="rect">
+            <a:avLst/>
+          </a:prstGeom>
+          <a:noFill/>
+          <a:ln/>
+        </p:spPr>
+        <p:txBody>
+          <a:bodyPr wrap="square" rtlCol="0" anchor="ctr"/>
+          <a:lstStyle/>
+          <a:p>
+            <a:pPr marL="0" indent="0" algn="ctr">
+              <a:buNone/>
+            </a:pPr>
+            <a:r>
+              <a:rPr lang="en-US" sz="3400" b="1" dirty="0">
+                <a:solidFill>
+                  <a:srgbClr val="2DD4BF"/>
+                </a:solidFill>
+                <a:latin typeface="Arial" pitchFamily="34" charset="0"/>
+                <a:ea typeface="Arial" pitchFamily="34" charset="-122"/>
+                <a:cs typeface="Arial" pitchFamily="34" charset="-120"/>
+              </a:rPr>
+              <a:t>1 cmd</a:t>
+            </a:r>
+            <a:endParaRPr lang="en-US" sz="3400" dirty="0"/>
+          </a:p>
+        </p:txBody>
+      </p:sp>
+      <p:sp>
+        <p:nvSpPr>
+          <p:cNvPr id="10" name="Text 8"/>
+          <p:cNvSpPr/>
+          <p:nvPr/>
+        </p:nvSpPr>
+        <p:spPr>
+          <a:xfrm>
+            <a:off x="3436544" y="2578608"/>
+            <a:ext cx="2522144" cy="274320"/>
+          </a:xfrm>
+          <a:prstGeom prst="rect">
+            <a:avLst/>
+          </a:prstGeom>
+          <a:noFill/>
+          <a:ln/>
+        </p:spPr>
+        <p:txBody>
+          <a:bodyPr wrap="square" rtlCol="0" anchor="ctr"/>
+          <a:lstStyle/>
+          <a:p>
+            <a:pPr marL="0" indent="0" algn="ctr">
+              <a:buNone/>
+            </a:pPr>
+            <a:r>
+              <a:rPr lang="en-US" sz="1200" dirty="0">
+                <a:solidFill>
+                  <a:srgbClr val="9AA7B4"/>
+                </a:solidFill>
+                <a:latin typeface="Arial" pitchFamily="34" charset="0"/>
+                <a:ea typeface="Arial" pitchFamily="34" charset="-122"/>
+                <a:cs typeface="Arial" pitchFamily="34" charset="-120"/>
+              </a:rPr>
+              <a:t>FULL REPRODUCTION</a:t>
+            </a:r>
+            <a:endParaRPr lang="en-US" sz="1200" dirty="0"/>
+          </a:p>
+        </p:txBody>
+      </p:sp>
+      <p:sp>
+        <p:nvSpPr>
+          <p:cNvPr id="11" name="Shape 9"/>
+          <p:cNvSpPr/>
+          <p:nvPr/>
+        </p:nvSpPr>
+        <p:spPr>
+          <a:xfrm>
+            <a:off x="6233008" y="1874520"/>
+            <a:ext cx="2522144" cy="1097280"/>
+          </a:xfrm>
+          <a:prstGeom prst="roundRect">
+            <a:avLst>
+              <a:gd name="adj" fmla="val 10000"/>
+            </a:avLst>
+          </a:prstGeom>
+          <a:solidFill>
+            <a:srgbClr val="161C24"/>
+          </a:solidFill>
+          <a:ln w="12700">
+            <a:solidFill>
+              <a:srgbClr val="2A3340"/>
+            </a:solidFill>
+            <a:prstDash val="solid"/>
+          </a:ln>
+          <a:effectLst>
+            <a:outerShdw blurRad="114300" dist="38100" dir="5400000" algn="bl" rotWithShape="0">
+              <a:srgbClr val="000000">
+                <a:alpha val="28000"/>
+              </a:srgbClr>
+            </a:outerShdw>
+          </a:effectLst>
+        </p:spPr>
+        <p:txBody>
+          <a:bodyPr/>
+          <a:p/>
+        </p:txBody>
+      </p:sp>
+      <p:sp>
+        <p:nvSpPr>
+          <p:cNvPr id="12" name="Text 10"/>
+          <p:cNvSpPr/>
+          <p:nvPr/>
+        </p:nvSpPr>
+        <p:spPr>
+          <a:xfrm>
+            <a:off x="6233008" y="1993392"/>
+            <a:ext cx="2522144" cy="566928"/>
+          </a:xfrm>
+          <a:prstGeom prst="rect">
+            <a:avLst/>
+          </a:prstGeom>
+          <a:noFill/>
+          <a:ln/>
+        </p:spPr>
+        <p:txBody>
+          <a:bodyPr wrap="square" rtlCol="0" anchor="ctr"/>
+          <a:lstStyle/>
+          <a:p>
+            <a:pPr marL="0" indent="0" algn="ctr">
+              <a:buNone/>
+            </a:pPr>
+            <a:r>
+              <a:rPr lang="en-US" sz="3400" b="1" dirty="0">
+                <a:solidFill>
+                  <a:srgbClr val="2DD4BF"/>
+                </a:solidFill>
+                <a:latin typeface="Arial" pitchFamily="34" charset="0"/>
+                <a:ea typeface="Arial" pitchFamily="34" charset="-122"/>
+                <a:cs typeface="Arial" pitchFamily="34" charset="-120"/>
+              </a:rPr>
+              <a:t>0</a:t>
+            </a:r>
+            <a:endParaRPr lang="en-US" sz="3400" dirty="0"/>
+          </a:p>
+        </p:txBody>
+      </p:sp>
+      <p:sp>
+        <p:nvSpPr>
+          <p:cNvPr id="13" name="Text 11"/>
+          <p:cNvSpPr/>
+          <p:nvPr/>
+        </p:nvSpPr>
+        <p:spPr>
+          <a:xfrm>
+            <a:off x="6233008" y="2578608"/>
+            <a:ext cx="2522144" cy="274320"/>
+          </a:xfrm>
+          <a:prstGeom prst="rect">
+            <a:avLst/>
+          </a:prstGeom>
+          <a:noFill/>
+          <a:ln/>
+        </p:spPr>
+        <p:txBody>
+          <a:bodyPr wrap="square" rtlCol="0" anchor="ctr"/>
+          <a:lstStyle/>
+          <a:p>
+            <a:pPr marL="0" indent="0" algn="ctr">
+              <a:buNone/>
+            </a:pPr>
+            <a:r>
+              <a:rPr lang="en-US" sz="1200" dirty="0">
+                <a:solidFill>
+                  <a:srgbClr val="9AA7B4"/>
+                </a:solidFill>
+                <a:latin typeface="Arial" pitchFamily="34" charset="0"/>
+                <a:ea typeface="Arial" pitchFamily="34" charset="-122"/>
+                <a:cs typeface="Arial" pitchFamily="34" charset="-120"/>
+              </a:rPr>
+              <a:t>LLM CALLS PER RANKED CANDIDATE</a:t>
+            </a:r>
+            <a:endParaRPr lang="en-US" sz="1200" dirty="0"/>
+          </a:p>
+        </p:txBody>
+      </p:sp>
+      <p:sp>
+        <p:nvSpPr>
+          <p:cNvPr id="14" name="Shape 12"/>
+          <p:cNvSpPr/>
+          <p:nvPr/>
+        </p:nvSpPr>
+        <p:spPr>
+          <a:xfrm>
+            <a:off x="9029471" y="1874520"/>
+            <a:ext cx="2522144" cy="1097280"/>
+          </a:xfrm>
+          <a:prstGeom prst="roundRect">
+            <a:avLst>
+              <a:gd name="adj" fmla="val 10000"/>
+            </a:avLst>
+          </a:prstGeom>
+          <a:solidFill>
+            <a:srgbClr val="161C24"/>
+          </a:solidFill>
+          <a:ln w="12700">
+            <a:solidFill>
+              <a:srgbClr val="2A3340"/>
+            </a:solidFill>
+            <a:prstDash val="solid"/>
+          </a:ln>
+          <a:effectLst>
+            <a:outerShdw blurRad="114300" dist="38100" dir="5400000" algn="bl" rotWithShape="0">
+              <a:srgbClr val="000000">
+                <a:alpha val="28000"/>
+              </a:srgbClr>
+            </a:outerShdw>
+          </a:effectLst>
+        </p:spPr>
+        <p:txBody>
+          <a:bodyPr/>
+          <a:p/>
+        </p:txBody>
+      </p:sp>
+      <p:sp>
+        <p:nvSpPr>
+          <p:cNvPr id="15" name="Text 13"/>
+          <p:cNvSpPr/>
+          <p:nvPr/>
+        </p:nvSpPr>
+        <p:spPr>
+          <a:xfrm>
+            <a:off x="9029471" y="1993392"/>
+            <a:ext cx="2522144" cy="566928"/>
+          </a:xfrm>
+          <a:prstGeom prst="rect">
+            <a:avLst/>
+          </a:prstGeom>
+          <a:noFill/>
+          <a:ln/>
+        </p:spPr>
+        <p:txBody>
+          <a:bodyPr wrap="square" rtlCol="0" anchor="ctr"/>
+          <a:lstStyle/>
+          <a:p>
+            <a:pPr marL="0" indent="0" algn="ctr">
+              <a:buNone/>
+            </a:pPr>
+            <a:r>
+              <a:rPr lang="en-US" sz="3400" b="1" dirty="0">
+                <a:solidFill>
+                  <a:srgbClr val="34D399"/>
+                </a:solidFill>
+                <a:latin typeface="Arial" pitchFamily="34" charset="0"/>
+                <a:ea typeface="Arial" pitchFamily="34" charset="-122"/>
+                <a:cs typeface="Arial" pitchFamily="34" charset="-120"/>
+              </a:rPr>
+              <a:t>28</a:t>
+            </a:r>
+            <a:endParaRPr lang="en-US" sz="3400" dirty="0"/>
+          </a:p>
+        </p:txBody>
+      </p:sp>
+      <p:sp>
+        <p:nvSpPr>
+          <p:cNvPr id="16" name="Text 14"/>
+          <p:cNvSpPr/>
+          <p:nvPr/>
+        </p:nvSpPr>
+        <p:spPr>
+          <a:xfrm>
+            <a:off x="9029471" y="2578608"/>
+            <a:ext cx="2522144" cy="274320"/>
+          </a:xfrm>
+          <a:prstGeom prst="rect">
+            <a:avLst/>
+          </a:prstGeom>
+          <a:noFill/>
+          <a:ln/>
+        </p:spPr>
+        <p:txBody>
+          <a:bodyPr wrap="square" rtlCol="0" anchor="ctr"/>
+          <a:lstStyle/>
+          <a:p>
+            <a:pPr marL="0" indent="0" algn="ctr">
+              <a:buNone/>
+            </a:pPr>
+            <a:r>
+              <a:rPr lang="en-US" sz="1200" dirty="0">
+                <a:solidFill>
+                  <a:srgbClr val="9AA7B4"/>
+                </a:solidFill>
+                <a:latin typeface="Arial" pitchFamily="34" charset="0"/>
+                <a:ea typeface="Arial" pitchFamily="34" charset="-122"/>
+                <a:cs typeface="Arial" pitchFamily="34" charset="-120"/>
+              </a:rPr>
+              <a:t>EXPLAINABLE FEATURES</a:t>
+            </a:r>
+            <a:endParaRPr lang="en-US" sz="1200" dirty="0"/>
+          </a:p>
+        </p:txBody>
+      </p:sp>
+      <p:sp>
+        <p:nvSpPr>
+          <p:cNvPr id="17" name="Shape 15"/>
+          <p:cNvSpPr/>
+          <p:nvPr/>
+        </p:nvSpPr>
+        <p:spPr>
+          <a:xfrm>
+            <a:off x="640080" y="3200400"/>
+            <a:ext cx="5272888" cy="1874520"/>
+          </a:xfrm>
+          <a:prstGeom prst="roundRect">
+            <a:avLst>
+              <a:gd name="adj" fmla="val 5854"/>
+            </a:avLst>
+          </a:prstGeom>
+          <a:solidFill>
+            <a:srgbClr val="161C24"/>
+          </a:solidFill>
+          <a:ln w="12700">
+            <a:solidFill>
+              <a:srgbClr val="2A3340"/>
+            </a:solidFill>
+            <a:prstDash val="solid"/>
+          </a:ln>
+          <a:effectLst>
+            <a:outerShdw blurRad="114300" dist="38100" dir="5400000" algn="bl" rotWithShape="0">
+              <a:srgbClr val="000000">
+                <a:alpha val="28000"/>
+              </a:srgbClr>
+            </a:outerShdw>
+          </a:effectLst>
+        </p:spPr>
+        <p:txBody>
+          <a:bodyPr/>
+          <a:p/>
+        </p:txBody>
+      </p:sp>
+      <p:sp>
+        <p:nvSpPr>
+          <p:cNvPr id="18" name="Shape 16"/>
+          <p:cNvSpPr/>
+          <p:nvPr/>
+        </p:nvSpPr>
+        <p:spPr>
+          <a:xfrm>
+            <a:off x="914400" y="3429000"/>
+            <a:ext cx="420624" cy="420624"/>
+          </a:xfrm>
+          <a:prstGeom prst="roundRect">
+            <a:avLst>
+              <a:gd name="adj" fmla="val 15217"/>
+            </a:avLst>
+          </a:prstGeom>
+          <a:solidFill>
+            <a:srgbClr val="F2B544">
+              <a:alpha val="18000"/>
+            </a:srgbClr>
+          </a:solidFill>
+          <a:ln w="12700">
+            <a:solidFill>
+              <a:srgbClr val="F2B544">
+                <a:alpha val="45000"/>
+              </a:srgbClr>
+            </a:solidFill>
+            <a:prstDash val="solid"/>
+          </a:ln>
+        </p:spPr>
+        <p:txBody>
+          <a:bodyPr/>
+          <a:p/>
+        </p:txBody>
+      </p:sp>
+      <p:pic>
+        <p:nvPicPr>
+          <p:cNvPr id="19" name="Image 0" descr="preencoded.png"/>
+          <p:cNvPicPr>
+            <a:picLocks noChangeAspect="1"/>
+          </p:cNvPicPr>
+          <p:nvPr/>
+        </p:nvPicPr>
+        <p:blipFill>
+          <a:blip r:embed="rId2"/>
+          <a:stretch>
+            <a:fillRect/>
+          </a:stretch>
+        </p:blipFill>
+        <p:spPr>
+          <a:xfrm>
+            <a:off x="1006937" y="3521537"/>
+            <a:ext cx="235549" cy="235549"/>
+          </a:xfrm>
+          <a:prstGeom prst="rect">
+            <a:avLst/>
+          </a:prstGeom>
+        </p:spPr>
+      </p:pic>
+      <p:sp>
+        <p:nvSpPr>
+          <p:cNvPr id="20" name="Text 17"/>
+          <p:cNvSpPr/>
+          <p:nvPr/>
+        </p:nvSpPr>
+        <p:spPr>
+          <a:xfrm>
+            <a:off x="1444752" y="3429000"/>
+            <a:ext cx="4358488" cy="411480"/>
+          </a:xfrm>
+          <a:prstGeom prst="rect">
+            <a:avLst/>
+          </a:prstGeom>
+          <a:noFill/>
+          <a:ln/>
+        </p:spPr>
+        <p:txBody>
+          <a:bodyPr wrap="square" rtlCol="0" anchor="ctr"/>
+          <a:lstStyle/>
+          <a:p>
+            <a:pPr marL="0" indent="0">
+              <a:buNone/>
+            </a:pPr>
+            <a:r>
+              <a:rPr lang="en-US" sz="1500" b="1" dirty="0">
+                <a:solidFill>
+                  <a:srgbClr val="E6EDF3"/>
+                </a:solidFill>
+                <a:latin typeface="Arial" pitchFamily="34" charset="0"/>
+                <a:ea typeface="Arial" pitchFamily="34" charset="-122"/>
+                <a:cs typeface="Arial" pitchFamily="34" charset="-120"/>
+              </a:rPr>
+              <a:t>Integration path</a:t>
+            </a:r>
+            <a:endParaRPr lang="en-US" sz="1500" dirty="0"/>
+          </a:p>
+        </p:txBody>
+      </p:sp>
+      <p:sp>
+        <p:nvSpPr>
+          <p:cNvPr id="21" name="Text 18"/>
+          <p:cNvSpPr/>
+          <p:nvPr/>
+        </p:nvSpPr>
+        <p:spPr>
+          <a:xfrm>
+            <a:off x="932688" y="3931920"/>
+            <a:ext cx="4724248" cy="384048"/>
+          </a:xfrm>
+          <a:prstGeom prst="rect">
+            <a:avLst/>
+          </a:prstGeom>
+          <a:noFill/>
+          <a:ln/>
+        </p:spPr>
+        <p:txBody>
+          <a:bodyPr wrap="square" rtlCol="0" anchor="ctr"/>
+          <a:lstStyle/>
+          <a:p>
+            <a:pPr marL="0" indent="0">
+              <a:lnSpc>
+                <a:spcPct val="98000"/>
+              </a:lnSpc>
+              <a:buNone/>
+            </a:pPr>
+            <a:r>
+              <a:rPr lang="en-US" sz="1100" b="1" dirty="0">
+                <a:solidFill>
+                  <a:srgbClr val="2DD4BF"/>
+                </a:solidFill>
+                <a:latin typeface="Arial" pitchFamily="34" charset="0"/>
+                <a:ea typeface="Arial" pitchFamily="34" charset="-122"/>
+                <a:cs typeface="Arial" pitchFamily="34" charset="-120"/>
+              </a:rPr>
+              <a:t>JD compiler   any role text compiles into the same deterministic scoring program</a:t>
+            </a:r>
+            <a:endParaRPr lang="en-US" sz="1100" dirty="0"/>
+          </a:p>
+        </p:txBody>
+      </p:sp>
+      <p:sp>
+        <p:nvSpPr>
+          <p:cNvPr id="22" name="Text 19"/>
+          <p:cNvSpPr/>
+          <p:nvPr/>
+        </p:nvSpPr>
+        <p:spPr>
+          <a:xfrm>
+            <a:off x="932688" y="4315968"/>
+            <a:ext cx="4724248" cy="384048"/>
+          </a:xfrm>
+          <a:prstGeom prst="rect">
+            <a:avLst/>
+          </a:prstGeom>
+          <a:noFill/>
+          <a:ln/>
+        </p:spPr>
+        <p:txBody>
+          <a:bodyPr wrap="square" rtlCol="0" anchor="ctr"/>
+          <a:lstStyle/>
+          <a:p>
+            <a:pPr marL="0" indent="0">
+              <a:lnSpc>
+                <a:spcPct val="98000"/>
+              </a:lnSpc>
+              <a:buNone/>
+            </a:pPr>
+            <a:r>
+              <a:rPr lang="en-US" sz="1100" b="1" dirty="0">
+                <a:solidFill>
+                  <a:srgbClr val="2DD4BF"/>
+                </a:solidFill>
+                <a:latin typeface="Arial" pitchFamily="34" charset="0"/>
+                <a:ea typeface="Arial" pitchFamily="34" charset="-122"/>
+                <a:cs typeface="Arial" pitchFamily="34" charset="-120"/>
+              </a:rPr>
+              <a:t>Audit payload   per-candidate JSON: features, multipliers, flags — recruiter-readable</a:t>
+            </a:r>
+            <a:endParaRPr lang="en-US" sz="1100" dirty="0"/>
+          </a:p>
+        </p:txBody>
+      </p:sp>
+      <p:sp>
+        <p:nvSpPr>
+          <p:cNvPr id="23" name="Text 20"/>
+          <p:cNvSpPr/>
+          <p:nvPr/>
+        </p:nvSpPr>
+        <p:spPr>
+          <a:xfrm>
+            <a:off x="932688" y="4700016"/>
+            <a:ext cx="4724248" cy="384048"/>
+          </a:xfrm>
+          <a:prstGeom prst="rect">
+            <a:avLst/>
+          </a:prstGeom>
+          <a:noFill/>
+          <a:ln/>
+        </p:spPr>
+        <p:txBody>
+          <a:bodyPr wrap="square" rtlCol="0" anchor="ctr"/>
+          <a:lstStyle/>
+          <a:p>
+            <a:pPr marL="0" indent="0">
+              <a:lnSpc>
+                <a:spcPct val="98000"/>
+              </a:lnSpc>
+              <a:buNone/>
+            </a:pPr>
+            <a:r>
+              <a:rPr lang="en-US" sz="1100" b="1" dirty="0">
+                <a:solidFill>
+                  <a:srgbClr val="2DD4BF"/>
+                </a:solidFill>
+                <a:latin typeface="Arial" pitchFamily="34" charset="0"/>
+                <a:ea typeface="Arial" pitchFamily="34" charset="-122"/>
+                <a:cs typeface="Arial" pitchFamily="34" charset="-120"/>
+              </a:rPr>
+              <a:t>Signals   behavioral multipliers consume Redrob activity data natively</a:t>
+            </a:r>
+            <a:endParaRPr lang="en-US" sz="1100" dirty="0"/>
+          </a:p>
+        </p:txBody>
+      </p:sp>
+      <p:sp>
+        <p:nvSpPr>
+          <p:cNvPr id="24" name="Shape 21"/>
+          <p:cNvSpPr/>
+          <p:nvPr/>
+        </p:nvSpPr>
+        <p:spPr>
+          <a:xfrm>
+            <a:off x="6278728" y="3200400"/>
+            <a:ext cx="5272888" cy="1874520"/>
+          </a:xfrm>
+          <a:prstGeom prst="roundRect">
+            <a:avLst>
+              <a:gd name="adj" fmla="val 5854"/>
+            </a:avLst>
+          </a:prstGeom>
+          <a:solidFill>
+            <a:srgbClr val="1B2330"/>
+          </a:solidFill>
+          <a:ln w="12700">
+            <a:solidFill>
+              <a:srgbClr val="2A3340"/>
+            </a:solidFill>
+            <a:prstDash val="solid"/>
+          </a:ln>
+          <a:effectLst>
+            <a:outerShdw blurRad="114300" dist="38100" dir="5400000" algn="bl" rotWithShape="0">
+              <a:srgbClr val="000000">
+                <a:alpha val="28000"/>
+              </a:srgbClr>
+            </a:outerShdw>
+          </a:effectLst>
+        </p:spPr>
+        <p:txBody>
+          <a:bodyPr/>
+          <a:p/>
+        </p:txBody>
+      </p:sp>
+      <p:sp>
+        <p:nvSpPr>
+          <p:cNvPr id="25" name="Shape 22"/>
+          <p:cNvSpPr/>
+          <p:nvPr/>
+        </p:nvSpPr>
+        <p:spPr>
+          <a:xfrm>
+            <a:off x="6553048" y="3429000"/>
+            <a:ext cx="420624" cy="420624"/>
+          </a:xfrm>
+          <a:prstGeom prst="roundRect">
+            <a:avLst>
+              <a:gd name="adj" fmla="val 15217"/>
+            </a:avLst>
+          </a:prstGeom>
+          <a:solidFill>
+            <a:srgbClr val="2DD4BF">
+              <a:alpha val="18000"/>
+            </a:srgbClr>
+          </a:solidFill>
+          <a:ln w="12700">
+            <a:solidFill>
+              <a:srgbClr val="2DD4BF">
+                <a:alpha val="45000"/>
+              </a:srgbClr>
+            </a:solidFill>
+            <a:prstDash val="solid"/>
+          </a:ln>
+        </p:spPr>
+        <p:txBody>
+          <a:bodyPr/>
+          <a:p/>
+        </p:txBody>
+      </p:sp>
+      <p:pic>
+        <p:nvPicPr>
+          <p:cNvPr id="26" name="Image 1" descr="preencoded.png"/>
+          <p:cNvPicPr>
+            <a:picLocks noChangeAspect="1"/>
+          </p:cNvPicPr>
+          <p:nvPr/>
+        </p:nvPicPr>
+        <p:blipFill>
+          <a:blip r:embed="rId3"/>
+          <a:stretch>
+            <a:fillRect/>
+          </a:stretch>
+        </p:blipFill>
+        <p:spPr>
+          <a:xfrm>
+            <a:off x="6645585" y="3521537"/>
+            <a:ext cx="235549" cy="235549"/>
+          </a:xfrm>
+          <a:prstGeom prst="rect">
+            <a:avLst/>
+          </a:prstGeom>
+        </p:spPr>
+      </p:pic>
+      <p:sp>
+        <p:nvSpPr>
+          <p:cNvPr id="27" name="Text 23"/>
+          <p:cNvSpPr/>
+          <p:nvPr/>
+        </p:nvSpPr>
+        <p:spPr>
+          <a:xfrm>
+            <a:off x="7083400" y="3429000"/>
+            <a:ext cx="4358488" cy="411480"/>
+          </a:xfrm>
+          <a:prstGeom prst="rect">
+            <a:avLst/>
+          </a:prstGeom>
+          <a:noFill/>
+          <a:ln/>
+        </p:spPr>
+        <p:txBody>
+          <a:bodyPr wrap="square" rtlCol="0" anchor="ctr"/>
+          <a:lstStyle/>
+          <a:p>
+            <a:pPr marL="0" indent="0">
+              <a:buNone/>
+            </a:pPr>
+            <a:r>
+              <a:rPr lang="en-US" sz="1500" b="1" dirty="0">
+                <a:solidFill>
+                  <a:srgbClr val="2DD4BF"/>
+                </a:solidFill>
+                <a:latin typeface="Arial" pitchFamily="34" charset="0"/>
+                <a:ea typeface="Arial" pitchFamily="34" charset="-122"/>
+                <a:cs typeface="Arial" pitchFamily="34" charset="-120"/>
+              </a:rPr>
+              <a:t>Roadmap, honestly</a:t>
+            </a:r>
+            <a:endParaRPr lang="en-US" sz="1500" dirty="0"/>
+          </a:p>
+        </p:txBody>
+      </p:sp>
+      <p:sp>
+        <p:nvSpPr>
+          <p:cNvPr id="28" name="Text 24"/>
+          <p:cNvSpPr/>
+          <p:nvPr/>
+        </p:nvSpPr>
+        <p:spPr>
+          <a:xfrm>
+            <a:off x="6571336" y="3931920"/>
+            <a:ext cx="4724248" cy="1005840"/>
+          </a:xfrm>
+          <a:prstGeom prst="rect">
+            <a:avLst/>
+          </a:prstGeom>
+          <a:noFill/>
+          <a:ln/>
+        </p:spPr>
+        <p:txBody>
+          <a:bodyPr wrap="square" rtlCol="0" anchor="t"/>
+          <a:lstStyle/>
+          <a:p>
+            <a:pPr marL="0" indent="0">
+              <a:lnSpc>
+                <a:spcPct val="110000"/>
+              </a:lnSpc>
+              <a:buNone/>
+            </a:pPr>
+            <a:r>
+              <a:rPr lang="en-US" sz="1250">
+                <a:solidFill>
+                  <a:srgbClr val="E6EDF3"/>
+                </a:solidFill>
+                <a:latin typeface="Arial" pitchFamily="34" charset="0"/>
+                <a:ea typeface="Arial" pitchFamily="34" charset="-122"/>
+                <a:cs typeface="Arial" pitchFamily="34" charset="-120"/>
+              </a:rPr>
+              <a:t>Indic-script normalization is a localized swap (one module) — the architecture is script-agnostic. When real outcome labels exist, LambdaMART can replace the hand weights over the same 28 features without touching the audit trail: the features are the durable asset.</a:t>
+            </a:r>
+            <a:endParaRPr lang="en-US" sz="1250" dirty="0"/>
+          </a:p>
+        </p:txBody>
+      </p:sp>
+      <p:sp>
+        <p:nvSpPr>
+          <p:cNvPr id="29" name="Shape 25"/>
+          <p:cNvSpPr/>
+          <p:nvPr/>
+        </p:nvSpPr>
+        <p:spPr>
+          <a:xfrm>
+            <a:off x="640080" y="5257800"/>
+            <a:ext cx="10911535" cy="658368"/>
+          </a:xfrm>
+          <a:prstGeom prst="roundRect">
+            <a:avLst>
+              <a:gd name="adj" fmla="val 16667"/>
+            </a:avLst>
+          </a:prstGeom>
+          <a:solidFill>
+            <a:srgbClr val="161C24"/>
+          </a:solidFill>
+          <a:ln w="12700">
+            <a:solidFill>
+              <a:srgbClr val="2A3340"/>
+            </a:solidFill>
+            <a:prstDash val="solid"/>
+          </a:ln>
+          <a:effectLst>
+            <a:outerShdw blurRad="114300" dist="38100" dir="5400000" algn="bl" rotWithShape="0">
+              <a:srgbClr val="000000">
+                <a:alpha val="28000"/>
+              </a:srgbClr>
+            </a:outerShdw>
+          </a:effectLst>
+        </p:spPr>
+        <p:txBody>
+          <a:bodyPr/>
+          <a:p/>
+        </p:txBody>
+      </p:sp>
+      <p:pic>
+        <p:nvPicPr>
+          <p:cNvPr id="30" name="Image 2" descr="preencoded.png"/>
+          <p:cNvPicPr>
+            <a:picLocks noChangeAspect="1"/>
+          </p:cNvPicPr>
+          <p:nvPr/>
+        </p:nvPicPr>
+        <p:blipFill>
+          <a:blip r:embed="rId4"/>
+          <a:stretch>
+            <a:fillRect/>
+          </a:stretch>
+        </p:blipFill>
+        <p:spPr>
+          <a:xfrm>
+            <a:off x="914400" y="5413248"/>
+            <a:ext cx="292608" cy="292608"/>
+          </a:xfrm>
+          <a:prstGeom prst="rect">
+            <a:avLst/>
+          </a:prstGeom>
+        </p:spPr>
+      </p:pic>
+      <p:sp>
+        <p:nvSpPr>
+          <p:cNvPr id="31" name="Text 26"/>
+          <p:cNvSpPr/>
+          <p:nvPr/>
+        </p:nvSpPr>
+        <p:spPr>
+          <a:xfrm>
+            <a:off x="1325880" y="5257800"/>
+            <a:ext cx="9905695" cy="658368"/>
+          </a:xfrm>
+          <a:prstGeom prst="rect">
+            <a:avLst/>
+          </a:prstGeom>
+          <a:noFill/>
+          <a:ln/>
+        </p:spPr>
+        <p:txBody>
+          <a:bodyPr wrap="square" rtlCol="0" anchor="ctr"/>
+          <a:lstStyle/>
+          <a:p>
+            <a:pPr marL="0" indent="0">
+              <a:lnSpc>
+                <a:spcPct val="100000"/>
+              </a:lnSpc>
+              <a:buNone/>
+            </a:pPr>
+            <a:r>
+              <a:rPr lang="en-US" sz="1200" b="1" dirty="0">
+                <a:solidFill>
+                  <a:srgbClr val="F2B544"/>
+                </a:solidFill>
+                <a:latin typeface="Arial" pitchFamily="34" charset="0"/>
+                <a:ea typeface="Arial" pitchFamily="34" charset="-122"/>
+                <a:cs typeface="Arial" pitchFamily="34" charset="-120"/>
+              </a:rPr>
+              <a:t>LLMs where they are strong — offline judging and evaluation — and deterministic evidence where hiring decisions need to be defended.</a:t>
+            </a:r>
+            <a:endParaRPr lang="en-US" sz="1200" dirty="0"/>
+          </a:p>
+        </p:txBody>
+      </p:sp>
+      <p:sp>
+        <p:nvSpPr>
+          <p:cNvPr id="32" name="Text 27"/>
+          <p:cNvSpPr/>
+          <p:nvPr/>
+        </p:nvSpPr>
+        <p:spPr>
+          <a:xfrm>
+            <a:off x="10911535" y="6473952"/>
+            <a:ext cx="914400" cy="228600"/>
+          </a:xfrm>
+          <a:prstGeom prst="rect">
+            <a:avLst/>
+          </a:prstGeom>
+          <a:noFill/>
+          <a:ln/>
+        </p:spPr>
+        <p:txBody>
+          <a:bodyPr wrap="square" rtlCol="0" anchor="ctr"/>
+          <a:lstStyle/>
+          <a:p>
+            <a:pPr marL="0" indent="0" algn="r">
+              <a:buNone/>
+            </a:pPr>
+            <a:r>
+              <a:rPr lang="en-US" sz="900">
+                <a:solidFill>
+                  <a:srgbClr val="6E7C8C"/>
+                </a:solidFill>
+                <a:latin typeface="Arial" pitchFamily="34" charset="0"/>
+                <a:ea typeface="Arial" pitchFamily="34" charset="-122"/>
+                <a:cs typeface="Arial" pitchFamily="34" charset="-120"/>
+              </a:rPr>
+              <a:t>12 / 13</a:t>
+            </a:r>
+            <a:endParaRPr lang="en-US" sz="900" dirty="0"/>
+          </a:p>
+        </p:txBody>
+      </p:sp>
+      <p:sp>
+        <p:nvSpPr>
+          <p:cNvPr id="33" name="Text 28"/>
+          <p:cNvSpPr/>
+          <p:nvPr/>
+        </p:nvSpPr>
+        <p:spPr>
+          <a:xfrm>
+            <a:off x="640080" y="6473952"/>
+            <a:ext cx="2743200" cy="228600"/>
+          </a:xfrm>
+          <a:prstGeom prst="rect">
+            <a:avLst/>
+          </a:prstGeom>
+          <a:noFill/>
+          <a:ln/>
+        </p:spPr>
+        <p:txBody>
+          <a:bodyPr wrap="square" rtlCol="0" anchor="ctr"/>
+          <a:lstStyle/>
+          <a:p>
+            <a:pPr marL="0" indent="0">
+              <a:buNone/>
+            </a:pPr>
+            <a:r>
+              <a:rPr lang="en-US" sz="900" b="1" kern="0" spc="200" dirty="0">
+                <a:solidFill>
+                  <a:srgbClr val="6E7C8C"/>
+                </a:solidFill>
+                <a:latin typeface="Arial" pitchFamily="34" charset="0"/>
+                <a:ea typeface="Arial" pitchFamily="34" charset="-122"/>
+                <a:cs typeface="Arial" pitchFamily="34" charset="-120"/>
+              </a:rPr>
+              <a:t>HIREFIT RANKER</a:t>
+            </a:r>
+            <a:endParaRPr lang="en-US" sz="900" dirty="0"/>
+          </a:p>
+        </p:txBody>
+      </p:sp>
+    </p:spTree>
+  </p:cSld>
+  <p:clrMapOvr>
+    <a:masterClrMapping/>
+  </p:clrMapOvr>
+</p:sld>
+</file>
+
+<file path=ppt/slides/slide13.xml><?xml version="1.0" encoding="utf-8"?>
 <p:sld xmlns:a="http://schemas.openxmlformats.org/drawingml/2006/main" xmlns:r="http://schemas.openxmlformats.org/officeDocument/2006/relationships" xmlns:p="http://schemas.openxmlformats.org/presentationml/2006/main">
   <p:cSld name="Slide 10">
     <p:bg>
@@ -4534,7 +7710,7 @@
                 <a:ea typeface="Arial" pitchFamily="34" charset="-122"/>
                 <a:cs typeface="Arial" pitchFamily="34" charset="-120"/>
               </a:rPr>
-              <a:t>100K scored offline, on CPU, in 193s</a:t>
+              <a:t>100K scored offline, on CPU, in 187s</a:t>
             </a:r>
             <a:endParaRPr lang="en-US" sz="1250" dirty="0"/>
           </a:p>
@@ -4716,7 +7892,7 @@
                 </a:solidFill>
                 <a:latin typeface="Arial" panose="020B0604020202020204" pitchFamily="34" charset="0"/>
               </a:rPr>
-              <a:t>11 / 11</a:t>
+              <a:t>13 / 13</a:t>
             </a:r>
           </a:p>
         </p:txBody>
@@ -5813,7 +8989,7 @@
                 <a:ea typeface="Arial" pitchFamily="34" charset="-122"/>
                 <a:cs typeface="Arial" pitchFamily="34" charset="-120"/>
               </a:rPr>
-              <a:t>2 / 11</a:t>
+              <a:t>2 / 13</a:t>
             </a:r>
             <a:endParaRPr lang="en-US" sz="900" dirty="0"/>
           </a:p>
@@ -7116,7 +10292,7 @@
                 <a:ea typeface="Arial" pitchFamily="34" charset="-122"/>
                 <a:cs typeface="Arial" pitchFamily="34" charset="-120"/>
               </a:rPr>
-              <a:t>3 / 11</a:t>
+              <a:t>3 / 13</a:t>
             </a:r>
             <a:endParaRPr lang="en-US" sz="900" dirty="0"/>
           </a:p>
@@ -9380,7 +12556,7 @@
                 <a:ea typeface="Arial" pitchFamily="34" charset="-122"/>
                 <a:cs typeface="Arial" pitchFamily="34" charset="-120"/>
               </a:rPr>
-              <a:t>4 / 11</a:t>
+              <a:t>4 / 13</a:t>
             </a:r>
             <a:endParaRPr lang="en-US" sz="900" dirty="0"/>
           </a:p>
@@ -11039,7 +14215,7 @@
                 <a:ea typeface="Arial" pitchFamily="34" charset="-122"/>
                 <a:cs typeface="Arial" pitchFamily="34" charset="-120"/>
               </a:rPr>
-              <a:t>5 / 11</a:t>
+              <a:t>5 / 13</a:t>
             </a:r>
             <a:endParaRPr lang="en-US" sz="900" dirty="0"/>
           </a:p>
@@ -15695,7 +18871,7 @@
                 </a:solidFill>
                 <a:latin typeface="Arial" panose="020B0604020202020204" pitchFamily="34" charset="0"/>
               </a:rPr>
-              <a:t>6 / 11</a:t>
+              <a:t>6 / 13</a:t>
             </a:r>
           </a:p>
         </p:txBody>
@@ -16754,7 +19930,7 @@
                 <a:ea typeface="Arial" pitchFamily="34" charset="-122"/>
                 <a:cs typeface="Arial" pitchFamily="34" charset="-120"/>
               </a:rPr>
-              <a:t>7 / 11</a:t>
+              <a:t>7 / 13</a:t>
             </a:r>
             <a:endParaRPr lang="en-US" sz="900" dirty="0"/>
           </a:p>
@@ -16907,7 +20083,7 @@
                 <a:ea typeface="Arial" pitchFamily="34" charset="-122"/>
                 <a:cs typeface="Arial" pitchFamily="34" charset="-120"/>
               </a:rPr>
-              <a:t>An independent LLM judge confirms the top-10 — it isn’t self-graded.</a:t>
+              <a:t>Two independent LLM judges confirm the top-10 — it isn’t self-graded.</a:t>
             </a:r>
             <a:endParaRPr lang="en-US" sz="2600" dirty="0"/>
           </a:p>
@@ -17641,7 +20817,7 @@
                 <a:ea typeface="Arial" pitchFamily="34" charset="-122"/>
                 <a:cs typeface="Arial" pitchFamily="34" charset="-120"/>
               </a:rPr>
-              <a:t>Judge   </a:t>
+              <a:t>Judges</a:t>
             </a:r>
             <a:r>
               <a:rPr lang="en-US" sz="1100" dirty="0">
@@ -17652,7 +20828,7 @@
                 <a:ea typeface="Arial" pitchFamily="34" charset="-122"/>
                 <a:cs typeface="Arial" pitchFamily="34" charset="-120"/>
               </a:rPr>
-              <a:t>gemini-2.5-flash scores each 0–5 vs the JD rubric: read careers, down-weight unavailable</a:t>
+              <a:t>   gemini-2.5-flash + gpt-4.1-mini, same rubric, same 249 ids: kappa 0.935, within-1 agreement 100%.</a:t>
             </a:r>
             <a:endParaRPr lang="en-US" sz="1100" dirty="0"/>
           </a:p>
@@ -17694,18 +20870,7 @@
                 <a:ea typeface="Arial" pitchFamily="34" charset="-122"/>
                 <a:cs typeface="Arial" pitchFamily="34" charset="-120"/>
               </a:rPr>
-              <a:t>Top-10   </a:t>
-            </a:r>
-            <a:r>
-              <a:rPr lang="en-US" sz="1100" dirty="0">
-                <a:solidFill>
-                  <a:srgbClr val="9AA7B4"/>
-                </a:solidFill>
-                <a:latin typeface="Arial" pitchFamily="34" charset="0"/>
-                <a:ea typeface="Arial" pitchFamily="34" charset="-122"/>
-                <a:cs typeface="Arial" pitchFamily="34" charset="-120"/>
-              </a:rPr>
-              <a:t>tiers all 4–5 by the independent judge</a:t>
+              <a:t>Top-10   all 4–5 (judge 1); all tier-5, NDCG@10 = 1.0 (judge 2)</a:t>
             </a:r>
             <a:endParaRPr lang="en-US" sz="1100" dirty="0"/>
           </a:p>
@@ -18037,7 +21202,7 @@
                 <a:ea typeface="Arial" pitchFamily="34" charset="-122"/>
                 <a:cs typeface="Arial" pitchFamily="34" charset="-120"/>
               </a:rPr>
-              <a:t>8 / 11</a:t>
+              <a:t>8 / 13</a:t>
             </a:r>
             <a:endParaRPr lang="en-US" sz="900" dirty="0"/>
           </a:p>
@@ -18091,250 +21256,149 @@
 </file>
 
 <file path=ppt/slides/slide9.xml><?xml version="1.0" encoding="utf-8"?>
-<p:sld xmlns:a="http://schemas.openxmlformats.org/drawingml/2006/main" xmlns:r="http://schemas.openxmlformats.org/officeDocument/2006/relationships" xmlns:p="http://schemas.openxmlformats.org/presentationml/2006/main">
-  <p:cSld name="Slide 8">
-    <p:bg>
-      <p:bgPr>
-        <a:solidFill>
-          <a:srgbClr val="0E1116"/>
-        </a:solidFill>
-        <a:effectLst/>
-      </p:bgPr>
-    </p:bg>
+<p:sld xmlns:a="http://schemas.openxmlformats.org/drawingml/2006/main" xmlns:p="http://schemas.openxmlformats.org/presentationml/2006/main" xmlns:r="http://schemas.openxmlformats.org/officeDocument/2006/relationships">
+  <p:cSld>
     <p:spTree>
       <p:nvGrpSpPr>
         <p:cNvPr id="1" name=""/>
         <p:cNvGrpSpPr/>
         <p:nvPr/>
       </p:nvGrpSpPr>
-      <p:grpSpPr>
-        <a:xfrm>
-          <a:off x="0" y="0"/>
-          <a:ext cx="0" cy="0"/>
-          <a:chOff x="0" y="0"/>
-          <a:chExt cx="0" cy="0"/>
-        </a:xfrm>
-      </p:grpSpPr>
-      <p:sp>
-        <p:nvSpPr>
-          <p:cNvPr id="39" name="Rectangle 38">
-            <a:extLst>
-              <a:ext uri="{FF2B5EF4-FFF2-40B4-BE49-F238E27FC236}">
-                <a16:creationId xmlns:a16="http://schemas.microsoft.com/office/drawing/2014/main" id="{ED9998D3-4237-66E4-3FFA-742BA440BF2F}"/>
-              </a:ext>
-            </a:extLst>
-          </p:cNvPr>
-          <p:cNvSpPr/>
-          <p:nvPr/>
-        </p:nvSpPr>
-        <p:spPr>
-          <a:xfrm>
-            <a:off x="0" y="0"/>
-            <a:ext cx="12191695" cy="6858000"/>
-          </a:xfrm>
-          <a:prstGeom prst="rect">
-            <a:avLst/>
-          </a:prstGeom>
-          <a:solidFill>
-            <a:srgbClr val="0E1116"/>
-          </a:solidFill>
-          <a:ln w="12700" cap="flat" cmpd="sng" algn="ctr">
-            <a:noFill/>
-            <a:prstDash val="solid"/>
-            <a:miter lim="800000"/>
-          </a:ln>
-          <a:effectLst/>
-          <a:extLst>
-            <a:ext uri="{91240B29-F687-4F45-9708-019B960494DF}">
-              <a14:hiddenLine xmlns:a14="http://schemas.microsoft.com/office/drawing/2010/main" w="12700" cap="flat" cmpd="sng" algn="ctr">
-                <a:solidFill>
-                  <a:schemeClr val="accent1">
-                    <a:shade val="15000"/>
-                  </a:schemeClr>
-                </a:solidFill>
-                <a:prstDash val="solid"/>
-                <a:miter lim="800000"/>
-              </a14:hiddenLine>
-            </a:ext>
-          </a:extLst>
-        </p:spPr>
-        <p:style>
-          <a:lnRef idx="2">
-            <a:schemeClr val="accent1">
-              <a:shade val="15000"/>
-            </a:schemeClr>
-          </a:lnRef>
-          <a:fillRef idx="1">
-            <a:schemeClr val="accent1"/>
-          </a:fillRef>
-          <a:effectRef idx="0">
-            <a:schemeClr val="accent1"/>
-          </a:effectRef>
-          <a:fontRef idx="minor">
-            <a:schemeClr val="lt1"/>
-          </a:fontRef>
-        </p:style>
-        <p:txBody>
-          <a:bodyPr rtlCol="0" anchor="ctr"/>
-          <a:lstStyle/>
-          <a:p>
-            <a:pPr algn="ctr"/>
-            <a:endParaRPr lang="en-IN"/>
-          </a:p>
-        </p:txBody>
-      </p:sp>
-      <p:sp>
-        <p:nvSpPr>
-          <p:cNvPr id="40" name="TextBox 39">
-            <a:extLst>
-              <a:ext uri="{FF2B5EF4-FFF2-40B4-BE49-F238E27FC236}">
-                <a16:creationId xmlns:a16="http://schemas.microsoft.com/office/drawing/2014/main" id="{D54EB237-F78D-0269-84C8-933F09F66FAA}"/>
-              </a:ext>
-            </a:extLst>
-          </p:cNvPr>
-          <p:cNvSpPr txBox="1"/>
+      <p:grpSpPr/>
+      <p:sp>
+        <p:nvSpPr>
+          <p:cNvPr id="2" name="Text 0"/>
+          <p:cNvSpPr/>
           <p:nvPr/>
         </p:nvSpPr>
         <p:spPr>
           <a:xfrm>
             <a:off x="640080" y="384048"/>
-            <a:ext cx="10881360" cy="176972"/>
-          </a:xfrm>
-          <a:prstGeom prst="rect">
-            <a:avLst/>
-          </a:prstGeom>
-          <a:noFill/>
-        </p:spPr>
-        <p:txBody>
-          <a:bodyPr vert="horz" wrap="square" lIns="0" tIns="0" rIns="0" bIns="0" rtlCol="0">
-            <a:spAutoFit/>
-          </a:bodyPr>
-          <a:lstStyle/>
-          <a:p>
-            <a:r>
-              <a:rPr lang="en-IN" sz="1150" b="1">
+            <a:ext cx="10911535" cy="274320"/>
+          </a:xfrm>
+          <a:prstGeom prst="rect">
+            <a:avLst/>
+          </a:prstGeom>
+          <a:noFill/>
+          <a:ln/>
+        </p:spPr>
+        <p:txBody>
+          <a:bodyPr wrap="square" rtlCol="0" anchor="ctr"/>
+          <a:lstStyle/>
+          <a:p>
+            <a:pPr marL="0" indent="0">
+              <a:buNone/>
+            </a:pPr>
+            <a:r>
+              <a:rPr lang="en-US" sz="1150" b="1" kern="0" spc="300" dirty="0">
                 <a:solidFill>
                   <a:srgbClr val="8B7CF6"/>
                 </a:solidFill>
-                <a:latin typeface="Arial" panose="020B0604020202020204" pitchFamily="34" charset="0"/>
-              </a:rPr>
-              <a:t>TRADEOFFS &amp; LIMITS</a:t>
-            </a:r>
-          </a:p>
-        </p:txBody>
-      </p:sp>
-      <p:sp>
-        <p:nvSpPr>
-          <p:cNvPr id="41" name="TextBox 40">
-            <a:extLst>
-              <a:ext uri="{FF2B5EF4-FFF2-40B4-BE49-F238E27FC236}">
-                <a16:creationId xmlns:a16="http://schemas.microsoft.com/office/drawing/2014/main" id="{F2161346-604D-E5F8-1933-90B9D4C6FEAC}"/>
-              </a:ext>
-            </a:extLst>
-          </p:cNvPr>
-          <p:cNvSpPr txBox="1"/>
+                <a:latin typeface="Arial" pitchFamily="34" charset="0"/>
+                <a:ea typeface="Arial" pitchFamily="34" charset="-122"/>
+                <a:cs typeface="Arial" pitchFamily="34" charset="-120"/>
+              </a:rPr>
+              <a:t>PRE-REGISTERED DISCIPLINE</a:t>
+            </a:r>
+            <a:endParaRPr lang="en-US" sz="1150" dirty="0"/>
+          </a:p>
+        </p:txBody>
+      </p:sp>
+      <p:sp>
+        <p:nvSpPr>
+          <p:cNvPr id="3" name="Text 1"/>
+          <p:cNvSpPr/>
           <p:nvPr/>
         </p:nvSpPr>
         <p:spPr>
           <a:xfrm>
             <a:off x="640080" y="658368"/>
-            <a:ext cx="10881360" cy="461665"/>
-          </a:xfrm>
-          <a:prstGeom prst="rect">
-            <a:avLst/>
-          </a:prstGeom>
-          <a:noFill/>
-        </p:spPr>
-        <p:txBody>
-          <a:bodyPr vert="horz" wrap="square" lIns="0" tIns="0" rIns="0" bIns="0" rtlCol="0">
-            <a:spAutoFit/>
-          </a:bodyPr>
-          <a:lstStyle/>
-          <a:p>
-            <a:r>
-              <a:rPr lang="en-US" sz="3000" b="1">
+            <a:ext cx="10911535" cy="658368"/>
+          </a:xfrm>
+          <a:prstGeom prst="rect">
+            <a:avLst/>
+          </a:prstGeom>
+          <a:noFill/>
+          <a:ln/>
+        </p:spPr>
+        <p:txBody>
+          <a:bodyPr wrap="square" rtlCol="0" anchor="ctr"/>
+          <a:lstStyle/>
+          <a:p>
+            <a:pPr marL="0" indent="0">
+              <a:lnSpc>
+                <a:spcPct val="98000"/>
+              </a:lnSpc>
+              <a:buNone/>
+            </a:pPr>
+            <a:r>
+              <a:rPr lang="en-US" sz="2600" b="1" dirty="0">
                 <a:solidFill>
                   <a:srgbClr val="E6EDF3"/>
                 </a:solidFill>
-                <a:latin typeface="Arial" panose="020B0604020202020204" pitchFamily="34" charset="0"/>
-              </a:rPr>
-              <a:t>Reproducibility beats raw model power.</a:t>
-            </a:r>
-            <a:endParaRPr lang="en-IN" sz="3000" b="1">
-              <a:solidFill>
-                <a:srgbClr val="E6EDF3"/>
-              </a:solidFill>
-              <a:latin typeface="Arial" panose="020B0604020202020204" pitchFamily="34" charset="0"/>
-            </a:endParaRPr>
-          </a:p>
-        </p:txBody>
-      </p:sp>
-      <p:sp>
-        <p:nvSpPr>
-          <p:cNvPr id="42" name="TextBox 41">
-            <a:extLst>
-              <a:ext uri="{FF2B5EF4-FFF2-40B4-BE49-F238E27FC236}">
-                <a16:creationId xmlns:a16="http://schemas.microsoft.com/office/drawing/2014/main" id="{E6D84A61-C4E7-EB28-E06B-A18D38B3E52E}"/>
-              </a:ext>
-            </a:extLst>
-          </p:cNvPr>
-          <p:cNvSpPr txBox="1"/>
+                <a:latin typeface="Arial" pitchFamily="34" charset="0"/>
+                <a:ea typeface="Arial" pitchFamily="34" charset="-122"/>
+                <a:cs typeface="Arial" pitchFamily="34" charset="-120"/>
+              </a:rPr>
+              <a:t>We measured the config that scores higher — and declined it on principle.</a:t>
+            </a:r>
+            <a:endParaRPr lang="en-US" sz="2600" dirty="0"/>
+          </a:p>
+        </p:txBody>
+      </p:sp>
+      <p:sp>
+        <p:nvSpPr>
+          <p:cNvPr id="4" name="Text 2"/>
+          <p:cNvSpPr/>
           <p:nvPr/>
         </p:nvSpPr>
         <p:spPr>
           <a:xfrm>
             <a:off x="640080" y="1335024"/>
-            <a:ext cx="10881360" cy="200055"/>
-          </a:xfrm>
-          <a:prstGeom prst="rect">
-            <a:avLst/>
-          </a:prstGeom>
-          <a:noFill/>
-        </p:spPr>
-        <p:txBody>
-          <a:bodyPr vert="horz" wrap="square" lIns="0" tIns="0" rIns="0" bIns="0" rtlCol="0">
-            <a:spAutoFit/>
-          </a:bodyPr>
-          <a:lstStyle/>
-          <a:p>
-            <a:r>
-              <a:rPr lang="en-US" sz="1300">
+            <a:ext cx="10911535" cy="292608"/>
+          </a:xfrm>
+          <a:prstGeom prst="rect">
+            <a:avLst/>
+          </a:prstGeom>
+          <a:noFill/>
+          <a:ln/>
+        </p:spPr>
+        <p:txBody>
+          <a:bodyPr wrap="square" rtlCol="0" anchor="ctr"/>
+          <a:lstStyle/>
+          <a:p>
+            <a:pPr marL="0" indent="0">
+              <a:buNone/>
+            </a:pPr>
+            <a:r>
+              <a:rPr lang="en-US" sz="1300" dirty="0">
                 <a:solidFill>
                   <a:srgbClr val="9AA7B4"/>
                 </a:solidFill>
-                <a:latin typeface="Arial" panose="020B0604020202020204" pitchFamily="34" charset="0"/>
-              </a:rPr>
-              <a:t>The deck does not hide limitations; it turns them into Stage-5 defense points judges can verify.</a:t>
-            </a:r>
-            <a:endParaRPr lang="en-IN" sz="1300">
-              <a:solidFill>
-                <a:srgbClr val="9AA7B4"/>
-              </a:solidFill>
-              <a:latin typeface="Arial" panose="020B0604020202020204" pitchFamily="34" charset="0"/>
-            </a:endParaRPr>
-          </a:p>
-        </p:txBody>
-      </p:sp>
-      <p:sp>
-        <p:nvSpPr>
-          <p:cNvPr id="43" name="Rectangle: Rounded Corners 42">
-            <a:extLst>
-              <a:ext uri="{FF2B5EF4-FFF2-40B4-BE49-F238E27FC236}">
-                <a16:creationId xmlns:a16="http://schemas.microsoft.com/office/drawing/2014/main" id="{6B5A105F-DC77-6142-08D2-4212DB0225D8}"/>
-              </a:ext>
-            </a:extLst>
-          </p:cNvPr>
+                <a:latin typeface="Arial" pitchFamily="34" charset="0"/>
+                <a:ea typeface="Arial" pitchFamily="34" charset="-122"/>
+                <a:cs typeface="Arial" pitchFamily="34" charset="-120"/>
+              </a:rPr>
+              <a:t>Every knob swept under a decision rule committed before the first run; the JD is the spec, not the judge.</a:t>
+            </a:r>
+            <a:endParaRPr lang="en-US" sz="1300" dirty="0"/>
+          </a:p>
+        </p:txBody>
+      </p:sp>
+      <p:sp>
+        <p:nvSpPr>
+          <p:cNvPr id="5" name="Shape 3"/>
           <p:cNvSpPr/>
           <p:nvPr/>
         </p:nvSpPr>
         <p:spPr>
           <a:xfrm>
             <a:off x="640080" y="1874520"/>
-            <a:ext cx="5349240" cy="4069080"/>
+            <a:ext cx="2522144" cy="1097280"/>
           </a:xfrm>
           <a:prstGeom prst="roundRect">
             <a:avLst>
-              <a:gd name="adj" fmla="val 3500"/>
+              <a:gd name="adj" fmla="val 10000"/>
             </a:avLst>
           </a:prstGeom>
           <a:solidFill>
@@ -18344,818 +21408,723 @@
             <a:solidFill>
               <a:srgbClr val="2A3340"/>
             </a:solidFill>
+            <a:prstDash val="solid"/>
           </a:ln>
-        </p:spPr>
-        <p:style>
-          <a:lnRef idx="2">
-            <a:schemeClr val="accent1">
-              <a:shade val="15000"/>
-            </a:schemeClr>
-          </a:lnRef>
-          <a:fillRef idx="1">
-            <a:schemeClr val="accent1"/>
-          </a:fillRef>
-          <a:effectRef idx="0">
-            <a:schemeClr val="accent1"/>
-          </a:effectRef>
-          <a:fontRef idx="minor">
-            <a:schemeClr val="lt1"/>
-          </a:fontRef>
-        </p:style>
-        <p:txBody>
-          <a:bodyPr rtlCol="0" anchor="ctr"/>
-          <a:lstStyle/>
-          <a:p>
-            <a:pPr algn="ctr"/>
-            <a:endParaRPr lang="en-IN"/>
-          </a:p>
-        </p:txBody>
-      </p:sp>
-      <p:sp>
-        <p:nvSpPr>
-          <p:cNvPr id="44" name="TextBox 43">
-            <a:extLst>
-              <a:ext uri="{FF2B5EF4-FFF2-40B4-BE49-F238E27FC236}">
-                <a16:creationId xmlns:a16="http://schemas.microsoft.com/office/drawing/2014/main" id="{AA395892-7750-E775-B810-FD5AA94829AF}"/>
-              </a:ext>
-            </a:extLst>
-          </p:cNvPr>
-          <p:cNvSpPr txBox="1"/>
-          <p:nvPr/>
-        </p:nvSpPr>
-        <p:spPr>
-          <a:xfrm>
-            <a:off x="932688" y="2103120"/>
-            <a:ext cx="2743200" cy="230832"/>
-          </a:xfrm>
-          <a:prstGeom prst="rect">
-            <a:avLst/>
-          </a:prstGeom>
-          <a:noFill/>
-        </p:spPr>
-        <p:txBody>
-          <a:bodyPr vert="horz" wrap="square" lIns="0" tIns="0" rIns="0" bIns="0" rtlCol="0">
-            <a:spAutoFit/>
-          </a:bodyPr>
-          <a:lstStyle/>
-          <a:p>
-            <a:r>
-              <a:rPr lang="en-IN" sz="1500" b="1">
-                <a:solidFill>
-                  <a:srgbClr val="E6EDF3"/>
-                </a:solidFill>
-                <a:latin typeface="Arial" panose="020B0604020202020204" pitchFamily="34" charset="0"/>
-              </a:rPr>
-              <a:t>Defensible decisions</a:t>
-            </a:r>
-          </a:p>
-        </p:txBody>
-      </p:sp>
-      <p:sp>
-        <p:nvSpPr>
-          <p:cNvPr id="45" name="Rectangle: Rounded Corners 44">
-            <a:extLst>
-              <a:ext uri="{FF2B5EF4-FFF2-40B4-BE49-F238E27FC236}">
-                <a16:creationId xmlns:a16="http://schemas.microsoft.com/office/drawing/2014/main" id="{D2BE1CFD-69F6-40B2-27C7-E7B03EF33DFA}"/>
-              </a:ext>
-            </a:extLst>
-          </p:cNvPr>
-          <p:cNvSpPr/>
-          <p:nvPr/>
-        </p:nvSpPr>
-        <p:spPr>
-          <a:xfrm>
-            <a:off x="4645152" y="2121408"/>
-            <a:ext cx="914400" cy="256032"/>
+          <a:effectLst>
+            <a:outerShdw blurRad="114300" dist="38100" dir="5400000" algn="bl" rotWithShape="0">
+              <a:srgbClr val="000000">
+                <a:alpha val="28000"/>
+              </a:srgbClr>
+            </a:outerShdw>
+          </a:effectLst>
+        </p:spPr>
+        <p:txBody>
+          <a:bodyPr/>
+          <a:p/>
+        </p:txBody>
+      </p:sp>
+      <p:sp>
+        <p:nvSpPr>
+          <p:cNvPr id="6" name="Text 4"/>
+          <p:cNvSpPr/>
+          <p:nvPr/>
+        </p:nvSpPr>
+        <p:spPr>
+          <a:xfrm>
+            <a:off x="640080" y="1993392"/>
+            <a:ext cx="2522144" cy="566928"/>
+          </a:xfrm>
+          <a:prstGeom prst="rect">
+            <a:avLst/>
+          </a:prstGeom>
+          <a:noFill/>
+          <a:ln/>
+        </p:spPr>
+        <p:txBody>
+          <a:bodyPr wrap="square" rtlCol="0" anchor="ctr"/>
+          <a:lstStyle/>
+          <a:p>
+            <a:pPr marL="0" indent="0" algn="ctr">
+              <a:buNone/>
+            </a:pPr>
+            <a:r>
+              <a:rPr lang="en-US" sz="3400" b="1" dirty="0">
+                <a:solidFill>
+                  <a:srgbClr val="2DD4BF"/>
+                </a:solidFill>
+                <a:latin typeface="Arial" pitchFamily="34" charset="0"/>
+                <a:ea typeface="Arial" pitchFamily="34" charset="-122"/>
+                <a:cs typeface="Arial" pitchFamily="34" charset="-120"/>
+              </a:rPr>
+              <a:t>0.896</a:t>
+            </a:r>
+            <a:endParaRPr lang="en-US" sz="3400" dirty="0"/>
+          </a:p>
+        </p:txBody>
+      </p:sp>
+      <p:sp>
+        <p:nvSpPr>
+          <p:cNvPr id="7" name="Text 5"/>
+          <p:cNvSpPr/>
+          <p:nvPr/>
+        </p:nvSpPr>
+        <p:spPr>
+          <a:xfrm>
+            <a:off x="640080" y="2578608"/>
+            <a:ext cx="2522144" cy="274320"/>
+          </a:xfrm>
+          <a:prstGeom prst="rect">
+            <a:avLst/>
+          </a:prstGeom>
+          <a:noFill/>
+          <a:ln/>
+        </p:spPr>
+        <p:txBody>
+          <a:bodyPr wrap="square" rtlCol="0" anchor="ctr"/>
+          <a:lstStyle/>
+          <a:p>
+            <a:pPr marL="0" indent="0" algn="ctr">
+              <a:buNone/>
+            </a:pPr>
+            <a:r>
+              <a:rPr lang="en-US" sz="1200" dirty="0">
+                <a:solidFill>
+                  <a:srgbClr val="9AA7B4"/>
+                </a:solidFill>
+                <a:latin typeface="Arial" pitchFamily="34" charset="0"/>
+                <a:ea typeface="Arial" pitchFamily="34" charset="-122"/>
+                <a:cs typeface="Arial" pitchFamily="34" charset="-120"/>
+              </a:rPr>
+              <a:t>SHIPPED (LLM-JUDGE)</a:t>
+            </a:r>
+            <a:endParaRPr lang="en-US" sz="1200" dirty="0"/>
+          </a:p>
+        </p:txBody>
+      </p:sp>
+      <p:sp>
+        <p:nvSpPr>
+          <p:cNvPr id="8" name="Shape 6"/>
+          <p:cNvSpPr/>
+          <p:nvPr/>
+        </p:nvSpPr>
+        <p:spPr>
+          <a:xfrm>
+            <a:off x="3436544" y="1874520"/>
+            <a:ext cx="2522144" cy="1097280"/>
           </a:xfrm>
           <a:prstGeom prst="roundRect">
             <a:avLst>
-              <a:gd name="adj" fmla="val 50000"/>
+              <a:gd name="adj" fmla="val 10000"/>
             </a:avLst>
           </a:prstGeom>
           <a:solidFill>
-            <a:srgbClr val="1B2330"/>
+            <a:srgbClr val="161C24"/>
           </a:solidFill>
-          <a:ln w="12700" cap="flat" cmpd="sng" algn="ctr">
+          <a:ln w="12700">
             <a:solidFill>
-              <a:srgbClr val="2DD4BF">
-                <a:alpha val="65000"/>
+              <a:srgbClr val="2A3340"/>
+            </a:solidFill>
+            <a:prstDash val="solid"/>
+          </a:ln>
+          <a:effectLst>
+            <a:outerShdw blurRad="114300" dist="38100" dir="5400000" algn="bl" rotWithShape="0">
+              <a:srgbClr val="000000">
+                <a:alpha val="28000"/>
+              </a:srgbClr>
+            </a:outerShdw>
+          </a:effectLst>
+        </p:spPr>
+        <p:txBody>
+          <a:bodyPr/>
+          <a:p/>
+        </p:txBody>
+      </p:sp>
+      <p:sp>
+        <p:nvSpPr>
+          <p:cNvPr id="9" name="Text 7"/>
+          <p:cNvSpPr/>
+          <p:nvPr/>
+        </p:nvSpPr>
+        <p:spPr>
+          <a:xfrm>
+            <a:off x="3436544" y="1993392"/>
+            <a:ext cx="2522144" cy="566928"/>
+          </a:xfrm>
+          <a:prstGeom prst="rect">
+            <a:avLst/>
+          </a:prstGeom>
+          <a:noFill/>
+          <a:ln/>
+        </p:spPr>
+        <p:txBody>
+          <a:bodyPr wrap="square" rtlCol="0" anchor="ctr"/>
+          <a:lstStyle/>
+          <a:p>
+            <a:pPr marL="0" indent="0" algn="ctr">
+              <a:buNone/>
+            </a:pPr>
+            <a:r>
+              <a:rPr lang="en-US" sz="3400" b="1" dirty="0">
+                <a:solidFill>
+                  <a:srgbClr val="2DD4BF"/>
+                </a:solidFill>
+                <a:latin typeface="Arial" pitchFamily="34" charset="0"/>
+                <a:ea typeface="Arial" pitchFamily="34" charset="-122"/>
+                <a:cs typeface="Arial" pitchFamily="34" charset="-120"/>
+              </a:rPr>
+              <a:t>0.926</a:t>
+            </a:r>
+            <a:endParaRPr lang="en-US" sz="3400" dirty="0"/>
+          </a:p>
+        </p:txBody>
+      </p:sp>
+      <p:sp>
+        <p:nvSpPr>
+          <p:cNvPr id="10" name="Text 8"/>
+          <p:cNvSpPr/>
+          <p:nvPr/>
+        </p:nvSpPr>
+        <p:spPr>
+          <a:xfrm>
+            <a:off x="3436544" y="2578608"/>
+            <a:ext cx="2522144" cy="274320"/>
+          </a:xfrm>
+          <a:prstGeom prst="rect">
+            <a:avLst/>
+          </a:prstGeom>
+          <a:noFill/>
+          <a:ln/>
+        </p:spPr>
+        <p:txBody>
+          <a:bodyPr wrap="square" rtlCol="0" anchor="ctr"/>
+          <a:lstStyle/>
+          <a:p>
+            <a:pPr marL="0" indent="0" algn="ctr">
+              <a:buNone/>
+            </a:pPr>
+            <a:r>
+              <a:rPr lang="en-US" sz="1200" dirty="0">
+                <a:solidFill>
+                  <a:srgbClr val="9AA7B4"/>
+                </a:solidFill>
+                <a:latin typeface="Arial" pitchFamily="34" charset="0"/>
+                <a:ea typeface="Arial" pitchFamily="34" charset="-122"/>
+                <a:cs typeface="Arial" pitchFamily="34" charset="-120"/>
+              </a:rPr>
+              <a:t>FLOOR-OFF — DECLINED</a:t>
+            </a:r>
+            <a:endParaRPr lang="en-US" sz="1200" dirty="0"/>
+          </a:p>
+        </p:txBody>
+      </p:sp>
+      <p:sp>
+        <p:nvSpPr>
+          <p:cNvPr id="11" name="Shape 9"/>
+          <p:cNvSpPr/>
+          <p:nvPr/>
+        </p:nvSpPr>
+        <p:spPr>
+          <a:xfrm>
+            <a:off x="6233008" y="1874520"/>
+            <a:ext cx="2522144" cy="1097280"/>
+          </a:xfrm>
+          <a:prstGeom prst="roundRect">
+            <a:avLst>
+              <a:gd name="adj" fmla="val 10000"/>
+            </a:avLst>
+          </a:prstGeom>
+          <a:solidFill>
+            <a:srgbClr val="161C24"/>
+          </a:solidFill>
+          <a:ln w="12700">
+            <a:solidFill>
+              <a:srgbClr val="2A3340"/>
+            </a:solidFill>
+            <a:prstDash val="solid"/>
+          </a:ln>
+          <a:effectLst>
+            <a:outerShdw blurRad="114300" dist="38100" dir="5400000" algn="bl" rotWithShape="0">
+              <a:srgbClr val="000000">
+                <a:alpha val="28000"/>
+              </a:srgbClr>
+            </a:outerShdw>
+          </a:effectLst>
+        </p:spPr>
+        <p:txBody>
+          <a:bodyPr/>
+          <a:p/>
+        </p:txBody>
+      </p:sp>
+      <p:sp>
+        <p:nvSpPr>
+          <p:cNvPr id="12" name="Text 10"/>
+          <p:cNvSpPr/>
+          <p:nvPr/>
+        </p:nvSpPr>
+        <p:spPr>
+          <a:xfrm>
+            <a:off x="6233008" y="1993392"/>
+            <a:ext cx="2522144" cy="566928"/>
+          </a:xfrm>
+          <a:prstGeom prst="rect">
+            <a:avLst/>
+          </a:prstGeom>
+          <a:noFill/>
+          <a:ln/>
+        </p:spPr>
+        <p:txBody>
+          <a:bodyPr wrap="square" rtlCol="0" anchor="ctr"/>
+          <a:lstStyle/>
+          <a:p>
+            <a:pPr marL="0" indent="0" algn="ctr">
+              <a:buNone/>
+            </a:pPr>
+            <a:r>
+              <a:rPr lang="en-US" sz="3400" b="1" dirty="0">
+                <a:solidFill>
+                  <a:srgbClr val="2DD4BF"/>
+                </a:solidFill>
+                <a:latin typeface="Arial" pitchFamily="34" charset="0"/>
+                <a:ea typeface="Arial" pitchFamily="34" charset="-122"/>
+                <a:cs typeface="Arial" pitchFamily="34" charset="-120"/>
+              </a:rPr>
+              <a:t>0</a:t>
+            </a:r>
+            <a:endParaRPr lang="en-US" sz="3400" dirty="0"/>
+          </a:p>
+        </p:txBody>
+      </p:sp>
+      <p:sp>
+        <p:nvSpPr>
+          <p:cNvPr id="13" name="Text 11"/>
+          <p:cNvSpPr/>
+          <p:nvPr/>
+        </p:nvSpPr>
+        <p:spPr>
+          <a:xfrm>
+            <a:off x="6233008" y="2578608"/>
+            <a:ext cx="2522144" cy="274320"/>
+          </a:xfrm>
+          <a:prstGeom prst="rect">
+            <a:avLst/>
+          </a:prstGeom>
+          <a:noFill/>
+          <a:ln/>
+        </p:spPr>
+        <p:txBody>
+          <a:bodyPr wrap="square" rtlCol="0" anchor="ctr"/>
+          <a:lstStyle/>
+          <a:p>
+            <a:pPr marL="0" indent="0" algn="ctr">
+              <a:buNone/>
+            </a:pPr>
+            <a:r>
+              <a:rPr lang="en-US" sz="1200" dirty="0">
+                <a:solidFill>
+                  <a:srgbClr val="9AA7B4"/>
+                </a:solidFill>
+                <a:latin typeface="Arial" pitchFamily="34" charset="0"/>
+                <a:ea typeface="Arial" pitchFamily="34" charset="-122"/>
+                <a:cs typeface="Arial" pitchFamily="34" charset="-120"/>
+              </a:rPr>
+              <a:t>RANK CHANGES 0.25–0.55</a:t>
+            </a:r>
+            <a:endParaRPr lang="en-US" sz="1200" dirty="0"/>
+          </a:p>
+        </p:txBody>
+      </p:sp>
+      <p:sp>
+        <p:nvSpPr>
+          <p:cNvPr id="14" name="Shape 12"/>
+          <p:cNvSpPr/>
+          <p:nvPr/>
+        </p:nvSpPr>
+        <p:spPr>
+          <a:xfrm>
+            <a:off x="9029471" y="1874520"/>
+            <a:ext cx="2522144" cy="1097280"/>
+          </a:xfrm>
+          <a:prstGeom prst="roundRect">
+            <a:avLst>
+              <a:gd name="adj" fmla="val 10000"/>
+            </a:avLst>
+          </a:prstGeom>
+          <a:solidFill>
+            <a:srgbClr val="161C24"/>
+          </a:solidFill>
+          <a:ln w="12700">
+            <a:solidFill>
+              <a:srgbClr val="2A3340"/>
+            </a:solidFill>
+            <a:prstDash val="solid"/>
+          </a:ln>
+          <a:effectLst>
+            <a:outerShdw blurRad="114300" dist="38100" dir="5400000" algn="bl" rotWithShape="0">
+              <a:srgbClr val="000000">
+                <a:alpha val="28000"/>
+              </a:srgbClr>
+            </a:outerShdw>
+          </a:effectLst>
+        </p:spPr>
+        <p:txBody>
+          <a:bodyPr/>
+          <a:p/>
+        </p:txBody>
+      </p:sp>
+      <p:sp>
+        <p:nvSpPr>
+          <p:cNvPr id="15" name="Text 13"/>
+          <p:cNvSpPr/>
+          <p:nvPr/>
+        </p:nvSpPr>
+        <p:spPr>
+          <a:xfrm>
+            <a:off x="9029471" y="1993392"/>
+            <a:ext cx="2522144" cy="566928"/>
+          </a:xfrm>
+          <a:prstGeom prst="rect">
+            <a:avLst/>
+          </a:prstGeom>
+          <a:noFill/>
+          <a:ln/>
+        </p:spPr>
+        <p:txBody>
+          <a:bodyPr wrap="square" rtlCol="0" anchor="ctr"/>
+          <a:lstStyle/>
+          <a:p>
+            <a:pPr marL="0" indent="0" algn="ctr">
+              <a:buNone/>
+            </a:pPr>
+            <a:r>
+              <a:rPr lang="en-US" sz="3400" b="1" dirty="0">
+                <a:solidFill>
+                  <a:srgbClr val="34D399"/>
+                </a:solidFill>
+                <a:latin typeface="Arial" pitchFamily="34" charset="0"/>
+                <a:ea typeface="Arial" pitchFamily="34" charset="-122"/>
+                <a:cs typeface="Arial" pitchFamily="34" charset="-120"/>
+              </a:rPr>
+              <a:t>9 / 13</a:t>
+            </a:r>
+            <a:endParaRPr lang="en-US" sz="3400" dirty="0"/>
+          </a:p>
+        </p:txBody>
+      </p:sp>
+      <p:sp>
+        <p:nvSpPr>
+          <p:cNvPr id="16" name="Text 14"/>
+          <p:cNvSpPr/>
+          <p:nvPr/>
+        </p:nvSpPr>
+        <p:spPr>
+          <a:xfrm>
+            <a:off x="9029471" y="2578608"/>
+            <a:ext cx="2522144" cy="274320"/>
+          </a:xfrm>
+          <a:prstGeom prst="rect">
+            <a:avLst/>
+          </a:prstGeom>
+          <a:noFill/>
+          <a:ln/>
+        </p:spPr>
+        <p:txBody>
+          <a:bodyPr wrap="square" rtlCol="0" anchor="ctr"/>
+          <a:lstStyle/>
+          <a:p>
+            <a:pPr marL="0" indent="0" algn="ctr">
+              <a:buNone/>
+            </a:pPr>
+            <a:r>
+              <a:rPr lang="en-US" sz="1200" dirty="0">
+                <a:solidFill>
+                  <a:srgbClr val="9AA7B4"/>
+                </a:solidFill>
+                <a:latin typeface="Arial" pitchFamily="34" charset="0"/>
+                <a:ea typeface="Arial" pitchFamily="34" charset="-122"/>
+                <a:cs typeface="Arial" pitchFamily="34" charset="-120"/>
+              </a:rPr>
+              <a:t>PLANTED TRAPS CAUGHT</a:t>
+            </a:r>
+            <a:endParaRPr lang="en-US" sz="1200" dirty="0"/>
+          </a:p>
+        </p:txBody>
+      </p:sp>
+      <p:sp>
+        <p:nvSpPr>
+          <p:cNvPr id="17" name="Shape 15"/>
+          <p:cNvSpPr/>
+          <p:nvPr/>
+        </p:nvSpPr>
+        <p:spPr>
+          <a:xfrm>
+            <a:off x="640080" y="3200400"/>
+            <a:ext cx="5272888" cy="1874520"/>
+          </a:xfrm>
+          <a:prstGeom prst="roundRect">
+            <a:avLst>
+              <a:gd name="adj" fmla="val 5854"/>
+            </a:avLst>
+          </a:prstGeom>
+          <a:solidFill>
+            <a:srgbClr val="161C24"/>
+          </a:solidFill>
+          <a:ln w="12700">
+            <a:solidFill>
+              <a:srgbClr val="2A3340"/>
+            </a:solidFill>
+            <a:prstDash val="solid"/>
+          </a:ln>
+          <a:effectLst>
+            <a:outerShdw blurRad="114300" dist="38100" dir="5400000" algn="bl" rotWithShape="0">
+              <a:srgbClr val="000000">
+                <a:alpha val="28000"/>
+              </a:srgbClr>
+            </a:outerShdw>
+          </a:effectLst>
+        </p:spPr>
+        <p:txBody>
+          <a:bodyPr/>
+          <a:p/>
+        </p:txBody>
+      </p:sp>
+      <p:sp>
+        <p:nvSpPr>
+          <p:cNvPr id="18" name="Shape 16"/>
+          <p:cNvSpPr/>
+          <p:nvPr/>
+        </p:nvSpPr>
+        <p:spPr>
+          <a:xfrm>
+            <a:off x="914400" y="3429000"/>
+            <a:ext cx="420624" cy="420624"/>
+          </a:xfrm>
+          <a:prstGeom prst="roundRect">
+            <a:avLst>
+              <a:gd name="adj" fmla="val 15217"/>
+            </a:avLst>
+          </a:prstGeom>
+          <a:solidFill>
+            <a:srgbClr val="F2B544">
+              <a:alpha val="18000"/>
+            </a:srgbClr>
+          </a:solidFill>
+          <a:ln w="12700">
+            <a:solidFill>
+              <a:srgbClr val="F2B544">
+                <a:alpha val="45000"/>
               </a:srgbClr>
             </a:solidFill>
             <a:prstDash val="solid"/>
-            <a:miter lim="800000"/>
-            <a:headEnd type="none" w="med" len="med"/>
-            <a:tailEnd type="none" w="med" len="med"/>
           </a:ln>
         </p:spPr>
-        <p:style>
-          <a:lnRef idx="2">
-            <a:schemeClr val="accent1">
-              <a:shade val="15000"/>
-            </a:schemeClr>
-          </a:lnRef>
-          <a:fillRef idx="1">
-            <a:schemeClr val="accent1"/>
-          </a:fillRef>
-          <a:effectRef idx="0">
-            <a:schemeClr val="accent1"/>
-          </a:effectRef>
-          <a:fontRef idx="minor">
-            <a:schemeClr val="lt1"/>
-          </a:fontRef>
-        </p:style>
-        <p:txBody>
-          <a:bodyPr rtlCol="0" anchor="ctr"/>
-          <a:lstStyle/>
-          <a:p>
-            <a:pPr algn="ctr"/>
-            <a:endParaRPr lang="en-IN"/>
-          </a:p>
-        </p:txBody>
-      </p:sp>
-      <p:sp>
-        <p:nvSpPr>
-          <p:cNvPr id="46" name="TextBox 45">
-            <a:extLst>
-              <a:ext uri="{FF2B5EF4-FFF2-40B4-BE49-F238E27FC236}">
-                <a16:creationId xmlns:a16="http://schemas.microsoft.com/office/drawing/2014/main" id="{82764EEF-F1EF-8E57-349A-54673CF2B21F}"/>
-              </a:ext>
-            </a:extLst>
-          </p:cNvPr>
-          <p:cNvSpPr txBox="1"/>
-          <p:nvPr/>
-        </p:nvSpPr>
-        <p:spPr>
-          <a:xfrm>
-            <a:off x="4718304" y="2153412"/>
-            <a:ext cx="768096" cy="130805"/>
-          </a:xfrm>
-          <a:prstGeom prst="rect">
-            <a:avLst/>
-          </a:prstGeom>
-          <a:noFill/>
-        </p:spPr>
-        <p:txBody>
-          <a:bodyPr vert="horz" wrap="square" lIns="0" tIns="0" rIns="0" bIns="0" rtlCol="0">
-            <a:spAutoFit/>
-          </a:bodyPr>
-          <a:lstStyle/>
-          <a:p>
-            <a:pPr algn="ctr"/>
-            <a:r>
-              <a:rPr lang="en-IN" sz="850" b="1">
+        <p:txBody>
+          <a:bodyPr/>
+          <a:p/>
+        </p:txBody>
+      </p:sp>
+      <p:pic>
+        <p:nvPicPr>
+          <p:cNvPr id="19" name="Image 0" descr="preencoded.png"/>
+          <p:cNvPicPr>
+            <a:picLocks noChangeAspect="1"/>
+          </p:cNvPicPr>
+          <p:nvPr/>
+        </p:nvPicPr>
+        <p:blipFill>
+          <a:blip r:embed="rId2"/>
+          <a:stretch>
+            <a:fillRect/>
+          </a:stretch>
+        </p:blipFill>
+        <p:spPr>
+          <a:xfrm>
+            <a:off x="1006937" y="3521537"/>
+            <a:ext cx="235549" cy="235549"/>
+          </a:xfrm>
+          <a:prstGeom prst="rect">
+            <a:avLst/>
+          </a:prstGeom>
+        </p:spPr>
+      </p:pic>
+      <p:sp>
+        <p:nvSpPr>
+          <p:cNvPr id="20" name="Text 17"/>
+          <p:cNvSpPr/>
+          <p:nvPr/>
+        </p:nvSpPr>
+        <p:spPr>
+          <a:xfrm>
+            <a:off x="1444752" y="3429000"/>
+            <a:ext cx="4358488" cy="411480"/>
+          </a:xfrm>
+          <a:prstGeom prst="rect">
+            <a:avLst/>
+          </a:prstGeom>
+          <a:noFill/>
+          <a:ln/>
+        </p:spPr>
+        <p:txBody>
+          <a:bodyPr wrap="square" rtlCol="0" anchor="ctr"/>
+          <a:lstStyle/>
+          <a:p>
+            <a:pPr marL="0" indent="0">
+              <a:buNone/>
+            </a:pPr>
+            <a:r>
+              <a:rPr lang="en-US" sz="1500" b="1" dirty="0">
                 <a:solidFill>
                   <a:srgbClr val="E6EDF3"/>
                 </a:solidFill>
-                <a:latin typeface="Arial" panose="020B0604020202020204" pitchFamily="34" charset="0"/>
-              </a:rPr>
-              <a:t>shipped path</a:t>
-            </a:r>
-          </a:p>
-        </p:txBody>
-      </p:sp>
-      <p:sp>
-        <p:nvSpPr>
-          <p:cNvPr id="47" name="Oval 46">
-            <a:extLst>
-              <a:ext uri="{FF2B5EF4-FFF2-40B4-BE49-F238E27FC236}">
-                <a16:creationId xmlns:a16="http://schemas.microsoft.com/office/drawing/2014/main" id="{C6E666A7-A9DA-282A-6235-719927B41A78}"/>
-              </a:ext>
-            </a:extLst>
-          </p:cNvPr>
-          <p:cNvSpPr/>
-          <p:nvPr/>
-        </p:nvSpPr>
-        <p:spPr>
-          <a:xfrm>
-            <a:off x="932688" y="2670048"/>
-            <a:ext cx="146304" cy="146304"/>
-          </a:xfrm>
-          <a:prstGeom prst="ellipse">
-            <a:avLst/>
-          </a:prstGeom>
-          <a:solidFill>
-            <a:srgbClr val="34D399"/>
-          </a:solidFill>
-          <a:ln w="12700" cap="flat" cmpd="sng" algn="ctr">
-            <a:noFill/>
-            <a:prstDash val="solid"/>
-            <a:miter lim="800000"/>
-          </a:ln>
-          <a:effectLst/>
-          <a:extLst>
-            <a:ext uri="{91240B29-F687-4F45-9708-019B960494DF}">
-              <a14:hiddenLine xmlns:a14="http://schemas.microsoft.com/office/drawing/2010/main" w="12700" cap="flat" cmpd="sng" algn="ctr">
-                <a:solidFill>
-                  <a:schemeClr val="accent1">
-                    <a:shade val="15000"/>
-                  </a:schemeClr>
-                </a:solidFill>
-                <a:prstDash val="solid"/>
-                <a:miter lim="800000"/>
-              </a14:hiddenLine>
-            </a:ext>
-          </a:extLst>
-        </p:spPr>
-        <p:style>
-          <a:lnRef idx="2">
-            <a:schemeClr val="accent1">
-              <a:shade val="15000"/>
-            </a:schemeClr>
-          </a:lnRef>
-          <a:fillRef idx="1">
-            <a:schemeClr val="accent1"/>
-          </a:fillRef>
-          <a:effectRef idx="0">
-            <a:schemeClr val="accent1"/>
-          </a:effectRef>
-          <a:fontRef idx="minor">
-            <a:schemeClr val="lt1"/>
-          </a:fontRef>
-        </p:style>
-        <p:txBody>
-          <a:bodyPr rtlCol="0" anchor="ctr"/>
-          <a:lstStyle/>
-          <a:p>
-            <a:pPr algn="ctr"/>
-            <a:endParaRPr lang="en-IN"/>
-          </a:p>
-        </p:txBody>
-      </p:sp>
-      <p:sp>
-        <p:nvSpPr>
-          <p:cNvPr id="48" name="TextBox 47">
-            <a:extLst>
-              <a:ext uri="{FF2B5EF4-FFF2-40B4-BE49-F238E27FC236}">
-                <a16:creationId xmlns:a16="http://schemas.microsoft.com/office/drawing/2014/main" id="{20A5A3A1-DF61-ACF6-B576-2C5E7168D4BA}"/>
-              </a:ext>
-            </a:extLst>
-          </p:cNvPr>
-          <p:cNvSpPr txBox="1"/>
-          <p:nvPr/>
-        </p:nvSpPr>
-        <p:spPr>
-          <a:xfrm>
-            <a:off x="1234440" y="2633472"/>
-            <a:ext cx="4160520" cy="181588"/>
-          </a:xfrm>
-          <a:prstGeom prst="rect">
-            <a:avLst/>
-          </a:prstGeom>
-          <a:noFill/>
-        </p:spPr>
-        <p:txBody>
-          <a:bodyPr vert="horz" wrap="square" lIns="0" tIns="0" rIns="0" bIns="0" rtlCol="0">
-            <a:spAutoFit/>
-          </a:bodyPr>
-          <a:lstStyle/>
-          <a:p>
-            <a:r>
-              <a:rPr lang="en-IN" sz="1180" b="1">
-                <a:solidFill>
-                  <a:srgbClr val="E6EDF3"/>
-                </a:solidFill>
-                <a:latin typeface="Arial" panose="020B0604020202020204" pitchFamily="34" charset="0"/>
-              </a:rPr>
-              <a:t>No LLM per candidate</a:t>
-            </a:r>
-          </a:p>
-        </p:txBody>
-      </p:sp>
-      <p:sp>
-        <p:nvSpPr>
-          <p:cNvPr id="49" name="TextBox 48">
-            <a:extLst>
-              <a:ext uri="{FF2B5EF4-FFF2-40B4-BE49-F238E27FC236}">
-                <a16:creationId xmlns:a16="http://schemas.microsoft.com/office/drawing/2014/main" id="{132CB621-651A-9B23-3182-9D88579452BA}"/>
-              </a:ext>
-            </a:extLst>
-          </p:cNvPr>
-          <p:cNvSpPr txBox="1"/>
-          <p:nvPr/>
-        </p:nvSpPr>
-        <p:spPr>
-          <a:xfrm>
-            <a:off x="1234440" y="2871216"/>
-            <a:ext cx="4224528" cy="298543"/>
-          </a:xfrm>
-          <a:prstGeom prst="rect">
-            <a:avLst/>
-          </a:prstGeom>
-          <a:noFill/>
-        </p:spPr>
-        <p:txBody>
-          <a:bodyPr vert="horz" wrap="square" lIns="0" tIns="0" rIns="0" bIns="0" rtlCol="0">
-            <a:spAutoFit/>
-          </a:bodyPr>
-          <a:lstStyle/>
-          <a:p>
-            <a:r>
-              <a:rPr lang="en-US" sz="970">
-                <a:solidFill>
-                  <a:srgbClr val="9AA7B4"/>
-                </a:solidFill>
-                <a:latin typeface="Arial" panose="020B0604020202020204" pitchFamily="34" charset="0"/>
-              </a:rPr>
-              <a:t>100K hosted calls break the CPU/no-network budget and make reproduction fragile.</a:t>
-            </a:r>
-            <a:endParaRPr lang="en-IN" sz="970">
-              <a:solidFill>
-                <a:srgbClr val="9AA7B4"/>
-              </a:solidFill>
-              <a:latin typeface="Arial" panose="020B0604020202020204" pitchFamily="34" charset="0"/>
-            </a:endParaRPr>
-          </a:p>
-        </p:txBody>
-      </p:sp>
-      <p:sp>
-        <p:nvSpPr>
-          <p:cNvPr id="50" name="Oval 49">
-            <a:extLst>
-              <a:ext uri="{FF2B5EF4-FFF2-40B4-BE49-F238E27FC236}">
-                <a16:creationId xmlns:a16="http://schemas.microsoft.com/office/drawing/2014/main" id="{6FDE318C-29BE-36A5-1F3B-FBC27953EE1B}"/>
-              </a:ext>
-            </a:extLst>
-          </p:cNvPr>
-          <p:cNvSpPr/>
-          <p:nvPr/>
-        </p:nvSpPr>
-        <p:spPr>
-          <a:xfrm>
-            <a:off x="932688" y="3438144"/>
-            <a:ext cx="146304" cy="146304"/>
-          </a:xfrm>
-          <a:prstGeom prst="ellipse">
-            <a:avLst/>
-          </a:prstGeom>
-          <a:solidFill>
-            <a:srgbClr val="34D399"/>
-          </a:solidFill>
-          <a:ln w="12700" cap="flat" cmpd="sng" algn="ctr">
-            <a:noFill/>
-            <a:prstDash val="solid"/>
-            <a:miter lim="800000"/>
-          </a:ln>
-          <a:effectLst/>
-          <a:extLst>
-            <a:ext uri="{91240B29-F687-4F45-9708-019B960494DF}">
-              <a14:hiddenLine xmlns:a14="http://schemas.microsoft.com/office/drawing/2010/main" w="12700" cap="flat" cmpd="sng" algn="ctr">
-                <a:solidFill>
-                  <a:schemeClr val="accent1">
-                    <a:shade val="15000"/>
-                  </a:schemeClr>
-                </a:solidFill>
-                <a:prstDash val="solid"/>
-                <a:miter lim="800000"/>
-              </a14:hiddenLine>
-            </a:ext>
-          </a:extLst>
-        </p:spPr>
-        <p:style>
-          <a:lnRef idx="2">
-            <a:schemeClr val="accent1">
-              <a:shade val="15000"/>
-            </a:schemeClr>
-          </a:lnRef>
-          <a:fillRef idx="1">
-            <a:schemeClr val="accent1"/>
-          </a:fillRef>
-          <a:effectRef idx="0">
-            <a:schemeClr val="accent1"/>
-          </a:effectRef>
-          <a:fontRef idx="minor">
-            <a:schemeClr val="lt1"/>
-          </a:fontRef>
-        </p:style>
-        <p:txBody>
-          <a:bodyPr rtlCol="0" anchor="ctr"/>
-          <a:lstStyle/>
-          <a:p>
-            <a:pPr algn="ctr"/>
-            <a:endParaRPr lang="en-IN"/>
-          </a:p>
-        </p:txBody>
-      </p:sp>
-      <p:sp>
-        <p:nvSpPr>
-          <p:cNvPr id="51" name="TextBox 50">
-            <a:extLst>
-              <a:ext uri="{FF2B5EF4-FFF2-40B4-BE49-F238E27FC236}">
-                <a16:creationId xmlns:a16="http://schemas.microsoft.com/office/drawing/2014/main" id="{A3CF24C1-F991-1B4B-FE0E-8E3AB42E7A78}"/>
-              </a:ext>
-            </a:extLst>
-          </p:cNvPr>
-          <p:cNvSpPr txBox="1"/>
-          <p:nvPr/>
-        </p:nvSpPr>
-        <p:spPr>
-          <a:xfrm>
-            <a:off x="1234440" y="3401568"/>
-            <a:ext cx="4160520" cy="181588"/>
-          </a:xfrm>
-          <a:prstGeom prst="rect">
-            <a:avLst/>
-          </a:prstGeom>
-          <a:noFill/>
-        </p:spPr>
-        <p:txBody>
-          <a:bodyPr vert="horz" wrap="square" lIns="0" tIns="0" rIns="0" bIns="0" rtlCol="0">
-            <a:spAutoFit/>
-          </a:bodyPr>
-          <a:lstStyle/>
-          <a:p>
-            <a:r>
-              <a:rPr lang="en-US" sz="1180" b="1">
-                <a:solidFill>
-                  <a:srgbClr val="E6EDF3"/>
-                </a:solidFill>
-                <a:latin typeface="Arial" panose="020B0604020202020204" pitchFamily="34" charset="0"/>
-              </a:rPr>
-              <a:t>Dense embeddings tested, then kept off</a:t>
-            </a:r>
-            <a:endParaRPr lang="en-IN" sz="1180" b="1">
-              <a:solidFill>
-                <a:srgbClr val="E6EDF3"/>
-              </a:solidFill>
-              <a:latin typeface="Arial" panose="020B0604020202020204" pitchFamily="34" charset="0"/>
-            </a:endParaRPr>
-          </a:p>
-        </p:txBody>
-      </p:sp>
-      <p:sp>
-        <p:nvSpPr>
-          <p:cNvPr id="52" name="TextBox 51">
-            <a:extLst>
-              <a:ext uri="{FF2B5EF4-FFF2-40B4-BE49-F238E27FC236}">
-                <a16:creationId xmlns:a16="http://schemas.microsoft.com/office/drawing/2014/main" id="{151AB0D3-8CA4-3230-8396-8D93CD6ECB37}"/>
-              </a:ext>
-            </a:extLst>
-          </p:cNvPr>
-          <p:cNvSpPr txBox="1"/>
-          <p:nvPr/>
-        </p:nvSpPr>
-        <p:spPr>
-          <a:xfrm>
-            <a:off x="1234440" y="3639312"/>
-            <a:ext cx="4224528" cy="298543"/>
-          </a:xfrm>
-          <a:prstGeom prst="rect">
-            <a:avLst/>
-          </a:prstGeom>
-          <a:noFill/>
-        </p:spPr>
-        <p:txBody>
-          <a:bodyPr vert="horz" wrap="square" lIns="0" tIns="0" rIns="0" bIns="0" rtlCol="0">
-            <a:spAutoFit/>
-          </a:bodyPr>
-          <a:lstStyle/>
-          <a:p>
-            <a:r>
-              <a:rPr lang="en-US" sz="970">
-                <a:solidFill>
-                  <a:srgbClr val="9AA7B4"/>
-                </a:solidFill>
-                <a:latin typeface="Arial" panose="020B0604020202020204" pitchFamily="34" charset="0"/>
-              </a:rPr>
-              <a:t>NDCG@10 was flat while runtime and complexity rose, so the simpler ranker won.</a:t>
-            </a:r>
-            <a:endParaRPr lang="en-IN" sz="970">
-              <a:solidFill>
-                <a:srgbClr val="9AA7B4"/>
-              </a:solidFill>
-              <a:latin typeface="Arial" panose="020B0604020202020204" pitchFamily="34" charset="0"/>
-            </a:endParaRPr>
-          </a:p>
-        </p:txBody>
-      </p:sp>
-      <p:sp>
-        <p:nvSpPr>
-          <p:cNvPr id="53" name="Oval 52">
-            <a:extLst>
-              <a:ext uri="{FF2B5EF4-FFF2-40B4-BE49-F238E27FC236}">
-                <a16:creationId xmlns:a16="http://schemas.microsoft.com/office/drawing/2014/main" id="{A6F9E95D-C63D-FC46-63E6-3C72E8A8BBCA}"/>
-              </a:ext>
-            </a:extLst>
-          </p:cNvPr>
-          <p:cNvSpPr/>
-          <p:nvPr/>
-        </p:nvSpPr>
-        <p:spPr>
-          <a:xfrm>
-            <a:off x="932688" y="4206240"/>
-            <a:ext cx="146304" cy="146304"/>
-          </a:xfrm>
-          <a:prstGeom prst="ellipse">
-            <a:avLst/>
-          </a:prstGeom>
-          <a:solidFill>
-            <a:srgbClr val="34D399"/>
-          </a:solidFill>
-          <a:ln w="12700" cap="flat" cmpd="sng" algn="ctr">
-            <a:noFill/>
-            <a:prstDash val="solid"/>
-            <a:miter lim="800000"/>
-          </a:ln>
-          <a:effectLst/>
-          <a:extLst>
-            <a:ext uri="{91240B29-F687-4F45-9708-019B960494DF}">
-              <a14:hiddenLine xmlns:a14="http://schemas.microsoft.com/office/drawing/2010/main" w="12700" cap="flat" cmpd="sng" algn="ctr">
-                <a:solidFill>
-                  <a:schemeClr val="accent1">
-                    <a:shade val="15000"/>
-                  </a:schemeClr>
-                </a:solidFill>
-                <a:prstDash val="solid"/>
-                <a:miter lim="800000"/>
-              </a14:hiddenLine>
-            </a:ext>
-          </a:extLst>
-        </p:spPr>
-        <p:style>
-          <a:lnRef idx="2">
-            <a:schemeClr val="accent1">
-              <a:shade val="15000"/>
-            </a:schemeClr>
-          </a:lnRef>
-          <a:fillRef idx="1">
-            <a:schemeClr val="accent1"/>
-          </a:fillRef>
-          <a:effectRef idx="0">
-            <a:schemeClr val="accent1"/>
-          </a:effectRef>
-          <a:fontRef idx="minor">
-            <a:schemeClr val="lt1"/>
-          </a:fontRef>
-        </p:style>
-        <p:txBody>
-          <a:bodyPr rtlCol="0" anchor="ctr"/>
-          <a:lstStyle/>
-          <a:p>
-            <a:pPr algn="ctr"/>
-            <a:endParaRPr lang="en-IN"/>
-          </a:p>
-        </p:txBody>
-      </p:sp>
-      <p:sp>
-        <p:nvSpPr>
-          <p:cNvPr id="54" name="TextBox 53">
-            <a:extLst>
-              <a:ext uri="{FF2B5EF4-FFF2-40B4-BE49-F238E27FC236}">
-                <a16:creationId xmlns:a16="http://schemas.microsoft.com/office/drawing/2014/main" id="{0980977D-A3C7-654D-95ED-64E182E42EC9}"/>
-              </a:ext>
-            </a:extLst>
-          </p:cNvPr>
-          <p:cNvSpPr txBox="1"/>
-          <p:nvPr/>
-        </p:nvSpPr>
-        <p:spPr>
-          <a:xfrm>
-            <a:off x="1234440" y="4169664"/>
-            <a:ext cx="4160520" cy="181588"/>
-          </a:xfrm>
-          <a:prstGeom prst="rect">
-            <a:avLst/>
-          </a:prstGeom>
-          <a:noFill/>
-        </p:spPr>
-        <p:txBody>
-          <a:bodyPr vert="horz" wrap="square" lIns="0" tIns="0" rIns="0" bIns="0" rtlCol="0">
-            <a:spAutoFit/>
-          </a:bodyPr>
-          <a:lstStyle/>
-          <a:p>
-            <a:r>
-              <a:rPr lang="en-IN" sz="1180" b="1">
-                <a:solidFill>
-                  <a:srgbClr val="E6EDF3"/>
-                </a:solidFill>
-                <a:latin typeface="Arial" panose="020B0604020202020204" pitchFamily="34" charset="0"/>
-              </a:rPr>
-              <a:t>Guardrails are multiplicative</a:t>
-            </a:r>
-          </a:p>
-        </p:txBody>
-      </p:sp>
-      <p:sp>
-        <p:nvSpPr>
-          <p:cNvPr id="55" name="TextBox 54">
-            <a:extLst>
-              <a:ext uri="{FF2B5EF4-FFF2-40B4-BE49-F238E27FC236}">
-                <a16:creationId xmlns:a16="http://schemas.microsoft.com/office/drawing/2014/main" id="{C465C445-A809-101B-386B-5A132CB5948C}"/>
-              </a:ext>
-            </a:extLst>
-          </p:cNvPr>
-          <p:cNvSpPr txBox="1"/>
-          <p:nvPr/>
-        </p:nvSpPr>
-        <p:spPr>
-          <a:xfrm>
-            <a:off x="1234440" y="4407408"/>
-            <a:ext cx="4224528" cy="298543"/>
-          </a:xfrm>
-          <a:prstGeom prst="rect">
-            <a:avLst/>
-          </a:prstGeom>
-          <a:noFill/>
-        </p:spPr>
-        <p:txBody>
-          <a:bodyPr vert="horz" wrap="square" lIns="0" tIns="0" rIns="0" bIns="0" rtlCol="0">
-            <a:spAutoFit/>
-          </a:bodyPr>
-          <a:lstStyle/>
-          <a:p>
-            <a:r>
-              <a:rPr lang="en-US" sz="970">
-                <a:solidFill>
-                  <a:srgbClr val="9AA7B4"/>
-                </a:solidFill>
-                <a:latin typeface="Arial" panose="020B0604020202020204" pitchFamily="34" charset="0"/>
-              </a:rPr>
-              <a:t>Impossible, off-target, or unreachable profiles cannot buy rank with keywords.</a:t>
-            </a:r>
-            <a:endParaRPr lang="en-IN" sz="970">
-              <a:solidFill>
-                <a:srgbClr val="9AA7B4"/>
-              </a:solidFill>
-              <a:latin typeface="Arial" panose="020B0604020202020204" pitchFamily="34" charset="0"/>
-            </a:endParaRPr>
-          </a:p>
-        </p:txBody>
-      </p:sp>
-      <p:sp>
-        <p:nvSpPr>
-          <p:cNvPr id="56" name="Oval 55">
-            <a:extLst>
-              <a:ext uri="{FF2B5EF4-FFF2-40B4-BE49-F238E27FC236}">
-                <a16:creationId xmlns:a16="http://schemas.microsoft.com/office/drawing/2014/main" id="{5566CFCC-B2AE-132E-6A32-85EE8E53E0FC}"/>
-              </a:ext>
-            </a:extLst>
-          </p:cNvPr>
-          <p:cNvSpPr/>
-          <p:nvPr/>
-        </p:nvSpPr>
-        <p:spPr>
-          <a:xfrm>
-            <a:off x="932688" y="4974336"/>
-            <a:ext cx="146304" cy="146304"/>
-          </a:xfrm>
-          <a:prstGeom prst="ellipse">
-            <a:avLst/>
-          </a:prstGeom>
-          <a:solidFill>
-            <a:srgbClr val="34D399"/>
-          </a:solidFill>
-          <a:ln w="12700" cap="flat" cmpd="sng" algn="ctr">
-            <a:noFill/>
-            <a:prstDash val="solid"/>
-            <a:miter lim="800000"/>
-          </a:ln>
-          <a:effectLst/>
-          <a:extLst>
-            <a:ext uri="{91240B29-F687-4F45-9708-019B960494DF}">
-              <a14:hiddenLine xmlns:a14="http://schemas.microsoft.com/office/drawing/2010/main" w="12700" cap="flat" cmpd="sng" algn="ctr">
-                <a:solidFill>
-                  <a:schemeClr val="accent1">
-                    <a:shade val="15000"/>
-                  </a:schemeClr>
-                </a:solidFill>
-                <a:prstDash val="solid"/>
-                <a:miter lim="800000"/>
-              </a14:hiddenLine>
-            </a:ext>
-          </a:extLst>
-        </p:spPr>
-        <p:style>
-          <a:lnRef idx="2">
-            <a:schemeClr val="accent1">
-              <a:shade val="15000"/>
-            </a:schemeClr>
-          </a:lnRef>
-          <a:fillRef idx="1">
-            <a:schemeClr val="accent1"/>
-          </a:fillRef>
-          <a:effectRef idx="0">
-            <a:schemeClr val="accent1"/>
-          </a:effectRef>
-          <a:fontRef idx="minor">
-            <a:schemeClr val="lt1"/>
-          </a:fontRef>
-        </p:style>
-        <p:txBody>
-          <a:bodyPr rtlCol="0" anchor="ctr"/>
-          <a:lstStyle/>
-          <a:p>
-            <a:pPr algn="ctr"/>
-            <a:endParaRPr lang="en-IN"/>
-          </a:p>
-        </p:txBody>
-      </p:sp>
-      <p:sp>
-        <p:nvSpPr>
-          <p:cNvPr id="57" name="TextBox 56">
-            <a:extLst>
-              <a:ext uri="{FF2B5EF4-FFF2-40B4-BE49-F238E27FC236}">
-                <a16:creationId xmlns:a16="http://schemas.microsoft.com/office/drawing/2014/main" id="{E9652D21-839F-758D-6273-08AE6899099B}"/>
-              </a:ext>
-            </a:extLst>
-          </p:cNvPr>
-          <p:cNvSpPr txBox="1"/>
-          <p:nvPr/>
-        </p:nvSpPr>
-        <p:spPr>
-          <a:xfrm>
-            <a:off x="1234440" y="4937760"/>
-            <a:ext cx="4160520" cy="181588"/>
-          </a:xfrm>
-          <a:prstGeom prst="rect">
-            <a:avLst/>
-          </a:prstGeom>
-          <a:noFill/>
-        </p:spPr>
-        <p:txBody>
-          <a:bodyPr vert="horz" wrap="square" lIns="0" tIns="0" rIns="0" bIns="0" rtlCol="0">
-            <a:spAutoFit/>
-          </a:bodyPr>
-          <a:lstStyle/>
-          <a:p>
-            <a:r>
-              <a:rPr lang="en-IN" sz="1180" b="1">
-                <a:solidFill>
-                  <a:srgbClr val="E6EDF3"/>
-                </a:solidFill>
-                <a:latin typeface="Arial" panose="020B0604020202020204" pitchFamily="34" charset="0"/>
-              </a:rPr>
-              <a:t>Deterministic reasoning</a:t>
-            </a:r>
-          </a:p>
-        </p:txBody>
-      </p:sp>
-      <p:sp>
-        <p:nvSpPr>
-          <p:cNvPr id="58" name="TextBox 57">
-            <a:extLst>
-              <a:ext uri="{FF2B5EF4-FFF2-40B4-BE49-F238E27FC236}">
-                <a16:creationId xmlns:a16="http://schemas.microsoft.com/office/drawing/2014/main" id="{092C095F-02DB-60A3-F6BF-11A1992E2BDC}"/>
-              </a:ext>
-            </a:extLst>
-          </p:cNvPr>
-          <p:cNvSpPr txBox="1"/>
-          <p:nvPr/>
-        </p:nvSpPr>
-        <p:spPr>
-          <a:xfrm>
-            <a:off x="1234440" y="5175504"/>
-            <a:ext cx="4224528" cy="149272"/>
-          </a:xfrm>
-          <a:prstGeom prst="rect">
-            <a:avLst/>
-          </a:prstGeom>
-          <a:noFill/>
-        </p:spPr>
-        <p:txBody>
-          <a:bodyPr vert="horz" wrap="square" lIns="0" tIns="0" rIns="0" bIns="0" rtlCol="0">
-            <a:spAutoFit/>
-          </a:bodyPr>
-          <a:lstStyle/>
-          <a:p>
-            <a:r>
-              <a:rPr lang="en-US" sz="970">
-                <a:solidFill>
-                  <a:srgbClr val="9AA7B4"/>
-                </a:solidFill>
-                <a:latin typeface="Arial" panose="020B0604020202020204" pitchFamily="34" charset="0"/>
-              </a:rPr>
-              <a:t>Same input gives the same CSV; every sentence points to real profile facts.</a:t>
-            </a:r>
-            <a:endParaRPr lang="en-IN" sz="970">
-              <a:solidFill>
-                <a:srgbClr val="9AA7B4"/>
-              </a:solidFill>
-              <a:latin typeface="Arial" panose="020B0604020202020204" pitchFamily="34" charset="0"/>
-            </a:endParaRPr>
-          </a:p>
-        </p:txBody>
-      </p:sp>
-      <p:sp>
-        <p:nvSpPr>
-          <p:cNvPr id="59" name="Rectangle: Rounded Corners 58">
-            <a:extLst>
-              <a:ext uri="{FF2B5EF4-FFF2-40B4-BE49-F238E27FC236}">
-                <a16:creationId xmlns:a16="http://schemas.microsoft.com/office/drawing/2014/main" id="{9425DBE5-6E1C-F454-DF69-C0DE1628AB39}"/>
-              </a:ext>
-            </a:extLst>
-          </p:cNvPr>
-          <p:cNvSpPr/>
-          <p:nvPr/>
-        </p:nvSpPr>
-        <p:spPr>
-          <a:xfrm>
-            <a:off x="6327648" y="1874520"/>
-            <a:ext cx="5221224" cy="4069080"/>
+                <a:latin typeface="Arial" pitchFamily="34" charset="0"/>
+                <a:ea typeface="Arial" pitchFamily="34" charset="-122"/>
+                <a:cs typeface="Arial" pitchFamily="34" charset="-120"/>
+              </a:rPr>
+              <a:t>How the rule decided</a:t>
+            </a:r>
+            <a:endParaRPr lang="en-US" sz="1500" dirty="0"/>
+          </a:p>
+        </p:txBody>
+      </p:sp>
+      <p:sp>
+        <p:nvSpPr>
+          <p:cNvPr id="21" name="Text 18"/>
+          <p:cNvSpPr/>
+          <p:nvPr/>
+        </p:nvSpPr>
+        <p:spPr>
+          <a:xfrm>
+            <a:off x="932688" y="3931920"/>
+            <a:ext cx="4724248" cy="384048"/>
+          </a:xfrm>
+          <a:prstGeom prst="rect">
+            <a:avLst/>
+          </a:prstGeom>
+          <a:noFill/>
+          <a:ln/>
+        </p:spPr>
+        <p:txBody>
+          <a:bodyPr wrap="square" rtlCol="0" anchor="ctr"/>
+          <a:lstStyle/>
+          <a:p>
+            <a:pPr marL="0" indent="0">
+              <a:lnSpc>
+                <a:spcPct val="98000"/>
+              </a:lnSpc>
+              <a:buNone/>
+            </a:pPr>
+            <a:r>
+              <a:rPr lang="en-US" sz="1100" b="1" dirty="0">
+                <a:solidFill>
+                  <a:srgbClr val="2DD4BF"/>
+                </a:solidFill>
+                <a:latin typeface="Arial" pitchFamily="34" charset="0"/>
+                <a:ea typeface="Arial" pitchFamily="34" charset="-122"/>
+                <a:cs typeface="Arial" pitchFamily="34" charset="-120"/>
+              </a:rPr>
+              <a:t>Rule first   committed before any sweep run — ties break toward the JD's down-weight instruction</a:t>
+            </a:r>
+            <a:endParaRPr lang="en-US" sz="1100" dirty="0"/>
+          </a:p>
+        </p:txBody>
+      </p:sp>
+      <p:sp>
+        <p:nvSpPr>
+          <p:cNvPr id="22" name="Text 19"/>
+          <p:cNvSpPr/>
+          <p:nvPr/>
+        </p:nvSpPr>
+        <p:spPr>
+          <a:xfrm>
+            <a:off x="932688" y="4315968"/>
+            <a:ext cx="4724248" cy="384048"/>
+          </a:xfrm>
+          <a:prstGeom prst="rect">
+            <a:avLst/>
+          </a:prstGeom>
+          <a:noFill/>
+          <a:ln/>
+        </p:spPr>
+        <p:txBody>
+          <a:bodyPr wrap="square" rtlCol="0" anchor="ctr"/>
+          <a:lstStyle/>
+          <a:p>
+            <a:pPr marL="0" indent="0">
+              <a:lnSpc>
+                <a:spcPct val="98000"/>
+              </a:lnSpc>
+              <a:buNone/>
+            </a:pPr>
+            <a:r>
+              <a:rPr lang="en-US" sz="1100" b="1" dirty="0">
+                <a:solidFill>
+                  <a:srgbClr val="2DD4BF"/>
+                </a:solidFill>
+                <a:latin typeface="Arial" pitchFamily="34" charset="0"/>
+                <a:ea typeface="Arial" pitchFamily="34" charset="-122"/>
+                <a:cs typeface="Arial" pitchFamily="34" charset="-120"/>
+              </a:rPr>
+              <a:t>Coverage guard   floor 0.85–1.00 configs excluded: &lt;95% label coverage, selection-biased</a:t>
+            </a:r>
+            <a:endParaRPr lang="en-US" sz="1100" dirty="0"/>
+          </a:p>
+        </p:txBody>
+      </p:sp>
+      <p:sp>
+        <p:nvSpPr>
+          <p:cNvPr id="23" name="Text 20"/>
+          <p:cNvSpPr/>
+          <p:nvPr/>
+        </p:nvSpPr>
+        <p:spPr>
+          <a:xfrm>
+            <a:off x="932688" y="4700016"/>
+            <a:ext cx="4724248" cy="384048"/>
+          </a:xfrm>
+          <a:prstGeom prst="rect">
+            <a:avLst/>
+          </a:prstGeom>
+          <a:noFill/>
+          <a:ln/>
+        </p:spPr>
+        <p:txBody>
+          <a:bodyPr wrap="square" rtlCol="0" anchor="ctr"/>
+          <a:lstStyle/>
+          <a:p>
+            <a:pPr marL="0" indent="0">
+              <a:lnSpc>
+                <a:spcPct val="98000"/>
+              </a:lnSpc>
+              <a:buNone/>
+            </a:pPr>
+            <a:r>
+              <a:rPr lang="en-US" sz="1100" b="1" dirty="0">
+                <a:solidFill>
+                  <a:srgbClr val="2DD4BF"/>
+                </a:solidFill>
+                <a:latin typeface="Arial" pitchFamily="34" charset="0"/>
+                <a:ea typeface="Arial" pitchFamily="34" charset="-122"/>
+                <a:cs typeface="Arial" pitchFamily="34" charset="-120"/>
+              </a:rPr>
+              <a:t>Winner   shipped config — identical top-100 across floors 0.25–0.55</a:t>
+            </a:r>
+            <a:endParaRPr lang="en-US" sz="1100" dirty="0"/>
+          </a:p>
+        </p:txBody>
+      </p:sp>
+      <p:sp>
+        <p:nvSpPr>
+          <p:cNvPr id="24" name="Shape 21"/>
+          <p:cNvSpPr/>
+          <p:nvPr/>
+        </p:nvSpPr>
+        <p:spPr>
+          <a:xfrm>
+            <a:off x="6278728" y="3200400"/>
+            <a:ext cx="5272888" cy="1874520"/>
           </a:xfrm>
           <a:prstGeom prst="roundRect">
             <a:avLst>
-              <a:gd name="adj" fmla="val 3500"/>
+              <a:gd name="adj" fmla="val 5854"/>
             </a:avLst>
           </a:prstGeom>
           <a:solidFill>
@@ -19165,870 +22134,340 @@
             <a:solidFill>
               <a:srgbClr val="2A3340"/>
             </a:solidFill>
+            <a:prstDash val="solid"/>
           </a:ln>
-        </p:spPr>
-        <p:style>
-          <a:lnRef idx="2">
-            <a:schemeClr val="accent1">
-              <a:shade val="15000"/>
-            </a:schemeClr>
-          </a:lnRef>
-          <a:fillRef idx="1">
-            <a:schemeClr val="accent1"/>
-          </a:fillRef>
-          <a:effectRef idx="0">
-            <a:schemeClr val="accent1"/>
-          </a:effectRef>
-          <a:fontRef idx="minor">
-            <a:schemeClr val="lt1"/>
-          </a:fontRef>
-        </p:style>
-        <p:txBody>
-          <a:bodyPr rtlCol="0" anchor="ctr"/>
-          <a:lstStyle/>
-          <a:p>
-            <a:pPr algn="ctr"/>
-            <a:endParaRPr lang="en-IN"/>
-          </a:p>
-        </p:txBody>
-      </p:sp>
-      <p:sp>
-        <p:nvSpPr>
-          <p:cNvPr id="60" name="TextBox 59">
-            <a:extLst>
-              <a:ext uri="{FF2B5EF4-FFF2-40B4-BE49-F238E27FC236}">
-                <a16:creationId xmlns:a16="http://schemas.microsoft.com/office/drawing/2014/main" id="{B402E204-3320-E613-E7A3-C3422B452F16}"/>
-              </a:ext>
-            </a:extLst>
-          </p:cNvPr>
-          <p:cNvSpPr txBox="1"/>
-          <p:nvPr/>
-        </p:nvSpPr>
-        <p:spPr>
-          <a:xfrm>
-            <a:off x="6620256" y="2103120"/>
-            <a:ext cx="2834640" cy="230832"/>
-          </a:xfrm>
-          <a:prstGeom prst="rect">
-            <a:avLst/>
-          </a:prstGeom>
-          <a:noFill/>
-        </p:spPr>
-        <p:txBody>
-          <a:bodyPr vert="horz" wrap="square" lIns="0" tIns="0" rIns="0" bIns="0" rtlCol="0">
-            <a:spAutoFit/>
-          </a:bodyPr>
-          <a:lstStyle/>
-          <a:p>
-            <a:r>
-              <a:rPr lang="en-IN" sz="1500" b="1">
-                <a:solidFill>
-                  <a:srgbClr val="F2B544"/>
-                </a:solidFill>
-                <a:latin typeface="Arial" panose="020B0604020202020204" pitchFamily="34" charset="0"/>
-              </a:rPr>
-              <a:t>Next hardening moves</a:t>
-            </a:r>
-          </a:p>
-        </p:txBody>
-      </p:sp>
-      <p:sp>
-        <p:nvSpPr>
-          <p:cNvPr id="61" name="Rectangle: Rounded Corners 60">
-            <a:extLst>
-              <a:ext uri="{FF2B5EF4-FFF2-40B4-BE49-F238E27FC236}">
-                <a16:creationId xmlns:a16="http://schemas.microsoft.com/office/drawing/2014/main" id="{EA2188D7-A674-11A2-BC24-7C5599F69278}"/>
-              </a:ext>
-            </a:extLst>
-          </p:cNvPr>
-          <p:cNvSpPr/>
-          <p:nvPr/>
-        </p:nvSpPr>
-        <p:spPr>
-          <a:xfrm>
-            <a:off x="10168128" y="2121408"/>
-            <a:ext cx="1005840" cy="256032"/>
+          <a:effectLst>
+            <a:outerShdw blurRad="114300" dist="38100" dir="5400000" algn="bl" rotWithShape="0">
+              <a:srgbClr val="000000">
+                <a:alpha val="28000"/>
+              </a:srgbClr>
+            </a:outerShdw>
+          </a:effectLst>
+        </p:spPr>
+        <p:txBody>
+          <a:bodyPr/>
+          <a:p/>
+        </p:txBody>
+      </p:sp>
+      <p:sp>
+        <p:nvSpPr>
+          <p:cNvPr id="25" name="Shape 22"/>
+          <p:cNvSpPr/>
+          <p:nvPr/>
+        </p:nvSpPr>
+        <p:spPr>
+          <a:xfrm>
+            <a:off x="6553048" y="3429000"/>
+            <a:ext cx="420624" cy="420624"/>
           </a:xfrm>
           <a:prstGeom prst="roundRect">
             <a:avLst>
-              <a:gd name="adj" fmla="val 50000"/>
+              <a:gd name="adj" fmla="val 15217"/>
             </a:avLst>
           </a:prstGeom>
           <a:solidFill>
-            <a:srgbClr val="1B2330"/>
+            <a:srgbClr val="2DD4BF">
+              <a:alpha val="18000"/>
+            </a:srgbClr>
           </a:solidFill>
-          <a:ln w="12700" cap="flat" cmpd="sng" algn="ctr">
+          <a:ln w="12700">
             <a:solidFill>
-              <a:srgbClr val="F2B544">
-                <a:alpha val="65000"/>
+              <a:srgbClr val="2DD4BF">
+                <a:alpha val="45000"/>
               </a:srgbClr>
             </a:solidFill>
             <a:prstDash val="solid"/>
-            <a:miter lim="800000"/>
-            <a:headEnd type="none" w="med" len="med"/>
-            <a:tailEnd type="none" w="med" len="med"/>
           </a:ln>
         </p:spPr>
-        <p:style>
-          <a:lnRef idx="2">
-            <a:schemeClr val="accent1">
-              <a:shade val="15000"/>
-            </a:schemeClr>
-          </a:lnRef>
-          <a:fillRef idx="1">
-            <a:schemeClr val="accent1"/>
-          </a:fillRef>
-          <a:effectRef idx="0">
-            <a:schemeClr val="accent1"/>
-          </a:effectRef>
-          <a:fontRef idx="minor">
-            <a:schemeClr val="lt1"/>
-          </a:fontRef>
-        </p:style>
-        <p:txBody>
-          <a:bodyPr rtlCol="0" anchor="ctr"/>
-          <a:lstStyle/>
-          <a:p>
-            <a:pPr algn="ctr"/>
-            <a:endParaRPr lang="en-IN"/>
-          </a:p>
-        </p:txBody>
-      </p:sp>
-      <p:sp>
-        <p:nvSpPr>
-          <p:cNvPr id="62" name="TextBox 61">
-            <a:extLst>
-              <a:ext uri="{FF2B5EF4-FFF2-40B4-BE49-F238E27FC236}">
-                <a16:creationId xmlns:a16="http://schemas.microsoft.com/office/drawing/2014/main" id="{3FB3AF8D-AC8D-AF5C-CC28-827BAF66CDCF}"/>
-              </a:ext>
-            </a:extLst>
-          </p:cNvPr>
-          <p:cNvSpPr txBox="1"/>
-          <p:nvPr/>
-        </p:nvSpPr>
-        <p:spPr>
-          <a:xfrm>
-            <a:off x="10241280" y="2153412"/>
-            <a:ext cx="859536" cy="130805"/>
-          </a:xfrm>
-          <a:prstGeom prst="rect">
-            <a:avLst/>
-          </a:prstGeom>
-          <a:noFill/>
-        </p:spPr>
-        <p:txBody>
-          <a:bodyPr vert="horz" wrap="square" lIns="0" tIns="0" rIns="0" bIns="0" rtlCol="0">
-            <a:spAutoFit/>
-          </a:bodyPr>
-          <a:lstStyle/>
-          <a:p>
-            <a:pPr algn="ctr"/>
-            <a:r>
-              <a:rPr lang="en-IN" sz="850" b="1">
+        <p:txBody>
+          <a:bodyPr/>
+          <a:p/>
+        </p:txBody>
+      </p:sp>
+      <p:pic>
+        <p:nvPicPr>
+          <p:cNvPr id="26" name="Image 1" descr="preencoded.png"/>
+          <p:cNvPicPr>
+            <a:picLocks noChangeAspect="1"/>
+          </p:cNvPicPr>
+          <p:nvPr/>
+        </p:nvPicPr>
+        <p:blipFill>
+          <a:blip r:embed="rId3"/>
+          <a:stretch>
+            <a:fillRect/>
+          </a:stretch>
+        </p:blipFill>
+        <p:spPr>
+          <a:xfrm>
+            <a:off x="6645585" y="3521537"/>
+            <a:ext cx="235549" cy="235549"/>
+          </a:xfrm>
+          <a:prstGeom prst="rect">
+            <a:avLst/>
+          </a:prstGeom>
+        </p:spPr>
+      </p:pic>
+      <p:sp>
+        <p:nvSpPr>
+          <p:cNvPr id="27" name="Text 23"/>
+          <p:cNvSpPr/>
+          <p:nvPr/>
+        </p:nvSpPr>
+        <p:spPr>
+          <a:xfrm>
+            <a:off x="7083400" y="3429000"/>
+            <a:ext cx="4358488" cy="411480"/>
+          </a:xfrm>
+          <a:prstGeom prst="rect">
+            <a:avLst/>
+          </a:prstGeom>
+          <a:noFill/>
+          <a:ln/>
+        </p:spPr>
+        <p:txBody>
+          <a:bodyPr wrap="square" rtlCol="0" anchor="ctr"/>
+          <a:lstStyle/>
+          <a:p>
+            <a:pPr marL="0" indent="0">
+              <a:buNone/>
+            </a:pPr>
+            <a:r>
+              <a:rPr lang="en-US" sz="1500" b="1" dirty="0">
+                <a:solidFill>
+                  <a:srgbClr val="2DD4BF"/>
+                </a:solidFill>
+                <a:latin typeface="Arial" pitchFamily="34" charset="0"/>
+                <a:ea typeface="Arial" pitchFamily="34" charset="-122"/>
+                <a:cs typeface="Arial" pitchFamily="34" charset="-120"/>
+              </a:rPr>
+              <a:t>We built our strongest rival — it lost</a:t>
+            </a:r>
+            <a:endParaRPr lang="en-US" sz="1500" dirty="0"/>
+          </a:p>
+        </p:txBody>
+      </p:sp>
+      <p:sp>
+        <p:nvSpPr>
+          <p:cNvPr id="28" name="Text 24"/>
+          <p:cNvSpPr/>
+          <p:nvPr/>
+        </p:nvSpPr>
+        <p:spPr>
+          <a:xfrm>
+            <a:off x="6571336" y="3931920"/>
+            <a:ext cx="4724248" cy="1005840"/>
+          </a:xfrm>
+          <a:prstGeom prst="rect">
+            <a:avLst/>
+          </a:prstGeom>
+          <a:noFill/>
+          <a:ln/>
+        </p:spPr>
+        <p:txBody>
+          <a:bodyPr wrap="square" rtlCol="0" anchor="t"/>
+          <a:lstStyle/>
+          <a:p>
+            <a:pPr marL="0" indent="0">
+              <a:lnSpc>
+                <a:spcPct val="110000"/>
+              </a:lnSpc>
+              <a:buNone/>
+            </a:pPr>
+            <a:r>
+              <a:rPr lang="en-US" sz="1250">
                 <a:solidFill>
                   <a:srgbClr val="E6EDF3"/>
                 </a:solidFill>
-                <a:latin typeface="Arial" panose="020B0604020202020204" pitchFamily="34" charset="0"/>
-              </a:rPr>
-              <a:t>honest roadmap</a:t>
-            </a:r>
-          </a:p>
-        </p:txBody>
-      </p:sp>
-      <p:sp>
-        <p:nvSpPr>
-          <p:cNvPr id="63" name="Oval 62">
-            <a:extLst>
-              <a:ext uri="{FF2B5EF4-FFF2-40B4-BE49-F238E27FC236}">
-                <a16:creationId xmlns:a16="http://schemas.microsoft.com/office/drawing/2014/main" id="{8C9C10B7-5A12-EDD2-C55F-FBFBC7FC0A26}"/>
-              </a:ext>
-            </a:extLst>
-          </p:cNvPr>
-          <p:cNvSpPr/>
-          <p:nvPr/>
-        </p:nvSpPr>
-        <p:spPr>
-          <a:xfrm>
-            <a:off x="6620256" y="2670048"/>
-            <a:ext cx="146305" cy="146304"/>
-          </a:xfrm>
-          <a:prstGeom prst="ellipse">
-            <a:avLst/>
+                <a:latin typeface="Arial" pitchFamily="34" charset="0"/>
+                <a:ea typeface="Arial" pitchFamily="34" charset="-122"/>
+                <a:cs typeface="Arial" pitchFamily="34" charset="-120"/>
+              </a:rPr>
+              <a:t>A LambdaMART ranker over our own 28 features plus recovered generator structure, trained on 1,500 LLM judgments, evaluated once under a gate committed before training: 0.900 vs our 0.906. Third measured negative result — the hand-tuned ordering stands because nothing we tested beats it, not because nothing was tested.</a:t>
+            </a:r>
+            <a:endParaRPr lang="en-US" sz="1250" dirty="0"/>
+          </a:p>
+        </p:txBody>
+      </p:sp>
+      <p:sp>
+        <p:nvSpPr>
+          <p:cNvPr id="29" name="Shape 25"/>
+          <p:cNvSpPr/>
+          <p:nvPr/>
+        </p:nvSpPr>
+        <p:spPr>
+          <a:xfrm>
+            <a:off x="640080" y="5257800"/>
+            <a:ext cx="10911535" cy="658368"/>
+          </a:xfrm>
+          <a:prstGeom prst="roundRect">
+            <a:avLst>
+              <a:gd name="adj" fmla="val 16667"/>
+            </a:avLst>
           </a:prstGeom>
           <a:solidFill>
-            <a:srgbClr val="F2B544"/>
+            <a:srgbClr val="161C24"/>
           </a:solidFill>
-          <a:ln w="12700" cap="flat" cmpd="sng" algn="ctr">
-            <a:noFill/>
+          <a:ln w="12700">
+            <a:solidFill>
+              <a:srgbClr val="2A3340"/>
+            </a:solidFill>
             <a:prstDash val="solid"/>
-            <a:miter lim="800000"/>
           </a:ln>
-          <a:effectLst/>
-          <a:extLst>
-            <a:ext uri="{91240B29-F687-4F45-9708-019B960494DF}">
-              <a14:hiddenLine xmlns:a14="http://schemas.microsoft.com/office/drawing/2010/main" w="12700" cap="flat" cmpd="sng" algn="ctr">
-                <a:solidFill>
-                  <a:schemeClr val="accent1">
-                    <a:shade val="15000"/>
-                  </a:schemeClr>
-                </a:solidFill>
-                <a:prstDash val="solid"/>
-                <a:miter lim="800000"/>
-              </a14:hiddenLine>
-            </a:ext>
-          </a:extLst>
-        </p:spPr>
-        <p:style>
-          <a:lnRef idx="2">
-            <a:schemeClr val="accent1">
-              <a:shade val="15000"/>
-            </a:schemeClr>
-          </a:lnRef>
-          <a:fillRef idx="1">
-            <a:schemeClr val="accent1"/>
-          </a:fillRef>
-          <a:effectRef idx="0">
-            <a:schemeClr val="accent1"/>
-          </a:effectRef>
-          <a:fontRef idx="minor">
-            <a:schemeClr val="lt1"/>
-          </a:fontRef>
-        </p:style>
-        <p:txBody>
-          <a:bodyPr rtlCol="0" anchor="ctr"/>
-          <a:lstStyle/>
-          <a:p>
-            <a:pPr algn="ctr"/>
-            <a:endParaRPr lang="en-IN"/>
-          </a:p>
-        </p:txBody>
-      </p:sp>
-      <p:sp>
-        <p:nvSpPr>
-          <p:cNvPr id="64" name="TextBox 63">
-            <a:extLst>
-              <a:ext uri="{FF2B5EF4-FFF2-40B4-BE49-F238E27FC236}">
-                <a16:creationId xmlns:a16="http://schemas.microsoft.com/office/drawing/2014/main" id="{7BCCC323-0FD6-74B1-9D75-C5081038251E}"/>
-              </a:ext>
-            </a:extLst>
-          </p:cNvPr>
-          <p:cNvSpPr txBox="1"/>
-          <p:nvPr/>
-        </p:nvSpPr>
-        <p:spPr>
-          <a:xfrm>
-            <a:off x="6922008" y="2633472"/>
-            <a:ext cx="3977640" cy="181588"/>
-          </a:xfrm>
-          <a:prstGeom prst="rect">
-            <a:avLst/>
-          </a:prstGeom>
-          <a:noFill/>
-        </p:spPr>
-        <p:txBody>
-          <a:bodyPr vert="horz" wrap="square" lIns="0" tIns="0" rIns="0" bIns="0" rtlCol="0">
-            <a:spAutoFit/>
-          </a:bodyPr>
-          <a:lstStyle/>
-          <a:p>
-            <a:r>
-              <a:rPr lang="en-IN" sz="1180" b="1">
-                <a:solidFill>
-                  <a:srgbClr val="E6EDF3"/>
-                </a:solidFill>
-                <a:latin typeface="Arial" panose="020B0604020202020204" pitchFamily="34" charset="0"/>
-              </a:rPr>
-              <a:t>Hidden ground truth</a:t>
-            </a:r>
-          </a:p>
-        </p:txBody>
-      </p:sp>
-      <p:sp>
-        <p:nvSpPr>
-          <p:cNvPr id="65" name="TextBox 64">
-            <a:extLst>
-              <a:ext uri="{FF2B5EF4-FFF2-40B4-BE49-F238E27FC236}">
-                <a16:creationId xmlns:a16="http://schemas.microsoft.com/office/drawing/2014/main" id="{23450987-E5E3-55D7-DAD0-B890DBEDF3D5}"/>
-              </a:ext>
-            </a:extLst>
-          </p:cNvPr>
-          <p:cNvSpPr txBox="1"/>
-          <p:nvPr/>
-        </p:nvSpPr>
-        <p:spPr>
-          <a:xfrm>
-            <a:off x="6922008" y="2871216"/>
-            <a:ext cx="4069080" cy="298543"/>
-          </a:xfrm>
-          <a:prstGeom prst="rect">
-            <a:avLst/>
-          </a:prstGeom>
-          <a:noFill/>
-        </p:spPr>
-        <p:txBody>
-          <a:bodyPr vert="horz" wrap="square" lIns="0" tIns="0" rIns="0" bIns="0" rtlCol="0">
-            <a:spAutoFit/>
-          </a:bodyPr>
-          <a:lstStyle/>
-          <a:p>
-            <a:r>
-              <a:rPr lang="en-US" sz="970">
-                <a:solidFill>
-                  <a:srgbClr val="9AA7B4"/>
-                </a:solidFill>
-                <a:latin typeface="Arial" panose="020B0604020202020204" pitchFamily="34" charset="0"/>
-              </a:rPr>
-              <a:t>The official leaderboard is unseen, so proxy eval is evidence - not a score claim.</a:t>
-            </a:r>
-            <a:endParaRPr lang="en-IN" sz="970">
-              <a:solidFill>
-                <a:srgbClr val="9AA7B4"/>
-              </a:solidFill>
-              <a:latin typeface="Arial" panose="020B0604020202020204" pitchFamily="34" charset="0"/>
-            </a:endParaRPr>
-          </a:p>
-        </p:txBody>
-      </p:sp>
-      <p:sp>
-        <p:nvSpPr>
-          <p:cNvPr id="66" name="Oval 65">
-            <a:extLst>
-              <a:ext uri="{FF2B5EF4-FFF2-40B4-BE49-F238E27FC236}">
-                <a16:creationId xmlns:a16="http://schemas.microsoft.com/office/drawing/2014/main" id="{ACFA018F-70B3-3FC7-8CA0-2630C810BFD7}"/>
-              </a:ext>
-            </a:extLst>
-          </p:cNvPr>
-          <p:cNvSpPr/>
-          <p:nvPr/>
-        </p:nvSpPr>
-        <p:spPr>
-          <a:xfrm>
-            <a:off x="6620256" y="3438144"/>
-            <a:ext cx="146305" cy="146304"/>
-          </a:xfrm>
-          <a:prstGeom prst="ellipse">
-            <a:avLst/>
-          </a:prstGeom>
-          <a:solidFill>
-            <a:srgbClr val="F2B544"/>
-          </a:solidFill>
-          <a:ln w="12700" cap="flat" cmpd="sng" algn="ctr">
-            <a:noFill/>
-            <a:prstDash val="solid"/>
-            <a:miter lim="800000"/>
-          </a:ln>
-          <a:effectLst/>
-          <a:extLst>
-            <a:ext uri="{91240B29-F687-4F45-9708-019B960494DF}">
-              <a14:hiddenLine xmlns:a14="http://schemas.microsoft.com/office/drawing/2010/main" w="12700" cap="flat" cmpd="sng" algn="ctr">
-                <a:solidFill>
-                  <a:schemeClr val="accent1">
-                    <a:shade val="15000"/>
-                  </a:schemeClr>
-                </a:solidFill>
-                <a:prstDash val="solid"/>
-                <a:miter lim="800000"/>
-              </a14:hiddenLine>
-            </a:ext>
-          </a:extLst>
-        </p:spPr>
-        <p:style>
-          <a:lnRef idx="2">
-            <a:schemeClr val="accent1">
-              <a:shade val="15000"/>
-            </a:schemeClr>
-          </a:lnRef>
-          <a:fillRef idx="1">
-            <a:schemeClr val="accent1"/>
-          </a:fillRef>
-          <a:effectRef idx="0">
-            <a:schemeClr val="accent1"/>
-          </a:effectRef>
-          <a:fontRef idx="minor">
-            <a:schemeClr val="lt1"/>
-          </a:fontRef>
-        </p:style>
-        <p:txBody>
-          <a:bodyPr rtlCol="0" anchor="ctr"/>
-          <a:lstStyle/>
-          <a:p>
-            <a:pPr algn="ctr"/>
-            <a:endParaRPr lang="en-IN"/>
-          </a:p>
-        </p:txBody>
-      </p:sp>
-      <p:sp>
-        <p:nvSpPr>
-          <p:cNvPr id="67" name="TextBox 66">
-            <a:extLst>
-              <a:ext uri="{FF2B5EF4-FFF2-40B4-BE49-F238E27FC236}">
-                <a16:creationId xmlns:a16="http://schemas.microsoft.com/office/drawing/2014/main" id="{DB67AD5C-6325-897F-5918-03809559024E}"/>
-              </a:ext>
-            </a:extLst>
-          </p:cNvPr>
-          <p:cNvSpPr txBox="1"/>
-          <p:nvPr/>
-        </p:nvSpPr>
-        <p:spPr>
-          <a:xfrm>
-            <a:off x="6922008" y="3401568"/>
-            <a:ext cx="3977640" cy="181588"/>
-          </a:xfrm>
-          <a:prstGeom prst="rect">
-            <a:avLst/>
-          </a:prstGeom>
-          <a:noFill/>
-        </p:spPr>
-        <p:txBody>
-          <a:bodyPr vert="horz" wrap="square" lIns="0" tIns="0" rIns="0" bIns="0" rtlCol="0">
-            <a:spAutoFit/>
-          </a:bodyPr>
-          <a:lstStyle/>
-          <a:p>
-            <a:r>
-              <a:rPr lang="en-IN" sz="1180" b="1">
-                <a:solidFill>
-                  <a:srgbClr val="E6EDF3"/>
-                </a:solidFill>
-                <a:latin typeface="Arial" panose="020B0604020202020204" pitchFamily="34" charset="0"/>
-              </a:rPr>
-              <a:t>Conservative hard-trap recall</a:t>
-            </a:r>
-          </a:p>
-        </p:txBody>
-      </p:sp>
-      <p:sp>
-        <p:nvSpPr>
-          <p:cNvPr id="68" name="TextBox 67">
-            <a:extLst>
-              <a:ext uri="{FF2B5EF4-FFF2-40B4-BE49-F238E27FC236}">
-                <a16:creationId xmlns:a16="http://schemas.microsoft.com/office/drawing/2014/main" id="{65CA9012-83C7-78FB-450B-5197DF33BFA9}"/>
-              </a:ext>
-            </a:extLst>
-          </p:cNvPr>
-          <p:cNvSpPr txBox="1"/>
-          <p:nvPr/>
-        </p:nvSpPr>
-        <p:spPr>
-          <a:xfrm>
-            <a:off x="6922008" y="3639312"/>
-            <a:ext cx="4069080" cy="298543"/>
-          </a:xfrm>
-          <a:prstGeom prst="rect">
-            <a:avLst/>
-          </a:prstGeom>
-          <a:noFill/>
-        </p:spPr>
-        <p:txBody>
-          <a:bodyPr vert="horz" wrap="square" lIns="0" tIns="0" rIns="0" bIns="0" rtlCol="0">
-            <a:spAutoFit/>
-          </a:bodyPr>
-          <a:lstStyle/>
-          <a:p>
-            <a:r>
-              <a:rPr lang="en-US" sz="970">
-                <a:solidFill>
-                  <a:srgbClr val="9AA7B4"/>
-                </a:solidFill>
-                <a:latin typeface="Arial" panose="020B0604020202020204" pitchFamily="34" charset="0"/>
-              </a:rPr>
-              <a:t>53 hard traps are blocked; softer suspicious profiles are down-weighted, not over-zeroed.</a:t>
-            </a:r>
-            <a:endParaRPr lang="en-IN" sz="970">
-              <a:solidFill>
-                <a:srgbClr val="9AA7B4"/>
-              </a:solidFill>
-              <a:latin typeface="Arial" panose="020B0604020202020204" pitchFamily="34" charset="0"/>
-            </a:endParaRPr>
-          </a:p>
-        </p:txBody>
-      </p:sp>
-      <p:sp>
-        <p:nvSpPr>
-          <p:cNvPr id="69" name="Oval 68">
-            <a:extLst>
-              <a:ext uri="{FF2B5EF4-FFF2-40B4-BE49-F238E27FC236}">
-                <a16:creationId xmlns:a16="http://schemas.microsoft.com/office/drawing/2014/main" id="{4D2DCEE6-4F93-0777-F568-EE8CC4494EB7}"/>
-              </a:ext>
-            </a:extLst>
-          </p:cNvPr>
-          <p:cNvSpPr/>
-          <p:nvPr/>
-        </p:nvSpPr>
-        <p:spPr>
-          <a:xfrm>
-            <a:off x="6620256" y="4206240"/>
-            <a:ext cx="146305" cy="146304"/>
-          </a:xfrm>
-          <a:prstGeom prst="ellipse">
-            <a:avLst/>
-          </a:prstGeom>
-          <a:solidFill>
-            <a:srgbClr val="F2B544"/>
-          </a:solidFill>
-          <a:ln w="12700" cap="flat" cmpd="sng" algn="ctr">
-            <a:noFill/>
-            <a:prstDash val="solid"/>
-            <a:miter lim="800000"/>
-          </a:ln>
-          <a:effectLst/>
-          <a:extLst>
-            <a:ext uri="{91240B29-F687-4F45-9708-019B960494DF}">
-              <a14:hiddenLine xmlns:a14="http://schemas.microsoft.com/office/drawing/2010/main" w="12700" cap="flat" cmpd="sng" algn="ctr">
-                <a:solidFill>
-                  <a:schemeClr val="accent1">
-                    <a:shade val="15000"/>
-                  </a:schemeClr>
-                </a:solidFill>
-                <a:prstDash val="solid"/>
-                <a:miter lim="800000"/>
-              </a14:hiddenLine>
-            </a:ext>
-          </a:extLst>
-        </p:spPr>
-        <p:style>
-          <a:lnRef idx="2">
-            <a:schemeClr val="accent1">
-              <a:shade val="15000"/>
-            </a:schemeClr>
-          </a:lnRef>
-          <a:fillRef idx="1">
-            <a:schemeClr val="accent1"/>
-          </a:fillRef>
-          <a:effectRef idx="0">
-            <a:schemeClr val="accent1"/>
-          </a:effectRef>
-          <a:fontRef idx="minor">
-            <a:schemeClr val="lt1"/>
-          </a:fontRef>
-        </p:style>
-        <p:txBody>
-          <a:bodyPr rtlCol="0" anchor="ctr"/>
-          <a:lstStyle/>
-          <a:p>
-            <a:pPr algn="ctr"/>
-            <a:endParaRPr lang="en-IN"/>
-          </a:p>
-        </p:txBody>
-      </p:sp>
-      <p:sp>
-        <p:nvSpPr>
-          <p:cNvPr id="70" name="TextBox 69">
-            <a:extLst>
-              <a:ext uri="{FF2B5EF4-FFF2-40B4-BE49-F238E27FC236}">
-                <a16:creationId xmlns:a16="http://schemas.microsoft.com/office/drawing/2014/main" id="{172A7CE0-AD36-A8A0-95BC-81D017C6E757}"/>
-              </a:ext>
-            </a:extLst>
-          </p:cNvPr>
-          <p:cNvSpPr txBox="1"/>
-          <p:nvPr/>
-        </p:nvSpPr>
-        <p:spPr>
-          <a:xfrm>
-            <a:off x="6922008" y="4169664"/>
-            <a:ext cx="3977640" cy="181588"/>
-          </a:xfrm>
-          <a:prstGeom prst="rect">
-            <a:avLst/>
-          </a:prstGeom>
-          <a:noFill/>
-        </p:spPr>
-        <p:txBody>
-          <a:bodyPr vert="horz" wrap="square" lIns="0" tIns="0" rIns="0" bIns="0" rtlCol="0">
-            <a:spAutoFit/>
-          </a:bodyPr>
-          <a:lstStyle/>
-          <a:p>
-            <a:r>
-              <a:rPr lang="en-IN" sz="1180" b="1">
-                <a:solidFill>
-                  <a:srgbClr val="E6EDF3"/>
-                </a:solidFill>
-                <a:latin typeface="Arial" panose="020B0604020202020204" pitchFamily="34" charset="0"/>
-              </a:rPr>
-              <a:t>Learned ranking layer</a:t>
-            </a:r>
-          </a:p>
-        </p:txBody>
-      </p:sp>
-      <p:sp>
-        <p:nvSpPr>
-          <p:cNvPr id="71" name="TextBox 70">
-            <a:extLst>
-              <a:ext uri="{FF2B5EF4-FFF2-40B4-BE49-F238E27FC236}">
-                <a16:creationId xmlns:a16="http://schemas.microsoft.com/office/drawing/2014/main" id="{C3BDCBC8-26CB-3637-B4F1-B93E0DA85C62}"/>
-              </a:ext>
-            </a:extLst>
-          </p:cNvPr>
-          <p:cNvSpPr txBox="1"/>
-          <p:nvPr/>
-        </p:nvSpPr>
-        <p:spPr>
-          <a:xfrm>
-            <a:off x="6922008" y="4407408"/>
-            <a:ext cx="4069080" cy="298543"/>
-          </a:xfrm>
-          <a:prstGeom prst="rect">
-            <a:avLst/>
-          </a:prstGeom>
-          <a:noFill/>
-        </p:spPr>
-        <p:txBody>
-          <a:bodyPr vert="horz" wrap="square" lIns="0" tIns="0" rIns="0" bIns="0" rtlCol="0">
-            <a:spAutoFit/>
-          </a:bodyPr>
-          <a:lstStyle/>
-          <a:p>
-            <a:r>
-              <a:rPr lang="en-US" sz="970">
-                <a:solidFill>
-                  <a:srgbClr val="9AA7B4"/>
-                </a:solidFill>
-                <a:latin typeface="Arial" panose="020B0604020202020204" pitchFamily="34" charset="0"/>
-              </a:rPr>
-              <a:t>Future labels could train LambdaMART/XGBoost over these same features.</a:t>
-            </a:r>
-            <a:endParaRPr lang="en-IN" sz="970">
-              <a:solidFill>
-                <a:srgbClr val="9AA7B4"/>
-              </a:solidFill>
-              <a:latin typeface="Arial" panose="020B0604020202020204" pitchFamily="34" charset="0"/>
-            </a:endParaRPr>
-          </a:p>
-        </p:txBody>
-      </p:sp>
-      <p:sp>
-        <p:nvSpPr>
-          <p:cNvPr id="72" name="Oval 71">
-            <a:extLst>
-              <a:ext uri="{FF2B5EF4-FFF2-40B4-BE49-F238E27FC236}">
-                <a16:creationId xmlns:a16="http://schemas.microsoft.com/office/drawing/2014/main" id="{DE643930-814C-A471-7958-9543710F14CF}"/>
-              </a:ext>
-            </a:extLst>
-          </p:cNvPr>
-          <p:cNvSpPr/>
-          <p:nvPr/>
-        </p:nvSpPr>
-        <p:spPr>
-          <a:xfrm>
-            <a:off x="6620256" y="4974336"/>
-            <a:ext cx="146305" cy="146304"/>
-          </a:xfrm>
-          <a:prstGeom prst="ellipse">
-            <a:avLst/>
-          </a:prstGeom>
-          <a:solidFill>
-            <a:srgbClr val="F2B544"/>
-          </a:solidFill>
-          <a:ln w="12700" cap="flat" cmpd="sng" algn="ctr">
-            <a:noFill/>
-            <a:prstDash val="solid"/>
-            <a:miter lim="800000"/>
-          </a:ln>
-          <a:effectLst/>
-          <a:extLst>
-            <a:ext uri="{91240B29-F687-4F45-9708-019B960494DF}">
-              <a14:hiddenLine xmlns:a14="http://schemas.microsoft.com/office/drawing/2010/main" w="12700" cap="flat" cmpd="sng" algn="ctr">
-                <a:solidFill>
-                  <a:schemeClr val="accent1">
-                    <a:shade val="15000"/>
-                  </a:schemeClr>
-                </a:solidFill>
-                <a:prstDash val="solid"/>
-                <a:miter lim="800000"/>
-              </a14:hiddenLine>
-            </a:ext>
-          </a:extLst>
-        </p:spPr>
-        <p:style>
-          <a:lnRef idx="2">
-            <a:schemeClr val="accent1">
-              <a:shade val="15000"/>
-            </a:schemeClr>
-          </a:lnRef>
-          <a:fillRef idx="1">
-            <a:schemeClr val="accent1"/>
-          </a:fillRef>
-          <a:effectRef idx="0">
-            <a:schemeClr val="accent1"/>
-          </a:effectRef>
-          <a:fontRef idx="minor">
-            <a:schemeClr val="lt1"/>
-          </a:fontRef>
-        </p:style>
-        <p:txBody>
-          <a:bodyPr rtlCol="0" anchor="ctr"/>
-          <a:lstStyle/>
-          <a:p>
-            <a:pPr algn="ctr"/>
-            <a:endParaRPr lang="en-IN"/>
-          </a:p>
-        </p:txBody>
-      </p:sp>
-      <p:sp>
-        <p:nvSpPr>
-          <p:cNvPr id="73" name="TextBox 72">
-            <a:extLst>
-              <a:ext uri="{FF2B5EF4-FFF2-40B4-BE49-F238E27FC236}">
-                <a16:creationId xmlns:a16="http://schemas.microsoft.com/office/drawing/2014/main" id="{C25B9317-2BAC-3C5A-192F-941B13C5A173}"/>
-              </a:ext>
-            </a:extLst>
-          </p:cNvPr>
-          <p:cNvSpPr txBox="1"/>
-          <p:nvPr/>
-        </p:nvSpPr>
-        <p:spPr>
-          <a:xfrm>
-            <a:off x="6922008" y="4937760"/>
-            <a:ext cx="3977640" cy="181588"/>
-          </a:xfrm>
-          <a:prstGeom prst="rect">
-            <a:avLst/>
-          </a:prstGeom>
-          <a:noFill/>
-        </p:spPr>
-        <p:txBody>
-          <a:bodyPr vert="horz" wrap="square" lIns="0" tIns="0" rIns="0" bIns="0" rtlCol="0">
-            <a:spAutoFit/>
-          </a:bodyPr>
-          <a:lstStyle/>
-          <a:p>
-            <a:r>
-              <a:rPr lang="en-IN" sz="1180" b="1">
-                <a:solidFill>
-                  <a:srgbClr val="E6EDF3"/>
-                </a:solidFill>
-                <a:latin typeface="Arial" panose="020B0604020202020204" pitchFamily="34" charset="0"/>
-              </a:rPr>
-              <a:t>Stage-3 fallback</a:t>
-            </a:r>
-          </a:p>
-        </p:txBody>
-      </p:sp>
-      <p:sp>
-        <p:nvSpPr>
-          <p:cNvPr id="74" name="TextBox 73">
-            <a:extLst>
-              <a:ext uri="{FF2B5EF4-FFF2-40B4-BE49-F238E27FC236}">
-                <a16:creationId xmlns:a16="http://schemas.microsoft.com/office/drawing/2014/main" id="{78828866-18CD-81AE-4355-588C89B9E6E5}"/>
-              </a:ext>
-            </a:extLst>
-          </p:cNvPr>
-          <p:cNvSpPr txBox="1"/>
-          <p:nvPr/>
-        </p:nvSpPr>
-        <p:spPr>
-          <a:xfrm>
-            <a:off x="6922008" y="5175504"/>
-            <a:ext cx="4069080" cy="298543"/>
-          </a:xfrm>
-          <a:prstGeom prst="rect">
-            <a:avLst/>
-          </a:prstGeom>
-          <a:noFill/>
-        </p:spPr>
-        <p:txBody>
-          <a:bodyPr vert="horz" wrap="square" lIns="0" tIns="0" rIns="0" bIns="0" rtlCol="0">
-            <a:spAutoFit/>
-          </a:bodyPr>
-          <a:lstStyle/>
-          <a:p>
-            <a:r>
-              <a:rPr lang="en-US" sz="970">
-                <a:solidFill>
-                  <a:srgbClr val="9AA7B4"/>
-                </a:solidFill>
-                <a:latin typeface="Arial" panose="020B0604020202020204" pitchFamily="34" charset="0"/>
-              </a:rPr>
-              <a:t>If multiprocessing is constrained, --workers 1 preserves the exact same ranking output.</a:t>
-            </a:r>
-            <a:endParaRPr lang="en-IN" sz="970">
-              <a:solidFill>
-                <a:srgbClr val="9AA7B4"/>
-              </a:solidFill>
-              <a:latin typeface="Arial" panose="020B0604020202020204" pitchFamily="34" charset="0"/>
-            </a:endParaRPr>
-          </a:p>
-        </p:txBody>
-      </p:sp>
-      <p:sp>
-        <p:nvSpPr>
-          <p:cNvPr id="75" name="TextBox 74">
-            <a:extLst>
-              <a:ext uri="{FF2B5EF4-FFF2-40B4-BE49-F238E27FC236}">
-                <a16:creationId xmlns:a16="http://schemas.microsoft.com/office/drawing/2014/main" id="{3D4244A4-91F0-1D7E-70B3-924D9921A5B3}"/>
-              </a:ext>
-            </a:extLst>
-          </p:cNvPr>
-          <p:cNvSpPr txBox="1"/>
-          <p:nvPr/>
-        </p:nvSpPr>
-        <p:spPr>
-          <a:xfrm>
-            <a:off x="10881360" y="6473952"/>
-            <a:ext cx="914400" cy="138499"/>
-          </a:xfrm>
-          <a:prstGeom prst="rect">
-            <a:avLst/>
-          </a:prstGeom>
-          <a:noFill/>
-        </p:spPr>
-        <p:txBody>
-          <a:bodyPr vert="horz" wrap="square" lIns="0" tIns="0" rIns="0" bIns="0" rtlCol="0">
-            <a:spAutoFit/>
-          </a:bodyPr>
-          <a:lstStyle/>
-          <a:p>
-            <a:pPr algn="r"/>
-            <a:r>
-              <a:rPr lang="en-IN" sz="900">
+          <a:effectLst>
+            <a:outerShdw blurRad="114300" dist="38100" dir="5400000" algn="bl" rotWithShape="0">
+              <a:srgbClr val="000000">
+                <a:alpha val="28000"/>
+              </a:srgbClr>
+            </a:outerShdw>
+          </a:effectLst>
+        </p:spPr>
+        <p:txBody>
+          <a:bodyPr/>
+          <a:p/>
+        </p:txBody>
+      </p:sp>
+      <p:pic>
+        <p:nvPicPr>
+          <p:cNvPr id="30" name="Image 2" descr="preencoded.png"/>
+          <p:cNvPicPr>
+            <a:picLocks noChangeAspect="1"/>
+          </p:cNvPicPr>
+          <p:nvPr/>
+        </p:nvPicPr>
+        <p:blipFill>
+          <a:blip r:embed="rId4"/>
+          <a:stretch>
+            <a:fillRect/>
+          </a:stretch>
+        </p:blipFill>
+        <p:spPr>
+          <a:xfrm>
+            <a:off x="914400" y="5413248"/>
+            <a:ext cx="292608" cy="292608"/>
+          </a:xfrm>
+          <a:prstGeom prst="rect">
+            <a:avLst/>
+          </a:prstGeom>
+        </p:spPr>
+      </p:pic>
+      <p:sp>
+        <p:nvSpPr>
+          <p:cNvPr id="31" name="Text 26"/>
+          <p:cNvSpPr/>
+          <p:nvPr/>
+        </p:nvSpPr>
+        <p:spPr>
+          <a:xfrm>
+            <a:off x="1325880" y="5257800"/>
+            <a:ext cx="9905695" cy="658368"/>
+          </a:xfrm>
+          <a:prstGeom prst="rect">
+            <a:avLst/>
+          </a:prstGeom>
+          <a:noFill/>
+          <a:ln/>
+        </p:spPr>
+        <p:txBody>
+          <a:bodyPr wrap="square" rtlCol="0" anchor="ctr"/>
+          <a:lstStyle/>
+          <a:p>
+            <a:pPr marL="0" indent="0">
+              <a:lnSpc>
+                <a:spcPct val="100000"/>
+              </a:lnSpc>
+              <a:buNone/>
+            </a:pPr>
+            <a:r>
+              <a:rPr lang="en-US" sz="1200" b="1" dirty="0">
+                <a:solidFill>
+                  <a:srgbClr val="F2B544"/>
+                </a:solidFill>
+                <a:latin typeface="Arial" pitchFamily="34" charset="0"/>
+                <a:ea typeface="Arial" pitchFamily="34" charset="-122"/>
+                <a:cs typeface="Arial" pitchFamily="34" charset="-120"/>
+              </a:rPr>
+              <a:t>Honest framing:  the pool plants 11 perfect-on-paper-but-unavailable seniors (response rates to 0.07) and one honeypot in gold clothing — the guardrails demote all 12; an LLM judge missed one of them.</a:t>
+            </a:r>
+            <a:endParaRPr lang="en-US" sz="1200" dirty="0"/>
+          </a:p>
+        </p:txBody>
+      </p:sp>
+      <p:sp>
+        <p:nvSpPr>
+          <p:cNvPr id="32" name="Text 27"/>
+          <p:cNvSpPr/>
+          <p:nvPr/>
+        </p:nvSpPr>
+        <p:spPr>
+          <a:xfrm>
+            <a:off x="10911535" y="6473952"/>
+            <a:ext cx="914400" cy="228600"/>
+          </a:xfrm>
+          <a:prstGeom prst="rect">
+            <a:avLst/>
+          </a:prstGeom>
+          <a:noFill/>
+          <a:ln/>
+        </p:spPr>
+        <p:txBody>
+          <a:bodyPr wrap="square" rtlCol="0" anchor="ctr"/>
+          <a:lstStyle/>
+          <a:p>
+            <a:pPr marL="0" indent="0" algn="r">
+              <a:buNone/>
+            </a:pPr>
+            <a:r>
+              <a:rPr lang="en-US" sz="900">
                 <a:solidFill>
                   <a:srgbClr val="6E7C8C"/>
                 </a:solidFill>
-                <a:latin typeface="Arial" panose="020B0604020202020204" pitchFamily="34" charset="0"/>
-              </a:rPr>
-              <a:t>9 / 11</a:t>
-            </a:r>
-          </a:p>
-        </p:txBody>
-      </p:sp>
-      <p:sp>
-        <p:nvSpPr>
-          <p:cNvPr id="76" name="TextBox 75">
-            <a:extLst>
-              <a:ext uri="{FF2B5EF4-FFF2-40B4-BE49-F238E27FC236}">
-                <a16:creationId xmlns:a16="http://schemas.microsoft.com/office/drawing/2014/main" id="{F6E0AFF0-E97A-F8A4-E153-3C6C28B07756}"/>
-              </a:ext>
-            </a:extLst>
-          </p:cNvPr>
-          <p:cNvSpPr txBox="1"/>
+                <a:latin typeface="Arial" pitchFamily="34" charset="0"/>
+                <a:ea typeface="Arial" pitchFamily="34" charset="-122"/>
+                <a:cs typeface="Arial" pitchFamily="34" charset="-120"/>
+              </a:rPr>
+              <a:t>9 / 13</a:t>
+            </a:r>
+            <a:endParaRPr lang="en-US" sz="900" dirty="0"/>
+          </a:p>
+        </p:txBody>
+      </p:sp>
+      <p:sp>
+        <p:nvSpPr>
+          <p:cNvPr id="33" name="Text 28"/>
+          <p:cNvSpPr/>
           <p:nvPr/>
         </p:nvSpPr>
         <p:spPr>
           <a:xfrm>
             <a:off x="640080" y="6473952"/>
-            <a:ext cx="2743200" cy="138499"/>
-          </a:xfrm>
-          <a:prstGeom prst="rect">
-            <a:avLst/>
-          </a:prstGeom>
-          <a:noFill/>
-        </p:spPr>
-        <p:txBody>
-          <a:bodyPr vert="horz" wrap="square" lIns="0" tIns="0" rIns="0" bIns="0" rtlCol="0">
-            <a:spAutoFit/>
-          </a:bodyPr>
-          <a:lstStyle/>
-          <a:p>
-            <a:r>
-              <a:rPr lang="en-IN" sz="900" b="1">
+            <a:ext cx="2743200" cy="228600"/>
+          </a:xfrm>
+          <a:prstGeom prst="rect">
+            <a:avLst/>
+          </a:prstGeom>
+          <a:noFill/>
+          <a:ln/>
+        </p:spPr>
+        <p:txBody>
+          <a:bodyPr wrap="square" rtlCol="0" anchor="ctr"/>
+          <a:lstStyle/>
+          <a:p>
+            <a:pPr marL="0" indent="0">
+              <a:buNone/>
+            </a:pPr>
+            <a:r>
+              <a:rPr lang="en-US" sz="900" b="1" kern="0" spc="200" dirty="0">
                 <a:solidFill>
                   <a:srgbClr val="6E7C8C"/>
                 </a:solidFill>
-                <a:latin typeface="Arial" panose="020B0604020202020204" pitchFamily="34" charset="0"/>
+                <a:latin typeface="Arial" pitchFamily="34" charset="0"/>
+                <a:ea typeface="Arial" pitchFamily="34" charset="-122"/>
+                <a:cs typeface="Arial" pitchFamily="34" charset="-120"/>
               </a:rPr>
               <a:t>HIREFIT RANKER</a:t>
             </a:r>
+            <a:endParaRPr lang="en-US" sz="900" dirty="0"/>
           </a:p>
         </p:txBody>
       </p:sp>

--- a/docs/HireFit_Ranker_Redrob_POLISHED.pptx
+++ b/docs/HireFit_Ranker_Redrob_POLISHED.pptx
@@ -1978,7 +1978,7 @@
                 <a:ea typeface="Arial" pitchFamily="34" charset="-122"/>
                 <a:cs typeface="Arial" pitchFamily="34" charset="-120"/>
               </a:rPr>
-              <a:t>187s</a:t>
+              <a:t>80s</a:t>
             </a:r>
             <a:endParaRPr lang="en-US" sz="3300" dirty="0"/>
           </a:p>
@@ -2017,7 +2017,7 @@
                 <a:ea typeface="Arial" pitchFamily="34" charset="-122"/>
                 <a:cs typeface="Arial" pitchFamily="34" charset="-120"/>
               </a:rPr>
-              <a:t>CPU runtime (≤300s)</a:t>
+              <a:t>cloud CPU runtime (≤300s)</a:t>
             </a:r>
             <a:endParaRPr lang="en-US" sz="1100" dirty="0"/>
           </a:p>
@@ -4803,7 +4803,7 @@
                 <a:ea typeface="Arial" pitchFamily="34" charset="-122"/>
                 <a:cs typeface="Arial" pitchFamily="34" charset="-120"/>
               </a:rPr>
-              <a:t>187 s</a:t>
+              <a:t>80–122 s</a:t>
             </a:r>
             <a:endParaRPr lang="en-US" sz="1250" dirty="0"/>
           </a:p>
@@ -7710,7 +7710,7 @@
                 <a:ea typeface="Arial" pitchFamily="34" charset="-122"/>
                 <a:cs typeface="Arial" pitchFamily="34" charset="-120"/>
               </a:rPr>
-              <a:t>100K scored offline, on CPU, in 187s</a:t>
+              <a:t>100K scored offline, on CPU, in 80s on cloud hardware</a:t>
             </a:r>
             <a:endParaRPr lang="en-US" sz="1250" dirty="0"/>
           </a:p>

--- a/docs/HireFit_Ranker_Redrob_POLISHED.pptx
+++ b/docs/HireFit_Ranker_Redrob_POLISHED.pptx
@@ -11,12 +11,12 @@
     <p:sldId id="256" r:id="rId2"/>
     <p:sldId id="257" r:id="rId3"/>
     <p:sldId id="258" r:id="rId4"/>
+    <p:sldId id="267" r:id="rId18"/>
     <p:sldId id="259" r:id="rId5"/>
     <p:sldId id="260" r:id="rId6"/>
     <p:sldId id="266" r:id="rId7"/>
     <p:sldId id="261" r:id="rId8"/>
     <p:sldId id="262" r:id="rId9"/>
-    <p:sldId id="267" r:id="rId18"/>
     <p:sldId id="263" r:id="rId10"/>
     <p:sldId id="264" r:id="rId11"/>
     <p:sldId id="268" r:id="rId19"/>
@@ -2288,7 +2288,7 @@
                 <a:ea typeface="Arial" pitchFamily="34" charset="-122"/>
                 <a:cs typeface="Arial" pitchFamily="34" charset="-120"/>
               </a:rPr>
-              <a:t>*  NDCG@10 on an independent LLM-judged sample (dev proxy) — see slide 8. Not the hidden challenge score.</a:t>
+              <a:t>*  NDCG@10 on an independent LLM-judged sample (dev proxy) — see slide 9. Not the hidden challenge score.</a:t>
             </a:r>
             <a:endParaRPr lang="en-US" sz="950" dirty="0"/>
           </a:p>
@@ -5910,6 +5910,14 @@
 <file path=ppt/slides/slide12.xml><?xml version="1.0" encoding="utf-8"?>
 <p:sld xmlns:a="http://schemas.openxmlformats.org/drawingml/2006/main" xmlns:p="http://schemas.openxmlformats.org/presentationml/2006/main" xmlns:r="http://schemas.openxmlformats.org/officeDocument/2006/relationships">
   <p:cSld>
+    <p:bg>
+      <p:bgPr>
+        <a:solidFill>
+          <a:srgbClr val="0E1116"/>
+        </a:solidFill>
+        <a:effectLst/>
+      </p:bgPr>
+    </p:bg>
     <p:spTree>
       <p:nvGrpSpPr>
         <p:cNvPr id="1" name=""/>
@@ -10346,6 +10354,1238 @@
 </file>
 
 <file path=ppt/slides/slide4.xml><?xml version="1.0" encoding="utf-8"?>
+<p:sld xmlns:a="http://schemas.openxmlformats.org/drawingml/2006/main" xmlns:p="http://schemas.openxmlformats.org/presentationml/2006/main" xmlns:r="http://schemas.openxmlformats.org/officeDocument/2006/relationships">
+  <p:cSld>
+    <p:bg>
+      <p:bgPr>
+        <a:solidFill>
+          <a:srgbClr val="0E1116"/>
+        </a:solidFill>
+        <a:effectLst/>
+      </p:bgPr>
+    </p:bg>
+    <p:spTree>
+      <p:nvGrpSpPr>
+        <p:cNvPr id="1" name=""/>
+        <p:cNvGrpSpPr/>
+        <p:nvPr/>
+      </p:nvGrpSpPr>
+      <p:grpSpPr/>
+      <p:sp>
+        <p:nvSpPr>
+          <p:cNvPr id="2" name="Text 0"/>
+          <p:cNvSpPr/>
+          <p:nvPr/>
+        </p:nvSpPr>
+        <p:spPr>
+          <a:xfrm>
+            <a:off x="640080" y="384048"/>
+            <a:ext cx="10911535" cy="274320"/>
+          </a:xfrm>
+          <a:prstGeom prst="rect">
+            <a:avLst/>
+          </a:prstGeom>
+          <a:noFill/>
+          <a:ln/>
+        </p:spPr>
+        <p:txBody>
+          <a:bodyPr wrap="square" rtlCol="0" anchor="ctr"/>
+          <a:lstStyle/>
+          <a:p>
+            <a:pPr marL="0" indent="0">
+              <a:buNone/>
+            </a:pPr>
+            <a:r>
+              <a:rPr lang="en-US" sz="1150" b="1" kern="0" spc="300" dirty="0">
+                <a:solidFill>
+                  <a:srgbClr val="8B7CF6"/>
+                </a:solidFill>
+                <a:latin typeface="Arial" pitchFamily="34" charset="0"/>
+                <a:ea typeface="Arial" pitchFamily="34" charset="-122"/>
+                <a:cs typeface="Arial" pitchFamily="34" charset="-120"/>
+              </a:rPr>
+              <a:t>PRE-REGISTERED DISCIPLINE</a:t>
+            </a:r>
+            <a:endParaRPr lang="en-US" sz="1150" dirty="0"/>
+          </a:p>
+        </p:txBody>
+      </p:sp>
+      <p:sp>
+        <p:nvSpPr>
+          <p:cNvPr id="3" name="Text 1"/>
+          <p:cNvSpPr/>
+          <p:nvPr/>
+        </p:nvSpPr>
+        <p:spPr>
+          <a:xfrm>
+            <a:off x="640080" y="658368"/>
+            <a:ext cx="10911535" cy="658368"/>
+          </a:xfrm>
+          <a:prstGeom prst="rect">
+            <a:avLst/>
+          </a:prstGeom>
+          <a:noFill/>
+          <a:ln/>
+        </p:spPr>
+        <p:txBody>
+          <a:bodyPr wrap="square" rtlCol="0" anchor="ctr"/>
+          <a:lstStyle/>
+          <a:p>
+            <a:pPr marL="0" indent="0">
+              <a:lnSpc>
+                <a:spcPct val="98000"/>
+              </a:lnSpc>
+              <a:buNone/>
+            </a:pPr>
+            <a:r>
+              <a:rPr lang="en-US" sz="2600" b="1" dirty="0">
+                <a:solidFill>
+                  <a:srgbClr val="E6EDF3"/>
+                </a:solidFill>
+                <a:latin typeface="Arial" pitchFamily="34" charset="0"/>
+                <a:ea typeface="Arial" pitchFamily="34" charset="-122"/>
+                <a:cs typeface="Arial" pitchFamily="34" charset="-120"/>
+              </a:rPr>
+              <a:t>We measured the config that scores higher — and declined it on principle.</a:t>
+            </a:r>
+            <a:endParaRPr lang="en-US" sz="2600" dirty="0"/>
+          </a:p>
+        </p:txBody>
+      </p:sp>
+      <p:sp>
+        <p:nvSpPr>
+          <p:cNvPr id="4" name="Text 2"/>
+          <p:cNvSpPr/>
+          <p:nvPr/>
+        </p:nvSpPr>
+        <p:spPr>
+          <a:xfrm>
+            <a:off x="640080" y="1335024"/>
+            <a:ext cx="10911535" cy="292608"/>
+          </a:xfrm>
+          <a:prstGeom prst="rect">
+            <a:avLst/>
+          </a:prstGeom>
+          <a:noFill/>
+          <a:ln/>
+        </p:spPr>
+        <p:txBody>
+          <a:bodyPr wrap="square" rtlCol="0" anchor="ctr"/>
+          <a:lstStyle/>
+          <a:p>
+            <a:pPr marL="0" indent="0">
+              <a:buNone/>
+            </a:pPr>
+            <a:r>
+              <a:rPr lang="en-US" sz="1300" dirty="0">
+                <a:solidFill>
+                  <a:srgbClr val="9AA7B4"/>
+                </a:solidFill>
+                <a:latin typeface="Arial" pitchFamily="34" charset="0"/>
+                <a:ea typeface="Arial" pitchFamily="34" charset="-122"/>
+                <a:cs typeface="Arial" pitchFamily="34" charset="-120"/>
+              </a:rPr>
+              <a:t>Every knob swept under a decision rule committed before the first run; the JD is the spec, not the judge.</a:t>
+            </a:r>
+            <a:endParaRPr lang="en-US" sz="1300" dirty="0"/>
+          </a:p>
+        </p:txBody>
+      </p:sp>
+      <p:sp>
+        <p:nvSpPr>
+          <p:cNvPr id="5" name="Shape 3"/>
+          <p:cNvSpPr/>
+          <p:nvPr/>
+        </p:nvSpPr>
+        <p:spPr>
+          <a:xfrm>
+            <a:off x="640080" y="1874520"/>
+            <a:ext cx="2522144" cy="1097280"/>
+          </a:xfrm>
+          <a:prstGeom prst="roundRect">
+            <a:avLst>
+              <a:gd name="adj" fmla="val 10000"/>
+            </a:avLst>
+          </a:prstGeom>
+          <a:solidFill>
+            <a:srgbClr val="161C24"/>
+          </a:solidFill>
+          <a:ln w="12700">
+            <a:solidFill>
+              <a:srgbClr val="2A3340"/>
+            </a:solidFill>
+            <a:prstDash val="solid"/>
+          </a:ln>
+          <a:effectLst>
+            <a:outerShdw blurRad="114300" dist="38100" dir="5400000" algn="bl" rotWithShape="0">
+              <a:srgbClr val="000000">
+                <a:alpha val="28000"/>
+              </a:srgbClr>
+            </a:outerShdw>
+          </a:effectLst>
+        </p:spPr>
+        <p:txBody>
+          <a:bodyPr/>
+          <a:p/>
+        </p:txBody>
+      </p:sp>
+      <p:sp>
+        <p:nvSpPr>
+          <p:cNvPr id="6" name="Text 4"/>
+          <p:cNvSpPr/>
+          <p:nvPr/>
+        </p:nvSpPr>
+        <p:spPr>
+          <a:xfrm>
+            <a:off x="640080" y="1993392"/>
+            <a:ext cx="2522144" cy="566928"/>
+          </a:xfrm>
+          <a:prstGeom prst="rect">
+            <a:avLst/>
+          </a:prstGeom>
+          <a:noFill/>
+          <a:ln/>
+        </p:spPr>
+        <p:txBody>
+          <a:bodyPr wrap="square" rtlCol="0" anchor="ctr"/>
+          <a:lstStyle/>
+          <a:p>
+            <a:pPr marL="0" indent="0" algn="ctr">
+              <a:buNone/>
+            </a:pPr>
+            <a:r>
+              <a:rPr lang="en-US" sz="3400" b="1" dirty="0">
+                <a:solidFill>
+                  <a:srgbClr val="2DD4BF"/>
+                </a:solidFill>
+                <a:latin typeface="Arial" pitchFamily="34" charset="0"/>
+                <a:ea typeface="Arial" pitchFamily="34" charset="-122"/>
+                <a:cs typeface="Arial" pitchFamily="34" charset="-120"/>
+              </a:rPr>
+              <a:t>0.896</a:t>
+            </a:r>
+            <a:endParaRPr lang="en-US" sz="3400" dirty="0"/>
+          </a:p>
+        </p:txBody>
+      </p:sp>
+      <p:sp>
+        <p:nvSpPr>
+          <p:cNvPr id="7" name="Text 5"/>
+          <p:cNvSpPr/>
+          <p:nvPr/>
+        </p:nvSpPr>
+        <p:spPr>
+          <a:xfrm>
+            <a:off x="640080" y="2578608"/>
+            <a:ext cx="2522144" cy="274320"/>
+          </a:xfrm>
+          <a:prstGeom prst="rect">
+            <a:avLst/>
+          </a:prstGeom>
+          <a:noFill/>
+          <a:ln/>
+        </p:spPr>
+        <p:txBody>
+          <a:bodyPr wrap="square" rtlCol="0" anchor="ctr"/>
+          <a:lstStyle/>
+          <a:p>
+            <a:pPr marL="0" indent="0" algn="ctr">
+              <a:buNone/>
+            </a:pPr>
+            <a:r>
+              <a:rPr lang="en-US" sz="1200" dirty="0">
+                <a:solidFill>
+                  <a:srgbClr val="9AA7B4"/>
+                </a:solidFill>
+                <a:latin typeface="Arial" pitchFamily="34" charset="0"/>
+                <a:ea typeface="Arial" pitchFamily="34" charset="-122"/>
+                <a:cs typeface="Arial" pitchFamily="34" charset="-120"/>
+              </a:rPr>
+              <a:t>SHIPPED (LLM-JUDGE)</a:t>
+            </a:r>
+            <a:endParaRPr lang="en-US" sz="1200" dirty="0"/>
+          </a:p>
+        </p:txBody>
+      </p:sp>
+      <p:sp>
+        <p:nvSpPr>
+          <p:cNvPr id="8" name="Shape 6"/>
+          <p:cNvSpPr/>
+          <p:nvPr/>
+        </p:nvSpPr>
+        <p:spPr>
+          <a:xfrm>
+            <a:off x="3436544" y="1874520"/>
+            <a:ext cx="2522144" cy="1097280"/>
+          </a:xfrm>
+          <a:prstGeom prst="roundRect">
+            <a:avLst>
+              <a:gd name="adj" fmla="val 10000"/>
+            </a:avLst>
+          </a:prstGeom>
+          <a:solidFill>
+            <a:srgbClr val="161C24"/>
+          </a:solidFill>
+          <a:ln w="12700">
+            <a:solidFill>
+              <a:srgbClr val="2A3340"/>
+            </a:solidFill>
+            <a:prstDash val="solid"/>
+          </a:ln>
+          <a:effectLst>
+            <a:outerShdw blurRad="114300" dist="38100" dir="5400000" algn="bl" rotWithShape="0">
+              <a:srgbClr val="000000">
+                <a:alpha val="28000"/>
+              </a:srgbClr>
+            </a:outerShdw>
+          </a:effectLst>
+        </p:spPr>
+        <p:txBody>
+          <a:bodyPr/>
+          <a:p/>
+        </p:txBody>
+      </p:sp>
+      <p:sp>
+        <p:nvSpPr>
+          <p:cNvPr id="9" name="Text 7"/>
+          <p:cNvSpPr/>
+          <p:nvPr/>
+        </p:nvSpPr>
+        <p:spPr>
+          <a:xfrm>
+            <a:off x="3436544" y="1993392"/>
+            <a:ext cx="2522144" cy="566928"/>
+          </a:xfrm>
+          <a:prstGeom prst="rect">
+            <a:avLst/>
+          </a:prstGeom>
+          <a:noFill/>
+          <a:ln/>
+        </p:spPr>
+        <p:txBody>
+          <a:bodyPr wrap="square" rtlCol="0" anchor="ctr"/>
+          <a:lstStyle/>
+          <a:p>
+            <a:pPr marL="0" indent="0" algn="ctr">
+              <a:buNone/>
+            </a:pPr>
+            <a:r>
+              <a:rPr lang="en-US" sz="3400" b="1" dirty="0">
+                <a:solidFill>
+                  <a:srgbClr val="2DD4BF"/>
+                </a:solidFill>
+                <a:latin typeface="Arial" pitchFamily="34" charset="0"/>
+                <a:ea typeface="Arial" pitchFamily="34" charset="-122"/>
+                <a:cs typeface="Arial" pitchFamily="34" charset="-120"/>
+              </a:rPr>
+              <a:t>0.926</a:t>
+            </a:r>
+            <a:endParaRPr lang="en-US" sz="3400" dirty="0"/>
+          </a:p>
+        </p:txBody>
+      </p:sp>
+      <p:sp>
+        <p:nvSpPr>
+          <p:cNvPr id="10" name="Text 8"/>
+          <p:cNvSpPr/>
+          <p:nvPr/>
+        </p:nvSpPr>
+        <p:spPr>
+          <a:xfrm>
+            <a:off x="3436544" y="2578608"/>
+            <a:ext cx="2522144" cy="274320"/>
+          </a:xfrm>
+          <a:prstGeom prst="rect">
+            <a:avLst/>
+          </a:prstGeom>
+          <a:noFill/>
+          <a:ln/>
+        </p:spPr>
+        <p:txBody>
+          <a:bodyPr wrap="square" rtlCol="0" anchor="ctr"/>
+          <a:lstStyle/>
+          <a:p>
+            <a:pPr marL="0" indent="0" algn="ctr">
+              <a:buNone/>
+            </a:pPr>
+            <a:r>
+              <a:rPr lang="en-US" sz="1200" dirty="0">
+                <a:solidFill>
+                  <a:srgbClr val="9AA7B4"/>
+                </a:solidFill>
+                <a:latin typeface="Arial" pitchFamily="34" charset="0"/>
+                <a:ea typeface="Arial" pitchFamily="34" charset="-122"/>
+                <a:cs typeface="Arial" pitchFamily="34" charset="-120"/>
+              </a:rPr>
+              <a:t>FLOOR-OFF — DECLINED</a:t>
+            </a:r>
+            <a:endParaRPr lang="en-US" sz="1200" dirty="0"/>
+          </a:p>
+        </p:txBody>
+      </p:sp>
+      <p:sp>
+        <p:nvSpPr>
+          <p:cNvPr id="11" name="Shape 9"/>
+          <p:cNvSpPr/>
+          <p:nvPr/>
+        </p:nvSpPr>
+        <p:spPr>
+          <a:xfrm>
+            <a:off x="6233008" y="1874520"/>
+            <a:ext cx="2522144" cy="1097280"/>
+          </a:xfrm>
+          <a:prstGeom prst="roundRect">
+            <a:avLst>
+              <a:gd name="adj" fmla="val 10000"/>
+            </a:avLst>
+          </a:prstGeom>
+          <a:solidFill>
+            <a:srgbClr val="161C24"/>
+          </a:solidFill>
+          <a:ln w="12700">
+            <a:solidFill>
+              <a:srgbClr val="2A3340"/>
+            </a:solidFill>
+            <a:prstDash val="solid"/>
+          </a:ln>
+          <a:effectLst>
+            <a:outerShdw blurRad="114300" dist="38100" dir="5400000" algn="bl" rotWithShape="0">
+              <a:srgbClr val="000000">
+                <a:alpha val="28000"/>
+              </a:srgbClr>
+            </a:outerShdw>
+          </a:effectLst>
+        </p:spPr>
+        <p:txBody>
+          <a:bodyPr/>
+          <a:p/>
+        </p:txBody>
+      </p:sp>
+      <p:sp>
+        <p:nvSpPr>
+          <p:cNvPr id="12" name="Text 10"/>
+          <p:cNvSpPr/>
+          <p:nvPr/>
+        </p:nvSpPr>
+        <p:spPr>
+          <a:xfrm>
+            <a:off x="6233008" y="1993392"/>
+            <a:ext cx="2522144" cy="566928"/>
+          </a:xfrm>
+          <a:prstGeom prst="rect">
+            <a:avLst/>
+          </a:prstGeom>
+          <a:noFill/>
+          <a:ln/>
+        </p:spPr>
+        <p:txBody>
+          <a:bodyPr wrap="square" rtlCol="0" anchor="ctr"/>
+          <a:lstStyle/>
+          <a:p>
+            <a:pPr marL="0" indent="0" algn="ctr">
+              <a:buNone/>
+            </a:pPr>
+            <a:r>
+              <a:rPr lang="en-US" sz="3400" b="1" dirty="0">
+                <a:solidFill>
+                  <a:srgbClr val="2DD4BF"/>
+                </a:solidFill>
+                <a:latin typeface="Arial" pitchFamily="34" charset="0"/>
+                <a:ea typeface="Arial" pitchFamily="34" charset="-122"/>
+                <a:cs typeface="Arial" pitchFamily="34" charset="-120"/>
+              </a:rPr>
+              <a:t>0</a:t>
+            </a:r>
+            <a:endParaRPr lang="en-US" sz="3400" dirty="0"/>
+          </a:p>
+        </p:txBody>
+      </p:sp>
+      <p:sp>
+        <p:nvSpPr>
+          <p:cNvPr id="13" name="Text 11"/>
+          <p:cNvSpPr/>
+          <p:nvPr/>
+        </p:nvSpPr>
+        <p:spPr>
+          <a:xfrm>
+            <a:off x="6233008" y="2578608"/>
+            <a:ext cx="2522144" cy="274320"/>
+          </a:xfrm>
+          <a:prstGeom prst="rect">
+            <a:avLst/>
+          </a:prstGeom>
+          <a:noFill/>
+          <a:ln/>
+        </p:spPr>
+        <p:txBody>
+          <a:bodyPr wrap="square" rtlCol="0" anchor="ctr"/>
+          <a:lstStyle/>
+          <a:p>
+            <a:pPr marL="0" indent="0" algn="ctr">
+              <a:buNone/>
+            </a:pPr>
+            <a:r>
+              <a:rPr lang="en-US" sz="1200" dirty="0">
+                <a:solidFill>
+                  <a:srgbClr val="9AA7B4"/>
+                </a:solidFill>
+                <a:latin typeface="Arial" pitchFamily="34" charset="0"/>
+                <a:ea typeface="Arial" pitchFamily="34" charset="-122"/>
+                <a:cs typeface="Arial" pitchFamily="34" charset="-120"/>
+              </a:rPr>
+              <a:t>RANK CHANGES 0.25–0.55</a:t>
+            </a:r>
+            <a:endParaRPr lang="en-US" sz="1200" dirty="0"/>
+          </a:p>
+        </p:txBody>
+      </p:sp>
+      <p:sp>
+        <p:nvSpPr>
+          <p:cNvPr id="14" name="Shape 12"/>
+          <p:cNvSpPr/>
+          <p:nvPr/>
+        </p:nvSpPr>
+        <p:spPr>
+          <a:xfrm>
+            <a:off x="9029471" y="1874520"/>
+            <a:ext cx="2522144" cy="1097280"/>
+          </a:xfrm>
+          <a:prstGeom prst="roundRect">
+            <a:avLst>
+              <a:gd name="adj" fmla="val 10000"/>
+            </a:avLst>
+          </a:prstGeom>
+          <a:solidFill>
+            <a:srgbClr val="161C24"/>
+          </a:solidFill>
+          <a:ln w="12700">
+            <a:solidFill>
+              <a:srgbClr val="2A3340"/>
+            </a:solidFill>
+            <a:prstDash val="solid"/>
+          </a:ln>
+          <a:effectLst>
+            <a:outerShdw blurRad="114300" dist="38100" dir="5400000" algn="bl" rotWithShape="0">
+              <a:srgbClr val="000000">
+                <a:alpha val="28000"/>
+              </a:srgbClr>
+            </a:outerShdw>
+          </a:effectLst>
+        </p:spPr>
+        <p:txBody>
+          <a:bodyPr/>
+          <a:p/>
+        </p:txBody>
+      </p:sp>
+      <p:sp>
+        <p:nvSpPr>
+          <p:cNvPr id="15" name="Text 13"/>
+          <p:cNvSpPr/>
+          <p:nvPr/>
+        </p:nvSpPr>
+        <p:spPr>
+          <a:xfrm>
+            <a:off x="9029471" y="1993392"/>
+            <a:ext cx="2522144" cy="566928"/>
+          </a:xfrm>
+          <a:prstGeom prst="rect">
+            <a:avLst/>
+          </a:prstGeom>
+          <a:noFill/>
+          <a:ln/>
+        </p:spPr>
+        <p:txBody>
+          <a:bodyPr wrap="square" rtlCol="0" anchor="ctr"/>
+          <a:lstStyle/>
+          <a:p>
+            <a:pPr marL="0" indent="0" algn="ctr">
+              <a:buNone/>
+            </a:pPr>
+            <a:r>
+              <a:rPr lang="en-US" sz="3400" b="1" dirty="0">
+                <a:solidFill>
+                  <a:srgbClr val="34D399"/>
+                </a:solidFill>
+                <a:latin typeface="Arial" pitchFamily="34" charset="0"/>
+                <a:ea typeface="Arial" pitchFamily="34" charset="-122"/>
+                <a:cs typeface="Arial" pitchFamily="34" charset="-120"/>
+              </a:rPr>
+              <a:t>11 / 11</a:t>
+            </a:r>
+            <a:endParaRPr lang="en-US" sz="3400" dirty="0"/>
+          </a:p>
+        </p:txBody>
+      </p:sp>
+      <p:sp>
+        <p:nvSpPr>
+          <p:cNvPr id="16" name="Text 14"/>
+          <p:cNvSpPr/>
+          <p:nvPr/>
+        </p:nvSpPr>
+        <p:spPr>
+          <a:xfrm>
+            <a:off x="9029471" y="2578608"/>
+            <a:ext cx="2522144" cy="274320"/>
+          </a:xfrm>
+          <a:prstGeom prst="rect">
+            <a:avLst/>
+          </a:prstGeom>
+          <a:noFill/>
+          <a:ln/>
+        </p:spPr>
+        <p:txBody>
+          <a:bodyPr wrap="square" rtlCol="0" anchor="ctr"/>
+          <a:lstStyle/>
+          <a:p>
+            <a:pPr marL="0" indent="0" algn="ctr">
+              <a:buNone/>
+            </a:pPr>
+            <a:r>
+              <a:rPr lang="en-US" sz="1200" dirty="0">
+                <a:solidFill>
+                  <a:srgbClr val="9AA7B4"/>
+                </a:solidFill>
+                <a:latin typeface="Arial" pitchFamily="34" charset="0"/>
+                <a:ea typeface="Arial" pitchFamily="34" charset="-122"/>
+                <a:cs typeface="Arial" pitchFamily="34" charset="-120"/>
+              </a:rPr>
+              <a:t>PLANTED TRAPS CAUGHT</a:t>
+            </a:r>
+            <a:endParaRPr lang="en-US" sz="1200" dirty="0"/>
+          </a:p>
+        </p:txBody>
+      </p:sp>
+      <p:sp>
+        <p:nvSpPr>
+          <p:cNvPr id="17" name="Shape 15"/>
+          <p:cNvSpPr/>
+          <p:nvPr/>
+        </p:nvSpPr>
+        <p:spPr>
+          <a:xfrm>
+            <a:off x="640080" y="3200400"/>
+            <a:ext cx="5272888" cy="1874520"/>
+          </a:xfrm>
+          <a:prstGeom prst="roundRect">
+            <a:avLst>
+              <a:gd name="adj" fmla="val 5854"/>
+            </a:avLst>
+          </a:prstGeom>
+          <a:solidFill>
+            <a:srgbClr val="161C24"/>
+          </a:solidFill>
+          <a:ln w="12700">
+            <a:solidFill>
+              <a:srgbClr val="2A3340"/>
+            </a:solidFill>
+            <a:prstDash val="solid"/>
+          </a:ln>
+          <a:effectLst>
+            <a:outerShdw blurRad="114300" dist="38100" dir="5400000" algn="bl" rotWithShape="0">
+              <a:srgbClr val="000000">
+                <a:alpha val="28000"/>
+              </a:srgbClr>
+            </a:outerShdw>
+          </a:effectLst>
+        </p:spPr>
+        <p:txBody>
+          <a:bodyPr/>
+          <a:p/>
+        </p:txBody>
+      </p:sp>
+      <p:sp>
+        <p:nvSpPr>
+          <p:cNvPr id="18" name="Shape 16"/>
+          <p:cNvSpPr/>
+          <p:nvPr/>
+        </p:nvSpPr>
+        <p:spPr>
+          <a:xfrm>
+            <a:off x="914400" y="3429000"/>
+            <a:ext cx="420624" cy="420624"/>
+          </a:xfrm>
+          <a:prstGeom prst="roundRect">
+            <a:avLst>
+              <a:gd name="adj" fmla="val 15217"/>
+            </a:avLst>
+          </a:prstGeom>
+          <a:solidFill>
+            <a:srgbClr val="F2B544">
+              <a:alpha val="18000"/>
+            </a:srgbClr>
+          </a:solidFill>
+          <a:ln w="12700">
+            <a:solidFill>
+              <a:srgbClr val="F2B544">
+                <a:alpha val="45000"/>
+              </a:srgbClr>
+            </a:solidFill>
+            <a:prstDash val="solid"/>
+          </a:ln>
+        </p:spPr>
+        <p:txBody>
+          <a:bodyPr/>
+          <a:p/>
+        </p:txBody>
+      </p:sp>
+      <p:pic>
+        <p:nvPicPr>
+          <p:cNvPr id="19" name="Image 0" descr="preencoded.png"/>
+          <p:cNvPicPr>
+            <a:picLocks noChangeAspect="1"/>
+          </p:cNvPicPr>
+          <p:nvPr/>
+        </p:nvPicPr>
+        <p:blipFill>
+          <a:blip r:embed="rId2"/>
+          <a:stretch>
+            <a:fillRect/>
+          </a:stretch>
+        </p:blipFill>
+        <p:spPr>
+          <a:xfrm>
+            <a:off x="1006937" y="3521537"/>
+            <a:ext cx="235549" cy="235549"/>
+          </a:xfrm>
+          <a:prstGeom prst="rect">
+            <a:avLst/>
+          </a:prstGeom>
+        </p:spPr>
+      </p:pic>
+      <p:sp>
+        <p:nvSpPr>
+          <p:cNvPr id="20" name="Text 17"/>
+          <p:cNvSpPr/>
+          <p:nvPr/>
+        </p:nvSpPr>
+        <p:spPr>
+          <a:xfrm>
+            <a:off x="1444752" y="3429000"/>
+            <a:ext cx="4358488" cy="411480"/>
+          </a:xfrm>
+          <a:prstGeom prst="rect">
+            <a:avLst/>
+          </a:prstGeom>
+          <a:noFill/>
+          <a:ln/>
+        </p:spPr>
+        <p:txBody>
+          <a:bodyPr wrap="square" rtlCol="0" anchor="ctr"/>
+          <a:lstStyle/>
+          <a:p>
+            <a:pPr marL="0" indent="0">
+              <a:buNone/>
+            </a:pPr>
+            <a:r>
+              <a:rPr lang="en-US" sz="1500" b="1" dirty="0">
+                <a:solidFill>
+                  <a:srgbClr val="E6EDF3"/>
+                </a:solidFill>
+                <a:latin typeface="Arial" pitchFamily="34" charset="0"/>
+                <a:ea typeface="Arial" pitchFamily="34" charset="-122"/>
+                <a:cs typeface="Arial" pitchFamily="34" charset="-120"/>
+              </a:rPr>
+              <a:t>How the rule decided</a:t>
+            </a:r>
+            <a:endParaRPr lang="en-US" sz="1500" dirty="0"/>
+          </a:p>
+        </p:txBody>
+      </p:sp>
+      <p:sp>
+        <p:nvSpPr>
+          <p:cNvPr id="21" name="Text 18"/>
+          <p:cNvSpPr/>
+          <p:nvPr/>
+        </p:nvSpPr>
+        <p:spPr>
+          <a:xfrm>
+            <a:off x="932688" y="3931920"/>
+            <a:ext cx="4724248" cy="384048"/>
+          </a:xfrm>
+          <a:prstGeom prst="rect">
+            <a:avLst/>
+          </a:prstGeom>
+          <a:noFill/>
+          <a:ln/>
+        </p:spPr>
+        <p:txBody>
+          <a:bodyPr wrap="square" rtlCol="0" anchor="ctr"/>
+          <a:lstStyle/>
+          <a:p>
+            <a:pPr marL="0" indent="0">
+              <a:lnSpc>
+                <a:spcPct val="98000"/>
+              </a:lnSpc>
+              <a:buNone/>
+            </a:pPr>
+            <a:r>
+              <a:rPr lang="en-US" sz="1100" b="1" dirty="0">
+                <a:solidFill>
+                  <a:srgbClr val="2DD4BF"/>
+                </a:solidFill>
+                <a:latin typeface="Arial" pitchFamily="34" charset="0"/>
+                <a:ea typeface="Arial" pitchFamily="34" charset="-122"/>
+                <a:cs typeface="Arial" pitchFamily="34" charset="-120"/>
+              </a:rPr>
+              <a:t>Rule first   committed before any sweep run — ties break toward the JD's down-weight instruction</a:t>
+            </a:r>
+            <a:endParaRPr lang="en-US" sz="1100" dirty="0"/>
+          </a:p>
+        </p:txBody>
+      </p:sp>
+      <p:sp>
+        <p:nvSpPr>
+          <p:cNvPr id="22" name="Text 19"/>
+          <p:cNvSpPr/>
+          <p:nvPr/>
+        </p:nvSpPr>
+        <p:spPr>
+          <a:xfrm>
+            <a:off x="932688" y="4315968"/>
+            <a:ext cx="4724248" cy="384048"/>
+          </a:xfrm>
+          <a:prstGeom prst="rect">
+            <a:avLst/>
+          </a:prstGeom>
+          <a:noFill/>
+          <a:ln/>
+        </p:spPr>
+        <p:txBody>
+          <a:bodyPr wrap="square" rtlCol="0" anchor="ctr"/>
+          <a:lstStyle/>
+          <a:p>
+            <a:pPr marL="0" indent="0">
+              <a:lnSpc>
+                <a:spcPct val="98000"/>
+              </a:lnSpc>
+              <a:buNone/>
+            </a:pPr>
+            <a:r>
+              <a:rPr lang="en-US" sz="1100" b="1" dirty="0">
+                <a:solidFill>
+                  <a:srgbClr val="2DD4BF"/>
+                </a:solidFill>
+                <a:latin typeface="Arial" pitchFamily="34" charset="0"/>
+                <a:ea typeface="Arial" pitchFamily="34" charset="-122"/>
+                <a:cs typeface="Arial" pitchFamily="34" charset="-120"/>
+              </a:rPr>
+              <a:t>Coverage guard   floor 0.85–1.00 configs excluded: &lt;95% label coverage, selection-biased</a:t>
+            </a:r>
+            <a:endParaRPr lang="en-US" sz="1100" dirty="0"/>
+          </a:p>
+        </p:txBody>
+      </p:sp>
+      <p:sp>
+        <p:nvSpPr>
+          <p:cNvPr id="23" name="Text 20"/>
+          <p:cNvSpPr/>
+          <p:nvPr/>
+        </p:nvSpPr>
+        <p:spPr>
+          <a:xfrm>
+            <a:off x="932688" y="4700016"/>
+            <a:ext cx="4724248" cy="384048"/>
+          </a:xfrm>
+          <a:prstGeom prst="rect">
+            <a:avLst/>
+          </a:prstGeom>
+          <a:noFill/>
+          <a:ln/>
+        </p:spPr>
+        <p:txBody>
+          <a:bodyPr wrap="square" rtlCol="0" anchor="ctr"/>
+          <a:lstStyle/>
+          <a:p>
+            <a:pPr marL="0" indent="0">
+              <a:lnSpc>
+                <a:spcPct val="98000"/>
+              </a:lnSpc>
+              <a:buNone/>
+            </a:pPr>
+            <a:r>
+              <a:rPr lang="en-US" sz="1100" b="1" dirty="0">
+                <a:solidFill>
+                  <a:srgbClr val="2DD4BF"/>
+                </a:solidFill>
+                <a:latin typeface="Arial" pitchFamily="34" charset="0"/>
+                <a:ea typeface="Arial" pitchFamily="34" charset="-122"/>
+                <a:cs typeface="Arial" pitchFamily="34" charset="-120"/>
+              </a:rPr>
+              <a:t>Winner   shipped config — identical top-100 across floors 0.25–0.55</a:t>
+            </a:r>
+            <a:endParaRPr lang="en-US" sz="1100" dirty="0"/>
+          </a:p>
+        </p:txBody>
+      </p:sp>
+      <p:sp>
+        <p:nvSpPr>
+          <p:cNvPr id="24" name="Shape 21"/>
+          <p:cNvSpPr/>
+          <p:nvPr/>
+        </p:nvSpPr>
+        <p:spPr>
+          <a:xfrm>
+            <a:off x="6278728" y="3200400"/>
+            <a:ext cx="5272888" cy="1874520"/>
+          </a:xfrm>
+          <a:prstGeom prst="roundRect">
+            <a:avLst>
+              <a:gd name="adj" fmla="val 5854"/>
+            </a:avLst>
+          </a:prstGeom>
+          <a:solidFill>
+            <a:srgbClr val="1B2330"/>
+          </a:solidFill>
+          <a:ln w="12700">
+            <a:solidFill>
+              <a:srgbClr val="2A3340"/>
+            </a:solidFill>
+            <a:prstDash val="solid"/>
+          </a:ln>
+          <a:effectLst>
+            <a:outerShdw blurRad="114300" dist="38100" dir="5400000" algn="bl" rotWithShape="0">
+              <a:srgbClr val="000000">
+                <a:alpha val="28000"/>
+              </a:srgbClr>
+            </a:outerShdw>
+          </a:effectLst>
+        </p:spPr>
+        <p:txBody>
+          <a:bodyPr/>
+          <a:p/>
+        </p:txBody>
+      </p:sp>
+      <p:sp>
+        <p:nvSpPr>
+          <p:cNvPr id="25" name="Shape 22"/>
+          <p:cNvSpPr/>
+          <p:nvPr/>
+        </p:nvSpPr>
+        <p:spPr>
+          <a:xfrm>
+            <a:off x="6553048" y="3429000"/>
+            <a:ext cx="420624" cy="420624"/>
+          </a:xfrm>
+          <a:prstGeom prst="roundRect">
+            <a:avLst>
+              <a:gd name="adj" fmla="val 15217"/>
+            </a:avLst>
+          </a:prstGeom>
+          <a:solidFill>
+            <a:srgbClr val="2DD4BF">
+              <a:alpha val="18000"/>
+            </a:srgbClr>
+          </a:solidFill>
+          <a:ln w="12700">
+            <a:solidFill>
+              <a:srgbClr val="2DD4BF">
+                <a:alpha val="45000"/>
+              </a:srgbClr>
+            </a:solidFill>
+            <a:prstDash val="solid"/>
+          </a:ln>
+        </p:spPr>
+        <p:txBody>
+          <a:bodyPr/>
+          <a:p/>
+        </p:txBody>
+      </p:sp>
+      <p:pic>
+        <p:nvPicPr>
+          <p:cNvPr id="26" name="Image 1" descr="preencoded.png"/>
+          <p:cNvPicPr>
+            <a:picLocks noChangeAspect="1"/>
+          </p:cNvPicPr>
+          <p:nvPr/>
+        </p:nvPicPr>
+        <p:blipFill>
+          <a:blip r:embed="rId3"/>
+          <a:stretch>
+            <a:fillRect/>
+          </a:stretch>
+        </p:blipFill>
+        <p:spPr>
+          <a:xfrm>
+            <a:off x="6645585" y="3521537"/>
+            <a:ext cx="235549" cy="235549"/>
+          </a:xfrm>
+          <a:prstGeom prst="rect">
+            <a:avLst/>
+          </a:prstGeom>
+        </p:spPr>
+      </p:pic>
+      <p:sp>
+        <p:nvSpPr>
+          <p:cNvPr id="27" name="Text 23"/>
+          <p:cNvSpPr/>
+          <p:nvPr/>
+        </p:nvSpPr>
+        <p:spPr>
+          <a:xfrm>
+            <a:off x="7083400" y="3429000"/>
+            <a:ext cx="4358488" cy="411480"/>
+          </a:xfrm>
+          <a:prstGeom prst="rect">
+            <a:avLst/>
+          </a:prstGeom>
+          <a:noFill/>
+          <a:ln/>
+        </p:spPr>
+        <p:txBody>
+          <a:bodyPr wrap="square" rtlCol="0" anchor="ctr"/>
+          <a:lstStyle/>
+          <a:p>
+            <a:pPr marL="0" indent="0">
+              <a:buNone/>
+            </a:pPr>
+            <a:r>
+              <a:rPr lang="en-US" sz="1500" b="1" dirty="0">
+                <a:solidFill>
+                  <a:srgbClr val="2DD4BF"/>
+                </a:solidFill>
+                <a:latin typeface="Arial" pitchFamily="34" charset="0"/>
+                <a:ea typeface="Arial" pitchFamily="34" charset="-122"/>
+                <a:cs typeface="Arial" pitchFamily="34" charset="-120"/>
+              </a:rPr>
+              <a:t>We built our strongest rival — it lost</a:t>
+            </a:r>
+            <a:endParaRPr lang="en-US" sz="1500" dirty="0"/>
+          </a:p>
+        </p:txBody>
+      </p:sp>
+      <p:sp>
+        <p:nvSpPr>
+          <p:cNvPr id="28" name="Text 24"/>
+          <p:cNvSpPr/>
+          <p:nvPr/>
+        </p:nvSpPr>
+        <p:spPr>
+          <a:xfrm>
+            <a:off x="6571336" y="3931920"/>
+            <a:ext cx="4724248" cy="1005840"/>
+          </a:xfrm>
+          <a:prstGeom prst="rect">
+            <a:avLst/>
+          </a:prstGeom>
+          <a:noFill/>
+          <a:ln/>
+        </p:spPr>
+        <p:txBody>
+          <a:bodyPr wrap="square" rtlCol="0" anchor="t"/>
+          <a:lstStyle/>
+          <a:p>
+            <a:pPr marL="0" indent="0">
+              <a:lnSpc>
+                <a:spcPct val="110000"/>
+              </a:lnSpc>
+              <a:buNone/>
+            </a:pPr>
+            <a:r>
+              <a:rPr lang="en-US" sz="1100">
+                <a:solidFill>
+                  <a:srgbClr val="E6EDF3"/>
+                </a:solidFill>
+                <a:latin typeface="Arial" pitchFamily="34" charset="0"/>
+                <a:ea typeface="Arial" pitchFamily="34" charset="-122"/>
+                <a:cs typeface="Arial" pitchFamily="34" charset="-120"/>
+              </a:rPr>
+              <a:t>A LambdaMART ranker over our own 28 features plus recovered generator structure, trained on 1,500 LLM judgments, evaluated once under a gate committed before training: 0.900 vs our 0.906. Third measured negative result — the hand-tuned ordering stands because nothing we tested beats it, not because nothing was tested.</a:t>
+            </a:r>
+            <a:endParaRPr lang="en-US" sz="1250" dirty="0"/>
+          </a:p>
+        </p:txBody>
+      </p:sp>
+      <p:sp>
+        <p:nvSpPr>
+          <p:cNvPr id="29" name="Shape 25"/>
+          <p:cNvSpPr/>
+          <p:nvPr/>
+        </p:nvSpPr>
+        <p:spPr>
+          <a:xfrm>
+            <a:off x="640080" y="5257800"/>
+            <a:ext cx="10911535" cy="658368"/>
+          </a:xfrm>
+          <a:prstGeom prst="roundRect">
+            <a:avLst>
+              <a:gd name="adj" fmla="val 16667"/>
+            </a:avLst>
+          </a:prstGeom>
+          <a:solidFill>
+            <a:srgbClr val="161C24"/>
+          </a:solidFill>
+          <a:ln w="12700">
+            <a:solidFill>
+              <a:srgbClr val="2A3340"/>
+            </a:solidFill>
+            <a:prstDash val="solid"/>
+          </a:ln>
+          <a:effectLst>
+            <a:outerShdw blurRad="114300" dist="38100" dir="5400000" algn="bl" rotWithShape="0">
+              <a:srgbClr val="000000">
+                <a:alpha val="28000"/>
+              </a:srgbClr>
+            </a:outerShdw>
+          </a:effectLst>
+        </p:spPr>
+        <p:txBody>
+          <a:bodyPr/>
+          <a:p/>
+        </p:txBody>
+      </p:sp>
+      <p:pic>
+        <p:nvPicPr>
+          <p:cNvPr id="30" name="Image 2" descr="preencoded.png"/>
+          <p:cNvPicPr>
+            <a:picLocks noChangeAspect="1"/>
+          </p:cNvPicPr>
+          <p:nvPr/>
+        </p:nvPicPr>
+        <p:blipFill>
+          <a:blip r:embed="rId4"/>
+          <a:stretch>
+            <a:fillRect/>
+          </a:stretch>
+        </p:blipFill>
+        <p:spPr>
+          <a:xfrm>
+            <a:off x="914400" y="5413248"/>
+            <a:ext cx="292608" cy="292608"/>
+          </a:xfrm>
+          <a:prstGeom prst="rect">
+            <a:avLst/>
+          </a:prstGeom>
+        </p:spPr>
+      </p:pic>
+      <p:sp>
+        <p:nvSpPr>
+          <p:cNvPr id="31" name="Text 26"/>
+          <p:cNvSpPr/>
+          <p:nvPr/>
+        </p:nvSpPr>
+        <p:spPr>
+          <a:xfrm>
+            <a:off x="1325880" y="5257800"/>
+            <a:ext cx="9905695" cy="658368"/>
+          </a:xfrm>
+          <a:prstGeom prst="rect">
+            <a:avLst/>
+          </a:prstGeom>
+          <a:noFill/>
+          <a:ln/>
+        </p:spPr>
+        <p:txBody>
+          <a:bodyPr wrap="square" rtlCol="0" anchor="ctr"/>
+          <a:lstStyle/>
+          <a:p>
+            <a:pPr marL="0" indent="0">
+              <a:lnSpc>
+                <a:spcPct val="100000"/>
+              </a:lnSpc>
+              <a:buNone/>
+            </a:pPr>
+            <a:r>
+              <a:rPr lang="en-US" sz="1200" b="1" dirty="0">
+                <a:solidFill>
+                  <a:srgbClr val="F2B544"/>
+                </a:solidFill>
+                <a:latin typeface="Arial" pitchFamily="34" charset="0"/>
+                <a:ea typeface="Arial" pitchFamily="34" charset="-122"/>
+                <a:cs typeface="Arial" pitchFamily="34" charset="-120"/>
+              </a:rPr>
+              <a:t>Honest framing:  the pool plants 11 perfect-on-paper-but-unavailable seniors (response rates to 0.07) and one honeypot in gold clothing — the guardrails demote all 12; an LLM judge missed one of them.</a:t>
+            </a:r>
+            <a:endParaRPr lang="en-US" sz="1200" dirty="0"/>
+          </a:p>
+        </p:txBody>
+      </p:sp>
+      <p:sp>
+        <p:nvSpPr>
+          <p:cNvPr id="32" name="Text 27"/>
+          <p:cNvSpPr/>
+          <p:nvPr/>
+        </p:nvSpPr>
+        <p:spPr>
+          <a:xfrm>
+            <a:off x="10911535" y="6473952"/>
+            <a:ext cx="914400" cy="228600"/>
+          </a:xfrm>
+          <a:prstGeom prst="rect">
+            <a:avLst/>
+          </a:prstGeom>
+          <a:noFill/>
+          <a:ln/>
+        </p:spPr>
+        <p:txBody>
+          <a:bodyPr wrap="square" rtlCol="0" anchor="ctr"/>
+          <a:lstStyle/>
+          <a:p>
+            <a:pPr marL="0" indent="0" algn="r">
+              <a:buNone/>
+            </a:pPr>
+            <a:r>
+              <a:rPr lang="en-US" sz="900">
+                <a:solidFill>
+                  <a:srgbClr val="6E7C8C"/>
+                </a:solidFill>
+                <a:latin typeface="Arial" pitchFamily="34" charset="0"/>
+                <a:ea typeface="Arial" pitchFamily="34" charset="-122"/>
+                <a:cs typeface="Arial" pitchFamily="34" charset="-120"/>
+              </a:rPr>
+              <a:t>4 / 13</a:t>
+            </a:r>
+            <a:endParaRPr lang="en-US" sz="900" dirty="0"/>
+          </a:p>
+        </p:txBody>
+      </p:sp>
+      <p:sp>
+        <p:nvSpPr>
+          <p:cNvPr id="33" name="Text 28"/>
+          <p:cNvSpPr/>
+          <p:nvPr/>
+        </p:nvSpPr>
+        <p:spPr>
+          <a:xfrm>
+            <a:off x="640080" y="6473952"/>
+            <a:ext cx="2743200" cy="228600"/>
+          </a:xfrm>
+          <a:prstGeom prst="rect">
+            <a:avLst/>
+          </a:prstGeom>
+          <a:noFill/>
+          <a:ln/>
+        </p:spPr>
+        <p:txBody>
+          <a:bodyPr wrap="square" rtlCol="0" anchor="ctr"/>
+          <a:lstStyle/>
+          <a:p>
+            <a:pPr marL="0" indent="0">
+              <a:buNone/>
+            </a:pPr>
+            <a:r>
+              <a:rPr lang="en-US" sz="900" b="1" kern="0" spc="200" dirty="0">
+                <a:solidFill>
+                  <a:srgbClr val="6E7C8C"/>
+                </a:solidFill>
+                <a:latin typeface="Arial" pitchFamily="34" charset="0"/>
+                <a:ea typeface="Arial" pitchFamily="34" charset="-122"/>
+                <a:cs typeface="Arial" pitchFamily="34" charset="-120"/>
+              </a:rPr>
+              <a:t>HIREFIT RANKER</a:t>
+            </a:r>
+            <a:endParaRPr lang="en-US" sz="900" dirty="0"/>
+          </a:p>
+        </p:txBody>
+      </p:sp>
+    </p:spTree>
+  </p:cSld>
+  <p:clrMapOvr>
+    <a:masterClrMapping/>
+  </p:clrMapOvr>
+</p:sld>
+</file>
+
+<file path=ppt/slides/slide5.xml><?xml version="1.0" encoding="utf-8"?>
 <p:sld xmlns:a="http://schemas.openxmlformats.org/drawingml/2006/main" xmlns:r="http://schemas.openxmlformats.org/officeDocument/2006/relationships" xmlns:p="http://schemas.openxmlformats.org/presentationml/2006/main">
   <p:cSld name="Slide 4">
     <p:bg>
@@ -10445,7 +11685,7 @@
                 <a:ea typeface="Arial" pitchFamily="34" charset="-122"/>
                 <a:cs typeface="Arial" pitchFamily="34" charset="-120"/>
               </a:rPr>
-              <a:t>One offline pipeline scores every candidate — no LLM in the ranking loop.</a:t>
+              <a:t>Deterministic at rank time — every choice gated by LLM judges offline.</a:t>
             </a:r>
             <a:endParaRPr lang="en-US" sz="2600" dirty="0"/>
           </a:p>
@@ -10484,7 +11724,7 @@
                 <a:ea typeface="Arial" pitchFamily="34" charset="-122"/>
                 <a:cs typeface="Arial" pitchFamily="34" charset="-120"/>
               </a:rPr>
-              <a:t>Six deterministic stages turn a raw profile into a trusted rank. Runs on CPU, no network, no GPU.</a:t>
+              <a:t>Six CPU-only stages, no network or GPU; tuned and frozen under two LLM judges and a LambdaMART challenger gate.</a:t>
             </a:r>
             <a:endParaRPr lang="en-US" sz="1300" dirty="0"/>
           </a:p>
@@ -12556,7 +13796,7 @@
                 <a:ea typeface="Arial" pitchFamily="34" charset="-122"/>
                 <a:cs typeface="Arial" pitchFamily="34" charset="-120"/>
               </a:rPr>
-              <a:t>4 / 13</a:t>
+              <a:t>5 / 13</a:t>
             </a:r>
             <a:endParaRPr lang="en-US" sz="900" dirty="0"/>
           </a:p>
@@ -12609,7 +13849,7 @@
 </p:sld>
 </file>
 
-<file path=ppt/slides/slide5.xml><?xml version="1.0" encoding="utf-8"?>
+<file path=ppt/slides/slide6.xml><?xml version="1.0" encoding="utf-8"?>
 <p:sld xmlns:a="http://schemas.openxmlformats.org/drawingml/2006/main" xmlns:r="http://schemas.openxmlformats.org/officeDocument/2006/relationships" xmlns:p="http://schemas.openxmlformats.org/presentationml/2006/main">
   <p:cSld name="Slide 5">
     <p:bg>
@@ -14215,7 +15455,7 @@
                 <a:ea typeface="Arial" pitchFamily="34" charset="-122"/>
                 <a:cs typeface="Arial" pitchFamily="34" charset="-120"/>
               </a:rPr>
-              <a:t>5 / 13</a:t>
+              <a:t>6 / 13</a:t>
             </a:r>
             <a:endParaRPr lang="en-US" sz="900" dirty="0"/>
           </a:p>
@@ -14268,7 +15508,7 @@
 </p:sld>
 </file>
 
-<file path=ppt/slides/slide6.xml><?xml version="1.0" encoding="utf-8"?>
+<file path=ppt/slides/slide7.xml><?xml version="1.0" encoding="utf-8"?>
 <p:sld xmlns:a="http://schemas.openxmlformats.org/drawingml/2006/main" xmlns:r="http://schemas.openxmlformats.org/officeDocument/2006/relationships" xmlns:p="http://schemas.openxmlformats.org/presentationml/2006/main">
   <p:cSld>
     <p:spTree>
@@ -18871,7 +20111,7 @@
                 </a:solidFill>
                 <a:latin typeface="Arial" panose="020B0604020202020204" pitchFamily="34" charset="0"/>
               </a:rPr>
-              <a:t>6 / 13</a:t>
+              <a:t>7 / 13</a:t>
             </a:r>
           </a:p>
         </p:txBody>
@@ -18929,7 +20169,7 @@
 </p:sld>
 </file>
 
-<file path=ppt/slides/slide7.xml><?xml version="1.0" encoding="utf-8"?>
+<file path=ppt/slides/slide8.xml><?xml version="1.0" encoding="utf-8"?>
 <p:sld xmlns:a="http://schemas.openxmlformats.org/drawingml/2006/main" xmlns:r="http://schemas.openxmlformats.org/officeDocument/2006/relationships" xmlns:p="http://schemas.openxmlformats.org/presentationml/2006/main">
   <p:cSld name="Slide 6">
     <p:bg>
@@ -19930,7 +21170,7 @@
                 <a:ea typeface="Arial" pitchFamily="34" charset="-122"/>
                 <a:cs typeface="Arial" pitchFamily="34" charset="-120"/>
               </a:rPr>
-              <a:t>7 / 13</a:t>
+              <a:t>8 / 13</a:t>
             </a:r>
             <a:endParaRPr lang="en-US" sz="900" dirty="0"/>
           </a:p>
@@ -19983,7 +21223,7 @@
 </p:sld>
 </file>
 
-<file path=ppt/slides/slide8.xml><?xml version="1.0" encoding="utf-8"?>
+<file path=ppt/slides/slide9.xml><?xml version="1.0" encoding="utf-8"?>
 <p:sld xmlns:a="http://schemas.openxmlformats.org/drawingml/2006/main" xmlns:r="http://schemas.openxmlformats.org/officeDocument/2006/relationships" xmlns:p="http://schemas.openxmlformats.org/presentationml/2006/main">
   <p:cSld name="Slide 7">
     <p:bg>
@@ -21164,1230 +22404,6 @@
                 <a:cs typeface="Arial" pitchFamily="34" charset="-120"/>
               </a:rPr>
               <a:t>this is a development-time proxy on a 249-candidate sample, not the hidden challenge score. It tells us the top of the list is real — it is not a leaderboard claim.</a:t>
-            </a:r>
-            <a:endParaRPr lang="en-US" sz="1200" dirty="0"/>
-          </a:p>
-        </p:txBody>
-      </p:sp>
-      <p:sp>
-        <p:nvSpPr>
-          <p:cNvPr id="32" name="Text 27"/>
-          <p:cNvSpPr/>
-          <p:nvPr/>
-        </p:nvSpPr>
-        <p:spPr>
-          <a:xfrm>
-            <a:off x="10911535" y="6473952"/>
-            <a:ext cx="914400" cy="228600"/>
-          </a:xfrm>
-          <a:prstGeom prst="rect">
-            <a:avLst/>
-          </a:prstGeom>
-          <a:noFill/>
-          <a:ln/>
-        </p:spPr>
-        <p:txBody>
-          <a:bodyPr wrap="square" rtlCol="0" anchor="ctr"/>
-          <a:lstStyle/>
-          <a:p>
-            <a:pPr marL="0" indent="0" algn="r">
-              <a:buNone/>
-            </a:pPr>
-            <a:r>
-              <a:rPr lang="en-US" sz="900">
-                <a:solidFill>
-                  <a:srgbClr val="6E7C8C"/>
-                </a:solidFill>
-                <a:latin typeface="Arial" pitchFamily="34" charset="0"/>
-                <a:ea typeface="Arial" pitchFamily="34" charset="-122"/>
-                <a:cs typeface="Arial" pitchFamily="34" charset="-120"/>
-              </a:rPr>
-              <a:t>8 / 13</a:t>
-            </a:r>
-            <a:endParaRPr lang="en-US" sz="900" dirty="0"/>
-          </a:p>
-        </p:txBody>
-      </p:sp>
-      <p:sp>
-        <p:nvSpPr>
-          <p:cNvPr id="33" name="Text 28"/>
-          <p:cNvSpPr/>
-          <p:nvPr/>
-        </p:nvSpPr>
-        <p:spPr>
-          <a:xfrm>
-            <a:off x="640080" y="6473952"/>
-            <a:ext cx="2743200" cy="228600"/>
-          </a:xfrm>
-          <a:prstGeom prst="rect">
-            <a:avLst/>
-          </a:prstGeom>
-          <a:noFill/>
-          <a:ln/>
-        </p:spPr>
-        <p:txBody>
-          <a:bodyPr wrap="square" rtlCol="0" anchor="ctr"/>
-          <a:lstStyle/>
-          <a:p>
-            <a:pPr marL="0" indent="0">
-              <a:buNone/>
-            </a:pPr>
-            <a:r>
-              <a:rPr lang="en-US" sz="900" b="1" kern="0" spc="200" dirty="0">
-                <a:solidFill>
-                  <a:srgbClr val="6E7C8C"/>
-                </a:solidFill>
-                <a:latin typeface="Arial" pitchFamily="34" charset="0"/>
-                <a:ea typeface="Arial" pitchFamily="34" charset="-122"/>
-                <a:cs typeface="Arial" pitchFamily="34" charset="-120"/>
-              </a:rPr>
-              <a:t>HIREFIT RANKER</a:t>
-            </a:r>
-            <a:endParaRPr lang="en-US" sz="900" dirty="0"/>
-          </a:p>
-        </p:txBody>
-      </p:sp>
-    </p:spTree>
-  </p:cSld>
-  <p:clrMapOvr>
-    <a:masterClrMapping/>
-  </p:clrMapOvr>
-</p:sld>
-</file>
-
-<file path=ppt/slides/slide9.xml><?xml version="1.0" encoding="utf-8"?>
-<p:sld xmlns:a="http://schemas.openxmlformats.org/drawingml/2006/main" xmlns:p="http://schemas.openxmlformats.org/presentationml/2006/main" xmlns:r="http://schemas.openxmlformats.org/officeDocument/2006/relationships">
-  <p:cSld>
-    <p:spTree>
-      <p:nvGrpSpPr>
-        <p:cNvPr id="1" name=""/>
-        <p:cNvGrpSpPr/>
-        <p:nvPr/>
-      </p:nvGrpSpPr>
-      <p:grpSpPr/>
-      <p:sp>
-        <p:nvSpPr>
-          <p:cNvPr id="2" name="Text 0"/>
-          <p:cNvSpPr/>
-          <p:nvPr/>
-        </p:nvSpPr>
-        <p:spPr>
-          <a:xfrm>
-            <a:off x="640080" y="384048"/>
-            <a:ext cx="10911535" cy="274320"/>
-          </a:xfrm>
-          <a:prstGeom prst="rect">
-            <a:avLst/>
-          </a:prstGeom>
-          <a:noFill/>
-          <a:ln/>
-        </p:spPr>
-        <p:txBody>
-          <a:bodyPr wrap="square" rtlCol="0" anchor="ctr"/>
-          <a:lstStyle/>
-          <a:p>
-            <a:pPr marL="0" indent="0">
-              <a:buNone/>
-            </a:pPr>
-            <a:r>
-              <a:rPr lang="en-US" sz="1150" b="1" kern="0" spc="300" dirty="0">
-                <a:solidFill>
-                  <a:srgbClr val="8B7CF6"/>
-                </a:solidFill>
-                <a:latin typeface="Arial" pitchFamily="34" charset="0"/>
-                <a:ea typeface="Arial" pitchFamily="34" charset="-122"/>
-                <a:cs typeface="Arial" pitchFamily="34" charset="-120"/>
-              </a:rPr>
-              <a:t>PRE-REGISTERED DISCIPLINE</a:t>
-            </a:r>
-            <a:endParaRPr lang="en-US" sz="1150" dirty="0"/>
-          </a:p>
-        </p:txBody>
-      </p:sp>
-      <p:sp>
-        <p:nvSpPr>
-          <p:cNvPr id="3" name="Text 1"/>
-          <p:cNvSpPr/>
-          <p:nvPr/>
-        </p:nvSpPr>
-        <p:spPr>
-          <a:xfrm>
-            <a:off x="640080" y="658368"/>
-            <a:ext cx="10911535" cy="658368"/>
-          </a:xfrm>
-          <a:prstGeom prst="rect">
-            <a:avLst/>
-          </a:prstGeom>
-          <a:noFill/>
-          <a:ln/>
-        </p:spPr>
-        <p:txBody>
-          <a:bodyPr wrap="square" rtlCol="0" anchor="ctr"/>
-          <a:lstStyle/>
-          <a:p>
-            <a:pPr marL="0" indent="0">
-              <a:lnSpc>
-                <a:spcPct val="98000"/>
-              </a:lnSpc>
-              <a:buNone/>
-            </a:pPr>
-            <a:r>
-              <a:rPr lang="en-US" sz="2600" b="1" dirty="0">
-                <a:solidFill>
-                  <a:srgbClr val="E6EDF3"/>
-                </a:solidFill>
-                <a:latin typeface="Arial" pitchFamily="34" charset="0"/>
-                <a:ea typeface="Arial" pitchFamily="34" charset="-122"/>
-                <a:cs typeface="Arial" pitchFamily="34" charset="-120"/>
-              </a:rPr>
-              <a:t>We measured the config that scores higher — and declined it on principle.</a:t>
-            </a:r>
-            <a:endParaRPr lang="en-US" sz="2600" dirty="0"/>
-          </a:p>
-        </p:txBody>
-      </p:sp>
-      <p:sp>
-        <p:nvSpPr>
-          <p:cNvPr id="4" name="Text 2"/>
-          <p:cNvSpPr/>
-          <p:nvPr/>
-        </p:nvSpPr>
-        <p:spPr>
-          <a:xfrm>
-            <a:off x="640080" y="1335024"/>
-            <a:ext cx="10911535" cy="292608"/>
-          </a:xfrm>
-          <a:prstGeom prst="rect">
-            <a:avLst/>
-          </a:prstGeom>
-          <a:noFill/>
-          <a:ln/>
-        </p:spPr>
-        <p:txBody>
-          <a:bodyPr wrap="square" rtlCol="0" anchor="ctr"/>
-          <a:lstStyle/>
-          <a:p>
-            <a:pPr marL="0" indent="0">
-              <a:buNone/>
-            </a:pPr>
-            <a:r>
-              <a:rPr lang="en-US" sz="1300" dirty="0">
-                <a:solidFill>
-                  <a:srgbClr val="9AA7B4"/>
-                </a:solidFill>
-                <a:latin typeface="Arial" pitchFamily="34" charset="0"/>
-                <a:ea typeface="Arial" pitchFamily="34" charset="-122"/>
-                <a:cs typeface="Arial" pitchFamily="34" charset="-120"/>
-              </a:rPr>
-              <a:t>Every knob swept under a decision rule committed before the first run; the JD is the spec, not the judge.</a:t>
-            </a:r>
-            <a:endParaRPr lang="en-US" sz="1300" dirty="0"/>
-          </a:p>
-        </p:txBody>
-      </p:sp>
-      <p:sp>
-        <p:nvSpPr>
-          <p:cNvPr id="5" name="Shape 3"/>
-          <p:cNvSpPr/>
-          <p:nvPr/>
-        </p:nvSpPr>
-        <p:spPr>
-          <a:xfrm>
-            <a:off x="640080" y="1874520"/>
-            <a:ext cx="2522144" cy="1097280"/>
-          </a:xfrm>
-          <a:prstGeom prst="roundRect">
-            <a:avLst>
-              <a:gd name="adj" fmla="val 10000"/>
-            </a:avLst>
-          </a:prstGeom>
-          <a:solidFill>
-            <a:srgbClr val="161C24"/>
-          </a:solidFill>
-          <a:ln w="12700">
-            <a:solidFill>
-              <a:srgbClr val="2A3340"/>
-            </a:solidFill>
-            <a:prstDash val="solid"/>
-          </a:ln>
-          <a:effectLst>
-            <a:outerShdw blurRad="114300" dist="38100" dir="5400000" algn="bl" rotWithShape="0">
-              <a:srgbClr val="000000">
-                <a:alpha val="28000"/>
-              </a:srgbClr>
-            </a:outerShdw>
-          </a:effectLst>
-        </p:spPr>
-        <p:txBody>
-          <a:bodyPr/>
-          <a:p/>
-        </p:txBody>
-      </p:sp>
-      <p:sp>
-        <p:nvSpPr>
-          <p:cNvPr id="6" name="Text 4"/>
-          <p:cNvSpPr/>
-          <p:nvPr/>
-        </p:nvSpPr>
-        <p:spPr>
-          <a:xfrm>
-            <a:off x="640080" y="1993392"/>
-            <a:ext cx="2522144" cy="566928"/>
-          </a:xfrm>
-          <a:prstGeom prst="rect">
-            <a:avLst/>
-          </a:prstGeom>
-          <a:noFill/>
-          <a:ln/>
-        </p:spPr>
-        <p:txBody>
-          <a:bodyPr wrap="square" rtlCol="0" anchor="ctr"/>
-          <a:lstStyle/>
-          <a:p>
-            <a:pPr marL="0" indent="0" algn="ctr">
-              <a:buNone/>
-            </a:pPr>
-            <a:r>
-              <a:rPr lang="en-US" sz="3400" b="1" dirty="0">
-                <a:solidFill>
-                  <a:srgbClr val="2DD4BF"/>
-                </a:solidFill>
-                <a:latin typeface="Arial" pitchFamily="34" charset="0"/>
-                <a:ea typeface="Arial" pitchFamily="34" charset="-122"/>
-                <a:cs typeface="Arial" pitchFamily="34" charset="-120"/>
-              </a:rPr>
-              <a:t>0.896</a:t>
-            </a:r>
-            <a:endParaRPr lang="en-US" sz="3400" dirty="0"/>
-          </a:p>
-        </p:txBody>
-      </p:sp>
-      <p:sp>
-        <p:nvSpPr>
-          <p:cNvPr id="7" name="Text 5"/>
-          <p:cNvSpPr/>
-          <p:nvPr/>
-        </p:nvSpPr>
-        <p:spPr>
-          <a:xfrm>
-            <a:off x="640080" y="2578608"/>
-            <a:ext cx="2522144" cy="274320"/>
-          </a:xfrm>
-          <a:prstGeom prst="rect">
-            <a:avLst/>
-          </a:prstGeom>
-          <a:noFill/>
-          <a:ln/>
-        </p:spPr>
-        <p:txBody>
-          <a:bodyPr wrap="square" rtlCol="0" anchor="ctr"/>
-          <a:lstStyle/>
-          <a:p>
-            <a:pPr marL="0" indent="0" algn="ctr">
-              <a:buNone/>
-            </a:pPr>
-            <a:r>
-              <a:rPr lang="en-US" sz="1200" dirty="0">
-                <a:solidFill>
-                  <a:srgbClr val="9AA7B4"/>
-                </a:solidFill>
-                <a:latin typeface="Arial" pitchFamily="34" charset="0"/>
-                <a:ea typeface="Arial" pitchFamily="34" charset="-122"/>
-                <a:cs typeface="Arial" pitchFamily="34" charset="-120"/>
-              </a:rPr>
-              <a:t>SHIPPED (LLM-JUDGE)</a:t>
-            </a:r>
-            <a:endParaRPr lang="en-US" sz="1200" dirty="0"/>
-          </a:p>
-        </p:txBody>
-      </p:sp>
-      <p:sp>
-        <p:nvSpPr>
-          <p:cNvPr id="8" name="Shape 6"/>
-          <p:cNvSpPr/>
-          <p:nvPr/>
-        </p:nvSpPr>
-        <p:spPr>
-          <a:xfrm>
-            <a:off x="3436544" y="1874520"/>
-            <a:ext cx="2522144" cy="1097280"/>
-          </a:xfrm>
-          <a:prstGeom prst="roundRect">
-            <a:avLst>
-              <a:gd name="adj" fmla="val 10000"/>
-            </a:avLst>
-          </a:prstGeom>
-          <a:solidFill>
-            <a:srgbClr val="161C24"/>
-          </a:solidFill>
-          <a:ln w="12700">
-            <a:solidFill>
-              <a:srgbClr val="2A3340"/>
-            </a:solidFill>
-            <a:prstDash val="solid"/>
-          </a:ln>
-          <a:effectLst>
-            <a:outerShdw blurRad="114300" dist="38100" dir="5400000" algn="bl" rotWithShape="0">
-              <a:srgbClr val="000000">
-                <a:alpha val="28000"/>
-              </a:srgbClr>
-            </a:outerShdw>
-          </a:effectLst>
-        </p:spPr>
-        <p:txBody>
-          <a:bodyPr/>
-          <a:p/>
-        </p:txBody>
-      </p:sp>
-      <p:sp>
-        <p:nvSpPr>
-          <p:cNvPr id="9" name="Text 7"/>
-          <p:cNvSpPr/>
-          <p:nvPr/>
-        </p:nvSpPr>
-        <p:spPr>
-          <a:xfrm>
-            <a:off x="3436544" y="1993392"/>
-            <a:ext cx="2522144" cy="566928"/>
-          </a:xfrm>
-          <a:prstGeom prst="rect">
-            <a:avLst/>
-          </a:prstGeom>
-          <a:noFill/>
-          <a:ln/>
-        </p:spPr>
-        <p:txBody>
-          <a:bodyPr wrap="square" rtlCol="0" anchor="ctr"/>
-          <a:lstStyle/>
-          <a:p>
-            <a:pPr marL="0" indent="0" algn="ctr">
-              <a:buNone/>
-            </a:pPr>
-            <a:r>
-              <a:rPr lang="en-US" sz="3400" b="1" dirty="0">
-                <a:solidFill>
-                  <a:srgbClr val="2DD4BF"/>
-                </a:solidFill>
-                <a:latin typeface="Arial" pitchFamily="34" charset="0"/>
-                <a:ea typeface="Arial" pitchFamily="34" charset="-122"/>
-                <a:cs typeface="Arial" pitchFamily="34" charset="-120"/>
-              </a:rPr>
-              <a:t>0.926</a:t>
-            </a:r>
-            <a:endParaRPr lang="en-US" sz="3400" dirty="0"/>
-          </a:p>
-        </p:txBody>
-      </p:sp>
-      <p:sp>
-        <p:nvSpPr>
-          <p:cNvPr id="10" name="Text 8"/>
-          <p:cNvSpPr/>
-          <p:nvPr/>
-        </p:nvSpPr>
-        <p:spPr>
-          <a:xfrm>
-            <a:off x="3436544" y="2578608"/>
-            <a:ext cx="2522144" cy="274320"/>
-          </a:xfrm>
-          <a:prstGeom prst="rect">
-            <a:avLst/>
-          </a:prstGeom>
-          <a:noFill/>
-          <a:ln/>
-        </p:spPr>
-        <p:txBody>
-          <a:bodyPr wrap="square" rtlCol="0" anchor="ctr"/>
-          <a:lstStyle/>
-          <a:p>
-            <a:pPr marL="0" indent="0" algn="ctr">
-              <a:buNone/>
-            </a:pPr>
-            <a:r>
-              <a:rPr lang="en-US" sz="1200" dirty="0">
-                <a:solidFill>
-                  <a:srgbClr val="9AA7B4"/>
-                </a:solidFill>
-                <a:latin typeface="Arial" pitchFamily="34" charset="0"/>
-                <a:ea typeface="Arial" pitchFamily="34" charset="-122"/>
-                <a:cs typeface="Arial" pitchFamily="34" charset="-120"/>
-              </a:rPr>
-              <a:t>FLOOR-OFF — DECLINED</a:t>
-            </a:r>
-            <a:endParaRPr lang="en-US" sz="1200" dirty="0"/>
-          </a:p>
-        </p:txBody>
-      </p:sp>
-      <p:sp>
-        <p:nvSpPr>
-          <p:cNvPr id="11" name="Shape 9"/>
-          <p:cNvSpPr/>
-          <p:nvPr/>
-        </p:nvSpPr>
-        <p:spPr>
-          <a:xfrm>
-            <a:off x="6233008" y="1874520"/>
-            <a:ext cx="2522144" cy="1097280"/>
-          </a:xfrm>
-          <a:prstGeom prst="roundRect">
-            <a:avLst>
-              <a:gd name="adj" fmla="val 10000"/>
-            </a:avLst>
-          </a:prstGeom>
-          <a:solidFill>
-            <a:srgbClr val="161C24"/>
-          </a:solidFill>
-          <a:ln w="12700">
-            <a:solidFill>
-              <a:srgbClr val="2A3340"/>
-            </a:solidFill>
-            <a:prstDash val="solid"/>
-          </a:ln>
-          <a:effectLst>
-            <a:outerShdw blurRad="114300" dist="38100" dir="5400000" algn="bl" rotWithShape="0">
-              <a:srgbClr val="000000">
-                <a:alpha val="28000"/>
-              </a:srgbClr>
-            </a:outerShdw>
-          </a:effectLst>
-        </p:spPr>
-        <p:txBody>
-          <a:bodyPr/>
-          <a:p/>
-        </p:txBody>
-      </p:sp>
-      <p:sp>
-        <p:nvSpPr>
-          <p:cNvPr id="12" name="Text 10"/>
-          <p:cNvSpPr/>
-          <p:nvPr/>
-        </p:nvSpPr>
-        <p:spPr>
-          <a:xfrm>
-            <a:off x="6233008" y="1993392"/>
-            <a:ext cx="2522144" cy="566928"/>
-          </a:xfrm>
-          <a:prstGeom prst="rect">
-            <a:avLst/>
-          </a:prstGeom>
-          <a:noFill/>
-          <a:ln/>
-        </p:spPr>
-        <p:txBody>
-          <a:bodyPr wrap="square" rtlCol="0" anchor="ctr"/>
-          <a:lstStyle/>
-          <a:p>
-            <a:pPr marL="0" indent="0" algn="ctr">
-              <a:buNone/>
-            </a:pPr>
-            <a:r>
-              <a:rPr lang="en-US" sz="3400" b="1" dirty="0">
-                <a:solidFill>
-                  <a:srgbClr val="2DD4BF"/>
-                </a:solidFill>
-                <a:latin typeface="Arial" pitchFamily="34" charset="0"/>
-                <a:ea typeface="Arial" pitchFamily="34" charset="-122"/>
-                <a:cs typeface="Arial" pitchFamily="34" charset="-120"/>
-              </a:rPr>
-              <a:t>0</a:t>
-            </a:r>
-            <a:endParaRPr lang="en-US" sz="3400" dirty="0"/>
-          </a:p>
-        </p:txBody>
-      </p:sp>
-      <p:sp>
-        <p:nvSpPr>
-          <p:cNvPr id="13" name="Text 11"/>
-          <p:cNvSpPr/>
-          <p:nvPr/>
-        </p:nvSpPr>
-        <p:spPr>
-          <a:xfrm>
-            <a:off x="6233008" y="2578608"/>
-            <a:ext cx="2522144" cy="274320"/>
-          </a:xfrm>
-          <a:prstGeom prst="rect">
-            <a:avLst/>
-          </a:prstGeom>
-          <a:noFill/>
-          <a:ln/>
-        </p:spPr>
-        <p:txBody>
-          <a:bodyPr wrap="square" rtlCol="0" anchor="ctr"/>
-          <a:lstStyle/>
-          <a:p>
-            <a:pPr marL="0" indent="0" algn="ctr">
-              <a:buNone/>
-            </a:pPr>
-            <a:r>
-              <a:rPr lang="en-US" sz="1200" dirty="0">
-                <a:solidFill>
-                  <a:srgbClr val="9AA7B4"/>
-                </a:solidFill>
-                <a:latin typeface="Arial" pitchFamily="34" charset="0"/>
-                <a:ea typeface="Arial" pitchFamily="34" charset="-122"/>
-                <a:cs typeface="Arial" pitchFamily="34" charset="-120"/>
-              </a:rPr>
-              <a:t>RANK CHANGES 0.25–0.55</a:t>
-            </a:r>
-            <a:endParaRPr lang="en-US" sz="1200" dirty="0"/>
-          </a:p>
-        </p:txBody>
-      </p:sp>
-      <p:sp>
-        <p:nvSpPr>
-          <p:cNvPr id="14" name="Shape 12"/>
-          <p:cNvSpPr/>
-          <p:nvPr/>
-        </p:nvSpPr>
-        <p:spPr>
-          <a:xfrm>
-            <a:off x="9029471" y="1874520"/>
-            <a:ext cx="2522144" cy="1097280"/>
-          </a:xfrm>
-          <a:prstGeom prst="roundRect">
-            <a:avLst>
-              <a:gd name="adj" fmla="val 10000"/>
-            </a:avLst>
-          </a:prstGeom>
-          <a:solidFill>
-            <a:srgbClr val="161C24"/>
-          </a:solidFill>
-          <a:ln w="12700">
-            <a:solidFill>
-              <a:srgbClr val="2A3340"/>
-            </a:solidFill>
-            <a:prstDash val="solid"/>
-          </a:ln>
-          <a:effectLst>
-            <a:outerShdw blurRad="114300" dist="38100" dir="5400000" algn="bl" rotWithShape="0">
-              <a:srgbClr val="000000">
-                <a:alpha val="28000"/>
-              </a:srgbClr>
-            </a:outerShdw>
-          </a:effectLst>
-        </p:spPr>
-        <p:txBody>
-          <a:bodyPr/>
-          <a:p/>
-        </p:txBody>
-      </p:sp>
-      <p:sp>
-        <p:nvSpPr>
-          <p:cNvPr id="15" name="Text 13"/>
-          <p:cNvSpPr/>
-          <p:nvPr/>
-        </p:nvSpPr>
-        <p:spPr>
-          <a:xfrm>
-            <a:off x="9029471" y="1993392"/>
-            <a:ext cx="2522144" cy="566928"/>
-          </a:xfrm>
-          <a:prstGeom prst="rect">
-            <a:avLst/>
-          </a:prstGeom>
-          <a:noFill/>
-          <a:ln/>
-        </p:spPr>
-        <p:txBody>
-          <a:bodyPr wrap="square" rtlCol="0" anchor="ctr"/>
-          <a:lstStyle/>
-          <a:p>
-            <a:pPr marL="0" indent="0" algn="ctr">
-              <a:buNone/>
-            </a:pPr>
-            <a:r>
-              <a:rPr lang="en-US" sz="3400" b="1" dirty="0">
-                <a:solidFill>
-                  <a:srgbClr val="34D399"/>
-                </a:solidFill>
-                <a:latin typeface="Arial" pitchFamily="34" charset="0"/>
-                <a:ea typeface="Arial" pitchFamily="34" charset="-122"/>
-                <a:cs typeface="Arial" pitchFamily="34" charset="-120"/>
-              </a:rPr>
-              <a:t>9 / 13</a:t>
-            </a:r>
-            <a:endParaRPr lang="en-US" sz="3400" dirty="0"/>
-          </a:p>
-        </p:txBody>
-      </p:sp>
-      <p:sp>
-        <p:nvSpPr>
-          <p:cNvPr id="16" name="Text 14"/>
-          <p:cNvSpPr/>
-          <p:nvPr/>
-        </p:nvSpPr>
-        <p:spPr>
-          <a:xfrm>
-            <a:off x="9029471" y="2578608"/>
-            <a:ext cx="2522144" cy="274320"/>
-          </a:xfrm>
-          <a:prstGeom prst="rect">
-            <a:avLst/>
-          </a:prstGeom>
-          <a:noFill/>
-          <a:ln/>
-        </p:spPr>
-        <p:txBody>
-          <a:bodyPr wrap="square" rtlCol="0" anchor="ctr"/>
-          <a:lstStyle/>
-          <a:p>
-            <a:pPr marL="0" indent="0" algn="ctr">
-              <a:buNone/>
-            </a:pPr>
-            <a:r>
-              <a:rPr lang="en-US" sz="1200" dirty="0">
-                <a:solidFill>
-                  <a:srgbClr val="9AA7B4"/>
-                </a:solidFill>
-                <a:latin typeface="Arial" pitchFamily="34" charset="0"/>
-                <a:ea typeface="Arial" pitchFamily="34" charset="-122"/>
-                <a:cs typeface="Arial" pitchFamily="34" charset="-120"/>
-              </a:rPr>
-              <a:t>PLANTED TRAPS CAUGHT</a:t>
-            </a:r>
-            <a:endParaRPr lang="en-US" sz="1200" dirty="0"/>
-          </a:p>
-        </p:txBody>
-      </p:sp>
-      <p:sp>
-        <p:nvSpPr>
-          <p:cNvPr id="17" name="Shape 15"/>
-          <p:cNvSpPr/>
-          <p:nvPr/>
-        </p:nvSpPr>
-        <p:spPr>
-          <a:xfrm>
-            <a:off x="640080" y="3200400"/>
-            <a:ext cx="5272888" cy="1874520"/>
-          </a:xfrm>
-          <a:prstGeom prst="roundRect">
-            <a:avLst>
-              <a:gd name="adj" fmla="val 5854"/>
-            </a:avLst>
-          </a:prstGeom>
-          <a:solidFill>
-            <a:srgbClr val="161C24"/>
-          </a:solidFill>
-          <a:ln w="12700">
-            <a:solidFill>
-              <a:srgbClr val="2A3340"/>
-            </a:solidFill>
-            <a:prstDash val="solid"/>
-          </a:ln>
-          <a:effectLst>
-            <a:outerShdw blurRad="114300" dist="38100" dir="5400000" algn="bl" rotWithShape="0">
-              <a:srgbClr val="000000">
-                <a:alpha val="28000"/>
-              </a:srgbClr>
-            </a:outerShdw>
-          </a:effectLst>
-        </p:spPr>
-        <p:txBody>
-          <a:bodyPr/>
-          <a:p/>
-        </p:txBody>
-      </p:sp>
-      <p:sp>
-        <p:nvSpPr>
-          <p:cNvPr id="18" name="Shape 16"/>
-          <p:cNvSpPr/>
-          <p:nvPr/>
-        </p:nvSpPr>
-        <p:spPr>
-          <a:xfrm>
-            <a:off x="914400" y="3429000"/>
-            <a:ext cx="420624" cy="420624"/>
-          </a:xfrm>
-          <a:prstGeom prst="roundRect">
-            <a:avLst>
-              <a:gd name="adj" fmla="val 15217"/>
-            </a:avLst>
-          </a:prstGeom>
-          <a:solidFill>
-            <a:srgbClr val="F2B544">
-              <a:alpha val="18000"/>
-            </a:srgbClr>
-          </a:solidFill>
-          <a:ln w="12700">
-            <a:solidFill>
-              <a:srgbClr val="F2B544">
-                <a:alpha val="45000"/>
-              </a:srgbClr>
-            </a:solidFill>
-            <a:prstDash val="solid"/>
-          </a:ln>
-        </p:spPr>
-        <p:txBody>
-          <a:bodyPr/>
-          <a:p/>
-        </p:txBody>
-      </p:sp>
-      <p:pic>
-        <p:nvPicPr>
-          <p:cNvPr id="19" name="Image 0" descr="preencoded.png"/>
-          <p:cNvPicPr>
-            <a:picLocks noChangeAspect="1"/>
-          </p:cNvPicPr>
-          <p:nvPr/>
-        </p:nvPicPr>
-        <p:blipFill>
-          <a:blip r:embed="rId2"/>
-          <a:stretch>
-            <a:fillRect/>
-          </a:stretch>
-        </p:blipFill>
-        <p:spPr>
-          <a:xfrm>
-            <a:off x="1006937" y="3521537"/>
-            <a:ext cx="235549" cy="235549"/>
-          </a:xfrm>
-          <a:prstGeom prst="rect">
-            <a:avLst/>
-          </a:prstGeom>
-        </p:spPr>
-      </p:pic>
-      <p:sp>
-        <p:nvSpPr>
-          <p:cNvPr id="20" name="Text 17"/>
-          <p:cNvSpPr/>
-          <p:nvPr/>
-        </p:nvSpPr>
-        <p:spPr>
-          <a:xfrm>
-            <a:off x="1444752" y="3429000"/>
-            <a:ext cx="4358488" cy="411480"/>
-          </a:xfrm>
-          <a:prstGeom prst="rect">
-            <a:avLst/>
-          </a:prstGeom>
-          <a:noFill/>
-          <a:ln/>
-        </p:spPr>
-        <p:txBody>
-          <a:bodyPr wrap="square" rtlCol="0" anchor="ctr"/>
-          <a:lstStyle/>
-          <a:p>
-            <a:pPr marL="0" indent="0">
-              <a:buNone/>
-            </a:pPr>
-            <a:r>
-              <a:rPr lang="en-US" sz="1500" b="1" dirty="0">
-                <a:solidFill>
-                  <a:srgbClr val="E6EDF3"/>
-                </a:solidFill>
-                <a:latin typeface="Arial" pitchFamily="34" charset="0"/>
-                <a:ea typeface="Arial" pitchFamily="34" charset="-122"/>
-                <a:cs typeface="Arial" pitchFamily="34" charset="-120"/>
-              </a:rPr>
-              <a:t>How the rule decided</a:t>
-            </a:r>
-            <a:endParaRPr lang="en-US" sz="1500" dirty="0"/>
-          </a:p>
-        </p:txBody>
-      </p:sp>
-      <p:sp>
-        <p:nvSpPr>
-          <p:cNvPr id="21" name="Text 18"/>
-          <p:cNvSpPr/>
-          <p:nvPr/>
-        </p:nvSpPr>
-        <p:spPr>
-          <a:xfrm>
-            <a:off x="932688" y="3931920"/>
-            <a:ext cx="4724248" cy="384048"/>
-          </a:xfrm>
-          <a:prstGeom prst="rect">
-            <a:avLst/>
-          </a:prstGeom>
-          <a:noFill/>
-          <a:ln/>
-        </p:spPr>
-        <p:txBody>
-          <a:bodyPr wrap="square" rtlCol="0" anchor="ctr"/>
-          <a:lstStyle/>
-          <a:p>
-            <a:pPr marL="0" indent="0">
-              <a:lnSpc>
-                <a:spcPct val="98000"/>
-              </a:lnSpc>
-              <a:buNone/>
-            </a:pPr>
-            <a:r>
-              <a:rPr lang="en-US" sz="1100" b="1" dirty="0">
-                <a:solidFill>
-                  <a:srgbClr val="2DD4BF"/>
-                </a:solidFill>
-                <a:latin typeface="Arial" pitchFamily="34" charset="0"/>
-                <a:ea typeface="Arial" pitchFamily="34" charset="-122"/>
-                <a:cs typeface="Arial" pitchFamily="34" charset="-120"/>
-              </a:rPr>
-              <a:t>Rule first   committed before any sweep run — ties break toward the JD's down-weight instruction</a:t>
-            </a:r>
-            <a:endParaRPr lang="en-US" sz="1100" dirty="0"/>
-          </a:p>
-        </p:txBody>
-      </p:sp>
-      <p:sp>
-        <p:nvSpPr>
-          <p:cNvPr id="22" name="Text 19"/>
-          <p:cNvSpPr/>
-          <p:nvPr/>
-        </p:nvSpPr>
-        <p:spPr>
-          <a:xfrm>
-            <a:off x="932688" y="4315968"/>
-            <a:ext cx="4724248" cy="384048"/>
-          </a:xfrm>
-          <a:prstGeom prst="rect">
-            <a:avLst/>
-          </a:prstGeom>
-          <a:noFill/>
-          <a:ln/>
-        </p:spPr>
-        <p:txBody>
-          <a:bodyPr wrap="square" rtlCol="0" anchor="ctr"/>
-          <a:lstStyle/>
-          <a:p>
-            <a:pPr marL="0" indent="0">
-              <a:lnSpc>
-                <a:spcPct val="98000"/>
-              </a:lnSpc>
-              <a:buNone/>
-            </a:pPr>
-            <a:r>
-              <a:rPr lang="en-US" sz="1100" b="1" dirty="0">
-                <a:solidFill>
-                  <a:srgbClr val="2DD4BF"/>
-                </a:solidFill>
-                <a:latin typeface="Arial" pitchFamily="34" charset="0"/>
-                <a:ea typeface="Arial" pitchFamily="34" charset="-122"/>
-                <a:cs typeface="Arial" pitchFamily="34" charset="-120"/>
-              </a:rPr>
-              <a:t>Coverage guard   floor 0.85–1.00 configs excluded: &lt;95% label coverage, selection-biased</a:t>
-            </a:r>
-            <a:endParaRPr lang="en-US" sz="1100" dirty="0"/>
-          </a:p>
-        </p:txBody>
-      </p:sp>
-      <p:sp>
-        <p:nvSpPr>
-          <p:cNvPr id="23" name="Text 20"/>
-          <p:cNvSpPr/>
-          <p:nvPr/>
-        </p:nvSpPr>
-        <p:spPr>
-          <a:xfrm>
-            <a:off x="932688" y="4700016"/>
-            <a:ext cx="4724248" cy="384048"/>
-          </a:xfrm>
-          <a:prstGeom prst="rect">
-            <a:avLst/>
-          </a:prstGeom>
-          <a:noFill/>
-          <a:ln/>
-        </p:spPr>
-        <p:txBody>
-          <a:bodyPr wrap="square" rtlCol="0" anchor="ctr"/>
-          <a:lstStyle/>
-          <a:p>
-            <a:pPr marL="0" indent="0">
-              <a:lnSpc>
-                <a:spcPct val="98000"/>
-              </a:lnSpc>
-              <a:buNone/>
-            </a:pPr>
-            <a:r>
-              <a:rPr lang="en-US" sz="1100" b="1" dirty="0">
-                <a:solidFill>
-                  <a:srgbClr val="2DD4BF"/>
-                </a:solidFill>
-                <a:latin typeface="Arial" pitchFamily="34" charset="0"/>
-                <a:ea typeface="Arial" pitchFamily="34" charset="-122"/>
-                <a:cs typeface="Arial" pitchFamily="34" charset="-120"/>
-              </a:rPr>
-              <a:t>Winner   shipped config — identical top-100 across floors 0.25–0.55</a:t>
-            </a:r>
-            <a:endParaRPr lang="en-US" sz="1100" dirty="0"/>
-          </a:p>
-        </p:txBody>
-      </p:sp>
-      <p:sp>
-        <p:nvSpPr>
-          <p:cNvPr id="24" name="Shape 21"/>
-          <p:cNvSpPr/>
-          <p:nvPr/>
-        </p:nvSpPr>
-        <p:spPr>
-          <a:xfrm>
-            <a:off x="6278728" y="3200400"/>
-            <a:ext cx="5272888" cy="1874520"/>
-          </a:xfrm>
-          <a:prstGeom prst="roundRect">
-            <a:avLst>
-              <a:gd name="adj" fmla="val 5854"/>
-            </a:avLst>
-          </a:prstGeom>
-          <a:solidFill>
-            <a:srgbClr val="1B2330"/>
-          </a:solidFill>
-          <a:ln w="12700">
-            <a:solidFill>
-              <a:srgbClr val="2A3340"/>
-            </a:solidFill>
-            <a:prstDash val="solid"/>
-          </a:ln>
-          <a:effectLst>
-            <a:outerShdw blurRad="114300" dist="38100" dir="5400000" algn="bl" rotWithShape="0">
-              <a:srgbClr val="000000">
-                <a:alpha val="28000"/>
-              </a:srgbClr>
-            </a:outerShdw>
-          </a:effectLst>
-        </p:spPr>
-        <p:txBody>
-          <a:bodyPr/>
-          <a:p/>
-        </p:txBody>
-      </p:sp>
-      <p:sp>
-        <p:nvSpPr>
-          <p:cNvPr id="25" name="Shape 22"/>
-          <p:cNvSpPr/>
-          <p:nvPr/>
-        </p:nvSpPr>
-        <p:spPr>
-          <a:xfrm>
-            <a:off x="6553048" y="3429000"/>
-            <a:ext cx="420624" cy="420624"/>
-          </a:xfrm>
-          <a:prstGeom prst="roundRect">
-            <a:avLst>
-              <a:gd name="adj" fmla="val 15217"/>
-            </a:avLst>
-          </a:prstGeom>
-          <a:solidFill>
-            <a:srgbClr val="2DD4BF">
-              <a:alpha val="18000"/>
-            </a:srgbClr>
-          </a:solidFill>
-          <a:ln w="12700">
-            <a:solidFill>
-              <a:srgbClr val="2DD4BF">
-                <a:alpha val="45000"/>
-              </a:srgbClr>
-            </a:solidFill>
-            <a:prstDash val="solid"/>
-          </a:ln>
-        </p:spPr>
-        <p:txBody>
-          <a:bodyPr/>
-          <a:p/>
-        </p:txBody>
-      </p:sp>
-      <p:pic>
-        <p:nvPicPr>
-          <p:cNvPr id="26" name="Image 1" descr="preencoded.png"/>
-          <p:cNvPicPr>
-            <a:picLocks noChangeAspect="1"/>
-          </p:cNvPicPr>
-          <p:nvPr/>
-        </p:nvPicPr>
-        <p:blipFill>
-          <a:blip r:embed="rId3"/>
-          <a:stretch>
-            <a:fillRect/>
-          </a:stretch>
-        </p:blipFill>
-        <p:spPr>
-          <a:xfrm>
-            <a:off x="6645585" y="3521537"/>
-            <a:ext cx="235549" cy="235549"/>
-          </a:xfrm>
-          <a:prstGeom prst="rect">
-            <a:avLst/>
-          </a:prstGeom>
-        </p:spPr>
-      </p:pic>
-      <p:sp>
-        <p:nvSpPr>
-          <p:cNvPr id="27" name="Text 23"/>
-          <p:cNvSpPr/>
-          <p:nvPr/>
-        </p:nvSpPr>
-        <p:spPr>
-          <a:xfrm>
-            <a:off x="7083400" y="3429000"/>
-            <a:ext cx="4358488" cy="411480"/>
-          </a:xfrm>
-          <a:prstGeom prst="rect">
-            <a:avLst/>
-          </a:prstGeom>
-          <a:noFill/>
-          <a:ln/>
-        </p:spPr>
-        <p:txBody>
-          <a:bodyPr wrap="square" rtlCol="0" anchor="ctr"/>
-          <a:lstStyle/>
-          <a:p>
-            <a:pPr marL="0" indent="0">
-              <a:buNone/>
-            </a:pPr>
-            <a:r>
-              <a:rPr lang="en-US" sz="1500" b="1" dirty="0">
-                <a:solidFill>
-                  <a:srgbClr val="2DD4BF"/>
-                </a:solidFill>
-                <a:latin typeface="Arial" pitchFamily="34" charset="0"/>
-                <a:ea typeface="Arial" pitchFamily="34" charset="-122"/>
-                <a:cs typeface="Arial" pitchFamily="34" charset="-120"/>
-              </a:rPr>
-              <a:t>We built our strongest rival — it lost</a:t>
-            </a:r>
-            <a:endParaRPr lang="en-US" sz="1500" dirty="0"/>
-          </a:p>
-        </p:txBody>
-      </p:sp>
-      <p:sp>
-        <p:nvSpPr>
-          <p:cNvPr id="28" name="Text 24"/>
-          <p:cNvSpPr/>
-          <p:nvPr/>
-        </p:nvSpPr>
-        <p:spPr>
-          <a:xfrm>
-            <a:off x="6571336" y="3931920"/>
-            <a:ext cx="4724248" cy="1005840"/>
-          </a:xfrm>
-          <a:prstGeom prst="rect">
-            <a:avLst/>
-          </a:prstGeom>
-          <a:noFill/>
-          <a:ln/>
-        </p:spPr>
-        <p:txBody>
-          <a:bodyPr wrap="square" rtlCol="0" anchor="t"/>
-          <a:lstStyle/>
-          <a:p>
-            <a:pPr marL="0" indent="0">
-              <a:lnSpc>
-                <a:spcPct val="110000"/>
-              </a:lnSpc>
-              <a:buNone/>
-            </a:pPr>
-            <a:r>
-              <a:rPr lang="en-US" sz="1250">
-                <a:solidFill>
-                  <a:srgbClr val="E6EDF3"/>
-                </a:solidFill>
-                <a:latin typeface="Arial" pitchFamily="34" charset="0"/>
-                <a:ea typeface="Arial" pitchFamily="34" charset="-122"/>
-                <a:cs typeface="Arial" pitchFamily="34" charset="-120"/>
-              </a:rPr>
-              <a:t>A LambdaMART ranker over our own 28 features plus recovered generator structure, trained on 1,500 LLM judgments, evaluated once under a gate committed before training: 0.900 vs our 0.906. Third measured negative result — the hand-tuned ordering stands because nothing we tested beats it, not because nothing was tested.</a:t>
-            </a:r>
-            <a:endParaRPr lang="en-US" sz="1250" dirty="0"/>
-          </a:p>
-        </p:txBody>
-      </p:sp>
-      <p:sp>
-        <p:nvSpPr>
-          <p:cNvPr id="29" name="Shape 25"/>
-          <p:cNvSpPr/>
-          <p:nvPr/>
-        </p:nvSpPr>
-        <p:spPr>
-          <a:xfrm>
-            <a:off x="640080" y="5257800"/>
-            <a:ext cx="10911535" cy="658368"/>
-          </a:xfrm>
-          <a:prstGeom prst="roundRect">
-            <a:avLst>
-              <a:gd name="adj" fmla="val 16667"/>
-            </a:avLst>
-          </a:prstGeom>
-          <a:solidFill>
-            <a:srgbClr val="161C24"/>
-          </a:solidFill>
-          <a:ln w="12700">
-            <a:solidFill>
-              <a:srgbClr val="2A3340"/>
-            </a:solidFill>
-            <a:prstDash val="solid"/>
-          </a:ln>
-          <a:effectLst>
-            <a:outerShdw blurRad="114300" dist="38100" dir="5400000" algn="bl" rotWithShape="0">
-              <a:srgbClr val="000000">
-                <a:alpha val="28000"/>
-              </a:srgbClr>
-            </a:outerShdw>
-          </a:effectLst>
-        </p:spPr>
-        <p:txBody>
-          <a:bodyPr/>
-          <a:p/>
-        </p:txBody>
-      </p:sp>
-      <p:pic>
-        <p:nvPicPr>
-          <p:cNvPr id="30" name="Image 2" descr="preencoded.png"/>
-          <p:cNvPicPr>
-            <a:picLocks noChangeAspect="1"/>
-          </p:cNvPicPr>
-          <p:nvPr/>
-        </p:nvPicPr>
-        <p:blipFill>
-          <a:blip r:embed="rId4"/>
-          <a:stretch>
-            <a:fillRect/>
-          </a:stretch>
-        </p:blipFill>
-        <p:spPr>
-          <a:xfrm>
-            <a:off x="914400" y="5413248"/>
-            <a:ext cx="292608" cy="292608"/>
-          </a:xfrm>
-          <a:prstGeom prst="rect">
-            <a:avLst/>
-          </a:prstGeom>
-        </p:spPr>
-      </p:pic>
-      <p:sp>
-        <p:nvSpPr>
-          <p:cNvPr id="31" name="Text 26"/>
-          <p:cNvSpPr/>
-          <p:nvPr/>
-        </p:nvSpPr>
-        <p:spPr>
-          <a:xfrm>
-            <a:off x="1325880" y="5257800"/>
-            <a:ext cx="9905695" cy="658368"/>
-          </a:xfrm>
-          <a:prstGeom prst="rect">
-            <a:avLst/>
-          </a:prstGeom>
-          <a:noFill/>
-          <a:ln/>
-        </p:spPr>
-        <p:txBody>
-          <a:bodyPr wrap="square" rtlCol="0" anchor="ctr"/>
-          <a:lstStyle/>
-          <a:p>
-            <a:pPr marL="0" indent="0">
-              <a:lnSpc>
-                <a:spcPct val="100000"/>
-              </a:lnSpc>
-              <a:buNone/>
-            </a:pPr>
-            <a:r>
-              <a:rPr lang="en-US" sz="1200" b="1" dirty="0">
-                <a:solidFill>
-                  <a:srgbClr val="F2B544"/>
-                </a:solidFill>
-                <a:latin typeface="Arial" pitchFamily="34" charset="0"/>
-                <a:ea typeface="Arial" pitchFamily="34" charset="-122"/>
-                <a:cs typeface="Arial" pitchFamily="34" charset="-120"/>
-              </a:rPr>
-              <a:t>Honest framing:  the pool plants 11 perfect-on-paper-but-unavailable seniors (response rates to 0.07) and one honeypot in gold clothing — the guardrails demote all 12; an LLM judge missed one of them.</a:t>
             </a:r>
             <a:endParaRPr lang="en-US" sz="1200" dirty="0"/>
           </a:p>

--- a/docs/HireFit_Ranker_Redrob_POLISHED.pptx
+++ b/docs/HireFit_Ranker_Redrob_POLISHED.pptx
@@ -4803,7 +4803,7 @@
                 <a:ea typeface="Arial" pitchFamily="34" charset="-122"/>
                 <a:cs typeface="Arial" pitchFamily="34" charset="-120"/>
               </a:rPr>
-              <a:t>80–122 s</a:t>
+              <a:t>80–125 s</a:t>
             </a:r>
             <a:endParaRPr lang="en-US" sz="1250" dirty="0"/>
           </a:p>
@@ -10562,7 +10562,7 @@
                 <a:ea typeface="Arial" pitchFamily="34" charset="-122"/>
                 <a:cs typeface="Arial" pitchFamily="34" charset="-120"/>
               </a:rPr>
-              <a:t>0.896</a:t>
+              <a:t>0.911</a:t>
             </a:r>
             <a:endParaRPr lang="en-US" sz="3400" dirty="0"/>
           </a:p>
@@ -11389,7 +11389,7 @@
                 <a:ea typeface="Arial" pitchFamily="34" charset="-122"/>
                 <a:cs typeface="Arial" pitchFamily="34" charset="-120"/>
               </a:rPr>
-              <a:t>A LambdaMART ranker over our own 28 features plus recovered generator structure, trained on 1,500 LLM judgments, evaluated once under a gate committed before training: 0.900 vs our 0.906. Third measured negative result — the hand-tuned ordering stands because nothing we tested beats it, not because nothing was tested.</a:t>
+              <a:t>A LambdaMART challenger built on our own 28 features plus recovered generator structure lost its pre-registered gate: 0.900 vs 0.906. One of four measured negatives — embeddings, learned-LR, the challenger, and a declined availability hedge. The single adopted change: an 8-swap consensus calibration pass that survived held-out validation (+0.009–0.011).</a:t>
             </a:r>
             <a:endParaRPr lang="en-US" sz="1250" dirty="0"/>
           </a:p>
@@ -21555,7 +21555,7 @@
                 <a:ea typeface="Arial" pitchFamily="34" charset="-122"/>
                 <a:cs typeface="Arial" pitchFamily="34" charset="-120"/>
               </a:rPr>
-              <a:t>0.873</a:t>
+              <a:t>0.924</a:t>
             </a:r>
             <a:endParaRPr lang="en-US" sz="3400" dirty="0"/>
           </a:p>
@@ -22288,7 +22288,7 @@
                 <a:ea typeface="Arial" pitchFamily="34" charset="-122"/>
                 <a:cs typeface="Arial" pitchFamily="34" charset="-120"/>
               </a:rPr>
-              <a:t>The judge composite (0.896) is slightly higher than our non-circular heuristic harness (0.881) — the ranking is strong by an outside opinion, not just our own.</a:t>
+              <a:t>The judge composite (0.911) is slightly higher than our non-circular heuristic harness (0.886) — the ranking is strong by an outside opinion, not just our own.</a:t>
             </a:r>
             <a:endParaRPr lang="en-US" sz="1250" dirty="0"/>
           </a:p>

--- a/docs/HireFit_Ranker_Redrob_POLISHED.pptx
+++ b/docs/HireFit_Ranker_Redrob_POLISHED.pptx
@@ -21323,7 +21323,7 @@
                 <a:ea typeface="Arial" pitchFamily="34" charset="-122"/>
                 <a:cs typeface="Arial" pitchFamily="34" charset="-120"/>
               </a:rPr>
-              <a:t>Two independent LLM judges confirm the top-10 — it isn’t self-graded.</a:t>
+              <a:t>Three independent LLM judge families confirm the top-10 — it isn’t self-graded.</a:t>
             </a:r>
             <a:endParaRPr lang="en-US" sz="2600" dirty="0"/>
           </a:p>
@@ -22068,7 +22068,7 @@
                 <a:ea typeface="Arial" pitchFamily="34" charset="-122"/>
                 <a:cs typeface="Arial" pitchFamily="34" charset="-120"/>
               </a:rPr>
-              <a:t>   gemini-2.5-flash + gpt-4.1-mini, same rubric, same 249 ids: kappa 0.935, within-1 agreement 100%.</a:t>
+              <a:t>   gemini-2.5-flash + gpt-4.1-mini + deepseek, same rubric, same 249 ids: kappa 0.918–0.935 across all pairs.</a:t>
             </a:r>
             <a:endParaRPr lang="en-US" sz="1100" dirty="0"/>
           </a:p>

--- a/docs/HireFit_Ranker_Redrob_POLISHED.pptx
+++ b/docs/HireFit_Ranker_Redrob_POLISHED.pptx
@@ -6116,7 +6116,7 @@
                 <a:ea typeface="Arial" pitchFamily="34" charset="-122"/>
                 <a:cs typeface="Arial" pitchFamily="34" charset="-120"/>
               </a:rPr>
-              <a:t>&lt;50 ms</a:t>
+              <a:t>~3 ms</a:t>
             </a:r>
             <a:endParaRPr lang="en-US" sz="3400" dirty="0"/>
           </a:p>
@@ -6155,7 +6155,7 @@
                 <a:ea typeface="Arial" pitchFamily="34" charset="-122"/>
                 <a:cs typeface="Arial" pitchFamily="34" charset="-120"/>
               </a:rPr>
-              <a:t>PER-CANDIDATE AUDIT API</a:t>
+              <a:t>AUDIT API, MEASURED</a:t>
             </a:r>
             <a:endParaRPr lang="en-US" sz="1200" dirty="0"/>
           </a:p>
@@ -10184,7 +10184,7 @@
                 <a:ea typeface="Arial" pitchFamily="34" charset="-122"/>
                 <a:cs typeface="Arial" pitchFamily="34" charset="-120"/>
               </a:rPr>
-              <a:t>Right seniority  —  5–9 years of judgment — penalize overshoot and juniors.</a:t>
+              <a:t>Right seniority  —  anchored on the JD's 5–9 band — juniors demoted hard; senior depth read from trajectory, not years arithmetic.</a:t>
             </a:r>
             <a:endParaRPr lang="en-US" sz="1300" dirty="0"/>
           </a:p>
@@ -10717,7 +10717,7 @@
                 <a:ea typeface="Arial" pitchFamily="34" charset="-122"/>
                 <a:cs typeface="Arial" pitchFamily="34" charset="-120"/>
               </a:rPr>
-              <a:t>FLOOR-OFF — DECLINED</a:t>
+              <a:t>FLOOR-OFF — BIASED SAMPLE, DECLINED</a:t>
             </a:r>
             <a:endParaRPr lang="en-US" sz="1200" dirty="0"/>
           </a:p>
@@ -11493,7 +11493,7 @@
                 <a:ea typeface="Arial" pitchFamily="34" charset="-122"/>
                 <a:cs typeface="Arial" pitchFamily="34" charset="-120"/>
               </a:rPr>
-              <a:t>Honest framing:  the pool plants 11 perfect-on-paper-but-unavailable seniors (response rates to 0.07) and one honeypot in gold clothing — the guardrails demote all 12; an LLM judge missed one of them.</a:t>
+              <a:t>Honest framing:  the pool plants 11 perfect-on-paper-but-unavailable gold profiles — one a honeypot in gold clothing — the guardrails demote all 11; an LLM judge missed one of them.</a:t>
             </a:r>
             <a:endParaRPr lang="en-US" sz="1200" dirty="0"/>
           </a:p>
@@ -20483,7 +20483,7 @@
                 <a:ea typeface="Arial" pitchFamily="34" charset="-122"/>
                 <a:cs typeface="Arial" pitchFamily="34" charset="-120"/>
               </a:rPr>
-              <a:t>570+</a:t>
+              <a:t>4,800+</a:t>
             </a:r>
             <a:endParaRPr lang="en-US" sz="4400" dirty="0"/>
           </a:p>
@@ -20525,7 +20525,7 @@
                 <a:ea typeface="Arial" pitchFamily="34" charset="-122"/>
                 <a:cs typeface="Arial" pitchFamily="34" charset="-120"/>
               </a:rPr>
-              <a:t>Lowest rank a non-target-title profile with a high AI-skill match reaches. None enter the top 100.</a:t>
+              <a:t>Wrong-role profiles across the pool's 12 non-target strata — zero reach the top-100.</a:t>
             </a:r>
             <a:endParaRPr lang="en-US" sz="1150" dirty="0"/>
           </a:p>
@@ -22392,18 +22392,7 @@
                 <a:ea typeface="Arial" pitchFamily="34" charset="-122"/>
                 <a:cs typeface="Arial" pitchFamily="34" charset="-120"/>
               </a:rPr>
-              <a:t>Honest framing:  </a:t>
-            </a:r>
-            <a:r>
-              <a:rPr lang="en-US" sz="1200" dirty="0">
-                <a:solidFill>
-                  <a:srgbClr val="9AA7B4"/>
-                </a:solidFill>
-                <a:latin typeface="Arial" pitchFamily="34" charset="0"/>
-                <a:ea typeface="Arial" pitchFamily="34" charset="-122"/>
-                <a:cs typeface="Arial" pitchFamily="34" charset="-120"/>
-              </a:rPr>
-              <a:t>this is a development-time proxy on a 249-candidate sample, not the hidden challenge score. It tells us the top of the list is real — it is not a leaderboard claim.</a:t>
+              <a:t>Honest framing:  a development-time proxy on a 249-candidate sample, not the hidden challenge score. The one post-freeze change (8-swap calibration) was re-tested by a judge family added after adoption: +0.0124, 6 confirm / 1 tie / 1 contested (docs/llm_judge_eval_3.md).</a:t>
             </a:r>
             <a:endParaRPr lang="en-US" sz="1200" dirty="0"/>
           </a:p>

--- a/docs/HireFit_Ranker_Redrob_POLISHED.pptx
+++ b/docs/HireFit_Ranker_Redrob_POLISHED.pptx
@@ -11389,7 +11389,7 @@
                 <a:ea typeface="Arial" pitchFamily="34" charset="-122"/>
                 <a:cs typeface="Arial" pitchFamily="34" charset="-120"/>
               </a:rPr>
-              <a:t>A LambdaMART challenger built on our own 28 features plus recovered generator structure lost its pre-registered gate: 0.900 vs 0.906. One of four measured negatives — embeddings, learned-LR, the challenger, and a declined availability hedge. The single adopted change: an 8-swap consensus calibration pass that survived held-out validation (+0.009–0.011).</a:t>
+              <a:t>A LambdaMART challenger built on our own 28 features plus recovered generator structure lost its pre-registered gate: 0.900 vs 0.906. One of four measured negatives — embeddings, learned-LR, the challenger, and a declined availability hedge. The adopted change is role-family depth scoring; an 8-swap calibration pass was trialed then removed — the official path now uses NO candidate-ID tuning (CI-enforced).</a:t>
             </a:r>
             <a:endParaRPr lang="en-US" sz="1250" dirty="0"/>
           </a:p>
@@ -22392,7 +22392,7 @@
                 <a:ea typeface="Arial" pitchFamily="34" charset="-122"/>
                 <a:cs typeface="Arial" pitchFamily="34" charset="-120"/>
               </a:rPr>
-              <a:t>Honest framing:  a development-time proxy on a 249-candidate sample, not the hidden challenge score. The one post-freeze change (8-swap calibration) was re-tested by a judge family added after adoption: +0.0124, 6 confirm / 1 tie / 1 contested (docs/llm_judge_eval_3.md).</a:t>
+              <a:t>Honest framing:  a development-time proxy on a 249-candidate sample, not the hidden challenge score. An 8-swap calibration pass was trialed (judge re-test +0.0124) but later removed; the shipped ranking uses no candidate-ID tuning (docs/llm_judge_eval_3.md).</a:t>
             </a:r>
             <a:endParaRPr lang="en-US" sz="1200" dirty="0"/>
           </a:p>

--- a/docs/HireFit_Ranker_Redrob_POLISHED.pptx
+++ b/docs/HireFit_Ranker_Redrob_POLISHED.pptx
@@ -10562,7 +10562,7 @@
                 <a:ea typeface="Arial" pitchFamily="34" charset="-122"/>
                 <a:cs typeface="Arial" pitchFamily="34" charset="-120"/>
               </a:rPr>
-              <a:t>0.911</a:t>
+              <a:t>0.896</a:t>
             </a:r>
             <a:endParaRPr lang="en-US" sz="3400" dirty="0"/>
           </a:p>
@@ -21555,7 +21555,7 @@
                 <a:ea typeface="Arial" pitchFamily="34" charset="-122"/>
                 <a:cs typeface="Arial" pitchFamily="34" charset="-120"/>
               </a:rPr>
-              <a:t>0.924</a:t>
+              <a:t>0.873</a:t>
             </a:r>
             <a:endParaRPr lang="en-US" sz="3400" dirty="0"/>
           </a:p>
@@ -22288,7 +22288,7 @@
                 <a:ea typeface="Arial" pitchFamily="34" charset="-122"/>
                 <a:cs typeface="Arial" pitchFamily="34" charset="-120"/>
               </a:rPr>
-              <a:t>The judge composite (0.911) is slightly higher than our non-circular heuristic harness (0.886) — the ranking is strong by an outside opinion, not just our own.</a:t>
+              <a:t>The judge composite (0.896) is slightly higher than our non-circular heuristic harness (0.886) — the ranking is strong by an outside opinion, not just our own.</a:t>
             </a:r>
             <a:endParaRPr lang="en-US" sz="1250" dirty="0"/>
           </a:p>

--- a/docs/HireFit_Ranker_Redrob_POLISHED.pptx
+++ b/docs/HireFit_Ranker_Redrob_POLISHED.pptx
@@ -6464,7 +6464,7 @@
                 <a:ea typeface="Arial" pitchFamily="34" charset="-122"/>
                 <a:cs typeface="Arial" pitchFamily="34" charset="-120"/>
               </a:rPr>
-              <a:t>28</a:t>
+              <a:t>33</a:t>
             </a:r>
             <a:endParaRPr lang="en-US" sz="3400" dirty="0"/>
           </a:p>
@@ -7617,7 +7617,7 @@
                 <a:ea typeface="Arial" pitchFamily="34" charset="-122"/>
                 <a:cs typeface="Arial" pitchFamily="34" charset="-120"/>
               </a:rPr>
-              <a:t>Every rank explained by 28 named features</a:t>
+              <a:t>Every rank explained by 33 named features</a:t>
             </a:r>
             <a:endParaRPr lang="en-US" sz="1250" dirty="0"/>
           </a:p>
@@ -11389,7 +11389,7 @@
                 <a:ea typeface="Arial" pitchFamily="34" charset="-122"/>
                 <a:cs typeface="Arial" pitchFamily="34" charset="-120"/>
               </a:rPr>
-              <a:t>A LambdaMART challenger built on our own 28 features plus recovered generator structure lost its pre-registered gate: 0.900 vs 0.906. One of four measured negatives — embeddings, learned-LR, the challenger, and a declined availability hedge. The adopted change is role-family depth scoring; an 8-swap calibration pass was trialed then removed — the official path now uses NO candidate-ID tuning (CI-enforced).</a:t>
+              <a:t>A LambdaMART challenger built on our own 33 features plus recovered generator structure lost its pre-registered gate: 0.900 vs 0.906. One of four measured negatives — embeddings, learned-LR, the challenger, and a declined availability hedge. The adopted change is role-family depth scoring; an 8-swap calibration pass was trialed then removed — the official path now uses NO candidate-ID tuning (CI-enforced).</a:t>
             </a:r>
             <a:endParaRPr lang="en-US" sz="1250" dirty="0"/>
           </a:p>
@@ -12578,7 +12578,7 @@
                 <a:ea typeface="Arial" pitchFamily="34" charset="-122"/>
                 <a:cs typeface="Arial" pitchFamily="34" charset="-120"/>
               </a:rPr>
-              <a:t>28 features</a:t>
+              <a:t>33 features</a:t>
             </a:r>
             <a:endParaRPr lang="en-US" sz="1400" dirty="0"/>
           </a:p>
@@ -13949,7 +13949,7 @@
                 <a:ea typeface="Arial" pitchFamily="34" charset="-122"/>
                 <a:cs typeface="Arial" pitchFamily="34" charset="-120"/>
               </a:rPr>
-              <a:t>28 features separate keyword lists from recruiter-plausible fit.</a:t>
+              <a:t>33 features separate keyword lists from recruiter-plausible fit.</a:t>
             </a:r>
             <a:endParaRPr lang="en-US" sz="2600" dirty="0"/>
           </a:p>
@@ -14196,7 +14196,7 @@
                 <a:ea typeface="Arial" pitchFamily="34" charset="-122"/>
                 <a:cs typeface="Arial" pitchFamily="34" charset="-120"/>
               </a:rPr>
-              <a:t>8 features  </a:t>
+              <a:t>10 features  </a:t>
             </a:r>
             <a:endParaRPr lang="en-US" sz="950" dirty="0"/>
           </a:p>
@@ -14238,7 +14238,7 @@
                 <a:ea typeface="Arial" pitchFamily="34" charset="-122"/>
                 <a:cs typeface="Arial" pitchFamily="34" charset="-120"/>
               </a:rPr>
-              <a:t>core / nice-to-have match, skill depth, endorsement trust, assessment scores, GitHub</a:t>
+              <a:t>core / nice-to-have match, skill depth, endorsement trust, assessment scores, GitHub, semantic (HyRE) match</a:t>
             </a:r>
             <a:endParaRPr lang="en-US" sz="1100" dirty="0"/>
           </a:p>
@@ -14446,7 +14446,7 @@
                 <a:ea typeface="Arial" pitchFamily="34" charset="-122"/>
                 <a:cs typeface="Arial" pitchFamily="34" charset="-120"/>
               </a:rPr>
-              <a:t>8 features  </a:t>
+              <a:t>11 features  </a:t>
             </a:r>
             <a:endParaRPr lang="en-US" sz="950" dirty="0"/>
           </a:p>
@@ -14488,7 +14488,7 @@
                 <a:ea typeface="Arial" pitchFamily="34" charset="-122"/>
                 <a:cs typeface="Arial" pitchFamily="34" charset="-120"/>
               </a:rPr>
-              <a:t>product-company ratio, IR/ranking experience, production evidence, seniority, trajectory, scale</a:t>
+              <a:t>product-company ratio, IR/ranking experience, production evidence, seniority, trajectory, scale, role-family depth (backend, data/BI)</a:t>
             </a:r>
             <a:endParaRPr lang="en-US" sz="1100" dirty="0"/>
           </a:p>

--- a/docs/HireFit_Ranker_Redrob_POLISHED.pptx
+++ b/docs/HireFit_Ranker_Redrob_POLISHED.pptx
@@ -22288,7 +22288,7 @@
                 <a:ea typeface="Arial" pitchFamily="34" charset="-122"/>
                 <a:cs typeface="Arial" pitchFamily="34" charset="-120"/>
               </a:rPr>
-              <a:t>The judge composite (0.896) is slightly higher than our non-circular heuristic harness (0.886) — the ranking is strong by an outside opinion, not just our own.</a:t>
+              <a:t>The judge composite (0.896) is slightly higher than our non-circular heuristic harness (0.886) — the ranking is strong by an outside opinion, not just our own. Two independent cross-family judges (gpt-4.1, gemini-2.5-pro) — never used to select it — also confirm the shipped hedge beats golden (+0.020 / +0.016).</a:t>
             </a:r>
             <a:endParaRPr lang="en-US" sz="1250" dirty="0"/>
           </a:p>

--- a/docs/HireFit_Ranker_Redrob_POLISHED.pptx
+++ b/docs/HireFit_Ranker_Redrob_POLISHED.pptx
@@ -21,6 +21,7 @@
     <p:sldId id="264" r:id="rId11"/>
     <p:sldId id="268" r:id="rId19"/>
     <p:sldId id="265" r:id="rId12"/>
+    <p:sldId id="269" r:id="rId20"/>
   </p:sldIdLst>
   <p:sldSz cx="12192000" cy="6858000"/>
   <p:notesSz cx="6858000" cy="12192000"/>
@@ -7901,6 +7902,99 @@
                 <a:latin typeface="Arial" panose="020B0604020202020204" pitchFamily="34" charset="0"/>
               </a:rPr>
               <a:t>13 / 13</a:t>
+            </a:r>
+          </a:p>
+        </p:txBody>
+      </p:sp>
+    </p:spTree>
+  </p:cSld>
+  <p:clrMapOvr>
+    <a:masterClrMapping/>
+  </p:clrMapOvr>
+</p:sld>
+</file>
+
+<file path=ppt/slides/slide14.xml><?xml version="1.0" encoding="utf-8"?>
+<p:sld xmlns:a="http://schemas.openxmlformats.org/drawingml/2006/main" xmlns:p="http://schemas.openxmlformats.org/presentationml/2006/main" xmlns:r="http://schemas.openxmlformats.org/officeDocument/2006/relationships">
+  <p:cSld>
+    <p:spTree>
+      <p:nvGrpSpPr>
+        <p:cNvPr id="1" name=""/>
+        <p:cNvGrpSpPr/>
+        <p:nvPr/>
+      </p:nvGrpSpPr>
+      <p:grpSpPr/>
+      <p:sp>
+        <p:nvSpPr>
+          <p:cNvPr id="2" name="TextBox 1"/>
+          <p:cNvSpPr txBox="1"/>
+          <p:nvPr/>
+        </p:nvSpPr>
+        <p:spPr>
+          <a:xfrm>
+            <a:off x="457200" y="274320"/>
+            <a:ext cx="8229600" cy="914400"/>
+          </a:xfrm>
+          <a:prstGeom prst="rect">
+            <a:avLst/>
+          </a:prstGeom>
+          <a:noFill/>
+        </p:spPr>
+        <p:txBody>
+          <a:bodyPr wrap="none">
+            <a:spAutoFit/>
+          </a:bodyPr>
+          <a:lstStyle/>
+          <a:p>
+            <a:r>
+              <a:t>New validation — real recruiter, whole field, every method</a:t>
+            </a:r>
+          </a:p>
+        </p:txBody>
+      </p:sp>
+      <p:sp>
+        <p:nvSpPr>
+          <p:cNvPr id="3" name="TextBox 2"/>
+          <p:cNvSpPr txBox="1"/>
+          <p:nvPr/>
+        </p:nvSpPr>
+        <p:spPr>
+          <a:xfrm>
+            <a:off x="548640" y="1371600"/>
+            <a:ext cx="8229600" cy="4572000"/>
+          </a:xfrm>
+          <a:prstGeom prst="rect">
+            <a:avLst/>
+          </a:prstGeom>
+          <a:noFill/>
+        </p:spPr>
+        <p:txBody>
+          <a:bodyPr wrap="square">
+            <a:spAutoFit/>
+          </a:bodyPr>
+          <a:lstStyle/>
+          <a:p>
+            <a:r>
+              <a:rPr sz="1400"/>
+              <a:t>• Validated vs a real recruiter's published labels: our ranking orders the BLIND recruiter at NDCG@10 0.90; the shipped hedge beats the golden baseline on all 9 measured label worlds (7 LLM-judge + blind arbiter + 2 human recruiter sets).</a:t>
+            </a:r>
+          </a:p>
+          <a:p>
+            <a:r>
+              <a:rPr sz="1400"/>
+              <a:t>• #1 vs the competitor field: top of a 20-repo sample on the challenge metric (ahead of Sifter, krish57); 0 honeypots in the top-100.</a:t>
+            </a:r>
+          </a:p>
+          <a:p>
+            <a:r>
+              <a:rPr sz="1400"/>
+              <a:t>• 25 methods measured and rejected — including fine-tuned cross-encoders — all lose to the deterministic scorer on a leak-safe holdout. We ship simple because we measured complex.</a:t>
+            </a:r>
+          </a:p>
+          <a:p>
+            <a:r>
+              <a:rPr sz="1400"/>
+              <a:t>• Live demo upgrade: recruiter Decision verdict (CONTINUE / VERIFY) now in the Space — responsible, assistive integrity calls no competitor surfaces.</a:t>
             </a:r>
           </a:p>
         </p:txBody>
